--- a/仕様書.pptx
+++ b/仕様書.pptx
@@ -5,13 +5,14 @@
     <p:sldMasterId id="2147483648" r:id="rId1"/>
   </p:sldMasterIdLst>
   <p:sldIdLst>
-    <p:sldId id="256" r:id="rId2"/>
-    <p:sldId id="257" r:id="rId3"/>
-    <p:sldId id="258" r:id="rId4"/>
-    <p:sldId id="260" r:id="rId5"/>
-    <p:sldId id="261" r:id="rId6"/>
-    <p:sldId id="262" r:id="rId7"/>
-    <p:sldId id="263" r:id="rId8"/>
+    <p:sldId id="265" r:id="rId2"/>
+    <p:sldId id="266" r:id="rId3"/>
+    <p:sldId id="257" r:id="rId4"/>
+    <p:sldId id="258" r:id="rId5"/>
+    <p:sldId id="260" r:id="rId6"/>
+    <p:sldId id="261" r:id="rId7"/>
+    <p:sldId id="262" r:id="rId8"/>
+    <p:sldId id="263" r:id="rId9"/>
   </p:sldIdLst>
   <p:sldSz cx="12192000" cy="6858000"/>
   <p:notesSz cx="6858000" cy="9144000"/>
@@ -110,6 +111,11 @@
       </a:defRPr>
     </a:lvl9pPr>
   </p:defaultTextStyle>
+  <p:extLst>
+    <p:ext uri="{EFAFB233-063F-42B5-8137-9DF3F51BA10A}">
+      <p15:sldGuideLst xmlns:p15="http://schemas.microsoft.com/office/powerpoint/2012/main"/>
+    </p:ext>
+  </p:extLst>
 </p:presentation>
 </file>
 
@@ -260,7 +266,7 @@
           <a:p>
             <a:fld id="{C83DFB27-A473-4C82-9157-45B838AE13E7}" type="datetimeFigureOut">
               <a:rPr kumimoji="1" lang="ja-JP" altLang="en-US" smtClean="0"/>
-              <a:t>2025/2/14</a:t>
+              <a:t>2025/12/18</a:t>
             </a:fld>
             <a:endParaRPr kumimoji="1" lang="ja-JP" altLang="en-US"/>
           </a:p>
@@ -490,7 +496,7 @@
           <a:p>
             <a:fld id="{C83DFB27-A473-4C82-9157-45B838AE13E7}" type="datetimeFigureOut">
               <a:rPr kumimoji="1" lang="ja-JP" altLang="en-US" smtClean="0"/>
-              <a:t>2025/2/14</a:t>
+              <a:t>2025/12/18</a:t>
             </a:fld>
             <a:endParaRPr kumimoji="1" lang="ja-JP" altLang="en-US"/>
           </a:p>
@@ -730,7 +736,7 @@
           <a:p>
             <a:fld id="{C83DFB27-A473-4C82-9157-45B838AE13E7}" type="datetimeFigureOut">
               <a:rPr kumimoji="1" lang="ja-JP" altLang="en-US" smtClean="0"/>
-              <a:t>2025/2/14</a:t>
+              <a:t>2025/12/18</a:t>
             </a:fld>
             <a:endParaRPr kumimoji="1" lang="ja-JP" altLang="en-US"/>
           </a:p>
@@ -960,7 +966,7 @@
           <a:p>
             <a:fld id="{C83DFB27-A473-4C82-9157-45B838AE13E7}" type="datetimeFigureOut">
               <a:rPr kumimoji="1" lang="ja-JP" altLang="en-US" smtClean="0"/>
-              <a:t>2025/2/14</a:t>
+              <a:t>2025/12/18</a:t>
             </a:fld>
             <a:endParaRPr kumimoji="1" lang="ja-JP" altLang="en-US"/>
           </a:p>
@@ -1235,7 +1241,7 @@
           <a:p>
             <a:fld id="{C83DFB27-A473-4C82-9157-45B838AE13E7}" type="datetimeFigureOut">
               <a:rPr kumimoji="1" lang="ja-JP" altLang="en-US" smtClean="0"/>
-              <a:t>2025/2/14</a:t>
+              <a:t>2025/12/18</a:t>
             </a:fld>
             <a:endParaRPr kumimoji="1" lang="ja-JP" altLang="en-US"/>
           </a:p>
@@ -1564,7 +1570,7 @@
           <a:p>
             <a:fld id="{C83DFB27-A473-4C82-9157-45B838AE13E7}" type="datetimeFigureOut">
               <a:rPr kumimoji="1" lang="ja-JP" altLang="en-US" smtClean="0"/>
-              <a:t>2025/2/14</a:t>
+              <a:t>2025/12/18</a:t>
             </a:fld>
             <a:endParaRPr kumimoji="1" lang="ja-JP" altLang="en-US"/>
           </a:p>
@@ -2040,7 +2046,7 @@
           <a:p>
             <a:fld id="{C83DFB27-A473-4C82-9157-45B838AE13E7}" type="datetimeFigureOut">
               <a:rPr kumimoji="1" lang="ja-JP" altLang="en-US" smtClean="0"/>
-              <a:t>2025/2/14</a:t>
+              <a:t>2025/12/18</a:t>
             </a:fld>
             <a:endParaRPr kumimoji="1" lang="ja-JP" altLang="en-US"/>
           </a:p>
@@ -2181,7 +2187,7 @@
           <a:p>
             <a:fld id="{C83DFB27-A473-4C82-9157-45B838AE13E7}" type="datetimeFigureOut">
               <a:rPr kumimoji="1" lang="ja-JP" altLang="en-US" smtClean="0"/>
-              <a:t>2025/2/14</a:t>
+              <a:t>2025/12/18</a:t>
             </a:fld>
             <a:endParaRPr kumimoji="1" lang="ja-JP" altLang="en-US"/>
           </a:p>
@@ -2294,7 +2300,7 @@
           <a:p>
             <a:fld id="{C83DFB27-A473-4C82-9157-45B838AE13E7}" type="datetimeFigureOut">
               <a:rPr kumimoji="1" lang="ja-JP" altLang="en-US" smtClean="0"/>
-              <a:t>2025/2/14</a:t>
+              <a:t>2025/12/18</a:t>
             </a:fld>
             <a:endParaRPr kumimoji="1" lang="ja-JP" altLang="en-US"/>
           </a:p>
@@ -2637,7 +2643,7 @@
           <a:p>
             <a:fld id="{C83DFB27-A473-4C82-9157-45B838AE13E7}" type="datetimeFigureOut">
               <a:rPr kumimoji="1" lang="ja-JP" altLang="en-US" smtClean="0"/>
-              <a:t>2025/2/14</a:t>
+              <a:t>2025/12/18</a:t>
             </a:fld>
             <a:endParaRPr kumimoji="1" lang="ja-JP" altLang="en-US"/>
           </a:p>
@@ -2925,7 +2931,7 @@
           <a:p>
             <a:fld id="{C83DFB27-A473-4C82-9157-45B838AE13E7}" type="datetimeFigureOut">
               <a:rPr kumimoji="1" lang="ja-JP" altLang="en-US" smtClean="0"/>
-              <a:t>2025/2/14</a:t>
+              <a:t>2025/12/18</a:t>
             </a:fld>
             <a:endParaRPr kumimoji="1" lang="ja-JP" altLang="en-US"/>
           </a:p>
@@ -3198,7 +3204,7 @@
           <a:p>
             <a:fld id="{C83DFB27-A473-4C82-9157-45B838AE13E7}" type="datetimeFigureOut">
               <a:rPr kumimoji="1" lang="ja-JP" altLang="en-US" smtClean="0"/>
-              <a:t>2025/2/14</a:t>
+              <a:t>2025/12/18</a:t>
             </a:fld>
             <a:endParaRPr kumimoji="1" lang="ja-JP" altLang="en-US"/>
           </a:p>
@@ -3615,12 +3621,48 @@
           <a:chExt cx="0" cy="0"/>
         </a:xfrm>
       </p:grpSpPr>
+      <p:pic>
+        <p:nvPicPr>
+          <p:cNvPr id="5" name="図 4">
+            <a:extLst>
+              <a:ext uri="{FF2B5EF4-FFF2-40B4-BE49-F238E27FC236}">
+                <a16:creationId xmlns:a16="http://schemas.microsoft.com/office/drawing/2014/main" id="{67407154-B6A2-42EB-890E-AC89B3A42917}"/>
+              </a:ext>
+            </a:extLst>
+          </p:cNvPr>
+          <p:cNvPicPr>
+            <a:picLocks noChangeAspect="1"/>
+          </p:cNvPicPr>
+          <p:nvPr/>
+        </p:nvPicPr>
+        <p:blipFill>
+          <a:blip r:embed="rId2">
+            <a:extLst>
+              <a:ext uri="{28A0092B-C50C-407E-A947-70E740481C1C}">
+                <a14:useLocalDpi xmlns:a14="http://schemas.microsoft.com/office/drawing/2010/main" val="0"/>
+              </a:ext>
+            </a:extLst>
+          </a:blip>
+          <a:stretch>
+            <a:fillRect/>
+          </a:stretch>
+        </p:blipFill>
+        <p:spPr>
+          <a:xfrm>
+            <a:off x="0" y="0"/>
+            <a:ext cx="12192000" cy="6858000"/>
+          </a:xfrm>
+          <a:prstGeom prst="rect">
+            <a:avLst/>
+          </a:prstGeom>
+        </p:spPr>
+      </p:pic>
       <p:sp>
         <p:nvSpPr>
           <p:cNvPr id="2" name="タイトル 1">
             <a:extLst>
               <a:ext uri="{FF2B5EF4-FFF2-40B4-BE49-F238E27FC236}">
-                <a16:creationId xmlns:a16="http://schemas.microsoft.com/office/drawing/2014/main" id="{4DCE4B0A-06FD-4E69-974B-8E70B3CDE853}"/>
+                <a16:creationId xmlns:a16="http://schemas.microsoft.com/office/drawing/2014/main" id="{0EE01B82-90A7-4878-8F8D-31804212C9FE}"/>
               </a:ext>
             </a:extLst>
           </p:cNvPr>
@@ -3633,20 +3675,30 @@
         </p:nvSpPr>
         <p:spPr>
           <a:xfrm>
-            <a:off x="1524000" y="1168401"/>
-            <a:ext cx="9144000" cy="2387600"/>
+            <a:off x="-1" y="0"/>
+            <a:ext cx="12191999" cy="1087821"/>
           </a:xfrm>
         </p:spPr>
         <p:txBody>
           <a:bodyPr>
-            <a:noAutofit/>
+            <a:normAutofit/>
           </a:bodyPr>
           <a:lstStyle/>
           <a:p>
-            <a:r>
-              <a:rPr kumimoji="1" lang="ja-JP" altLang="en-US" sz="15000" b="1" dirty="0"/>
-              <a:t>仕様書</a:t>
-            </a:r>
+            <a:pPr algn="just"/>
+            <a:r>
+              <a:rPr lang="ja-JP" altLang="en-US" sz="4000" dirty="0">
+                <a:solidFill>
+                  <a:schemeClr val="bg1"/>
+                </a:solidFill>
+              </a:rPr>
+              <a:t>　</a:t>
+            </a:r>
+            <a:endParaRPr kumimoji="1" lang="ja-JP" altLang="en-US" sz="4000" dirty="0">
+              <a:solidFill>
+                <a:schemeClr val="bg1"/>
+              </a:solidFill>
+            </a:endParaRPr>
           </a:p>
         </p:txBody>
       </p:sp>
@@ -3655,7 +3707,7 @@
           <p:cNvPr id="3" name="字幕 2">
             <a:extLst>
               <a:ext uri="{FF2B5EF4-FFF2-40B4-BE49-F238E27FC236}">
-                <a16:creationId xmlns:a16="http://schemas.microsoft.com/office/drawing/2014/main" id="{C65E7CF4-29B7-4EC5-BBF3-C41AB4598D5A}"/>
+                <a16:creationId xmlns:a16="http://schemas.microsoft.com/office/drawing/2014/main" id="{23D04860-05CF-49A0-A840-DA7970165E43}"/>
               </a:ext>
             </a:extLst>
           </p:cNvPr>
@@ -3668,55 +3720,414 @@
         </p:nvSpPr>
         <p:spPr>
           <a:xfrm>
-            <a:off x="1524000" y="4079875"/>
-            <a:ext cx="9144000" cy="1655762"/>
+            <a:off x="0" y="1087821"/>
+            <a:ext cx="12192000" cy="5770179"/>
           </a:xfrm>
         </p:spPr>
         <p:txBody>
           <a:bodyPr/>
           <a:lstStyle/>
           <a:p>
-            <a:r>
-              <a:rPr kumimoji="1" lang="ja-JP" altLang="en-US" dirty="0"/>
-              <a:t>タイトル：未定</a:t>
-            </a:r>
-            <a:endParaRPr kumimoji="1" lang="en-US" altLang="ja-JP" dirty="0"/>
-          </a:p>
-          <a:p>
+            <a:pPr algn="l"/>
+            <a:endParaRPr lang="en-US" altLang="ja-JP" dirty="0">
+              <a:solidFill>
+                <a:schemeClr val="bg1"/>
+              </a:solidFill>
+            </a:endParaRPr>
+          </a:p>
+          <a:p>
+            <a:pPr algn="l"/>
+            <a:r>
+              <a:rPr lang="ja-JP" altLang="en-US" dirty="0">
+                <a:solidFill>
+                  <a:schemeClr val="bg1"/>
+                </a:solidFill>
+              </a:rPr>
+              <a:t>　　概要</a:t>
+            </a:r>
+            <a:endParaRPr lang="en-US" altLang="ja-JP" dirty="0">
+              <a:solidFill>
+                <a:schemeClr val="bg1"/>
+              </a:solidFill>
+            </a:endParaRPr>
+          </a:p>
+          <a:p>
+            <a:pPr algn="l"/>
+            <a:br>
+              <a:rPr lang="en-US" altLang="ja-JP" dirty="0">
+                <a:solidFill>
+                  <a:schemeClr val="bg1"/>
+                </a:solidFill>
+              </a:rPr>
+            </a:br>
+            <a:r>
+              <a:rPr lang="ja-JP" altLang="en-US" dirty="0">
+                <a:solidFill>
+                  <a:schemeClr val="bg1"/>
+                </a:solidFill>
+              </a:rPr>
+              <a:t>　　➣ジャンル</a:t>
+            </a:r>
+            <a:r>
+              <a:rPr kumimoji="1" lang="ja-JP" altLang="en-US" dirty="0">
+                <a:solidFill>
+                  <a:schemeClr val="bg1"/>
+                </a:solidFill>
+              </a:rPr>
+              <a:t>：</a:t>
+            </a:r>
             <a:r>
               <a:rPr lang="ja-JP" altLang="en-US" dirty="0"/>
-              <a:t>製作期間：約</a:t>
-            </a:r>
-            <a:r>
-              <a:rPr lang="en-US" altLang="ja-JP" dirty="0"/>
-              <a:t>2</a:t>
-            </a:r>
-            <a:r>
-              <a:rPr lang="ja-JP" altLang="en-US" dirty="0"/>
-              <a:t>ヶ月</a:t>
-            </a:r>
-            <a:endParaRPr lang="en-US" altLang="ja-JP" dirty="0"/>
-          </a:p>
-          <a:p>
-            <a:r>
-              <a:rPr kumimoji="1" lang="ja-JP" altLang="en-US" dirty="0"/>
-              <a:t>制作人数：</a:t>
-            </a:r>
-            <a:r>
-              <a:rPr kumimoji="1" lang="en-US" altLang="ja-JP" dirty="0"/>
+              <a:t> </a:t>
+            </a:r>
+            <a:r>
+              <a:rPr lang="ja-JP" altLang="en-US" dirty="0">
+                <a:solidFill>
+                  <a:schemeClr val="bg1"/>
+                </a:solidFill>
+              </a:rPr>
+              <a:t>対戦型格闘ゲーム</a:t>
+            </a:r>
+            <a:endParaRPr lang="en-US" altLang="ja-JP" dirty="0">
+              <a:solidFill>
+                <a:schemeClr val="bg1"/>
+              </a:solidFill>
+            </a:endParaRPr>
+          </a:p>
+          <a:p>
+            <a:pPr algn="l"/>
+            <a:r>
+              <a:rPr lang="ja-JP" altLang="en-US" dirty="0">
+                <a:solidFill>
+                  <a:schemeClr val="bg1"/>
+                </a:solidFill>
+              </a:rPr>
+              <a:t>　　➣プラットフォーム：</a:t>
+            </a:r>
+            <a:r>
+              <a:rPr lang="en-US" altLang="ja-JP" dirty="0">
+                <a:solidFill>
+                  <a:schemeClr val="bg1"/>
+                </a:solidFill>
+              </a:rPr>
+              <a:t>Windows</a:t>
+            </a:r>
+            <a:endParaRPr kumimoji="1" lang="en-US" altLang="ja-JP" dirty="0">
+              <a:solidFill>
+                <a:schemeClr val="bg1"/>
+              </a:solidFill>
+            </a:endParaRPr>
+          </a:p>
+          <a:p>
+            <a:pPr algn="l"/>
+            <a:r>
+              <a:rPr kumimoji="1" lang="ja-JP" altLang="en-US" dirty="0">
+                <a:solidFill>
+                  <a:schemeClr val="bg1"/>
+                </a:solidFill>
+              </a:rPr>
+              <a:t>　　➣開発環境：</a:t>
+            </a:r>
+            <a:r>
+              <a:rPr lang="en-US" altLang="ja-JP" dirty="0">
+                <a:solidFill>
+                  <a:schemeClr val="bg1"/>
+                </a:solidFill>
+              </a:rPr>
+              <a:t>Visual Studio 2022</a:t>
+            </a:r>
+            <a:r>
+              <a:rPr lang="ja-JP" altLang="en-US" dirty="0">
+                <a:solidFill>
+                  <a:schemeClr val="bg1"/>
+                </a:solidFill>
+              </a:rPr>
+              <a:t>、</a:t>
+            </a:r>
+            <a:endParaRPr lang="en-US" altLang="ja-JP" dirty="0">
+              <a:solidFill>
+                <a:schemeClr val="bg1"/>
+              </a:solidFill>
+            </a:endParaRPr>
+          </a:p>
+          <a:p>
+            <a:pPr algn="l"/>
+            <a:r>
+              <a:rPr lang="en-US" altLang="ja-JP" dirty="0">
+                <a:solidFill>
+                  <a:schemeClr val="bg1"/>
+                </a:solidFill>
+              </a:rPr>
+              <a:t>		</a:t>
+            </a:r>
+            <a:r>
+              <a:rPr lang="ja-JP" altLang="en-US" dirty="0">
+                <a:solidFill>
+                  <a:schemeClr val="bg1"/>
+                </a:solidFill>
+              </a:rPr>
+              <a:t>　　</a:t>
+            </a:r>
+            <a:r>
+              <a:rPr lang="en-US" altLang="ja-JP" dirty="0">
+                <a:solidFill>
+                  <a:schemeClr val="bg1"/>
+                </a:solidFill>
+              </a:rPr>
+              <a:t>DX</a:t>
+            </a:r>
+            <a:r>
+              <a:rPr lang="ja-JP" altLang="en-US" dirty="0">
+                <a:solidFill>
+                  <a:schemeClr val="bg1"/>
+                </a:solidFill>
+              </a:rPr>
+              <a:t>ライブラリ（</a:t>
+            </a:r>
+            <a:r>
+              <a:rPr lang="en-US" altLang="ja-JP" dirty="0">
+                <a:solidFill>
+                  <a:schemeClr val="bg1"/>
+                </a:solidFill>
+              </a:rPr>
+              <a:t>DirectX</a:t>
+            </a:r>
+            <a:r>
+              <a:rPr lang="ja-JP" altLang="en-US" dirty="0">
+                <a:solidFill>
+                  <a:schemeClr val="bg1"/>
+                </a:solidFill>
+              </a:rPr>
+              <a:t>をより扱いやすくしたライブラリ）、</a:t>
+            </a:r>
+            <a:endParaRPr lang="en-US" altLang="ja-JP" dirty="0">
+              <a:solidFill>
+                <a:schemeClr val="bg1"/>
+              </a:solidFill>
+            </a:endParaRPr>
+          </a:p>
+          <a:p>
+            <a:pPr algn="l"/>
+            <a:r>
+              <a:rPr lang="en-US" altLang="ja-JP" dirty="0">
+                <a:solidFill>
+                  <a:schemeClr val="bg1"/>
+                </a:solidFill>
+              </a:rPr>
+              <a:t>		</a:t>
+            </a:r>
+            <a:r>
+              <a:rPr lang="ja-JP" altLang="en-US" dirty="0">
+                <a:solidFill>
+                  <a:schemeClr val="bg1"/>
+                </a:solidFill>
+              </a:rPr>
+              <a:t>　　</a:t>
+            </a:r>
+            <a:r>
+              <a:rPr lang="en-US" altLang="ja-JP" dirty="0">
+                <a:solidFill>
+                  <a:schemeClr val="bg1"/>
+                </a:solidFill>
+              </a:rPr>
+              <a:t>CoG</a:t>
+            </a:r>
+            <a:r>
+              <a:rPr lang="ja-JP" altLang="en-US" dirty="0">
+                <a:solidFill>
+                  <a:schemeClr val="bg1"/>
+                </a:solidFill>
+              </a:rPr>
+              <a:t>フレームワーク（</a:t>
+            </a:r>
+            <a:r>
+              <a:rPr lang="en-US" altLang="ja-JP" sz="1800" dirty="0">
+                <a:solidFill>
+                  <a:schemeClr val="bg1"/>
+                </a:solidFill>
+              </a:rPr>
+              <a:t>DX</a:t>
+            </a:r>
+            <a:r>
+              <a:rPr lang="ja-JP" altLang="en-US" sz="1800" dirty="0">
+                <a:solidFill>
+                  <a:schemeClr val="bg1"/>
+                </a:solidFill>
+              </a:rPr>
+              <a:t>ライブラリをさらに扱いやすくまとめたフレームワーク</a:t>
+            </a:r>
+            <a:r>
+              <a:rPr lang="ja-JP" altLang="en-US" dirty="0">
+                <a:solidFill>
+                  <a:schemeClr val="bg1"/>
+                </a:solidFill>
+              </a:rPr>
+              <a:t>）</a:t>
+            </a:r>
+            <a:endParaRPr kumimoji="1" lang="en-US" altLang="ja-JP" dirty="0">
+              <a:solidFill>
+                <a:schemeClr val="bg1"/>
+              </a:solidFill>
+            </a:endParaRPr>
+          </a:p>
+          <a:p>
+            <a:pPr algn="l"/>
+            <a:r>
+              <a:rPr kumimoji="1" lang="ja-JP" altLang="en-US" dirty="0">
+                <a:solidFill>
+                  <a:schemeClr val="bg1"/>
+                </a:solidFill>
+              </a:rPr>
+              <a:t>　　➣使用言語：</a:t>
+            </a:r>
+            <a:r>
+              <a:rPr kumimoji="1" lang="en-US" altLang="ja-JP" dirty="0">
+                <a:solidFill>
+                  <a:schemeClr val="bg1"/>
+                </a:solidFill>
+              </a:rPr>
+              <a:t>C++</a:t>
+            </a:r>
+            <a:endParaRPr lang="en-US" altLang="ja-JP" dirty="0">
+              <a:solidFill>
+                <a:schemeClr val="bg1"/>
+              </a:solidFill>
+            </a:endParaRPr>
+          </a:p>
+          <a:p>
+            <a:pPr algn="l"/>
+            <a:r>
+              <a:rPr kumimoji="1" lang="ja-JP" altLang="en-US" dirty="0">
+                <a:solidFill>
+                  <a:schemeClr val="bg1"/>
+                </a:solidFill>
+              </a:rPr>
+              <a:t>　　➣制作期間：</a:t>
+            </a:r>
+            <a:r>
+              <a:rPr kumimoji="1" lang="en-US" altLang="ja-JP" dirty="0">
+                <a:solidFill>
+                  <a:schemeClr val="bg1"/>
+                </a:solidFill>
+              </a:rPr>
+              <a:t>2025/4 ~ 2025/11</a:t>
+            </a:r>
+            <a:endParaRPr lang="en-US" altLang="ja-JP" dirty="0">
+              <a:solidFill>
+                <a:schemeClr val="bg1"/>
+              </a:solidFill>
+            </a:endParaRPr>
+          </a:p>
+          <a:p>
+            <a:pPr algn="l"/>
+            <a:r>
+              <a:rPr kumimoji="1" lang="ja-JP" altLang="en-US" dirty="0">
+                <a:solidFill>
+                  <a:schemeClr val="bg1"/>
+                </a:solidFill>
+              </a:rPr>
+              <a:t>　　➣制作人数：</a:t>
+            </a:r>
+            <a:r>
+              <a:rPr kumimoji="1" lang="en-US" altLang="ja-JP" dirty="0">
+                <a:solidFill>
+                  <a:schemeClr val="bg1"/>
+                </a:solidFill>
+              </a:rPr>
               <a:t>1</a:t>
             </a:r>
             <a:r>
-              <a:rPr kumimoji="1" lang="ja-JP" altLang="en-US" dirty="0"/>
+              <a:rPr kumimoji="1" lang="ja-JP" altLang="en-US" dirty="0">
+                <a:solidFill>
+                  <a:schemeClr val="bg1"/>
+                </a:solidFill>
+              </a:rPr>
               <a:t>人</a:t>
             </a:r>
-          </a:p>
-        </p:txBody>
-      </p:sp>
+            <a:endParaRPr kumimoji="1" lang="en-US" altLang="ja-JP" dirty="0">
+              <a:solidFill>
+                <a:schemeClr val="bg1"/>
+              </a:solidFill>
+            </a:endParaRPr>
+          </a:p>
+        </p:txBody>
+      </p:sp>
+      <p:pic>
+        <p:nvPicPr>
+          <p:cNvPr id="9" name="図 8">
+            <a:extLst>
+              <a:ext uri="{FF2B5EF4-FFF2-40B4-BE49-F238E27FC236}">
+                <a16:creationId xmlns:a16="http://schemas.microsoft.com/office/drawing/2014/main" id="{F481ADB3-DD13-4633-AADB-A16369483CFE}"/>
+              </a:ext>
+            </a:extLst>
+          </p:cNvPr>
+          <p:cNvPicPr>
+            <a:picLocks noChangeAspect="1"/>
+          </p:cNvPicPr>
+          <p:nvPr/>
+        </p:nvPicPr>
+        <p:blipFill>
+          <a:blip r:embed="rId3">
+            <a:extLst>
+              <a:ext uri="{28A0092B-C50C-407E-A947-70E740481C1C}">
+                <a14:useLocalDpi xmlns:a14="http://schemas.microsoft.com/office/drawing/2010/main" val="0"/>
+              </a:ext>
+            </a:extLst>
+          </a:blip>
+          <a:stretch>
+            <a:fillRect/>
+          </a:stretch>
+        </p:blipFill>
+        <p:spPr>
+          <a:xfrm>
+            <a:off x="920831" y="0"/>
+            <a:ext cx="4082372" cy="1314662"/>
+          </a:xfrm>
+          <a:prstGeom prst="rect">
+            <a:avLst/>
+          </a:prstGeom>
+        </p:spPr>
+      </p:pic>
+      <p:pic>
+        <p:nvPicPr>
+          <p:cNvPr id="11" name="図 10">
+            <a:extLst>
+              <a:ext uri="{FF2B5EF4-FFF2-40B4-BE49-F238E27FC236}">
+                <a16:creationId xmlns:a16="http://schemas.microsoft.com/office/drawing/2014/main" id="{12797FA8-5603-4FFB-9DFF-899032EEAD90}"/>
+              </a:ext>
+            </a:extLst>
+          </p:cNvPr>
+          <p:cNvPicPr>
+            <a:picLocks noChangeAspect="1"/>
+          </p:cNvPicPr>
+          <p:nvPr/>
+        </p:nvPicPr>
+        <p:blipFill>
+          <a:blip r:embed="rId4">
+            <a:extLst>
+              <a:ext uri="{28A0092B-C50C-407E-A947-70E740481C1C}">
+                <a14:useLocalDpi xmlns:a14="http://schemas.microsoft.com/office/drawing/2010/main" val="0"/>
+              </a:ext>
+            </a:extLst>
+          </a:blip>
+          <a:stretch>
+            <a:fillRect/>
+          </a:stretch>
+        </p:blipFill>
+        <p:spPr>
+          <a:xfrm>
+            <a:off x="5100009" y="80788"/>
+            <a:ext cx="6585283" cy="1153085"/>
+          </a:xfrm>
+          <a:prstGeom prst="rect">
+            <a:avLst/>
+          </a:prstGeom>
+        </p:spPr>
+      </p:pic>
     </p:spTree>
     <p:extLst>
       <p:ext uri="{BB962C8B-B14F-4D97-AF65-F5344CB8AC3E}">
-        <p14:creationId xmlns:p14="http://schemas.microsoft.com/office/powerpoint/2010/main" val="1470948310"/>
+        <p14:creationId xmlns:p14="http://schemas.microsoft.com/office/powerpoint/2010/main" val="1581021606"/>
       </p:ext>
     </p:extLst>
   </p:cSld>
@@ -3743,12 +4154,48 @@
           <a:chExt cx="0" cy="0"/>
         </a:xfrm>
       </p:grpSpPr>
+      <p:pic>
+        <p:nvPicPr>
+          <p:cNvPr id="13" name="図 12">
+            <a:extLst>
+              <a:ext uri="{FF2B5EF4-FFF2-40B4-BE49-F238E27FC236}">
+                <a16:creationId xmlns:a16="http://schemas.microsoft.com/office/drawing/2014/main" id="{C9E160C0-10C0-4409-AE3E-613249A15F2C}"/>
+              </a:ext>
+            </a:extLst>
+          </p:cNvPr>
+          <p:cNvPicPr>
+            <a:picLocks noChangeAspect="1"/>
+          </p:cNvPicPr>
+          <p:nvPr/>
+        </p:nvPicPr>
+        <p:blipFill>
+          <a:blip r:embed="rId2">
+            <a:extLst>
+              <a:ext uri="{28A0092B-C50C-407E-A947-70E740481C1C}">
+                <a14:useLocalDpi xmlns:a14="http://schemas.microsoft.com/office/drawing/2010/main" val="0"/>
+              </a:ext>
+            </a:extLst>
+          </a:blip>
+          <a:stretch>
+            <a:fillRect/>
+          </a:stretch>
+        </p:blipFill>
+        <p:spPr>
+          <a:xfrm>
+            <a:off x="0" y="0"/>
+            <a:ext cx="12191999" cy="6858000"/>
+          </a:xfrm>
+          <a:prstGeom prst="rect">
+            <a:avLst/>
+          </a:prstGeom>
+        </p:spPr>
+      </p:pic>
       <p:sp>
         <p:nvSpPr>
           <p:cNvPr id="2" name="タイトル 1">
             <a:extLst>
               <a:ext uri="{FF2B5EF4-FFF2-40B4-BE49-F238E27FC236}">
-                <a16:creationId xmlns:a16="http://schemas.microsoft.com/office/drawing/2014/main" id="{646F406E-6800-42C8-A3AF-63C86E852BA7}"/>
+                <a16:creationId xmlns:a16="http://schemas.microsoft.com/office/drawing/2014/main" id="{0ECA17D6-EC72-4D71-9740-3DAC16133BF6}"/>
               </a:ext>
             </a:extLst>
           </p:cNvPr>
@@ -3759,24 +4206,620 @@
             <p:ph type="title"/>
           </p:nvPr>
         </p:nvSpPr>
-        <p:spPr/>
+        <p:spPr>
+          <a:xfrm>
+            <a:off x="331077" y="839516"/>
+            <a:ext cx="7725102" cy="2963918"/>
+          </a:xfrm>
+        </p:spPr>
+        <p:txBody>
+          <a:bodyPr anchor="t">
+            <a:normAutofit/>
+          </a:bodyPr>
+          <a:lstStyle/>
+          <a:p>
+            <a:r>
+              <a:rPr kumimoji="1" lang="en-US" altLang="ja-JP" sz="2400" dirty="0">
+                <a:solidFill>
+                  <a:schemeClr val="bg1"/>
+                </a:solidFill>
+              </a:rPr>
+              <a:t>【</a:t>
+            </a:r>
+            <a:r>
+              <a:rPr kumimoji="1" lang="ja-JP" altLang="en-US" sz="2400" dirty="0">
+                <a:solidFill>
+                  <a:schemeClr val="bg1"/>
+                </a:solidFill>
+              </a:rPr>
+              <a:t>ゲーム内容</a:t>
+            </a:r>
+            <a:r>
+              <a:rPr kumimoji="1" lang="en-US" altLang="ja-JP" sz="2400" dirty="0">
+                <a:solidFill>
+                  <a:schemeClr val="bg1"/>
+                </a:solidFill>
+              </a:rPr>
+              <a:t>】</a:t>
+            </a:r>
+            <a:br>
+              <a:rPr kumimoji="1" lang="en-US" altLang="ja-JP" sz="1800" dirty="0">
+                <a:solidFill>
+                  <a:schemeClr val="bg1"/>
+                </a:solidFill>
+              </a:rPr>
+            </a:br>
+            <a:br>
+              <a:rPr kumimoji="1" lang="en-US" altLang="ja-JP" sz="1800" dirty="0">
+                <a:solidFill>
+                  <a:schemeClr val="bg1"/>
+                </a:solidFill>
+              </a:rPr>
+            </a:br>
+            <a:r>
+              <a:rPr lang="ja-JP" altLang="en-US" sz="1800" dirty="0">
+                <a:solidFill>
+                  <a:schemeClr val="bg1"/>
+                </a:solidFill>
+              </a:rPr>
+              <a:t>プレイヤーはメカキャラクターを操作して</a:t>
+            </a:r>
+            <a:r>
+              <a:rPr lang="en-US" altLang="ja-JP" sz="1800" dirty="0">
+                <a:solidFill>
+                  <a:schemeClr val="bg1"/>
+                </a:solidFill>
+              </a:rPr>
+              <a:t>1</a:t>
+            </a:r>
+            <a:r>
+              <a:rPr lang="ja-JP" altLang="en-US" sz="1800" dirty="0">
+                <a:solidFill>
+                  <a:schemeClr val="bg1"/>
+                </a:solidFill>
+              </a:rPr>
+              <a:t>対</a:t>
+            </a:r>
+            <a:r>
+              <a:rPr lang="en-US" altLang="ja-JP" sz="1800" dirty="0">
+                <a:solidFill>
+                  <a:schemeClr val="bg1"/>
+                </a:solidFill>
+              </a:rPr>
+              <a:t>1</a:t>
+            </a:r>
+            <a:r>
+              <a:rPr lang="ja-JP" altLang="en-US" sz="1800" dirty="0">
+                <a:solidFill>
+                  <a:schemeClr val="bg1"/>
+                </a:solidFill>
+              </a:rPr>
+              <a:t>で戦う</a:t>
+            </a:r>
+            <a:r>
+              <a:rPr lang="en-US" altLang="ja-JP" sz="1800" dirty="0">
+                <a:solidFill>
+                  <a:schemeClr val="bg1"/>
+                </a:solidFill>
+              </a:rPr>
+              <a:t>2D</a:t>
+            </a:r>
+            <a:r>
+              <a:rPr lang="ja-JP" altLang="en-US" sz="1800" dirty="0">
+                <a:solidFill>
+                  <a:schemeClr val="bg1"/>
+                </a:solidFill>
+              </a:rPr>
+              <a:t>格闘ゲームです。</a:t>
+            </a:r>
+            <a:br>
+              <a:rPr lang="ja-JP" altLang="en-US" sz="1800" dirty="0">
+                <a:solidFill>
+                  <a:schemeClr val="bg1"/>
+                </a:solidFill>
+              </a:rPr>
+            </a:br>
+            <a:r>
+              <a:rPr lang="ja-JP" altLang="en-US" sz="1800" dirty="0">
+                <a:solidFill>
+                  <a:schemeClr val="bg1"/>
+                </a:solidFill>
+              </a:rPr>
+              <a:t>攻撃は「パンチ（弱・中・強）」と「キック（弱・中・強）」の全</a:t>
+            </a:r>
+            <a:r>
+              <a:rPr lang="en-US" altLang="ja-JP" sz="1800" dirty="0">
+                <a:solidFill>
+                  <a:schemeClr val="bg1"/>
+                </a:solidFill>
+              </a:rPr>
+              <a:t>6</a:t>
+            </a:r>
+            <a:r>
+              <a:rPr lang="ja-JP" altLang="en-US" sz="1800" dirty="0">
+                <a:solidFill>
+                  <a:schemeClr val="bg1"/>
+                </a:solidFill>
+              </a:rPr>
+              <a:t>種類　　　があり、攻撃の強さによって威力や発生速度が変化します。</a:t>
+            </a:r>
+            <a:br>
+              <a:rPr lang="ja-JP" altLang="en-US" sz="1800" dirty="0">
+                <a:solidFill>
+                  <a:schemeClr val="bg1"/>
+                </a:solidFill>
+              </a:rPr>
+            </a:br>
+            <a:r>
+              <a:rPr lang="ja-JP" altLang="en-US" sz="1800" dirty="0">
+                <a:solidFill>
+                  <a:schemeClr val="bg1"/>
+                </a:solidFill>
+              </a:rPr>
+              <a:t>相手の</a:t>
+            </a:r>
+            <a:r>
+              <a:rPr lang="en-US" altLang="ja-JP" sz="1800" dirty="0">
+                <a:solidFill>
+                  <a:schemeClr val="bg1"/>
+                </a:solidFill>
+              </a:rPr>
+              <a:t>HP</a:t>
+            </a:r>
+            <a:r>
+              <a:rPr lang="ja-JP" altLang="en-US" sz="1800" dirty="0">
+                <a:solidFill>
+                  <a:schemeClr val="bg1"/>
+                </a:solidFill>
+              </a:rPr>
+              <a:t>を</a:t>
+            </a:r>
+            <a:r>
+              <a:rPr lang="en-US" altLang="ja-JP" sz="1800" dirty="0">
+                <a:solidFill>
+                  <a:schemeClr val="bg1"/>
+                </a:solidFill>
+              </a:rPr>
+              <a:t>0</a:t>
+            </a:r>
+            <a:r>
+              <a:rPr lang="ja-JP" altLang="en-US" sz="1800" dirty="0">
+                <a:solidFill>
+                  <a:schemeClr val="bg1"/>
+                </a:solidFill>
+              </a:rPr>
+              <a:t>にすると勝利となります。</a:t>
+            </a:r>
+            <a:br>
+              <a:rPr lang="ja-JP" altLang="en-US" sz="1800" dirty="0">
+                <a:solidFill>
+                  <a:schemeClr val="bg1"/>
+                </a:solidFill>
+              </a:rPr>
+            </a:br>
+            <a:r>
+              <a:rPr lang="ja-JP" altLang="en-US" sz="1800" dirty="0">
+                <a:solidFill>
+                  <a:schemeClr val="bg1"/>
+                </a:solidFill>
+              </a:rPr>
+              <a:t>キャラクターは</a:t>
+            </a:r>
+            <a:r>
+              <a:rPr lang="en-US" altLang="ja-JP" sz="1800" dirty="0">
+                <a:solidFill>
+                  <a:schemeClr val="bg1"/>
+                </a:solidFill>
+              </a:rPr>
+              <a:t>1</a:t>
+            </a:r>
+            <a:r>
+              <a:rPr lang="ja-JP" altLang="en-US" sz="1800" dirty="0">
+                <a:solidFill>
+                  <a:schemeClr val="bg1"/>
+                </a:solidFill>
+              </a:rPr>
+              <a:t>種類のみですが、攻撃の組み合わせや距離の取り方で多彩な戦い方ができます。</a:t>
+            </a:r>
+            <a:br>
+              <a:rPr lang="ja-JP" altLang="en-US" sz="1800" dirty="0">
+                <a:solidFill>
+                  <a:schemeClr val="bg1"/>
+                </a:solidFill>
+              </a:rPr>
+            </a:br>
+            <a:r>
+              <a:rPr lang="en-US" altLang="ja-JP" sz="1800" dirty="0">
+                <a:solidFill>
+                  <a:schemeClr val="bg1"/>
+                </a:solidFill>
+              </a:rPr>
+              <a:t>HP</a:t>
+            </a:r>
+            <a:r>
+              <a:rPr lang="ja-JP" altLang="en-US" sz="1800" dirty="0">
+                <a:solidFill>
+                  <a:schemeClr val="bg1"/>
+                </a:solidFill>
+              </a:rPr>
+              <a:t>バーは画面上部に固定表示され、操作のテンポや打撃感を重視したバトルを目指しました。</a:t>
+            </a:r>
+            <a:endParaRPr kumimoji="1" lang="ja-JP" altLang="en-US" sz="1800" dirty="0">
+              <a:solidFill>
+                <a:schemeClr val="bg1"/>
+              </a:solidFill>
+            </a:endParaRPr>
+          </a:p>
+        </p:txBody>
+      </p:sp>
+      <p:sp>
+        <p:nvSpPr>
+          <p:cNvPr id="5" name="タイトル 1">
+            <a:extLst>
+              <a:ext uri="{FF2B5EF4-FFF2-40B4-BE49-F238E27FC236}">
+                <a16:creationId xmlns:a16="http://schemas.microsoft.com/office/drawing/2014/main" id="{C26F9C28-2BFA-4D04-A864-32FDAF3A1932}"/>
+              </a:ext>
+            </a:extLst>
+          </p:cNvPr>
+          <p:cNvSpPr txBox="1">
+            <a:spLocks/>
+          </p:cNvSpPr>
+          <p:nvPr/>
+        </p:nvSpPr>
+        <p:spPr>
+          <a:xfrm>
+            <a:off x="331077" y="3968970"/>
+            <a:ext cx="7859109" cy="2175641"/>
+          </a:xfrm>
+          <a:prstGeom prst="rect">
+            <a:avLst/>
+          </a:prstGeom>
+        </p:spPr>
+        <p:txBody>
+          <a:bodyPr vert="horz" lIns="91440" tIns="45720" rIns="91440" bIns="45720" rtlCol="0" anchor="t">
+            <a:normAutofit/>
+          </a:bodyPr>
+          <a:lstStyle>
+            <a:lvl1pPr algn="l" defTabSz="914400" rtl="0" eaLnBrk="1" latinLnBrk="0" hangingPunct="1">
+              <a:lnSpc>
+                <a:spcPct val="90000"/>
+              </a:lnSpc>
+              <a:spcBef>
+                <a:spcPct val="0"/>
+              </a:spcBef>
+              <a:buNone/>
+              <a:defRPr kumimoji="1" sz="4400" kern="1200">
+                <a:solidFill>
+                  <a:schemeClr val="tx1"/>
+                </a:solidFill>
+                <a:latin typeface="+mj-lt"/>
+                <a:ea typeface="+mj-ea"/>
+                <a:cs typeface="+mj-cs"/>
+              </a:defRPr>
+            </a:lvl1pPr>
+          </a:lstStyle>
+          <a:p>
+            <a:r>
+              <a:rPr lang="en-US" altLang="ja-JP" sz="2400" dirty="0">
+                <a:solidFill>
+                  <a:schemeClr val="bg1"/>
+                </a:solidFill>
+              </a:rPr>
+              <a:t>【</a:t>
+            </a:r>
+            <a:r>
+              <a:rPr lang="ja-JP" altLang="en-US" sz="2400" dirty="0">
+                <a:solidFill>
+                  <a:schemeClr val="bg1"/>
+                </a:solidFill>
+              </a:rPr>
+              <a:t>制作意図</a:t>
+            </a:r>
+            <a:r>
+              <a:rPr lang="en-US" altLang="ja-JP" sz="2400" dirty="0">
+                <a:solidFill>
+                  <a:schemeClr val="bg1"/>
+                </a:solidFill>
+              </a:rPr>
+              <a:t>】</a:t>
+            </a:r>
+            <a:br>
+              <a:rPr lang="en-US" altLang="ja-JP" sz="1800" dirty="0">
+                <a:solidFill>
+                  <a:schemeClr val="bg1"/>
+                </a:solidFill>
+              </a:rPr>
+            </a:br>
+            <a:br>
+              <a:rPr lang="en-US" altLang="ja-JP" sz="1800" dirty="0">
+                <a:solidFill>
+                  <a:schemeClr val="bg1"/>
+                </a:solidFill>
+              </a:rPr>
+            </a:br>
+            <a:r>
+              <a:rPr lang="ja-JP" altLang="en-US" sz="1800" dirty="0">
+                <a:solidFill>
+                  <a:schemeClr val="bg1"/>
+                </a:solidFill>
+              </a:rPr>
+              <a:t>格闘ゲームは、当たり判定やフレーム処理など、プログラム面で高い精度が求められるジャンルです。</a:t>
+            </a:r>
+            <a:br>
+              <a:rPr lang="ja-JP" altLang="en-US" sz="1800" dirty="0">
+                <a:solidFill>
+                  <a:schemeClr val="bg1"/>
+                </a:solidFill>
+              </a:rPr>
+            </a:br>
+            <a:r>
+              <a:rPr lang="ja-JP" altLang="en-US" sz="1800" dirty="0">
+                <a:solidFill>
+                  <a:schemeClr val="bg1"/>
+                </a:solidFill>
+              </a:rPr>
+              <a:t>その複雑なシステムを一から自作することで、ゲームの設計や構造をより深く理解できると考え、制作しました。</a:t>
+            </a:r>
+            <a:br>
+              <a:rPr lang="ja-JP" altLang="en-US" sz="1800" dirty="0">
+                <a:solidFill>
+                  <a:schemeClr val="bg1"/>
+                </a:solidFill>
+              </a:rPr>
+            </a:br>
+            <a:r>
+              <a:rPr lang="en-US" altLang="ja-JP" sz="1800" dirty="0">
+                <a:solidFill>
+                  <a:schemeClr val="bg1"/>
+                </a:solidFill>
+              </a:rPr>
+              <a:t>3</a:t>
+            </a:r>
+            <a:r>
+              <a:rPr lang="ja-JP" altLang="en-US" sz="1800" dirty="0">
+                <a:solidFill>
+                  <a:schemeClr val="bg1"/>
+                </a:solidFill>
+              </a:rPr>
+              <a:t>年間の集大成として、</a:t>
+            </a:r>
+            <a:r>
+              <a:rPr lang="en-US" altLang="ja-JP" sz="1800" dirty="0">
+                <a:solidFill>
+                  <a:schemeClr val="bg1"/>
+                </a:solidFill>
+              </a:rPr>
+              <a:t>C++</a:t>
+            </a:r>
+            <a:r>
+              <a:rPr lang="ja-JP" altLang="en-US" sz="1800" dirty="0">
+                <a:solidFill>
+                  <a:schemeClr val="bg1"/>
+                </a:solidFill>
+              </a:rPr>
+              <a:t>と</a:t>
+            </a:r>
+            <a:r>
+              <a:rPr lang="en-US" altLang="ja-JP" sz="1800" dirty="0" err="1">
+                <a:solidFill>
+                  <a:schemeClr val="bg1"/>
+                </a:solidFill>
+              </a:rPr>
+              <a:t>DxLib</a:t>
+            </a:r>
+            <a:r>
+              <a:rPr lang="ja-JP" altLang="en-US" sz="1800" dirty="0">
+                <a:solidFill>
+                  <a:schemeClr val="bg1"/>
+                </a:solidFill>
+              </a:rPr>
+              <a:t>を用い、エンジンに頼らない実装力を試しました。</a:t>
+            </a:r>
+          </a:p>
+        </p:txBody>
+      </p:sp>
+      <p:pic>
+        <p:nvPicPr>
+          <p:cNvPr id="7" name="図 6">
+            <a:extLst>
+              <a:ext uri="{FF2B5EF4-FFF2-40B4-BE49-F238E27FC236}">
+                <a16:creationId xmlns:a16="http://schemas.microsoft.com/office/drawing/2014/main" id="{AB3BFE7F-FFA5-4995-9450-A9FDC8A813E9}"/>
+              </a:ext>
+            </a:extLst>
+          </p:cNvPr>
+          <p:cNvPicPr>
+            <a:picLocks noChangeAspect="1"/>
+          </p:cNvPicPr>
+          <p:nvPr/>
+        </p:nvPicPr>
+        <p:blipFill>
+          <a:blip r:embed="rId3">
+            <a:extLst>
+              <a:ext uri="{28A0092B-C50C-407E-A947-70E740481C1C}">
+                <a14:useLocalDpi xmlns:a14="http://schemas.microsoft.com/office/drawing/2010/main" val="0"/>
+              </a:ext>
+            </a:extLst>
+          </a:blip>
+          <a:stretch>
+            <a:fillRect/>
+          </a:stretch>
+        </p:blipFill>
+        <p:spPr>
+          <a:xfrm>
+            <a:off x="8056178" y="960055"/>
+            <a:ext cx="3723290" cy="2327056"/>
+          </a:xfrm>
+          <a:prstGeom prst="rect">
+            <a:avLst/>
+          </a:prstGeom>
+        </p:spPr>
+      </p:pic>
+      <p:pic>
+        <p:nvPicPr>
+          <p:cNvPr id="9" name="図 8">
+            <a:extLst>
+              <a:ext uri="{FF2B5EF4-FFF2-40B4-BE49-F238E27FC236}">
+                <a16:creationId xmlns:a16="http://schemas.microsoft.com/office/drawing/2014/main" id="{EC12FD31-E6C0-4639-BA9A-438C243F18C9}"/>
+              </a:ext>
+            </a:extLst>
+          </p:cNvPr>
+          <p:cNvPicPr>
+            <a:picLocks noChangeAspect="1"/>
+          </p:cNvPicPr>
+          <p:nvPr/>
+        </p:nvPicPr>
+        <p:blipFill>
+          <a:blip r:embed="rId4">
+            <a:extLst>
+              <a:ext uri="{28A0092B-C50C-407E-A947-70E740481C1C}">
+                <a14:useLocalDpi xmlns:a14="http://schemas.microsoft.com/office/drawing/2010/main" val="0"/>
+              </a:ext>
+            </a:extLst>
+          </a:blip>
+          <a:stretch>
+            <a:fillRect/>
+          </a:stretch>
+        </p:blipFill>
+        <p:spPr>
+          <a:xfrm>
+            <a:off x="8000999" y="3968970"/>
+            <a:ext cx="3723290" cy="2327056"/>
+          </a:xfrm>
+          <a:prstGeom prst="rect">
+            <a:avLst/>
+          </a:prstGeom>
+        </p:spPr>
+      </p:pic>
+    </p:spTree>
+    <p:extLst>
+      <p:ext uri="{BB962C8B-B14F-4D97-AF65-F5344CB8AC3E}">
+        <p14:creationId xmlns:p14="http://schemas.microsoft.com/office/powerpoint/2010/main" val="3743922765"/>
+      </p:ext>
+    </p:extLst>
+  </p:cSld>
+  <p:clrMapOvr>
+    <a:masterClrMapping/>
+  </p:clrMapOvr>
+</p:sld>
+</file>
+
+<file path=ppt/slides/slide3.xml><?xml version="1.0" encoding="utf-8"?>
+<p:sld xmlns:a="http://schemas.openxmlformats.org/drawingml/2006/main" xmlns:r="http://schemas.openxmlformats.org/officeDocument/2006/relationships" xmlns:p="http://schemas.openxmlformats.org/presentationml/2006/main">
+  <p:cSld>
+    <p:spTree>
+      <p:nvGrpSpPr>
+        <p:cNvPr id="1" name=""/>
+        <p:cNvGrpSpPr/>
+        <p:nvPr/>
+      </p:nvGrpSpPr>
+      <p:grpSpPr>
+        <a:xfrm>
+          <a:off x="0" y="0"/>
+          <a:ext cx="0" cy="0"/>
+          <a:chOff x="0" y="0"/>
+          <a:chExt cx="0" cy="0"/>
+        </a:xfrm>
+      </p:grpSpPr>
+      <p:pic>
+        <p:nvPicPr>
+          <p:cNvPr id="5" name="図 4">
+            <a:extLst>
+              <a:ext uri="{FF2B5EF4-FFF2-40B4-BE49-F238E27FC236}">
+                <a16:creationId xmlns:a16="http://schemas.microsoft.com/office/drawing/2014/main" id="{8171048D-035D-411F-99B6-8938408D0A57}"/>
+              </a:ext>
+            </a:extLst>
+          </p:cNvPr>
+          <p:cNvPicPr>
+            <a:picLocks noChangeAspect="1"/>
+          </p:cNvPicPr>
+          <p:nvPr/>
+        </p:nvPicPr>
+        <p:blipFill>
+          <a:blip r:embed="rId2">
+            <a:extLst>
+              <a:ext uri="{28A0092B-C50C-407E-A947-70E740481C1C}">
+                <a14:useLocalDpi xmlns:a14="http://schemas.microsoft.com/office/drawing/2010/main" val="0"/>
+              </a:ext>
+            </a:extLst>
+          </a:blip>
+          <a:stretch>
+            <a:fillRect/>
+          </a:stretch>
+        </p:blipFill>
+        <p:spPr>
+          <a:xfrm>
+            <a:off x="0" y="0"/>
+            <a:ext cx="12191999" cy="6858000"/>
+          </a:xfrm>
+          <a:prstGeom prst="rect">
+            <a:avLst/>
+          </a:prstGeom>
+        </p:spPr>
+      </p:pic>
+      <p:sp>
+        <p:nvSpPr>
+          <p:cNvPr id="2" name="タイトル 1">
+            <a:extLst>
+              <a:ext uri="{FF2B5EF4-FFF2-40B4-BE49-F238E27FC236}">
+                <a16:creationId xmlns:a16="http://schemas.microsoft.com/office/drawing/2014/main" id="{646F406E-6800-42C8-A3AF-63C86E852BA7}"/>
+              </a:ext>
+            </a:extLst>
+          </p:cNvPr>
+          <p:cNvSpPr>
+            <a:spLocks noGrp="1"/>
+          </p:cNvSpPr>
+          <p:nvPr>
+            <p:ph type="title"/>
+          </p:nvPr>
+        </p:nvSpPr>
+        <p:spPr>
+          <a:xfrm>
+            <a:off x="585952" y="386238"/>
+            <a:ext cx="10515600" cy="1325563"/>
+          </a:xfrm>
+        </p:spPr>
         <p:txBody>
           <a:bodyPr/>
           <a:lstStyle/>
           <a:p>
             <a:r>
-              <a:rPr kumimoji="1" lang="ja-JP" altLang="en-US" dirty="0"/>
-              <a:t>キャラクター</a:t>
-            </a:r>
-          </a:p>
-        </p:txBody>
-      </p:sp>
-      <p:sp>
-        <p:nvSpPr>
-          <p:cNvPr id="3" name="テキスト ボックス 2">
-            <a:extLst>
-              <a:ext uri="{FF2B5EF4-FFF2-40B4-BE49-F238E27FC236}">
-                <a16:creationId xmlns:a16="http://schemas.microsoft.com/office/drawing/2014/main" id="{52015895-24DE-4CED-865B-7AD3896EFD8E}"/>
+              <a:rPr kumimoji="1" lang="en-US" altLang="ja-JP" dirty="0">
+                <a:solidFill>
+                  <a:schemeClr val="bg1"/>
+                </a:solidFill>
+              </a:rPr>
+              <a:t>【</a:t>
+            </a:r>
+            <a:r>
+              <a:rPr kumimoji="1" lang="ja-JP" altLang="en-US" dirty="0">
+                <a:solidFill>
+                  <a:schemeClr val="bg1"/>
+                </a:solidFill>
+              </a:rPr>
+              <a:t>操作方法</a:t>
+            </a:r>
+            <a:r>
+              <a:rPr kumimoji="1" lang="en-US" altLang="ja-JP" dirty="0">
+                <a:solidFill>
+                  <a:schemeClr val="bg1"/>
+                </a:solidFill>
+              </a:rPr>
+              <a:t>】</a:t>
+            </a:r>
+            <a:endParaRPr kumimoji="1" lang="ja-JP" altLang="en-US" dirty="0">
+              <a:solidFill>
+                <a:schemeClr val="bg1"/>
+              </a:solidFill>
+            </a:endParaRPr>
+          </a:p>
+        </p:txBody>
+      </p:sp>
+      <p:sp>
+        <p:nvSpPr>
+          <p:cNvPr id="10" name="テキスト ボックス 9">
+            <a:extLst>
+              <a:ext uri="{FF2B5EF4-FFF2-40B4-BE49-F238E27FC236}">
+                <a16:creationId xmlns:a16="http://schemas.microsoft.com/office/drawing/2014/main" id="{E0EE238F-FB2D-4A9B-BAF0-5E250B245B05}"/>
               </a:ext>
             </a:extLst>
           </p:cNvPr>
@@ -3785,8 +4828,8 @@
         </p:nvSpPr>
         <p:spPr>
           <a:xfrm>
-            <a:off x="838200" y="1690688"/>
-            <a:ext cx="3562350" cy="369332"/>
+            <a:off x="830317" y="1711801"/>
+            <a:ext cx="3205655" cy="2862322"/>
           </a:xfrm>
           <a:prstGeom prst="rect">
             <a:avLst/>
@@ -3800,35 +4843,341 @@
           <a:lstStyle/>
           <a:p>
             <a:r>
-              <a:rPr lang="ja-JP" altLang="en-US" dirty="0"/>
-              <a:t>・最低でも</a:t>
-            </a:r>
-            <a:r>
-              <a:rPr lang="en-US" altLang="ja-JP" dirty="0"/>
-              <a:t>2</a:t>
-            </a:r>
-            <a:r>
-              <a:rPr lang="ja-JP" altLang="en-US" dirty="0"/>
-              <a:t>人、多ければ</a:t>
-            </a:r>
-            <a:r>
-              <a:rPr lang="en-US" altLang="ja-JP" dirty="0"/>
-              <a:t>5</a:t>
-            </a:r>
-            <a:r>
-              <a:rPr lang="ja-JP" altLang="en-US" dirty="0"/>
-              <a:t>人</a:t>
-            </a:r>
-            <a:endParaRPr lang="en-US" altLang="ja-JP" dirty="0"/>
-          </a:p>
-        </p:txBody>
-      </p:sp>
-      <p:sp>
-        <p:nvSpPr>
-          <p:cNvPr id="9" name="テキスト ボックス 8">
-            <a:extLst>
-              <a:ext uri="{FF2B5EF4-FFF2-40B4-BE49-F238E27FC236}">
-                <a16:creationId xmlns:a16="http://schemas.microsoft.com/office/drawing/2014/main" id="{60779DCA-7853-4A8B-86D3-8271AEAB6BD1}"/>
+              <a:rPr lang="en-US" altLang="ja-JP" dirty="0">
+                <a:solidFill>
+                  <a:schemeClr val="bg1"/>
+                </a:solidFill>
+              </a:rPr>
+              <a:t>【</a:t>
+            </a:r>
+            <a:r>
+              <a:rPr lang="ja-JP" altLang="en-US" dirty="0">
+                <a:solidFill>
+                  <a:schemeClr val="bg1"/>
+                </a:solidFill>
+              </a:rPr>
+              <a:t>キーボードコマンド</a:t>
+            </a:r>
+            <a:r>
+              <a:rPr lang="en-US" altLang="ja-JP" dirty="0">
+                <a:solidFill>
+                  <a:schemeClr val="bg1"/>
+                </a:solidFill>
+              </a:rPr>
+              <a:t>】</a:t>
+            </a:r>
+          </a:p>
+          <a:p>
+            <a:endParaRPr lang="en-US" altLang="ja-JP" dirty="0">
+              <a:solidFill>
+                <a:schemeClr val="bg1"/>
+              </a:solidFill>
+            </a:endParaRPr>
+          </a:p>
+          <a:p>
+            <a:r>
+              <a:rPr lang="ja-JP" altLang="en-US" dirty="0">
+                <a:solidFill>
+                  <a:schemeClr val="bg1"/>
+                </a:solidFill>
+              </a:rPr>
+              <a:t>・移動　　：</a:t>
+            </a:r>
+            <a:r>
+              <a:rPr lang="en-US" altLang="ja-JP" dirty="0">
+                <a:solidFill>
+                  <a:schemeClr val="bg1"/>
+                </a:solidFill>
+              </a:rPr>
+              <a:t>A</a:t>
+            </a:r>
+            <a:r>
+              <a:rPr lang="ja-JP" altLang="en-US" dirty="0">
+                <a:solidFill>
+                  <a:schemeClr val="bg1"/>
+                </a:solidFill>
+              </a:rPr>
+              <a:t>キー</a:t>
+            </a:r>
+            <a:r>
+              <a:rPr lang="en-US" altLang="ja-JP" dirty="0">
+                <a:solidFill>
+                  <a:schemeClr val="bg1"/>
+                </a:solidFill>
+              </a:rPr>
+              <a:t> &amp; D</a:t>
+            </a:r>
+            <a:r>
+              <a:rPr lang="ja-JP" altLang="en-US" dirty="0">
+                <a:solidFill>
+                  <a:schemeClr val="bg1"/>
+                </a:solidFill>
+              </a:rPr>
+              <a:t>キー</a:t>
+            </a:r>
+            <a:endParaRPr lang="en-US" altLang="ja-JP" dirty="0">
+              <a:solidFill>
+                <a:schemeClr val="bg1"/>
+              </a:solidFill>
+            </a:endParaRPr>
+          </a:p>
+          <a:p>
+            <a:r>
+              <a:rPr lang="ja-JP" altLang="en-US" dirty="0">
+                <a:solidFill>
+                  <a:schemeClr val="bg1"/>
+                </a:solidFill>
+              </a:rPr>
+              <a:t>・パンチ弱：</a:t>
+            </a:r>
+            <a:r>
+              <a:rPr lang="en-US" altLang="ja-JP" dirty="0">
+                <a:solidFill>
+                  <a:schemeClr val="bg1"/>
+                </a:solidFill>
+              </a:rPr>
+              <a:t>U</a:t>
+            </a:r>
+            <a:r>
+              <a:rPr lang="ja-JP" altLang="en-US" dirty="0">
+                <a:solidFill>
+                  <a:schemeClr val="bg1"/>
+                </a:solidFill>
+              </a:rPr>
+              <a:t>キー</a:t>
+            </a:r>
+            <a:endParaRPr lang="en-US" altLang="ja-JP" dirty="0">
+              <a:solidFill>
+                <a:schemeClr val="bg1"/>
+              </a:solidFill>
+            </a:endParaRPr>
+          </a:p>
+          <a:p>
+            <a:r>
+              <a:rPr lang="en-US" altLang="ja-JP" dirty="0">
+                <a:solidFill>
+                  <a:schemeClr val="bg1"/>
+                </a:solidFill>
+              </a:rPr>
+              <a:t>	</a:t>
+            </a:r>
+            <a:r>
+              <a:rPr lang="ja-JP" altLang="en-US" dirty="0">
+                <a:solidFill>
+                  <a:schemeClr val="bg1"/>
+                </a:solidFill>
+              </a:rPr>
+              <a:t>中：</a:t>
+            </a:r>
+            <a:r>
+              <a:rPr lang="en-US" altLang="ja-JP" dirty="0">
+                <a:solidFill>
+                  <a:schemeClr val="bg1"/>
+                </a:solidFill>
+              </a:rPr>
+              <a:t>I</a:t>
+            </a:r>
+            <a:r>
+              <a:rPr lang="ja-JP" altLang="en-US" dirty="0">
+                <a:solidFill>
+                  <a:schemeClr val="bg1"/>
+                </a:solidFill>
+              </a:rPr>
+              <a:t>キー</a:t>
+            </a:r>
+            <a:endParaRPr lang="en-US" altLang="ja-JP" dirty="0">
+              <a:solidFill>
+                <a:schemeClr val="bg1"/>
+              </a:solidFill>
+            </a:endParaRPr>
+          </a:p>
+          <a:p>
+            <a:r>
+              <a:rPr lang="en-US" altLang="ja-JP" dirty="0">
+                <a:solidFill>
+                  <a:schemeClr val="bg1"/>
+                </a:solidFill>
+              </a:rPr>
+              <a:t>	</a:t>
+            </a:r>
+            <a:r>
+              <a:rPr lang="ja-JP" altLang="en-US" dirty="0">
+                <a:solidFill>
+                  <a:schemeClr val="bg1"/>
+                </a:solidFill>
+              </a:rPr>
+              <a:t>強：</a:t>
+            </a:r>
+            <a:r>
+              <a:rPr lang="en-US" altLang="ja-JP" dirty="0">
+                <a:solidFill>
+                  <a:schemeClr val="bg1"/>
+                </a:solidFill>
+              </a:rPr>
+              <a:t>O</a:t>
+            </a:r>
+            <a:r>
+              <a:rPr lang="ja-JP" altLang="en-US" dirty="0">
+                <a:solidFill>
+                  <a:schemeClr val="bg1"/>
+                </a:solidFill>
+              </a:rPr>
+              <a:t>キー</a:t>
+            </a:r>
+            <a:endParaRPr lang="en-US" altLang="ja-JP" dirty="0">
+              <a:solidFill>
+                <a:schemeClr val="bg1"/>
+              </a:solidFill>
+            </a:endParaRPr>
+          </a:p>
+          <a:p>
+            <a:r>
+              <a:rPr lang="ja-JP" altLang="en-US" dirty="0">
+                <a:solidFill>
+                  <a:schemeClr val="bg1"/>
+                </a:solidFill>
+              </a:rPr>
+              <a:t>・キック弱：</a:t>
+            </a:r>
+            <a:r>
+              <a:rPr lang="en-US" altLang="ja-JP" dirty="0">
+                <a:solidFill>
+                  <a:schemeClr val="bg1"/>
+                </a:solidFill>
+              </a:rPr>
+              <a:t>J</a:t>
+            </a:r>
+            <a:r>
+              <a:rPr lang="ja-JP" altLang="en-US" dirty="0">
+                <a:solidFill>
+                  <a:schemeClr val="bg1"/>
+                </a:solidFill>
+              </a:rPr>
+              <a:t>キー</a:t>
+            </a:r>
+            <a:endParaRPr lang="en-US" altLang="ja-JP" dirty="0">
+              <a:solidFill>
+                <a:schemeClr val="bg1"/>
+              </a:solidFill>
+            </a:endParaRPr>
+          </a:p>
+          <a:p>
+            <a:r>
+              <a:rPr lang="en-US" altLang="ja-JP" dirty="0">
+                <a:solidFill>
+                  <a:schemeClr val="bg1"/>
+                </a:solidFill>
+              </a:rPr>
+              <a:t>	</a:t>
+            </a:r>
+            <a:r>
+              <a:rPr lang="ja-JP" altLang="en-US" dirty="0">
+                <a:solidFill>
+                  <a:schemeClr val="bg1"/>
+                </a:solidFill>
+              </a:rPr>
+              <a:t>中：</a:t>
+            </a:r>
+            <a:r>
+              <a:rPr lang="en-US" altLang="ja-JP" dirty="0">
+                <a:solidFill>
+                  <a:schemeClr val="bg1"/>
+                </a:solidFill>
+              </a:rPr>
+              <a:t>K</a:t>
+            </a:r>
+            <a:r>
+              <a:rPr lang="ja-JP" altLang="en-US" dirty="0">
+                <a:solidFill>
+                  <a:schemeClr val="bg1"/>
+                </a:solidFill>
+              </a:rPr>
+              <a:t>キー</a:t>
+            </a:r>
+            <a:endParaRPr lang="en-US" altLang="ja-JP" dirty="0">
+              <a:solidFill>
+                <a:schemeClr val="bg1"/>
+              </a:solidFill>
+            </a:endParaRPr>
+          </a:p>
+          <a:p>
+            <a:r>
+              <a:rPr lang="en-US" altLang="ja-JP" dirty="0">
+                <a:solidFill>
+                  <a:schemeClr val="bg1"/>
+                </a:solidFill>
+              </a:rPr>
+              <a:t>	</a:t>
+            </a:r>
+            <a:r>
+              <a:rPr lang="ja-JP" altLang="en-US" dirty="0">
+                <a:solidFill>
+                  <a:schemeClr val="bg1"/>
+                </a:solidFill>
+              </a:rPr>
+              <a:t>強：</a:t>
+            </a:r>
+            <a:r>
+              <a:rPr lang="en-US" altLang="ja-JP" dirty="0">
+                <a:solidFill>
+                  <a:schemeClr val="bg1"/>
+                </a:solidFill>
+              </a:rPr>
+              <a:t>L</a:t>
+            </a:r>
+            <a:r>
+              <a:rPr lang="ja-JP" altLang="en-US" dirty="0">
+                <a:solidFill>
+                  <a:schemeClr val="bg1"/>
+                </a:solidFill>
+              </a:rPr>
+              <a:t>キー</a:t>
+            </a:r>
+            <a:endParaRPr lang="en-US" altLang="ja-JP" dirty="0">
+              <a:solidFill>
+                <a:schemeClr val="bg1"/>
+              </a:solidFill>
+            </a:endParaRPr>
+          </a:p>
+          <a:p>
+            <a:r>
+              <a:rPr lang="ja-JP" altLang="en-US" dirty="0">
+                <a:solidFill>
+                  <a:schemeClr val="bg1"/>
+                </a:solidFill>
+              </a:rPr>
+              <a:t>・ガード　：</a:t>
+            </a:r>
+            <a:r>
+              <a:rPr lang="en-US" altLang="ja-JP" dirty="0">
+                <a:solidFill>
+                  <a:schemeClr val="bg1"/>
+                </a:solidFill>
+              </a:rPr>
+              <a:t>H</a:t>
+            </a:r>
+            <a:r>
+              <a:rPr lang="ja-JP" altLang="en-US" dirty="0">
+                <a:solidFill>
+                  <a:schemeClr val="bg1"/>
+                </a:solidFill>
+              </a:rPr>
+              <a:t>キー</a:t>
+            </a:r>
+            <a:endParaRPr lang="en-US" altLang="ja-JP" dirty="0">
+              <a:solidFill>
+                <a:schemeClr val="bg1"/>
+              </a:solidFill>
+            </a:endParaRPr>
+          </a:p>
+        </p:txBody>
+      </p:sp>
+      <p:sp>
+        <p:nvSpPr>
+          <p:cNvPr id="8" name="テキスト ボックス 7">
+            <a:extLst>
+              <a:ext uri="{FF2B5EF4-FFF2-40B4-BE49-F238E27FC236}">
+                <a16:creationId xmlns:a16="http://schemas.microsoft.com/office/drawing/2014/main" id="{9FA20AF2-CDB0-4DC3-AA69-573B362A4EA4}"/>
               </a:ext>
             </a:extLst>
           </p:cNvPr>
@@ -3837,8 +5186,8 @@
         </p:nvSpPr>
         <p:spPr>
           <a:xfrm>
-            <a:off x="838199" y="2454216"/>
-            <a:ext cx="10944225" cy="769441"/>
+            <a:off x="4035972" y="1711801"/>
+            <a:ext cx="3205655" cy="3139321"/>
           </a:xfrm>
           <a:prstGeom prst="rect">
             <a:avLst/>
@@ -3846,27 +5195,338 @@
           <a:noFill/>
         </p:spPr>
         <p:txBody>
-          <a:bodyPr wrap="square">
+          <a:bodyPr wrap="square" rtlCol="0">
             <a:spAutoFit/>
           </a:bodyPr>
           <a:lstStyle/>
           <a:p>
             <a:r>
-              <a:rPr lang="ja-JP" altLang="en-US" sz="4400" dirty="0">
-                <a:latin typeface="+mj-ea"/>
-                <a:ea typeface="+mj-ea"/>
-              </a:rPr>
-              <a:t>動作内容（キーボードとコントローラー）</a:t>
-            </a:r>
-          </a:p>
-        </p:txBody>
-      </p:sp>
-      <p:sp>
-        <p:nvSpPr>
-          <p:cNvPr id="10" name="テキスト ボックス 9">
-            <a:extLst>
-              <a:ext uri="{FF2B5EF4-FFF2-40B4-BE49-F238E27FC236}">
-                <a16:creationId xmlns:a16="http://schemas.microsoft.com/office/drawing/2014/main" id="{E0EE238F-FB2D-4A9B-BAF0-5E250B245B05}"/>
+              <a:rPr lang="en-US" altLang="ja-JP" dirty="0">
+                <a:solidFill>
+                  <a:schemeClr val="bg1"/>
+                </a:solidFill>
+              </a:rPr>
+              <a:t>【</a:t>
+            </a:r>
+            <a:r>
+              <a:rPr lang="ja-JP" altLang="en-US" dirty="0">
+                <a:solidFill>
+                  <a:schemeClr val="bg1"/>
+                </a:solidFill>
+              </a:rPr>
+              <a:t>ゲームパッドコマンド</a:t>
+            </a:r>
+            <a:r>
+              <a:rPr lang="en-US" altLang="ja-JP" dirty="0">
+                <a:solidFill>
+                  <a:schemeClr val="bg1"/>
+                </a:solidFill>
+              </a:rPr>
+              <a:t>】</a:t>
+            </a:r>
+          </a:p>
+          <a:p>
+            <a:endParaRPr lang="en-US" altLang="ja-JP" dirty="0">
+              <a:solidFill>
+                <a:schemeClr val="bg1"/>
+              </a:solidFill>
+            </a:endParaRPr>
+          </a:p>
+          <a:p>
+            <a:r>
+              <a:rPr lang="en-US" altLang="ja-JP" dirty="0">
+                <a:solidFill>
+                  <a:schemeClr val="bg1"/>
+                </a:solidFill>
+              </a:rPr>
+              <a:t>Xbox</a:t>
+            </a:r>
+            <a:r>
+              <a:rPr lang="ja-JP" altLang="en-US" dirty="0">
+                <a:solidFill>
+                  <a:schemeClr val="bg1"/>
+                </a:solidFill>
+              </a:rPr>
+              <a:t>専用</a:t>
+            </a:r>
+            <a:endParaRPr lang="en-US" altLang="ja-JP" dirty="0">
+              <a:solidFill>
+                <a:schemeClr val="bg1"/>
+              </a:solidFill>
+            </a:endParaRPr>
+          </a:p>
+          <a:p>
+            <a:r>
+              <a:rPr lang="ja-JP" altLang="en-US" dirty="0">
+                <a:solidFill>
+                  <a:schemeClr val="bg1"/>
+                </a:solidFill>
+              </a:rPr>
+              <a:t>・移動　　：左スティック</a:t>
+            </a:r>
+            <a:endParaRPr lang="en-US" altLang="ja-JP" dirty="0">
+              <a:solidFill>
+                <a:schemeClr val="bg1"/>
+              </a:solidFill>
+            </a:endParaRPr>
+          </a:p>
+          <a:p>
+            <a:r>
+              <a:rPr lang="ja-JP" altLang="en-US" dirty="0">
+                <a:solidFill>
+                  <a:schemeClr val="bg1"/>
+                </a:solidFill>
+              </a:rPr>
+              <a:t>・パンチ弱：</a:t>
+            </a:r>
+            <a:r>
+              <a:rPr lang="en-US" altLang="ja-JP" dirty="0">
+                <a:solidFill>
+                  <a:schemeClr val="bg1"/>
+                </a:solidFill>
+              </a:rPr>
+              <a:t>B</a:t>
+            </a:r>
+            <a:r>
+              <a:rPr lang="ja-JP" altLang="en-US" dirty="0">
+                <a:solidFill>
+                  <a:schemeClr val="bg1"/>
+                </a:solidFill>
+              </a:rPr>
+              <a:t>ボタン</a:t>
+            </a:r>
+            <a:endParaRPr lang="en-US" altLang="ja-JP" dirty="0">
+              <a:solidFill>
+                <a:schemeClr val="bg1"/>
+              </a:solidFill>
+            </a:endParaRPr>
+          </a:p>
+          <a:p>
+            <a:r>
+              <a:rPr lang="en-US" altLang="ja-JP" dirty="0">
+                <a:solidFill>
+                  <a:schemeClr val="bg1"/>
+                </a:solidFill>
+              </a:rPr>
+              <a:t>	</a:t>
+            </a:r>
+            <a:r>
+              <a:rPr lang="ja-JP" altLang="en-US" dirty="0">
+                <a:solidFill>
+                  <a:schemeClr val="bg1"/>
+                </a:solidFill>
+              </a:rPr>
+              <a:t>中：</a:t>
+            </a:r>
+            <a:r>
+              <a:rPr lang="en-US" altLang="ja-JP" dirty="0">
+                <a:solidFill>
+                  <a:schemeClr val="bg1"/>
+                </a:solidFill>
+              </a:rPr>
+              <a:t>L</a:t>
+            </a:r>
+            <a:r>
+              <a:rPr lang="ja-JP" altLang="en-US" dirty="0">
+                <a:solidFill>
+                  <a:schemeClr val="bg1"/>
+                </a:solidFill>
+              </a:rPr>
+              <a:t>ボタン</a:t>
+            </a:r>
+            <a:endParaRPr lang="en-US" altLang="ja-JP" dirty="0">
+              <a:solidFill>
+                <a:schemeClr val="bg1"/>
+              </a:solidFill>
+            </a:endParaRPr>
+          </a:p>
+          <a:p>
+            <a:r>
+              <a:rPr lang="en-US" altLang="ja-JP" dirty="0">
+                <a:solidFill>
+                  <a:schemeClr val="bg1"/>
+                </a:solidFill>
+              </a:rPr>
+              <a:t>	</a:t>
+            </a:r>
+            <a:r>
+              <a:rPr lang="ja-JP" altLang="en-US" dirty="0">
+                <a:solidFill>
+                  <a:schemeClr val="bg1"/>
+                </a:solidFill>
+              </a:rPr>
+              <a:t>強：</a:t>
+            </a:r>
+            <a:r>
+              <a:rPr lang="en-US" altLang="ja-JP" dirty="0">
+                <a:solidFill>
+                  <a:schemeClr val="bg1"/>
+                </a:solidFill>
+              </a:rPr>
+              <a:t>LT</a:t>
+            </a:r>
+            <a:r>
+              <a:rPr lang="ja-JP" altLang="en-US" dirty="0">
+                <a:solidFill>
+                  <a:schemeClr val="bg1"/>
+                </a:solidFill>
+              </a:rPr>
+              <a:t>トリガー</a:t>
+            </a:r>
+            <a:endParaRPr lang="en-US" altLang="ja-JP" dirty="0">
+              <a:solidFill>
+                <a:schemeClr val="bg1"/>
+              </a:solidFill>
+            </a:endParaRPr>
+          </a:p>
+          <a:p>
+            <a:r>
+              <a:rPr lang="ja-JP" altLang="en-US" dirty="0">
+                <a:solidFill>
+                  <a:schemeClr val="bg1"/>
+                </a:solidFill>
+              </a:rPr>
+              <a:t>・キック弱：</a:t>
+            </a:r>
+            <a:r>
+              <a:rPr lang="en-US" altLang="ja-JP" dirty="0">
+                <a:solidFill>
+                  <a:schemeClr val="bg1"/>
+                </a:solidFill>
+              </a:rPr>
+              <a:t>A</a:t>
+            </a:r>
+            <a:r>
+              <a:rPr lang="ja-JP" altLang="en-US" dirty="0">
+                <a:solidFill>
+                  <a:schemeClr val="bg1"/>
+                </a:solidFill>
+              </a:rPr>
+              <a:t>ボタン</a:t>
+            </a:r>
+            <a:endParaRPr lang="en-US" altLang="ja-JP" dirty="0">
+              <a:solidFill>
+                <a:schemeClr val="bg1"/>
+              </a:solidFill>
+            </a:endParaRPr>
+          </a:p>
+          <a:p>
+            <a:r>
+              <a:rPr lang="en-US" altLang="ja-JP" dirty="0">
+                <a:solidFill>
+                  <a:schemeClr val="bg1"/>
+                </a:solidFill>
+              </a:rPr>
+              <a:t>	</a:t>
+            </a:r>
+            <a:r>
+              <a:rPr lang="ja-JP" altLang="en-US" dirty="0">
+                <a:solidFill>
+                  <a:schemeClr val="bg1"/>
+                </a:solidFill>
+              </a:rPr>
+              <a:t>中：</a:t>
+            </a:r>
+            <a:r>
+              <a:rPr lang="en-US" altLang="ja-JP" dirty="0">
+                <a:solidFill>
+                  <a:schemeClr val="bg1"/>
+                </a:solidFill>
+              </a:rPr>
+              <a:t>R</a:t>
+            </a:r>
+            <a:r>
+              <a:rPr lang="ja-JP" altLang="en-US" dirty="0">
+                <a:solidFill>
+                  <a:schemeClr val="bg1"/>
+                </a:solidFill>
+              </a:rPr>
+              <a:t>ボタン</a:t>
+            </a:r>
+            <a:endParaRPr lang="en-US" altLang="ja-JP" dirty="0">
+              <a:solidFill>
+                <a:schemeClr val="bg1"/>
+              </a:solidFill>
+            </a:endParaRPr>
+          </a:p>
+          <a:p>
+            <a:r>
+              <a:rPr lang="en-US" altLang="ja-JP" dirty="0">
+                <a:solidFill>
+                  <a:schemeClr val="bg1"/>
+                </a:solidFill>
+              </a:rPr>
+              <a:t>	</a:t>
+            </a:r>
+            <a:r>
+              <a:rPr lang="ja-JP" altLang="en-US" dirty="0">
+                <a:solidFill>
+                  <a:schemeClr val="bg1"/>
+                </a:solidFill>
+              </a:rPr>
+              <a:t>強：</a:t>
+            </a:r>
+            <a:r>
+              <a:rPr lang="en-US" altLang="ja-JP" dirty="0">
+                <a:solidFill>
+                  <a:schemeClr val="bg1"/>
+                </a:solidFill>
+              </a:rPr>
+              <a:t>RT</a:t>
+            </a:r>
+            <a:r>
+              <a:rPr lang="ja-JP" altLang="en-US" dirty="0">
+                <a:solidFill>
+                  <a:schemeClr val="bg1"/>
+                </a:solidFill>
+              </a:rPr>
+              <a:t>トリガー</a:t>
+            </a:r>
+            <a:endParaRPr lang="en-US" altLang="ja-JP" dirty="0">
+              <a:solidFill>
+                <a:schemeClr val="bg1"/>
+              </a:solidFill>
+            </a:endParaRPr>
+          </a:p>
+          <a:p>
+            <a:r>
+              <a:rPr lang="ja-JP" altLang="en-US" dirty="0">
+                <a:solidFill>
+                  <a:schemeClr val="bg1"/>
+                </a:solidFill>
+              </a:rPr>
+              <a:t>・ガード　：</a:t>
+            </a:r>
+            <a:r>
+              <a:rPr lang="en-US" altLang="ja-JP" dirty="0">
+                <a:solidFill>
+                  <a:schemeClr val="bg1"/>
+                </a:solidFill>
+              </a:rPr>
+              <a:t>X</a:t>
+            </a:r>
+            <a:r>
+              <a:rPr lang="ja-JP" altLang="en-US" dirty="0">
+                <a:solidFill>
+                  <a:schemeClr val="bg1"/>
+                </a:solidFill>
+              </a:rPr>
+              <a:t>ボタン</a:t>
+            </a:r>
+            <a:endParaRPr lang="en-US" altLang="ja-JP" dirty="0">
+              <a:solidFill>
+                <a:schemeClr val="bg1"/>
+              </a:solidFill>
+            </a:endParaRPr>
+          </a:p>
+        </p:txBody>
+      </p:sp>
+      <p:sp>
+        <p:nvSpPr>
+          <p:cNvPr id="11" name="テキスト ボックス 10">
+            <a:extLst>
+              <a:ext uri="{FF2B5EF4-FFF2-40B4-BE49-F238E27FC236}">
+                <a16:creationId xmlns:a16="http://schemas.microsoft.com/office/drawing/2014/main" id="{539E2AC6-25FF-4C71-A9FD-32E00FA4E5AF}"/>
               </a:ext>
             </a:extLst>
           </p:cNvPr>
@@ -3875,8 +5535,8 @@
         </p:nvSpPr>
         <p:spPr>
           <a:xfrm>
-            <a:off x="838200" y="3223657"/>
-            <a:ext cx="5876925" cy="2585323"/>
+            <a:off x="7241627" y="1769608"/>
+            <a:ext cx="4566745" cy="1200329"/>
           </a:xfrm>
           <a:prstGeom prst="rect">
             <a:avLst/>
@@ -3890,146 +5550,470 @@
           <a:lstStyle/>
           <a:p>
             <a:r>
-              <a:rPr kumimoji="1" lang="ja-JP" altLang="en-US" dirty="0"/>
-              <a:t>・上：</a:t>
-            </a:r>
-            <a:r>
-              <a:rPr kumimoji="1" lang="en-US" altLang="ja-JP" dirty="0"/>
-              <a:t>Space </a:t>
-            </a:r>
-            <a:r>
-              <a:rPr kumimoji="1" lang="ja-JP" altLang="en-US" dirty="0"/>
-              <a:t>＆ 上スティック</a:t>
-            </a:r>
-            <a:endParaRPr kumimoji="1" lang="en-US" altLang="ja-JP" dirty="0"/>
-          </a:p>
-          <a:p>
-            <a:r>
-              <a:rPr lang="ja-JP" altLang="en-US" dirty="0"/>
-              <a:t>・下：</a:t>
-            </a:r>
-            <a:r>
-              <a:rPr lang="en-US" altLang="ja-JP" dirty="0"/>
-              <a:t>S </a:t>
-            </a:r>
-            <a:r>
-              <a:rPr lang="ja-JP" altLang="en-US" dirty="0"/>
-              <a:t>＆ 下スティック</a:t>
-            </a:r>
-            <a:endParaRPr lang="en-US" altLang="ja-JP" dirty="0"/>
-          </a:p>
-          <a:p>
-            <a:r>
-              <a:rPr kumimoji="1" lang="ja-JP" altLang="en-US" dirty="0"/>
-              <a:t>・左：</a:t>
-            </a:r>
-            <a:r>
-              <a:rPr kumimoji="1" lang="en-US" altLang="ja-JP" dirty="0"/>
-              <a:t>A &amp; </a:t>
-            </a:r>
-            <a:r>
-              <a:rPr kumimoji="1" lang="ja-JP" altLang="en-US" dirty="0"/>
-              <a:t>左スティック</a:t>
-            </a:r>
-            <a:endParaRPr kumimoji="1" lang="en-US" altLang="ja-JP" dirty="0"/>
-          </a:p>
-          <a:p>
-            <a:r>
-              <a:rPr lang="ja-JP" altLang="en-US" dirty="0"/>
-              <a:t>・右：</a:t>
-            </a:r>
-            <a:r>
-              <a:rPr lang="en-US" altLang="ja-JP" dirty="0"/>
-              <a:t>D &amp; </a:t>
-            </a:r>
-            <a:r>
-              <a:rPr lang="ja-JP" altLang="en-US" dirty="0"/>
-              <a:t>右スティック</a:t>
-            </a:r>
-            <a:endParaRPr lang="en-US" altLang="ja-JP" dirty="0"/>
-          </a:p>
-          <a:p>
-            <a:r>
-              <a:rPr kumimoji="1" lang="ja-JP" altLang="en-US" dirty="0"/>
-              <a:t>・右パンチ：</a:t>
-            </a:r>
-            <a:r>
-              <a:rPr kumimoji="1" lang="en-US" altLang="ja-JP" dirty="0"/>
-              <a:t>U &amp; B</a:t>
-            </a:r>
-            <a:r>
-              <a:rPr kumimoji="1" lang="ja-JP" altLang="en-US" dirty="0"/>
+              <a:rPr lang="en-US" altLang="ja-JP" dirty="0">
+                <a:solidFill>
+                  <a:schemeClr val="bg1"/>
+                </a:solidFill>
+              </a:rPr>
+              <a:t>【</a:t>
+            </a:r>
+            <a:r>
+              <a:rPr lang="ja-JP" altLang="en-US" dirty="0">
+                <a:solidFill>
+                  <a:schemeClr val="bg1"/>
+                </a:solidFill>
+              </a:rPr>
+              <a:t>トレーニング専用コマンド</a:t>
+            </a:r>
+            <a:r>
+              <a:rPr lang="en-US" altLang="ja-JP" dirty="0">
+                <a:solidFill>
+                  <a:schemeClr val="bg1"/>
+                </a:solidFill>
+              </a:rPr>
+              <a:t>】</a:t>
+            </a:r>
+          </a:p>
+          <a:p>
+            <a:endParaRPr lang="en-US" altLang="ja-JP" dirty="0">
+              <a:solidFill>
+                <a:schemeClr val="bg1"/>
+              </a:solidFill>
+            </a:endParaRPr>
+          </a:p>
+          <a:p>
+            <a:r>
+              <a:rPr lang="ja-JP" altLang="en-US" dirty="0">
+                <a:solidFill>
+                  <a:schemeClr val="bg1"/>
+                </a:solidFill>
+              </a:rPr>
+              <a:t>・オプション：</a:t>
+            </a:r>
+            <a:r>
+              <a:rPr lang="en-US" altLang="ja-JP" dirty="0">
+                <a:solidFill>
+                  <a:schemeClr val="bg1"/>
+                </a:solidFill>
+              </a:rPr>
+              <a:t>Tab</a:t>
+            </a:r>
+            <a:r>
+              <a:rPr lang="ja-JP" altLang="en-US" dirty="0">
+                <a:solidFill>
+                  <a:schemeClr val="bg1"/>
+                </a:solidFill>
+              </a:rPr>
+              <a:t>キー </a:t>
+            </a:r>
+            <a:r>
+              <a:rPr lang="en-US" altLang="ja-JP" dirty="0">
+                <a:solidFill>
+                  <a:schemeClr val="bg1"/>
+                </a:solidFill>
+              </a:rPr>
+              <a:t>or </a:t>
+            </a:r>
+            <a:r>
+              <a:rPr lang="ja-JP" altLang="en-US" sz="1800" dirty="0">
+                <a:solidFill>
+                  <a:schemeClr val="bg1"/>
+                </a:solidFill>
+                <a:ea typeface="ＭＳ ゴシック" panose="020B0609070205080204" pitchFamily="49" charset="-128"/>
+              </a:rPr>
+              <a:t>≡</a:t>
+            </a:r>
+            <a:r>
+              <a:rPr lang="ja-JP" altLang="en-US" sz="1800" dirty="0">
+                <a:solidFill>
+                  <a:schemeClr val="bg1"/>
+                </a:solidFill>
+                <a:latin typeface="+mn-ea"/>
+              </a:rPr>
               <a:t>ボタン</a:t>
             </a:r>
-            <a:endParaRPr kumimoji="1" lang="en-US" altLang="ja-JP" dirty="0"/>
-          </a:p>
-          <a:p>
-            <a:r>
-              <a:rPr lang="ja-JP" altLang="en-US" dirty="0"/>
-              <a:t>・左パンチ：</a:t>
-            </a:r>
-            <a:r>
-              <a:rPr lang="en-US" altLang="ja-JP" dirty="0"/>
-              <a:t>I &amp; X</a:t>
-            </a:r>
-            <a:r>
-              <a:rPr lang="ja-JP" altLang="en-US" dirty="0"/>
+            <a:endParaRPr lang="en-US" altLang="ja-JP" sz="1800" dirty="0">
+              <a:solidFill>
+                <a:schemeClr val="bg1"/>
+              </a:solidFill>
+              <a:latin typeface="+mn-ea"/>
+            </a:endParaRPr>
+          </a:p>
+          <a:p>
+            <a:r>
+              <a:rPr lang="ja-JP" altLang="en-US" dirty="0">
+                <a:solidFill>
+                  <a:schemeClr val="bg1"/>
+                </a:solidFill>
+                <a:latin typeface="+mn-ea"/>
+              </a:rPr>
+              <a:t>・モード切替：</a:t>
+            </a:r>
+            <a:r>
+              <a:rPr lang="en-US" altLang="ja-JP" dirty="0">
+                <a:solidFill>
+                  <a:schemeClr val="bg1"/>
+                </a:solidFill>
+                <a:latin typeface="+mn-ea"/>
+              </a:rPr>
+              <a:t>Q</a:t>
+            </a:r>
+            <a:r>
+              <a:rPr lang="ja-JP" altLang="en-US" dirty="0">
+                <a:solidFill>
+                  <a:schemeClr val="bg1"/>
+                </a:solidFill>
+                <a:latin typeface="+mn-ea"/>
+              </a:rPr>
+              <a:t>キー </a:t>
+            </a:r>
+            <a:r>
+              <a:rPr lang="en-US" altLang="ja-JP" dirty="0">
+                <a:solidFill>
+                  <a:schemeClr val="bg1"/>
+                </a:solidFill>
+                <a:latin typeface="+mn-ea"/>
+              </a:rPr>
+              <a:t>or Y</a:t>
+            </a:r>
+            <a:r>
+              <a:rPr lang="ja-JP" altLang="en-US" dirty="0">
+                <a:solidFill>
+                  <a:schemeClr val="bg1"/>
+                </a:solidFill>
+                <a:latin typeface="+mn-ea"/>
+              </a:rPr>
               <a:t>ボタン</a:t>
             </a:r>
-            <a:endParaRPr lang="en-US" altLang="ja-JP" dirty="0"/>
-          </a:p>
-          <a:p>
-            <a:r>
-              <a:rPr kumimoji="1" lang="ja-JP" altLang="en-US" dirty="0"/>
-              <a:t>・上右パンチ：</a:t>
-            </a:r>
-            <a:r>
-              <a:rPr lang="en-US" altLang="ja-JP" dirty="0"/>
-              <a:t>O &amp; Y</a:t>
-            </a:r>
-            <a:r>
-              <a:rPr lang="ja-JP" altLang="en-US" dirty="0"/>
-              <a:t>ボタン</a:t>
-            </a:r>
-            <a:endParaRPr kumimoji="1" lang="ja-JP" altLang="en-US" dirty="0"/>
-          </a:p>
-          <a:p>
-            <a:r>
-              <a:rPr lang="ja-JP" altLang="en-US" dirty="0"/>
-              <a:t>・強い攻撃：</a:t>
-            </a:r>
-            <a:r>
-              <a:rPr lang="en-US" altLang="ja-JP" dirty="0"/>
-              <a:t>P &amp; A</a:t>
-            </a:r>
-            <a:r>
-              <a:rPr lang="ja-JP" altLang="en-US" dirty="0"/>
-              <a:t>ボタン</a:t>
-            </a:r>
-            <a:endParaRPr lang="en-US" altLang="ja-JP" dirty="0"/>
-          </a:p>
-          <a:p>
-            <a:r>
-              <a:rPr kumimoji="1" lang="ja-JP" altLang="en-US" dirty="0"/>
-              <a:t>・守り：</a:t>
-            </a:r>
-            <a:r>
-              <a:rPr kumimoji="1" lang="en-US" altLang="ja-JP" dirty="0"/>
-              <a:t>H &amp; L</a:t>
-            </a:r>
-            <a:r>
-              <a:rPr lang="ja-JP" altLang="en-US" dirty="0"/>
-              <a:t>か</a:t>
-            </a:r>
-            <a:r>
-              <a:rPr kumimoji="1" lang="en-US" altLang="ja-JP" dirty="0"/>
-              <a:t>R</a:t>
-            </a:r>
-            <a:r>
-              <a:rPr kumimoji="1" lang="ja-JP" altLang="en-US" dirty="0"/>
-              <a:t>ボタン</a:t>
-            </a:r>
-            <a:endParaRPr kumimoji="1" lang="en-US" altLang="ja-JP" dirty="0"/>
+            <a:endParaRPr lang="en-US" altLang="ja-JP" dirty="0">
+              <a:solidFill>
+                <a:schemeClr val="bg1"/>
+              </a:solidFill>
+              <a:latin typeface="+mn-ea"/>
+            </a:endParaRPr>
+          </a:p>
+        </p:txBody>
+      </p:sp>
+      <p:sp>
+        <p:nvSpPr>
+          <p:cNvPr id="12" name="テキスト ボックス 11">
+            <a:extLst>
+              <a:ext uri="{FF2B5EF4-FFF2-40B4-BE49-F238E27FC236}">
+                <a16:creationId xmlns:a16="http://schemas.microsoft.com/office/drawing/2014/main" id="{BB4B2347-92CB-42D1-80C5-9B9B8D8DF1D2}"/>
+              </a:ext>
+            </a:extLst>
+          </p:cNvPr>
+          <p:cNvSpPr txBox="1"/>
+          <p:nvPr/>
+        </p:nvSpPr>
+        <p:spPr>
+          <a:xfrm>
+            <a:off x="7241626" y="3142962"/>
+            <a:ext cx="4566745" cy="1754326"/>
+          </a:xfrm>
+          <a:prstGeom prst="rect">
+            <a:avLst/>
+          </a:prstGeom>
+          <a:noFill/>
+        </p:spPr>
+        <p:txBody>
+          <a:bodyPr wrap="square" rtlCol="0">
+            <a:spAutoFit/>
+          </a:bodyPr>
+          <a:lstStyle/>
+          <a:p>
+            <a:r>
+              <a:rPr lang="en-US" altLang="ja-JP" dirty="0">
+                <a:solidFill>
+                  <a:schemeClr val="bg1"/>
+                </a:solidFill>
+              </a:rPr>
+              <a:t>【</a:t>
+            </a:r>
+            <a:r>
+              <a:rPr lang="ja-JP" altLang="en-US" dirty="0">
+                <a:solidFill>
+                  <a:schemeClr val="bg1"/>
+                </a:solidFill>
+              </a:rPr>
+              <a:t>選択コマンド</a:t>
+            </a:r>
+            <a:r>
+              <a:rPr lang="en-US" altLang="ja-JP" dirty="0">
+                <a:solidFill>
+                  <a:schemeClr val="bg1"/>
+                </a:solidFill>
+              </a:rPr>
+              <a:t>】</a:t>
+            </a:r>
+          </a:p>
+          <a:p>
+            <a:endParaRPr lang="en-US" altLang="ja-JP" dirty="0">
+              <a:solidFill>
+                <a:schemeClr val="bg1"/>
+              </a:solidFill>
+            </a:endParaRPr>
+          </a:p>
+          <a:p>
+            <a:r>
+              <a:rPr lang="ja-JP" altLang="en-US" dirty="0">
+                <a:solidFill>
+                  <a:schemeClr val="bg1"/>
+                </a:solidFill>
+              </a:rPr>
+              <a:t>・</a:t>
+            </a:r>
+            <a:r>
+              <a:rPr lang="en-US" altLang="ja-JP" dirty="0">
+                <a:solidFill>
+                  <a:schemeClr val="bg1"/>
+                </a:solidFill>
+              </a:rPr>
+              <a:t>UI</a:t>
+            </a:r>
+            <a:r>
+              <a:rPr lang="ja-JP" altLang="en-US" dirty="0">
+                <a:solidFill>
+                  <a:schemeClr val="bg1"/>
+                </a:solidFill>
+              </a:rPr>
+              <a:t>の移動</a:t>
+            </a:r>
+            <a:r>
+              <a:rPr lang="en-US" altLang="ja-JP" dirty="0">
+                <a:solidFill>
+                  <a:schemeClr val="bg1"/>
+                </a:solidFill>
+              </a:rPr>
+              <a:t>	</a:t>
+            </a:r>
+            <a:r>
+              <a:rPr lang="ja-JP" altLang="en-US" dirty="0">
+                <a:solidFill>
+                  <a:schemeClr val="bg1"/>
+                </a:solidFill>
+              </a:rPr>
+              <a:t>：</a:t>
+            </a:r>
+            <a:r>
+              <a:rPr lang="en-US" altLang="ja-JP" dirty="0">
+                <a:solidFill>
+                  <a:schemeClr val="bg1"/>
+                </a:solidFill>
+              </a:rPr>
+              <a:t>[</a:t>
+            </a:r>
+            <a:r>
+              <a:rPr lang="ja-JP" altLang="en-US" dirty="0">
+                <a:solidFill>
+                  <a:schemeClr val="bg1"/>
+                </a:solidFill>
+              </a:rPr>
+              <a:t>↑</a:t>
+            </a:r>
+            <a:r>
+              <a:rPr lang="en-US" altLang="ja-JP" dirty="0">
+                <a:solidFill>
+                  <a:schemeClr val="bg1"/>
+                </a:solidFill>
+              </a:rPr>
+              <a:t>] [</a:t>
+            </a:r>
+            <a:r>
+              <a:rPr lang="ja-JP" altLang="en-US" dirty="0">
+                <a:solidFill>
+                  <a:schemeClr val="bg1"/>
+                </a:solidFill>
+              </a:rPr>
+              <a:t>↓</a:t>
+            </a:r>
+            <a:r>
+              <a:rPr lang="en-US" altLang="ja-JP" dirty="0">
+                <a:solidFill>
+                  <a:schemeClr val="bg1"/>
+                </a:solidFill>
+              </a:rPr>
+              <a:t>] [</a:t>
+            </a:r>
+            <a:r>
+              <a:rPr lang="ja-JP" altLang="en-US" dirty="0">
+                <a:solidFill>
+                  <a:schemeClr val="bg1"/>
+                </a:solidFill>
+              </a:rPr>
+              <a:t>←</a:t>
+            </a:r>
+            <a:r>
+              <a:rPr lang="en-US" altLang="ja-JP" dirty="0">
+                <a:solidFill>
+                  <a:schemeClr val="bg1"/>
+                </a:solidFill>
+              </a:rPr>
+              <a:t>][</a:t>
+            </a:r>
+            <a:r>
+              <a:rPr lang="ja-JP" altLang="en-US" dirty="0">
+                <a:solidFill>
+                  <a:schemeClr val="bg1"/>
+                </a:solidFill>
+              </a:rPr>
+              <a:t>→</a:t>
+            </a:r>
+            <a:r>
+              <a:rPr lang="en-US" altLang="ja-JP" dirty="0">
+                <a:solidFill>
+                  <a:schemeClr val="bg1"/>
+                </a:solidFill>
+              </a:rPr>
+              <a:t>]</a:t>
+            </a:r>
+            <a:endParaRPr lang="en-US" altLang="ja-JP" sz="1800" dirty="0">
+              <a:solidFill>
+                <a:schemeClr val="bg1"/>
+              </a:solidFill>
+              <a:latin typeface="+mn-ea"/>
+            </a:endParaRPr>
+          </a:p>
+          <a:p>
+            <a:r>
+              <a:rPr lang="ja-JP" altLang="en-US" dirty="0">
+                <a:solidFill>
+                  <a:schemeClr val="bg1"/>
+                </a:solidFill>
+                <a:latin typeface="+mn-ea"/>
+              </a:rPr>
+              <a:t>・決定＆解除</a:t>
+            </a:r>
+            <a:r>
+              <a:rPr lang="en-US" altLang="ja-JP" dirty="0">
+                <a:solidFill>
+                  <a:schemeClr val="bg1"/>
+                </a:solidFill>
+                <a:latin typeface="+mn-ea"/>
+              </a:rPr>
+              <a:t>	</a:t>
+            </a:r>
+            <a:r>
+              <a:rPr lang="ja-JP" altLang="en-US" dirty="0">
+                <a:solidFill>
+                  <a:schemeClr val="bg1"/>
+                </a:solidFill>
+                <a:latin typeface="+mn-ea"/>
+              </a:rPr>
+              <a:t>：</a:t>
+            </a:r>
+            <a:r>
+              <a:rPr lang="en-US" altLang="ja-JP" dirty="0">
+                <a:solidFill>
+                  <a:schemeClr val="bg1"/>
+                </a:solidFill>
+                <a:latin typeface="+mn-ea"/>
+              </a:rPr>
+              <a:t>Enter</a:t>
+            </a:r>
+            <a:r>
+              <a:rPr lang="ja-JP" altLang="en-US" dirty="0">
+                <a:solidFill>
+                  <a:schemeClr val="bg1"/>
+                </a:solidFill>
+                <a:latin typeface="+mn-ea"/>
+              </a:rPr>
+              <a:t>キー</a:t>
+            </a:r>
+            <a:endParaRPr lang="en-US" altLang="ja-JP" dirty="0">
+              <a:solidFill>
+                <a:schemeClr val="bg1"/>
+              </a:solidFill>
+              <a:latin typeface="+mn-ea"/>
+            </a:endParaRPr>
+          </a:p>
+          <a:p>
+            <a:r>
+              <a:rPr lang="ja-JP" altLang="en-US" dirty="0">
+                <a:solidFill>
+                  <a:schemeClr val="bg1"/>
+                </a:solidFill>
+                <a:latin typeface="+mn-ea"/>
+              </a:rPr>
+              <a:t>・タイトルに戻る：</a:t>
+            </a:r>
+            <a:r>
+              <a:rPr lang="en-US" altLang="ja-JP" dirty="0">
+                <a:solidFill>
+                  <a:schemeClr val="bg1"/>
+                </a:solidFill>
+                <a:latin typeface="+mn-ea"/>
+              </a:rPr>
+              <a:t>Tab</a:t>
+            </a:r>
+            <a:r>
+              <a:rPr lang="ja-JP" altLang="en-US" dirty="0">
+                <a:solidFill>
+                  <a:schemeClr val="bg1"/>
+                </a:solidFill>
+                <a:latin typeface="+mn-ea"/>
+              </a:rPr>
+              <a:t>キー</a:t>
+            </a:r>
+            <a:br>
+              <a:rPr lang="en-US" altLang="ja-JP" dirty="0">
+                <a:solidFill>
+                  <a:schemeClr val="bg1"/>
+                </a:solidFill>
+                <a:latin typeface="+mn-ea"/>
+              </a:rPr>
+            </a:br>
+            <a:r>
+              <a:rPr lang="ja-JP" altLang="en-US" dirty="0">
+                <a:solidFill>
+                  <a:schemeClr val="bg1"/>
+                </a:solidFill>
+                <a:latin typeface="+mn-ea"/>
+              </a:rPr>
+              <a:t>・ゲーム終了</a:t>
+            </a:r>
+            <a:r>
+              <a:rPr lang="en-US" altLang="ja-JP" dirty="0">
+                <a:solidFill>
+                  <a:schemeClr val="bg1"/>
+                </a:solidFill>
+                <a:latin typeface="+mn-ea"/>
+              </a:rPr>
+              <a:t>	</a:t>
+            </a:r>
+            <a:r>
+              <a:rPr lang="ja-JP" altLang="en-US" dirty="0">
+                <a:solidFill>
+                  <a:schemeClr val="bg1"/>
+                </a:solidFill>
+                <a:latin typeface="+mn-ea"/>
+              </a:rPr>
+              <a:t>：</a:t>
+            </a:r>
+            <a:r>
+              <a:rPr lang="en-US" altLang="ja-JP" dirty="0">
+                <a:solidFill>
+                  <a:schemeClr val="bg1"/>
+                </a:solidFill>
+                <a:latin typeface="+mn-ea"/>
+              </a:rPr>
+              <a:t>Esc</a:t>
+            </a:r>
+            <a:r>
+              <a:rPr lang="ja-JP" altLang="en-US" dirty="0">
+                <a:solidFill>
+                  <a:schemeClr val="bg1"/>
+                </a:solidFill>
+                <a:latin typeface="+mn-ea"/>
+              </a:rPr>
+              <a:t>キー</a:t>
+            </a:r>
+            <a:endParaRPr lang="en-US" altLang="ja-JP" dirty="0">
+              <a:solidFill>
+                <a:schemeClr val="bg1"/>
+              </a:solidFill>
+              <a:latin typeface="+mn-ea"/>
+            </a:endParaRPr>
           </a:p>
         </p:txBody>
       </p:sp>
@@ -4046,7 +6030,7 @@
 </p:sld>
 </file>
 
-<file path=ppt/slides/slide3.xml><?xml version="1.0" encoding="utf-8"?>
+<file path=ppt/slides/slide4.xml><?xml version="1.0" encoding="utf-8"?>
 <p:sld xmlns:a="http://schemas.openxmlformats.org/drawingml/2006/main" xmlns:r="http://schemas.openxmlformats.org/officeDocument/2006/relationships" xmlns:p="http://schemas.openxmlformats.org/presentationml/2006/main">
   <p:cSld>
     <p:spTree>
@@ -4771,7 +6755,7 @@
 </p:sld>
 </file>
 
-<file path=ppt/slides/slide4.xml><?xml version="1.0" encoding="utf-8"?>
+<file path=ppt/slides/slide5.xml><?xml version="1.0" encoding="utf-8"?>
 <p:sld xmlns:a="http://schemas.openxmlformats.org/drawingml/2006/main" xmlns:r="http://schemas.openxmlformats.org/officeDocument/2006/relationships" xmlns:p="http://schemas.openxmlformats.org/presentationml/2006/main">
   <p:cSld>
     <p:spTree>
@@ -4885,7 +6869,7 @@
 </p:sld>
 </file>
 
-<file path=ppt/slides/slide5.xml><?xml version="1.0" encoding="utf-8"?>
+<file path=ppt/slides/slide6.xml><?xml version="1.0" encoding="utf-8"?>
 <p:sld xmlns:a="http://schemas.openxmlformats.org/drawingml/2006/main" xmlns:r="http://schemas.openxmlformats.org/officeDocument/2006/relationships" xmlns:p="http://schemas.openxmlformats.org/presentationml/2006/main">
   <p:cSld>
     <p:spTree>
@@ -5188,7 +7172,7 @@
 </p:sld>
 </file>
 
-<file path=ppt/slides/slide6.xml><?xml version="1.0" encoding="utf-8"?>
+<file path=ppt/slides/slide7.xml><?xml version="1.0" encoding="utf-8"?>
 <p:sld xmlns:a="http://schemas.openxmlformats.org/drawingml/2006/main" xmlns:r="http://schemas.openxmlformats.org/officeDocument/2006/relationships" xmlns:p="http://schemas.openxmlformats.org/presentationml/2006/main">
   <p:cSld>
     <p:spTree>
@@ -5644,7 +7628,7 @@
 </p:sld>
 </file>
 
-<file path=ppt/slides/slide7.xml><?xml version="1.0" encoding="utf-8"?>
+<file path=ppt/slides/slide8.xml><?xml version="1.0" encoding="utf-8"?>
 <p:sld xmlns:a="http://schemas.openxmlformats.org/drawingml/2006/main" xmlns:r="http://schemas.openxmlformats.org/officeDocument/2006/relationships" xmlns:p="http://schemas.openxmlformats.org/presentationml/2006/main">
   <p:cSld>
     <p:spTree>

--- a/仕様書.pptx
+++ b/仕様書.pptx
@@ -8,11 +8,14 @@
     <p:sldId id="265" r:id="rId2"/>
     <p:sldId id="266" r:id="rId3"/>
     <p:sldId id="257" r:id="rId4"/>
-    <p:sldId id="258" r:id="rId5"/>
-    <p:sldId id="260" r:id="rId6"/>
-    <p:sldId id="261" r:id="rId7"/>
-    <p:sldId id="262" r:id="rId8"/>
-    <p:sldId id="263" r:id="rId9"/>
+    <p:sldId id="267" r:id="rId5"/>
+    <p:sldId id="268" r:id="rId6"/>
+    <p:sldId id="269" r:id="rId7"/>
+    <p:sldId id="258" r:id="rId8"/>
+    <p:sldId id="260" r:id="rId9"/>
+    <p:sldId id="261" r:id="rId10"/>
+    <p:sldId id="262" r:id="rId11"/>
+    <p:sldId id="263" r:id="rId12"/>
   </p:sldIdLst>
   <p:sldSz cx="12192000" cy="6858000"/>
   <p:notesSz cx="6858000" cy="9144000"/>
@@ -3766,7 +3769,7 @@
                   <a:schemeClr val="bg1"/>
                 </a:solidFill>
               </a:rPr>
-              <a:t>　　➣ジャンル</a:t>
+              <a:t>　　➣ ジャンル</a:t>
             </a:r>
             <a:r>
               <a:rPr kumimoji="1" lang="ja-JP" altLang="en-US" dirty="0">
@@ -3802,7 +3805,7 @@
                   <a:schemeClr val="bg1"/>
                 </a:solidFill>
               </a:rPr>
-              <a:t>　　➣プラットフォーム：</a:t>
+              <a:t>　　➣ プラットフォーム：</a:t>
             </a:r>
             <a:r>
               <a:rPr lang="en-US" altLang="ja-JP" dirty="0">
@@ -3826,7 +3829,7 @@
                   <a:schemeClr val="bg1"/>
                 </a:solidFill>
               </a:rPr>
-              <a:t>　　➣開発環境：</a:t>
+              <a:t>　　➣ 開発環境：</a:t>
             </a:r>
             <a:r>
               <a:rPr lang="en-US" altLang="ja-JP" dirty="0">
@@ -3866,7 +3869,7 @@
                   <a:schemeClr val="bg1"/>
                 </a:solidFill>
               </a:rPr>
-              <a:t>　　</a:t>
+              <a:t>　　 </a:t>
             </a:r>
             <a:r>
               <a:rPr lang="en-US" altLang="ja-JP" dirty="0">
@@ -3922,10 +3925,10 @@
                   <a:schemeClr val="bg1"/>
                 </a:solidFill>
               </a:rPr>
-              <a:t>　　</a:t>
-            </a:r>
-            <a:r>
-              <a:rPr lang="en-US" altLang="ja-JP" dirty="0">
+              <a:t>　　 </a:t>
+            </a:r>
+            <a:r>
+              <a:rPr lang="en-US" altLang="ja-JP" dirty="0" err="1">
                 <a:solidFill>
                   <a:schemeClr val="bg1"/>
                 </a:solidFill>
@@ -3978,7 +3981,7 @@
                   <a:schemeClr val="bg1"/>
                 </a:solidFill>
               </a:rPr>
-              <a:t>　　➣使用言語：</a:t>
+              <a:t>　　➣ 使用言語：</a:t>
             </a:r>
             <a:r>
               <a:rPr kumimoji="1" lang="en-US" altLang="ja-JP" dirty="0">
@@ -4002,7 +4005,7 @@
                   <a:schemeClr val="bg1"/>
                 </a:solidFill>
               </a:rPr>
-              <a:t>　　➣制作期間：</a:t>
+              <a:t>　　➣ 制作期間：</a:t>
             </a:r>
             <a:r>
               <a:rPr kumimoji="1" lang="en-US" altLang="ja-JP" dirty="0">
@@ -4026,7 +4029,7 @@
                   <a:schemeClr val="bg1"/>
                 </a:solidFill>
               </a:rPr>
-              <a:t>　　➣制作人数：</a:t>
+              <a:t>　　➣ 制作人数：</a:t>
             </a:r>
             <a:r>
               <a:rPr kumimoji="1" lang="en-US" altLang="ja-JP" dirty="0">
@@ -4128,6 +4131,671 @@
     <p:extLst>
       <p:ext uri="{BB962C8B-B14F-4D97-AF65-F5344CB8AC3E}">
         <p14:creationId xmlns:p14="http://schemas.microsoft.com/office/powerpoint/2010/main" val="1581021606"/>
+      </p:ext>
+    </p:extLst>
+  </p:cSld>
+  <p:clrMapOvr>
+    <a:masterClrMapping/>
+  </p:clrMapOvr>
+</p:sld>
+</file>
+
+<file path=ppt/slides/slide10.xml><?xml version="1.0" encoding="utf-8"?>
+<p:sld xmlns:a="http://schemas.openxmlformats.org/drawingml/2006/main" xmlns:r="http://schemas.openxmlformats.org/officeDocument/2006/relationships" xmlns:p="http://schemas.openxmlformats.org/presentationml/2006/main">
+  <p:cSld>
+    <p:spTree>
+      <p:nvGrpSpPr>
+        <p:cNvPr id="1" name=""/>
+        <p:cNvGrpSpPr/>
+        <p:nvPr/>
+      </p:nvGrpSpPr>
+      <p:grpSpPr>
+        <a:xfrm>
+          <a:off x="0" y="0"/>
+          <a:ext cx="0" cy="0"/>
+          <a:chOff x="0" y="0"/>
+          <a:chExt cx="0" cy="0"/>
+        </a:xfrm>
+      </p:grpSpPr>
+      <p:sp>
+        <p:nvSpPr>
+          <p:cNvPr id="2" name="タイトル 1">
+            <a:extLst>
+              <a:ext uri="{FF2B5EF4-FFF2-40B4-BE49-F238E27FC236}">
+                <a16:creationId xmlns:a16="http://schemas.microsoft.com/office/drawing/2014/main" id="{EA37FBEC-4F81-4EF0-A5ED-18F8031A9E87}"/>
+              </a:ext>
+            </a:extLst>
+          </p:cNvPr>
+          <p:cNvSpPr>
+            <a:spLocks noGrp="1"/>
+          </p:cNvSpPr>
+          <p:nvPr>
+            <p:ph type="title"/>
+          </p:nvPr>
+        </p:nvSpPr>
+        <p:spPr>
+          <a:xfrm>
+            <a:off x="133350" y="99218"/>
+            <a:ext cx="10515600" cy="1325563"/>
+          </a:xfrm>
+        </p:spPr>
+        <p:txBody>
+          <a:bodyPr/>
+          <a:lstStyle/>
+          <a:p>
+            <a:r>
+              <a:rPr kumimoji="1" lang="ja-JP" altLang="en-US" dirty="0"/>
+              <a:t>ゲーム</a:t>
+            </a:r>
+          </a:p>
+        </p:txBody>
+      </p:sp>
+      <p:sp>
+        <p:nvSpPr>
+          <p:cNvPr id="3" name="正方形/長方形 2">
+            <a:extLst>
+              <a:ext uri="{FF2B5EF4-FFF2-40B4-BE49-F238E27FC236}">
+                <a16:creationId xmlns:a16="http://schemas.microsoft.com/office/drawing/2014/main" id="{853D63FD-E35C-4B5D-AB3D-EF0692161EC6}"/>
+              </a:ext>
+            </a:extLst>
+          </p:cNvPr>
+          <p:cNvSpPr/>
+          <p:nvPr/>
+        </p:nvSpPr>
+        <p:spPr>
+          <a:xfrm>
+            <a:off x="3057525" y="2466975"/>
+            <a:ext cx="2190750" cy="3629025"/>
+          </a:xfrm>
+          <a:prstGeom prst="rect">
+            <a:avLst/>
+          </a:prstGeom>
+        </p:spPr>
+        <p:style>
+          <a:lnRef idx="2">
+            <a:schemeClr val="dk1">
+              <a:shade val="50000"/>
+            </a:schemeClr>
+          </a:lnRef>
+          <a:fillRef idx="1">
+            <a:schemeClr val="dk1"/>
+          </a:fillRef>
+          <a:effectRef idx="0">
+            <a:schemeClr val="dk1"/>
+          </a:effectRef>
+          <a:fontRef idx="minor">
+            <a:schemeClr val="lt1"/>
+          </a:fontRef>
+        </p:style>
+        <p:txBody>
+          <a:bodyPr rtlCol="0" anchor="ctr"/>
+          <a:lstStyle/>
+          <a:p>
+            <a:pPr algn="ctr"/>
+            <a:r>
+              <a:rPr kumimoji="1" lang="ja-JP" altLang="en-US" dirty="0"/>
+              <a:t>キャラ</a:t>
+            </a:r>
+          </a:p>
+        </p:txBody>
+      </p:sp>
+      <p:sp>
+        <p:nvSpPr>
+          <p:cNvPr id="4" name="正方形/長方形 3">
+            <a:extLst>
+              <a:ext uri="{FF2B5EF4-FFF2-40B4-BE49-F238E27FC236}">
+                <a16:creationId xmlns:a16="http://schemas.microsoft.com/office/drawing/2014/main" id="{D28347EA-C43E-4578-84C7-23BF7E5D5099}"/>
+              </a:ext>
+            </a:extLst>
+          </p:cNvPr>
+          <p:cNvSpPr/>
+          <p:nvPr/>
+        </p:nvSpPr>
+        <p:spPr>
+          <a:xfrm>
+            <a:off x="7496175" y="2466975"/>
+            <a:ext cx="2190750" cy="3629025"/>
+          </a:xfrm>
+          <a:prstGeom prst="rect">
+            <a:avLst/>
+          </a:prstGeom>
+        </p:spPr>
+        <p:style>
+          <a:lnRef idx="2">
+            <a:schemeClr val="dk1">
+              <a:shade val="50000"/>
+            </a:schemeClr>
+          </a:lnRef>
+          <a:fillRef idx="1">
+            <a:schemeClr val="dk1"/>
+          </a:fillRef>
+          <a:effectRef idx="0">
+            <a:schemeClr val="dk1"/>
+          </a:effectRef>
+          <a:fontRef idx="minor">
+            <a:schemeClr val="lt1"/>
+          </a:fontRef>
+        </p:style>
+        <p:txBody>
+          <a:bodyPr rtlCol="0" anchor="ctr"/>
+          <a:lstStyle/>
+          <a:p>
+            <a:pPr algn="ctr"/>
+            <a:r>
+              <a:rPr kumimoji="1" lang="ja-JP" altLang="en-US" dirty="0"/>
+              <a:t>キャラ</a:t>
+            </a:r>
+          </a:p>
+        </p:txBody>
+      </p:sp>
+      <p:sp>
+        <p:nvSpPr>
+          <p:cNvPr id="5" name="正方形/長方形 4">
+            <a:extLst>
+              <a:ext uri="{FF2B5EF4-FFF2-40B4-BE49-F238E27FC236}">
+                <a16:creationId xmlns:a16="http://schemas.microsoft.com/office/drawing/2014/main" id="{1ABF6A07-DE58-4CC5-AC3B-7F354BDCC33C}"/>
+              </a:ext>
+            </a:extLst>
+          </p:cNvPr>
+          <p:cNvSpPr/>
+          <p:nvPr/>
+        </p:nvSpPr>
+        <p:spPr>
+          <a:xfrm>
+            <a:off x="1304925" y="1200150"/>
+            <a:ext cx="3943350" cy="533400"/>
+          </a:xfrm>
+          <a:prstGeom prst="rect">
+            <a:avLst/>
+          </a:prstGeom>
+          <a:solidFill>
+            <a:srgbClr val="FF0000"/>
+          </a:solidFill>
+        </p:spPr>
+        <p:style>
+          <a:lnRef idx="2">
+            <a:schemeClr val="accent1">
+              <a:shade val="50000"/>
+            </a:schemeClr>
+          </a:lnRef>
+          <a:fillRef idx="1">
+            <a:schemeClr val="accent1"/>
+          </a:fillRef>
+          <a:effectRef idx="0">
+            <a:schemeClr val="accent1"/>
+          </a:effectRef>
+          <a:fontRef idx="minor">
+            <a:schemeClr val="lt1"/>
+          </a:fontRef>
+        </p:style>
+        <p:txBody>
+          <a:bodyPr rtlCol="0" anchor="ctr"/>
+          <a:lstStyle/>
+          <a:p>
+            <a:pPr algn="ctr"/>
+            <a:r>
+              <a:rPr kumimoji="1" lang="en-US" altLang="ja-JP" dirty="0"/>
+              <a:t>HP</a:t>
+            </a:r>
+            <a:endParaRPr kumimoji="1" lang="ja-JP" altLang="en-US" dirty="0"/>
+          </a:p>
+        </p:txBody>
+      </p:sp>
+      <p:sp>
+        <p:nvSpPr>
+          <p:cNvPr id="6" name="正方形/長方形 5">
+            <a:extLst>
+              <a:ext uri="{FF2B5EF4-FFF2-40B4-BE49-F238E27FC236}">
+                <a16:creationId xmlns:a16="http://schemas.microsoft.com/office/drawing/2014/main" id="{AA01EA96-CBEF-4F4C-8F5E-A136E6E4F4F4}"/>
+              </a:ext>
+            </a:extLst>
+          </p:cNvPr>
+          <p:cNvSpPr/>
+          <p:nvPr/>
+        </p:nvSpPr>
+        <p:spPr>
+          <a:xfrm>
+            <a:off x="7496175" y="1200150"/>
+            <a:ext cx="3943350" cy="533400"/>
+          </a:xfrm>
+          <a:prstGeom prst="rect">
+            <a:avLst/>
+          </a:prstGeom>
+          <a:solidFill>
+            <a:srgbClr val="0070C0"/>
+          </a:solidFill>
+        </p:spPr>
+        <p:style>
+          <a:lnRef idx="2">
+            <a:schemeClr val="accent1">
+              <a:shade val="50000"/>
+            </a:schemeClr>
+          </a:lnRef>
+          <a:fillRef idx="1">
+            <a:schemeClr val="accent1"/>
+          </a:fillRef>
+          <a:effectRef idx="0">
+            <a:schemeClr val="accent1"/>
+          </a:effectRef>
+          <a:fontRef idx="minor">
+            <a:schemeClr val="lt1"/>
+          </a:fontRef>
+        </p:style>
+        <p:txBody>
+          <a:bodyPr rtlCol="0" anchor="ctr"/>
+          <a:lstStyle/>
+          <a:p>
+            <a:pPr algn="ctr"/>
+            <a:r>
+              <a:rPr kumimoji="1" lang="en-US" altLang="ja-JP" dirty="0"/>
+              <a:t>HP</a:t>
+            </a:r>
+            <a:endParaRPr kumimoji="1" lang="ja-JP" altLang="en-US" dirty="0"/>
+          </a:p>
+        </p:txBody>
+      </p:sp>
+      <p:sp>
+        <p:nvSpPr>
+          <p:cNvPr id="7" name="正方形/長方形 6">
+            <a:extLst>
+              <a:ext uri="{FF2B5EF4-FFF2-40B4-BE49-F238E27FC236}">
+                <a16:creationId xmlns:a16="http://schemas.microsoft.com/office/drawing/2014/main" id="{E2406FAC-CD78-4DF3-94A2-1814B260B7AF}"/>
+              </a:ext>
+            </a:extLst>
+          </p:cNvPr>
+          <p:cNvSpPr/>
+          <p:nvPr/>
+        </p:nvSpPr>
+        <p:spPr>
+          <a:xfrm>
+            <a:off x="350192" y="2552700"/>
+            <a:ext cx="952500" cy="3086100"/>
+          </a:xfrm>
+          <a:prstGeom prst="rect">
+            <a:avLst/>
+          </a:prstGeom>
+          <a:solidFill>
+            <a:schemeClr val="bg1"/>
+          </a:solidFill>
+          <a:ln>
+            <a:solidFill>
+              <a:schemeClr val="tx1"/>
+            </a:solidFill>
+          </a:ln>
+        </p:spPr>
+        <p:style>
+          <a:lnRef idx="2">
+            <a:schemeClr val="accent1">
+              <a:shade val="50000"/>
+            </a:schemeClr>
+          </a:lnRef>
+          <a:fillRef idx="1">
+            <a:schemeClr val="accent1"/>
+          </a:fillRef>
+          <a:effectRef idx="0">
+            <a:schemeClr val="accent1"/>
+          </a:effectRef>
+          <a:fontRef idx="minor">
+            <a:schemeClr val="lt1"/>
+          </a:fontRef>
+        </p:style>
+        <p:txBody>
+          <a:bodyPr rtlCol="0" anchor="ctr"/>
+          <a:lstStyle/>
+          <a:p>
+            <a:pPr algn="ctr"/>
+            <a:endParaRPr kumimoji="1" lang="ja-JP" altLang="en-US"/>
+          </a:p>
+        </p:txBody>
+      </p:sp>
+      <p:sp>
+        <p:nvSpPr>
+          <p:cNvPr id="8" name="テキスト ボックス 7">
+            <a:extLst>
+              <a:ext uri="{FF2B5EF4-FFF2-40B4-BE49-F238E27FC236}">
+                <a16:creationId xmlns:a16="http://schemas.microsoft.com/office/drawing/2014/main" id="{A2821839-6557-456C-8CF1-D4D4053DF904}"/>
+              </a:ext>
+            </a:extLst>
+          </p:cNvPr>
+          <p:cNvSpPr txBox="1"/>
+          <p:nvPr/>
+        </p:nvSpPr>
+        <p:spPr>
+          <a:xfrm>
+            <a:off x="595609" y="3333750"/>
+            <a:ext cx="461665" cy="1333500"/>
+          </a:xfrm>
+          <a:prstGeom prst="rect">
+            <a:avLst/>
+          </a:prstGeom>
+          <a:noFill/>
+        </p:spPr>
+        <p:txBody>
+          <a:bodyPr vert="eaVert" wrap="square" rtlCol="0">
+            <a:spAutoFit/>
+          </a:bodyPr>
+          <a:lstStyle/>
+          <a:p>
+            <a:r>
+              <a:rPr kumimoji="1" lang="ja-JP" altLang="en-US" dirty="0"/>
+              <a:t>コマンド</a:t>
+            </a:r>
+          </a:p>
+        </p:txBody>
+      </p:sp>
+      <p:sp>
+        <p:nvSpPr>
+          <p:cNvPr id="10" name="正方形/長方形 9">
+            <a:extLst>
+              <a:ext uri="{FF2B5EF4-FFF2-40B4-BE49-F238E27FC236}">
+                <a16:creationId xmlns:a16="http://schemas.microsoft.com/office/drawing/2014/main" id="{A1F64DE1-E8C7-4647-BE6C-2AC178C7824B}"/>
+              </a:ext>
+            </a:extLst>
+          </p:cNvPr>
+          <p:cNvSpPr/>
+          <p:nvPr/>
+        </p:nvSpPr>
+        <p:spPr>
+          <a:xfrm>
+            <a:off x="10808642" y="2552700"/>
+            <a:ext cx="952500" cy="3086100"/>
+          </a:xfrm>
+          <a:prstGeom prst="rect">
+            <a:avLst/>
+          </a:prstGeom>
+          <a:solidFill>
+            <a:schemeClr val="bg1"/>
+          </a:solidFill>
+          <a:ln>
+            <a:solidFill>
+              <a:schemeClr val="tx1"/>
+            </a:solidFill>
+          </a:ln>
+        </p:spPr>
+        <p:style>
+          <a:lnRef idx="2">
+            <a:schemeClr val="accent1">
+              <a:shade val="50000"/>
+            </a:schemeClr>
+          </a:lnRef>
+          <a:fillRef idx="1">
+            <a:schemeClr val="accent1"/>
+          </a:fillRef>
+          <a:effectRef idx="0">
+            <a:schemeClr val="accent1"/>
+          </a:effectRef>
+          <a:fontRef idx="minor">
+            <a:schemeClr val="lt1"/>
+          </a:fontRef>
+        </p:style>
+        <p:txBody>
+          <a:bodyPr rtlCol="0" anchor="ctr"/>
+          <a:lstStyle/>
+          <a:p>
+            <a:pPr algn="ctr"/>
+            <a:r>
+              <a:rPr kumimoji="1" lang="ja-JP" altLang="en-US" dirty="0"/>
+              <a:t>コマンド</a:t>
+            </a:r>
+          </a:p>
+          <a:p>
+            <a:pPr algn="ctr"/>
+            <a:endParaRPr kumimoji="1" lang="ja-JP" altLang="en-US" dirty="0">
+              <a:solidFill>
+                <a:schemeClr val="tx1"/>
+              </a:solidFill>
+            </a:endParaRPr>
+          </a:p>
+        </p:txBody>
+      </p:sp>
+      <p:sp>
+        <p:nvSpPr>
+          <p:cNvPr id="11" name="テキスト ボックス 10">
+            <a:extLst>
+              <a:ext uri="{FF2B5EF4-FFF2-40B4-BE49-F238E27FC236}">
+                <a16:creationId xmlns:a16="http://schemas.microsoft.com/office/drawing/2014/main" id="{567D1BD1-6E30-4B1E-A95B-FE13F697B2FE}"/>
+              </a:ext>
+            </a:extLst>
+          </p:cNvPr>
+          <p:cNvSpPr txBox="1"/>
+          <p:nvPr/>
+        </p:nvSpPr>
+        <p:spPr>
+          <a:xfrm>
+            <a:off x="11054059" y="3333750"/>
+            <a:ext cx="461665" cy="1247775"/>
+          </a:xfrm>
+          <a:prstGeom prst="rect">
+            <a:avLst/>
+          </a:prstGeom>
+          <a:noFill/>
+        </p:spPr>
+        <p:txBody>
+          <a:bodyPr vert="eaVert" wrap="square" rtlCol="0">
+            <a:spAutoFit/>
+          </a:bodyPr>
+          <a:lstStyle/>
+          <a:p>
+            <a:r>
+              <a:rPr kumimoji="1" lang="ja-JP" altLang="en-US" dirty="0"/>
+              <a:t>コマンド</a:t>
+            </a:r>
+          </a:p>
+        </p:txBody>
+      </p:sp>
+    </p:spTree>
+    <p:extLst>
+      <p:ext uri="{BB962C8B-B14F-4D97-AF65-F5344CB8AC3E}">
+        <p14:creationId xmlns:p14="http://schemas.microsoft.com/office/powerpoint/2010/main" val="3460234443"/>
+      </p:ext>
+    </p:extLst>
+  </p:cSld>
+  <p:clrMapOvr>
+    <a:masterClrMapping/>
+  </p:clrMapOvr>
+</p:sld>
+</file>
+
+<file path=ppt/slides/slide11.xml><?xml version="1.0" encoding="utf-8"?>
+<p:sld xmlns:a="http://schemas.openxmlformats.org/drawingml/2006/main" xmlns:r="http://schemas.openxmlformats.org/officeDocument/2006/relationships" xmlns:p="http://schemas.openxmlformats.org/presentationml/2006/main">
+  <p:cSld>
+    <p:spTree>
+      <p:nvGrpSpPr>
+        <p:cNvPr id="1" name=""/>
+        <p:cNvGrpSpPr/>
+        <p:nvPr/>
+      </p:nvGrpSpPr>
+      <p:grpSpPr>
+        <a:xfrm>
+          <a:off x="0" y="0"/>
+          <a:ext cx="0" cy="0"/>
+          <a:chOff x="0" y="0"/>
+          <a:chExt cx="0" cy="0"/>
+        </a:xfrm>
+      </p:grpSpPr>
+      <p:sp>
+        <p:nvSpPr>
+          <p:cNvPr id="2" name="タイトル 1">
+            <a:extLst>
+              <a:ext uri="{FF2B5EF4-FFF2-40B4-BE49-F238E27FC236}">
+                <a16:creationId xmlns:a16="http://schemas.microsoft.com/office/drawing/2014/main" id="{56642868-DB41-4B4D-BD90-A198EA1FB09A}"/>
+              </a:ext>
+            </a:extLst>
+          </p:cNvPr>
+          <p:cNvSpPr>
+            <a:spLocks noGrp="1"/>
+          </p:cNvSpPr>
+          <p:nvPr>
+            <p:ph type="title"/>
+          </p:nvPr>
+        </p:nvSpPr>
+        <p:spPr/>
+        <p:txBody>
+          <a:bodyPr/>
+          <a:lstStyle/>
+          <a:p>
+            <a:r>
+              <a:rPr kumimoji="1" lang="ja-JP" altLang="en-US" dirty="0"/>
+              <a:t>リトライ</a:t>
+            </a:r>
+          </a:p>
+        </p:txBody>
+      </p:sp>
+      <p:sp>
+        <p:nvSpPr>
+          <p:cNvPr id="3" name="正方形/長方形 2">
+            <a:extLst>
+              <a:ext uri="{FF2B5EF4-FFF2-40B4-BE49-F238E27FC236}">
+                <a16:creationId xmlns:a16="http://schemas.microsoft.com/office/drawing/2014/main" id="{F5F2AF6D-07C9-4467-8E0F-2AFA31BC2151}"/>
+              </a:ext>
+            </a:extLst>
+          </p:cNvPr>
+          <p:cNvSpPr/>
+          <p:nvPr/>
+        </p:nvSpPr>
+        <p:spPr>
+          <a:xfrm>
+            <a:off x="4567234" y="5214937"/>
+            <a:ext cx="3057525" cy="762000"/>
+          </a:xfrm>
+          <a:prstGeom prst="rect">
+            <a:avLst/>
+          </a:prstGeom>
+        </p:spPr>
+        <p:style>
+          <a:lnRef idx="2">
+            <a:schemeClr val="dk1">
+              <a:shade val="50000"/>
+            </a:schemeClr>
+          </a:lnRef>
+          <a:fillRef idx="1">
+            <a:schemeClr val="dk1"/>
+          </a:fillRef>
+          <a:effectRef idx="0">
+            <a:schemeClr val="dk1"/>
+          </a:effectRef>
+          <a:fontRef idx="minor">
+            <a:schemeClr val="lt1"/>
+          </a:fontRef>
+        </p:style>
+        <p:txBody>
+          <a:bodyPr rtlCol="0" anchor="ctr"/>
+          <a:lstStyle/>
+          <a:p>
+            <a:pPr algn="ctr"/>
+            <a:r>
+              <a:rPr kumimoji="1" lang="ja-JP" altLang="en-US" dirty="0"/>
+              <a:t>タイトルへ</a:t>
+            </a:r>
+          </a:p>
+        </p:txBody>
+      </p:sp>
+      <p:sp>
+        <p:nvSpPr>
+          <p:cNvPr id="4" name="正方形/長方形 3">
+            <a:extLst>
+              <a:ext uri="{FF2B5EF4-FFF2-40B4-BE49-F238E27FC236}">
+                <a16:creationId xmlns:a16="http://schemas.microsoft.com/office/drawing/2014/main" id="{41FEF113-E625-4C2C-9741-3F8F1803F934}"/>
+              </a:ext>
+            </a:extLst>
+          </p:cNvPr>
+          <p:cNvSpPr/>
+          <p:nvPr/>
+        </p:nvSpPr>
+        <p:spPr>
+          <a:xfrm>
+            <a:off x="4567234" y="3745706"/>
+            <a:ext cx="3057525" cy="762000"/>
+          </a:xfrm>
+          <a:prstGeom prst="rect">
+            <a:avLst/>
+          </a:prstGeom>
+        </p:spPr>
+        <p:style>
+          <a:lnRef idx="2">
+            <a:schemeClr val="dk1">
+              <a:shade val="50000"/>
+            </a:schemeClr>
+          </a:lnRef>
+          <a:fillRef idx="1">
+            <a:schemeClr val="dk1"/>
+          </a:fillRef>
+          <a:effectRef idx="0">
+            <a:schemeClr val="dk1"/>
+          </a:effectRef>
+          <a:fontRef idx="minor">
+            <a:schemeClr val="lt1"/>
+          </a:fontRef>
+        </p:style>
+        <p:txBody>
+          <a:bodyPr rtlCol="0" anchor="ctr"/>
+          <a:lstStyle/>
+          <a:p>
+            <a:pPr algn="ctr"/>
+            <a:r>
+              <a:rPr lang="ja-JP" altLang="en-US" dirty="0"/>
+              <a:t>セレクト</a:t>
+            </a:r>
+            <a:r>
+              <a:rPr kumimoji="1" lang="ja-JP" altLang="en-US" dirty="0"/>
+              <a:t>へ</a:t>
+            </a:r>
+          </a:p>
+        </p:txBody>
+      </p:sp>
+      <p:sp>
+        <p:nvSpPr>
+          <p:cNvPr id="5" name="正方形/長方形 4">
+            <a:extLst>
+              <a:ext uri="{FF2B5EF4-FFF2-40B4-BE49-F238E27FC236}">
+                <a16:creationId xmlns:a16="http://schemas.microsoft.com/office/drawing/2014/main" id="{917875AE-1639-4E08-8B8D-36D118830F09}"/>
+              </a:ext>
+            </a:extLst>
+          </p:cNvPr>
+          <p:cNvSpPr/>
+          <p:nvPr/>
+        </p:nvSpPr>
+        <p:spPr>
+          <a:xfrm>
+            <a:off x="4567234" y="2276475"/>
+            <a:ext cx="3057525" cy="762000"/>
+          </a:xfrm>
+          <a:prstGeom prst="rect">
+            <a:avLst/>
+          </a:prstGeom>
+        </p:spPr>
+        <p:style>
+          <a:lnRef idx="2">
+            <a:schemeClr val="dk1">
+              <a:shade val="50000"/>
+            </a:schemeClr>
+          </a:lnRef>
+          <a:fillRef idx="1">
+            <a:schemeClr val="dk1"/>
+          </a:fillRef>
+          <a:effectRef idx="0">
+            <a:schemeClr val="dk1"/>
+          </a:effectRef>
+          <a:fontRef idx="minor">
+            <a:schemeClr val="lt1"/>
+          </a:fontRef>
+        </p:style>
+        <p:txBody>
+          <a:bodyPr rtlCol="0" anchor="ctr"/>
+          <a:lstStyle/>
+          <a:p>
+            <a:pPr algn="ctr"/>
+            <a:r>
+              <a:rPr kumimoji="1" lang="ja-JP" altLang="en-US" dirty="0"/>
+              <a:t>再挑戦</a:t>
+            </a:r>
+          </a:p>
+        </p:txBody>
+      </p:sp>
+    </p:spTree>
+    <p:extLst>
+      <p:ext uri="{BB962C8B-B14F-4D97-AF65-F5344CB8AC3E}">
+        <p14:creationId xmlns:p14="http://schemas.microsoft.com/office/powerpoint/2010/main" val="2166365457"/>
       </p:ext>
     </p:extLst>
   </p:cSld>
@@ -4748,14 +5416,481 @@
         </p:blipFill>
         <p:spPr>
           <a:xfrm>
-            <a:off x="0" y="0"/>
-            <a:ext cx="12191999" cy="6858000"/>
+            <a:off x="0" y="-30455"/>
+            <a:ext cx="12246141" cy="6888455"/>
           </a:xfrm>
           <a:prstGeom prst="rect">
             <a:avLst/>
           </a:prstGeom>
         </p:spPr>
       </p:pic>
+      <p:sp>
+        <p:nvSpPr>
+          <p:cNvPr id="10" name="テキスト ボックス 9">
+            <a:extLst>
+              <a:ext uri="{FF2B5EF4-FFF2-40B4-BE49-F238E27FC236}">
+                <a16:creationId xmlns:a16="http://schemas.microsoft.com/office/drawing/2014/main" id="{E0EE238F-FB2D-4A9B-BAF0-5E250B245B05}"/>
+              </a:ext>
+            </a:extLst>
+          </p:cNvPr>
+          <p:cNvSpPr txBox="1"/>
+          <p:nvPr/>
+        </p:nvSpPr>
+        <p:spPr>
+          <a:xfrm>
+            <a:off x="971860" y="1720840"/>
+            <a:ext cx="5914076" cy="3416320"/>
+          </a:xfrm>
+          <a:prstGeom prst="rect">
+            <a:avLst/>
+          </a:prstGeom>
+          <a:noFill/>
+        </p:spPr>
+        <p:txBody>
+          <a:bodyPr wrap="square" rtlCol="0">
+            <a:spAutoFit/>
+          </a:bodyPr>
+          <a:lstStyle/>
+          <a:p>
+            <a:r>
+              <a:rPr lang="en-US" altLang="ja-JP" dirty="0">
+                <a:solidFill>
+                  <a:schemeClr val="bg1"/>
+                </a:solidFill>
+              </a:rPr>
+              <a:t>【</a:t>
+            </a:r>
+            <a:r>
+              <a:rPr lang="ja-JP" altLang="en-US" dirty="0">
+                <a:solidFill>
+                  <a:schemeClr val="bg1"/>
+                </a:solidFill>
+              </a:rPr>
+              <a:t>キーボードコマンド</a:t>
+            </a:r>
+            <a:r>
+              <a:rPr lang="en-US" altLang="ja-JP" dirty="0">
+                <a:solidFill>
+                  <a:schemeClr val="bg1"/>
+                </a:solidFill>
+              </a:rPr>
+              <a:t>】</a:t>
+            </a:r>
+          </a:p>
+          <a:p>
+            <a:endParaRPr lang="en-US" altLang="ja-JP" dirty="0">
+              <a:solidFill>
+                <a:schemeClr val="bg1"/>
+              </a:solidFill>
+            </a:endParaRPr>
+          </a:p>
+          <a:p>
+            <a:r>
+              <a:rPr lang="ja-JP" altLang="en-US" dirty="0">
+                <a:solidFill>
+                  <a:schemeClr val="bg1"/>
+                </a:solidFill>
+              </a:rPr>
+              <a:t>・左移動　　：</a:t>
+            </a:r>
+            <a:endParaRPr lang="en-US" altLang="ja-JP" dirty="0">
+              <a:solidFill>
+                <a:schemeClr val="bg1"/>
+              </a:solidFill>
+            </a:endParaRPr>
+          </a:p>
+          <a:p>
+            <a:endParaRPr lang="en-US" altLang="ja-JP" dirty="0">
+              <a:solidFill>
+                <a:schemeClr val="bg1"/>
+              </a:solidFill>
+            </a:endParaRPr>
+          </a:p>
+          <a:p>
+            <a:r>
+              <a:rPr lang="ja-JP" altLang="en-US" dirty="0">
+                <a:solidFill>
+                  <a:schemeClr val="bg1"/>
+                </a:solidFill>
+              </a:rPr>
+              <a:t>・右移動　　：</a:t>
+            </a:r>
+            <a:endParaRPr lang="en-US" altLang="ja-JP" dirty="0">
+              <a:solidFill>
+                <a:schemeClr val="bg1"/>
+              </a:solidFill>
+            </a:endParaRPr>
+          </a:p>
+          <a:p>
+            <a:endParaRPr lang="en-US" altLang="ja-JP" dirty="0">
+              <a:solidFill>
+                <a:schemeClr val="bg1"/>
+              </a:solidFill>
+            </a:endParaRPr>
+          </a:p>
+          <a:p>
+            <a:r>
+              <a:rPr lang="ja-JP" altLang="en-US" dirty="0">
+                <a:solidFill>
+                  <a:schemeClr val="bg1"/>
+                </a:solidFill>
+              </a:rPr>
+              <a:t>・パンチ弱　：</a:t>
+            </a:r>
+            <a:endParaRPr lang="en-US" altLang="ja-JP" dirty="0">
+              <a:solidFill>
+                <a:schemeClr val="bg1"/>
+              </a:solidFill>
+            </a:endParaRPr>
+          </a:p>
+          <a:p>
+            <a:endParaRPr lang="en-US" altLang="ja-JP" dirty="0">
+              <a:solidFill>
+                <a:schemeClr val="bg1"/>
+              </a:solidFill>
+            </a:endParaRPr>
+          </a:p>
+          <a:p>
+            <a:r>
+              <a:rPr lang="en-US" altLang="ja-JP" dirty="0">
+                <a:solidFill>
+                  <a:schemeClr val="bg1"/>
+                </a:solidFill>
+              </a:rPr>
+              <a:t>	</a:t>
+            </a:r>
+            <a:r>
+              <a:rPr lang="ja-JP" altLang="en-US" dirty="0">
+                <a:solidFill>
+                  <a:schemeClr val="bg1"/>
+                </a:solidFill>
+              </a:rPr>
+              <a:t>中：</a:t>
+            </a:r>
+            <a:endParaRPr lang="en-US" altLang="ja-JP" dirty="0">
+              <a:solidFill>
+                <a:schemeClr val="bg1"/>
+              </a:solidFill>
+            </a:endParaRPr>
+          </a:p>
+          <a:p>
+            <a:endParaRPr lang="en-US" altLang="ja-JP" dirty="0">
+              <a:solidFill>
+                <a:schemeClr val="bg1"/>
+              </a:solidFill>
+            </a:endParaRPr>
+          </a:p>
+          <a:p>
+            <a:r>
+              <a:rPr lang="en-US" altLang="ja-JP" dirty="0">
+                <a:solidFill>
+                  <a:schemeClr val="bg1"/>
+                </a:solidFill>
+              </a:rPr>
+              <a:t>	</a:t>
+            </a:r>
+            <a:r>
+              <a:rPr lang="ja-JP" altLang="en-US" dirty="0">
+                <a:solidFill>
+                  <a:schemeClr val="bg1"/>
+                </a:solidFill>
+              </a:rPr>
+              <a:t>強：</a:t>
+            </a:r>
+            <a:endParaRPr lang="en-US" altLang="ja-JP" dirty="0">
+              <a:solidFill>
+                <a:schemeClr val="bg1"/>
+              </a:solidFill>
+            </a:endParaRPr>
+          </a:p>
+          <a:p>
+            <a:endParaRPr lang="en-US" altLang="ja-JP" dirty="0">
+              <a:solidFill>
+                <a:schemeClr val="bg1"/>
+              </a:solidFill>
+            </a:endParaRPr>
+          </a:p>
+        </p:txBody>
+      </p:sp>
+      <p:sp>
+        <p:nvSpPr>
+          <p:cNvPr id="11" name="テキスト ボックス 10">
+            <a:extLst>
+              <a:ext uri="{FF2B5EF4-FFF2-40B4-BE49-F238E27FC236}">
+                <a16:creationId xmlns:a16="http://schemas.microsoft.com/office/drawing/2014/main" id="{539E2AC6-25FF-4C71-A9FD-32E00FA4E5AF}"/>
+              </a:ext>
+            </a:extLst>
+          </p:cNvPr>
+          <p:cNvSpPr txBox="1"/>
+          <p:nvPr/>
+        </p:nvSpPr>
+        <p:spPr>
+          <a:xfrm>
+            <a:off x="6123070" y="1503802"/>
+            <a:ext cx="4566745" cy="1477328"/>
+          </a:xfrm>
+          <a:prstGeom prst="rect">
+            <a:avLst/>
+          </a:prstGeom>
+          <a:noFill/>
+        </p:spPr>
+        <p:txBody>
+          <a:bodyPr wrap="square" rtlCol="0">
+            <a:spAutoFit/>
+          </a:bodyPr>
+          <a:lstStyle/>
+          <a:p>
+            <a:r>
+              <a:rPr lang="en-US" altLang="ja-JP" dirty="0">
+                <a:solidFill>
+                  <a:schemeClr val="bg1"/>
+                </a:solidFill>
+              </a:rPr>
+              <a:t>【</a:t>
+            </a:r>
+            <a:r>
+              <a:rPr lang="ja-JP" altLang="en-US" dirty="0">
+                <a:solidFill>
+                  <a:schemeClr val="bg1"/>
+                </a:solidFill>
+              </a:rPr>
+              <a:t>トレーニング専用コマンド</a:t>
+            </a:r>
+            <a:r>
+              <a:rPr lang="en-US" altLang="ja-JP" dirty="0">
+                <a:solidFill>
+                  <a:schemeClr val="bg1"/>
+                </a:solidFill>
+              </a:rPr>
+              <a:t>】</a:t>
+            </a:r>
+          </a:p>
+          <a:p>
+            <a:endParaRPr lang="en-US" altLang="ja-JP" dirty="0">
+              <a:solidFill>
+                <a:schemeClr val="bg1"/>
+              </a:solidFill>
+            </a:endParaRPr>
+          </a:p>
+          <a:p>
+            <a:r>
+              <a:rPr lang="ja-JP" altLang="en-US" dirty="0">
+                <a:solidFill>
+                  <a:schemeClr val="bg1"/>
+                </a:solidFill>
+              </a:rPr>
+              <a:t>・オプション：</a:t>
+            </a:r>
+            <a:endParaRPr lang="en-US" altLang="ja-JP" sz="1800" dirty="0">
+              <a:solidFill>
+                <a:schemeClr val="bg1"/>
+              </a:solidFill>
+              <a:latin typeface="+mn-ea"/>
+            </a:endParaRPr>
+          </a:p>
+          <a:p>
+            <a:endParaRPr lang="en-US" altLang="ja-JP" dirty="0">
+              <a:solidFill>
+                <a:schemeClr val="bg1"/>
+              </a:solidFill>
+              <a:latin typeface="+mn-ea"/>
+            </a:endParaRPr>
+          </a:p>
+          <a:p>
+            <a:r>
+              <a:rPr lang="ja-JP" altLang="en-US" dirty="0">
+                <a:solidFill>
+                  <a:schemeClr val="bg1"/>
+                </a:solidFill>
+                <a:latin typeface="+mn-ea"/>
+              </a:rPr>
+              <a:t>・モード切替：</a:t>
+            </a:r>
+            <a:endParaRPr lang="en-US" altLang="ja-JP" dirty="0">
+              <a:solidFill>
+                <a:schemeClr val="bg1"/>
+              </a:solidFill>
+              <a:latin typeface="+mn-ea"/>
+            </a:endParaRPr>
+          </a:p>
+        </p:txBody>
+      </p:sp>
+      <p:sp>
+        <p:nvSpPr>
+          <p:cNvPr id="12" name="テキスト ボックス 11">
+            <a:extLst>
+              <a:ext uri="{FF2B5EF4-FFF2-40B4-BE49-F238E27FC236}">
+                <a16:creationId xmlns:a16="http://schemas.microsoft.com/office/drawing/2014/main" id="{BB4B2347-92CB-42D1-80C5-9B9B8D8DF1D2}"/>
+              </a:ext>
+            </a:extLst>
+          </p:cNvPr>
+          <p:cNvSpPr txBox="1"/>
+          <p:nvPr/>
+        </p:nvSpPr>
+        <p:spPr>
+          <a:xfrm>
+            <a:off x="6096000" y="3301114"/>
+            <a:ext cx="4566745" cy="2862322"/>
+          </a:xfrm>
+          <a:prstGeom prst="rect">
+            <a:avLst/>
+          </a:prstGeom>
+          <a:noFill/>
+        </p:spPr>
+        <p:txBody>
+          <a:bodyPr wrap="square" rtlCol="0">
+            <a:spAutoFit/>
+          </a:bodyPr>
+          <a:lstStyle/>
+          <a:p>
+            <a:r>
+              <a:rPr lang="en-US" altLang="ja-JP" dirty="0">
+                <a:solidFill>
+                  <a:schemeClr val="bg1"/>
+                </a:solidFill>
+              </a:rPr>
+              <a:t>【</a:t>
+            </a:r>
+            <a:r>
+              <a:rPr lang="ja-JP" altLang="en-US" dirty="0">
+                <a:solidFill>
+                  <a:schemeClr val="bg1"/>
+                </a:solidFill>
+              </a:rPr>
+              <a:t>選択コマンド</a:t>
+            </a:r>
+            <a:r>
+              <a:rPr lang="en-US" altLang="ja-JP" dirty="0">
+                <a:solidFill>
+                  <a:schemeClr val="bg1"/>
+                </a:solidFill>
+              </a:rPr>
+              <a:t>】</a:t>
+            </a:r>
+          </a:p>
+          <a:p>
+            <a:endParaRPr lang="en-US" altLang="ja-JP" dirty="0">
+              <a:solidFill>
+                <a:schemeClr val="bg1"/>
+              </a:solidFill>
+            </a:endParaRPr>
+          </a:p>
+          <a:p>
+            <a:r>
+              <a:rPr lang="ja-JP" altLang="en-US" dirty="0">
+                <a:solidFill>
+                  <a:schemeClr val="bg1"/>
+                </a:solidFill>
+              </a:rPr>
+              <a:t>・</a:t>
+            </a:r>
+            <a:r>
+              <a:rPr lang="en-US" altLang="ja-JP" dirty="0">
+                <a:solidFill>
+                  <a:schemeClr val="bg1"/>
+                </a:solidFill>
+              </a:rPr>
+              <a:t>UI</a:t>
+            </a:r>
+            <a:r>
+              <a:rPr lang="ja-JP" altLang="en-US" dirty="0">
+                <a:solidFill>
+                  <a:schemeClr val="bg1"/>
+                </a:solidFill>
+              </a:rPr>
+              <a:t>の移動　：</a:t>
+            </a:r>
+            <a:endParaRPr lang="en-US" altLang="ja-JP" dirty="0">
+              <a:solidFill>
+                <a:schemeClr val="bg1"/>
+              </a:solidFill>
+            </a:endParaRPr>
+          </a:p>
+          <a:p>
+            <a:endParaRPr lang="en-US" altLang="ja-JP" sz="1800" dirty="0">
+              <a:solidFill>
+                <a:schemeClr val="bg1"/>
+              </a:solidFill>
+              <a:latin typeface="+mn-ea"/>
+            </a:endParaRPr>
+          </a:p>
+          <a:p>
+            <a:endParaRPr lang="en-US" altLang="ja-JP" dirty="0">
+              <a:solidFill>
+                <a:schemeClr val="bg1"/>
+              </a:solidFill>
+              <a:latin typeface="+mn-ea"/>
+            </a:endParaRPr>
+          </a:p>
+          <a:p>
+            <a:r>
+              <a:rPr lang="ja-JP" altLang="en-US" dirty="0">
+                <a:solidFill>
+                  <a:schemeClr val="bg1"/>
+                </a:solidFill>
+                <a:latin typeface="+mn-ea"/>
+              </a:rPr>
+              <a:t>・決定＆解除：</a:t>
+            </a:r>
+            <a:endParaRPr lang="en-US" altLang="ja-JP" dirty="0">
+              <a:solidFill>
+                <a:schemeClr val="bg1"/>
+              </a:solidFill>
+              <a:latin typeface="+mn-ea"/>
+            </a:endParaRPr>
+          </a:p>
+          <a:p>
+            <a:endParaRPr lang="en-US" altLang="ja-JP" dirty="0">
+              <a:solidFill>
+                <a:schemeClr val="bg1"/>
+              </a:solidFill>
+              <a:latin typeface="+mn-ea"/>
+            </a:endParaRPr>
+          </a:p>
+          <a:p>
+            <a:r>
+              <a:rPr lang="ja-JP" altLang="en-US" dirty="0">
+                <a:solidFill>
+                  <a:schemeClr val="bg1"/>
+                </a:solidFill>
+                <a:latin typeface="+mn-ea"/>
+              </a:rPr>
+              <a:t>・タイトルへ：</a:t>
+            </a:r>
+            <a:br>
+              <a:rPr lang="en-US" altLang="ja-JP" dirty="0">
+                <a:solidFill>
+                  <a:schemeClr val="bg1"/>
+                </a:solidFill>
+                <a:latin typeface="+mn-ea"/>
+              </a:rPr>
+            </a:br>
+            <a:endParaRPr lang="en-US" altLang="ja-JP" dirty="0">
+              <a:solidFill>
+                <a:schemeClr val="bg1"/>
+              </a:solidFill>
+              <a:latin typeface="+mn-ea"/>
+            </a:endParaRPr>
+          </a:p>
+          <a:p>
+            <a:r>
+              <a:rPr lang="ja-JP" altLang="en-US" dirty="0">
+                <a:solidFill>
+                  <a:schemeClr val="bg1"/>
+                </a:solidFill>
+                <a:latin typeface="+mn-ea"/>
+              </a:rPr>
+              <a:t>・ゲーム終了：</a:t>
+            </a:r>
+            <a:endParaRPr lang="en-US" altLang="ja-JP" dirty="0">
+              <a:solidFill>
+                <a:schemeClr val="bg1"/>
+              </a:solidFill>
+              <a:latin typeface="+mn-ea"/>
+            </a:endParaRPr>
+          </a:p>
+        </p:txBody>
+      </p:sp>
       <p:sp>
         <p:nvSpPr>
           <p:cNvPr id="2" name="タイトル 1">
@@ -4796,7 +5931,7 @@
                   <a:schemeClr val="bg1"/>
                 </a:solidFill>
               </a:rPr>
-              <a:t>操作方法</a:t>
+              <a:t>キーボード操作方法</a:t>
             </a:r>
             <a:r>
               <a:rPr kumimoji="1" lang="en-US" altLang="ja-JP" dirty="0">
@@ -4814,12 +5949,300 @@
           </a:p>
         </p:txBody>
       </p:sp>
-      <p:sp>
-        <p:nvSpPr>
-          <p:cNvPr id="10" name="テキスト ボックス 9">
-            <a:extLst>
-              <a:ext uri="{FF2B5EF4-FFF2-40B4-BE49-F238E27FC236}">
-                <a16:creationId xmlns:a16="http://schemas.microsoft.com/office/drawing/2014/main" id="{E0EE238F-FB2D-4A9B-BAF0-5E250B245B05}"/>
+      <p:pic>
+        <p:nvPicPr>
+          <p:cNvPr id="7" name="図 6">
+            <a:extLst>
+              <a:ext uri="{FF2B5EF4-FFF2-40B4-BE49-F238E27FC236}">
+                <a16:creationId xmlns:a16="http://schemas.microsoft.com/office/drawing/2014/main" id="{9E82BDA5-EEDF-46F4-8640-50886797BFCD}"/>
+              </a:ext>
+            </a:extLst>
+          </p:cNvPr>
+          <p:cNvPicPr>
+            <a:picLocks noChangeAspect="1"/>
+          </p:cNvPicPr>
+          <p:nvPr/>
+        </p:nvPicPr>
+        <p:blipFill>
+          <a:blip r:embed="rId3">
+            <a:extLst>
+              <a:ext uri="{28A0092B-C50C-407E-A947-70E740481C1C}">
+                <a14:useLocalDpi xmlns:a14="http://schemas.microsoft.com/office/drawing/2010/main" val="0"/>
+              </a:ext>
+            </a:extLst>
+          </a:blip>
+          <a:stretch>
+            <a:fillRect/>
+          </a:stretch>
+        </p:blipFill>
+        <p:spPr>
+          <a:xfrm>
+            <a:off x="2665614" y="2117251"/>
+            <a:ext cx="575913" cy="575913"/>
+          </a:xfrm>
+          <a:prstGeom prst="rect">
+            <a:avLst/>
+          </a:prstGeom>
+        </p:spPr>
+      </p:pic>
+      <p:pic>
+        <p:nvPicPr>
+          <p:cNvPr id="14" name="図 13">
+            <a:extLst>
+              <a:ext uri="{FF2B5EF4-FFF2-40B4-BE49-F238E27FC236}">
+                <a16:creationId xmlns:a16="http://schemas.microsoft.com/office/drawing/2014/main" id="{25D8F309-FDDB-4CCC-BBF2-641413C7268B}"/>
+              </a:ext>
+            </a:extLst>
+          </p:cNvPr>
+          <p:cNvPicPr>
+            <a:picLocks noChangeAspect="1"/>
+          </p:cNvPicPr>
+          <p:nvPr/>
+        </p:nvPicPr>
+        <p:blipFill>
+          <a:blip r:embed="rId4">
+            <a:extLst>
+              <a:ext uri="{28A0092B-C50C-407E-A947-70E740481C1C}">
+                <a14:useLocalDpi xmlns:a14="http://schemas.microsoft.com/office/drawing/2010/main" val="0"/>
+              </a:ext>
+            </a:extLst>
+          </a:blip>
+          <a:stretch>
+            <a:fillRect/>
+          </a:stretch>
+        </p:blipFill>
+        <p:spPr>
+          <a:xfrm>
+            <a:off x="2665614" y="2702203"/>
+            <a:ext cx="575913" cy="575913"/>
+          </a:xfrm>
+          <a:prstGeom prst="rect">
+            <a:avLst/>
+          </a:prstGeom>
+        </p:spPr>
+      </p:pic>
+      <p:pic>
+        <p:nvPicPr>
+          <p:cNvPr id="16" name="図 15">
+            <a:extLst>
+              <a:ext uri="{FF2B5EF4-FFF2-40B4-BE49-F238E27FC236}">
+                <a16:creationId xmlns:a16="http://schemas.microsoft.com/office/drawing/2014/main" id="{70CF7899-83B9-422B-B8B0-5DE161FFCB14}"/>
+              </a:ext>
+            </a:extLst>
+          </p:cNvPr>
+          <p:cNvPicPr>
+            <a:picLocks noChangeAspect="1"/>
+          </p:cNvPicPr>
+          <p:nvPr/>
+        </p:nvPicPr>
+        <p:blipFill>
+          <a:blip r:embed="rId5">
+            <a:extLst>
+              <a:ext uri="{28A0092B-C50C-407E-A947-70E740481C1C}">
+                <a14:useLocalDpi xmlns:a14="http://schemas.microsoft.com/office/drawing/2010/main" val="0"/>
+              </a:ext>
+            </a:extLst>
+          </a:blip>
+          <a:stretch>
+            <a:fillRect/>
+          </a:stretch>
+        </p:blipFill>
+        <p:spPr>
+          <a:xfrm>
+            <a:off x="2665614" y="3264477"/>
+            <a:ext cx="575913" cy="575913"/>
+          </a:xfrm>
+          <a:prstGeom prst="rect">
+            <a:avLst/>
+          </a:prstGeom>
+        </p:spPr>
+      </p:pic>
+      <p:pic>
+        <p:nvPicPr>
+          <p:cNvPr id="18" name="図 17">
+            <a:extLst>
+              <a:ext uri="{FF2B5EF4-FFF2-40B4-BE49-F238E27FC236}">
+                <a16:creationId xmlns:a16="http://schemas.microsoft.com/office/drawing/2014/main" id="{54C847E7-6AAB-43B9-8AFA-CC307249C525}"/>
+              </a:ext>
+            </a:extLst>
+          </p:cNvPr>
+          <p:cNvPicPr>
+            <a:picLocks noChangeAspect="1"/>
+          </p:cNvPicPr>
+          <p:nvPr/>
+        </p:nvPicPr>
+        <p:blipFill>
+          <a:blip r:embed="rId6">
+            <a:extLst>
+              <a:ext uri="{28A0092B-C50C-407E-A947-70E740481C1C}">
+                <a14:useLocalDpi xmlns:a14="http://schemas.microsoft.com/office/drawing/2010/main" val="0"/>
+              </a:ext>
+            </a:extLst>
+          </a:blip>
+          <a:stretch>
+            <a:fillRect/>
+          </a:stretch>
+        </p:blipFill>
+        <p:spPr>
+          <a:xfrm>
+            <a:off x="2658794" y="3794827"/>
+            <a:ext cx="575913" cy="575913"/>
+          </a:xfrm>
+          <a:prstGeom prst="rect">
+            <a:avLst/>
+          </a:prstGeom>
+        </p:spPr>
+      </p:pic>
+      <p:pic>
+        <p:nvPicPr>
+          <p:cNvPr id="20" name="図 19">
+            <a:extLst>
+              <a:ext uri="{FF2B5EF4-FFF2-40B4-BE49-F238E27FC236}">
+                <a16:creationId xmlns:a16="http://schemas.microsoft.com/office/drawing/2014/main" id="{2D099652-A0FA-4C5A-AC8D-42E2FB23F545}"/>
+              </a:ext>
+            </a:extLst>
+          </p:cNvPr>
+          <p:cNvPicPr>
+            <a:picLocks noChangeAspect="1"/>
+          </p:cNvPicPr>
+          <p:nvPr/>
+        </p:nvPicPr>
+        <p:blipFill>
+          <a:blip r:embed="rId7">
+            <a:extLst>
+              <a:ext uri="{28A0092B-C50C-407E-A947-70E740481C1C}">
+                <a14:useLocalDpi xmlns:a14="http://schemas.microsoft.com/office/drawing/2010/main" val="0"/>
+              </a:ext>
+            </a:extLst>
+          </a:blip>
+          <a:stretch>
+            <a:fillRect/>
+          </a:stretch>
+        </p:blipFill>
+        <p:spPr>
+          <a:xfrm>
+            <a:off x="2665614" y="4363252"/>
+            <a:ext cx="562274" cy="562274"/>
+          </a:xfrm>
+          <a:prstGeom prst="rect">
+            <a:avLst/>
+          </a:prstGeom>
+        </p:spPr>
+      </p:pic>
+      <p:pic>
+        <p:nvPicPr>
+          <p:cNvPr id="22" name="図 21">
+            <a:extLst>
+              <a:ext uri="{FF2B5EF4-FFF2-40B4-BE49-F238E27FC236}">
+                <a16:creationId xmlns:a16="http://schemas.microsoft.com/office/drawing/2014/main" id="{C64C02C5-E57B-4843-B3AC-B09BF133A99A}"/>
+              </a:ext>
+            </a:extLst>
+          </p:cNvPr>
+          <p:cNvPicPr>
+            <a:picLocks noChangeAspect="1"/>
+          </p:cNvPicPr>
+          <p:nvPr/>
+        </p:nvPicPr>
+        <p:blipFill>
+          <a:blip r:embed="rId8">
+            <a:extLst>
+              <a:ext uri="{28A0092B-C50C-407E-A947-70E740481C1C}">
+                <a14:useLocalDpi xmlns:a14="http://schemas.microsoft.com/office/drawing/2010/main" val="0"/>
+              </a:ext>
+            </a:extLst>
+          </a:blip>
+          <a:stretch>
+            <a:fillRect/>
+          </a:stretch>
+        </p:blipFill>
+        <p:spPr>
+          <a:xfrm>
+            <a:off x="5199305" y="2117250"/>
+            <a:ext cx="535398" cy="575913"/>
+          </a:xfrm>
+          <a:prstGeom prst="rect">
+            <a:avLst/>
+          </a:prstGeom>
+        </p:spPr>
+      </p:pic>
+      <p:pic>
+        <p:nvPicPr>
+          <p:cNvPr id="24" name="図 23">
+            <a:extLst>
+              <a:ext uri="{FF2B5EF4-FFF2-40B4-BE49-F238E27FC236}">
+                <a16:creationId xmlns:a16="http://schemas.microsoft.com/office/drawing/2014/main" id="{CBDD5CC7-76E4-4978-945E-DF1A3976CDEA}"/>
+              </a:ext>
+            </a:extLst>
+          </p:cNvPr>
+          <p:cNvPicPr>
+            <a:picLocks noChangeAspect="1"/>
+          </p:cNvPicPr>
+          <p:nvPr/>
+        </p:nvPicPr>
+        <p:blipFill>
+          <a:blip r:embed="rId9">
+            <a:extLst>
+              <a:ext uri="{28A0092B-C50C-407E-A947-70E740481C1C}">
+                <a14:useLocalDpi xmlns:a14="http://schemas.microsoft.com/office/drawing/2010/main" val="0"/>
+              </a:ext>
+            </a:extLst>
+          </a:blip>
+          <a:stretch>
+            <a:fillRect/>
+          </a:stretch>
+        </p:blipFill>
+        <p:spPr>
+          <a:xfrm>
+            <a:off x="5199305" y="2702202"/>
+            <a:ext cx="575913" cy="575913"/>
+          </a:xfrm>
+          <a:prstGeom prst="rect">
+            <a:avLst/>
+          </a:prstGeom>
+        </p:spPr>
+      </p:pic>
+      <p:pic>
+        <p:nvPicPr>
+          <p:cNvPr id="26" name="図 25">
+            <a:extLst>
+              <a:ext uri="{FF2B5EF4-FFF2-40B4-BE49-F238E27FC236}">
+                <a16:creationId xmlns:a16="http://schemas.microsoft.com/office/drawing/2014/main" id="{1B3F6DC4-B28F-4E72-9444-0AF6F497B57B}"/>
+              </a:ext>
+            </a:extLst>
+          </p:cNvPr>
+          <p:cNvPicPr>
+            <a:picLocks noChangeAspect="1"/>
+          </p:cNvPicPr>
+          <p:nvPr/>
+        </p:nvPicPr>
+        <p:blipFill>
+          <a:blip r:embed="rId10">
+            <a:extLst>
+              <a:ext uri="{28A0092B-C50C-407E-A947-70E740481C1C}">
+                <a14:useLocalDpi xmlns:a14="http://schemas.microsoft.com/office/drawing/2010/main" val="0"/>
+              </a:ext>
+            </a:extLst>
+          </a:blip>
+          <a:stretch>
+            <a:fillRect/>
+          </a:stretch>
+        </p:blipFill>
+        <p:spPr>
+          <a:xfrm>
+            <a:off x="5217646" y="3260427"/>
+            <a:ext cx="530351" cy="575913"/>
+          </a:xfrm>
+          <a:prstGeom prst="rect">
+            <a:avLst/>
+          </a:prstGeom>
+        </p:spPr>
+      </p:pic>
+      <p:sp>
+        <p:nvSpPr>
+          <p:cNvPr id="29" name="テキスト ボックス 28">
+            <a:extLst>
+              <a:ext uri="{FF2B5EF4-FFF2-40B4-BE49-F238E27FC236}">
+                <a16:creationId xmlns:a16="http://schemas.microsoft.com/office/drawing/2014/main" id="{E04DA076-61B8-4C0C-8942-1F0EA0BA2DCA}"/>
               </a:ext>
             </a:extLst>
           </p:cNvPr>
@@ -4828,8 +6251,8 @@
         </p:nvSpPr>
         <p:spPr>
           <a:xfrm>
-            <a:off x="830317" y="1711801"/>
-            <a:ext cx="3205655" cy="2862322"/>
+            <a:off x="3615165" y="2279065"/>
+            <a:ext cx="2022491" cy="2031325"/>
           </a:xfrm>
           <a:prstGeom prst="rect">
             <a:avLst/>
@@ -4843,31 +6266,13 @@
           <a:lstStyle/>
           <a:p>
             <a:r>
-              <a:rPr lang="en-US" altLang="ja-JP" dirty="0">
-                <a:solidFill>
-                  <a:schemeClr val="bg1"/>
-                </a:solidFill>
-              </a:rPr>
-              <a:t>【</a:t>
-            </a:r>
-            <a:r>
               <a:rPr lang="ja-JP" altLang="en-US" dirty="0">
                 <a:solidFill>
                   <a:schemeClr val="bg1"/>
                 </a:solidFill>
               </a:rPr>
-              <a:t>キーボードコマンド</a:t>
-            </a:r>
-            <a:r>
-              <a:rPr lang="en-US" altLang="ja-JP" dirty="0">
-                <a:solidFill>
-                  <a:schemeClr val="bg1"/>
-                </a:solidFill>
-              </a:rPr>
-              <a:t>】</a:t>
-            </a:r>
-          </a:p>
-          <a:p>
+              <a:t>・キック弱：</a:t>
+            </a:r>
             <a:endParaRPr lang="en-US" altLang="ja-JP" dirty="0">
               <a:solidFill>
                 <a:schemeClr val="bg1"/>
@@ -4875,46 +6280,6 @@
             </a:endParaRPr>
           </a:p>
           <a:p>
-            <a:r>
-              <a:rPr lang="ja-JP" altLang="en-US" dirty="0">
-                <a:solidFill>
-                  <a:schemeClr val="bg1"/>
-                </a:solidFill>
-              </a:rPr>
-              <a:t>・移動　　：</a:t>
-            </a:r>
-            <a:r>
-              <a:rPr lang="en-US" altLang="ja-JP" dirty="0">
-                <a:solidFill>
-                  <a:schemeClr val="bg1"/>
-                </a:solidFill>
-              </a:rPr>
-              <a:t>A</a:t>
-            </a:r>
-            <a:r>
-              <a:rPr lang="ja-JP" altLang="en-US" dirty="0">
-                <a:solidFill>
-                  <a:schemeClr val="bg1"/>
-                </a:solidFill>
-              </a:rPr>
-              <a:t>キー</a:t>
-            </a:r>
-            <a:r>
-              <a:rPr lang="en-US" altLang="ja-JP" dirty="0">
-                <a:solidFill>
-                  <a:schemeClr val="bg1"/>
-                </a:solidFill>
-              </a:rPr>
-              <a:t> &amp; D</a:t>
-            </a:r>
-            <a:r>
-              <a:rPr lang="ja-JP" altLang="en-US" dirty="0">
-                <a:solidFill>
-                  <a:schemeClr val="bg1"/>
-                </a:solidFill>
-              </a:rPr>
-              <a:t>キー</a:t>
-            </a:r>
             <a:endParaRPr lang="en-US" altLang="ja-JP" dirty="0">
               <a:solidFill>
                 <a:schemeClr val="bg1"/>
@@ -4923,28 +6288,20 @@
           </a:p>
           <a:p>
             <a:r>
+              <a:rPr lang="en-US" altLang="ja-JP" dirty="0">
+                <a:solidFill>
+                  <a:schemeClr val="bg1"/>
+                </a:solidFill>
+              </a:rPr>
+              <a:t>	</a:t>
+            </a:r>
+            <a:r>
               <a:rPr lang="ja-JP" altLang="en-US" dirty="0">
                 <a:solidFill>
                   <a:schemeClr val="bg1"/>
                 </a:solidFill>
               </a:rPr>
-              <a:t>・パンチ弱：</a:t>
-            </a:r>
-            <a:r>
-              <a:rPr lang="en-US" altLang="ja-JP" dirty="0">
-                <a:solidFill>
-                  <a:schemeClr val="bg1"/>
-                </a:solidFill>
-              </a:rPr>
-              <a:t>U</a:t>
-            </a:r>
-            <a:r>
-              <a:rPr lang="ja-JP" altLang="en-US" dirty="0">
-                <a:solidFill>
-                  <a:schemeClr val="bg1"/>
-                </a:solidFill>
-              </a:rPr>
-              <a:t>キー</a:t>
+              <a:t>中：</a:t>
             </a:r>
             <a:endParaRPr lang="en-US" altLang="ja-JP" dirty="0">
               <a:solidFill>
@@ -4953,38 +6310,6 @@
             </a:endParaRPr>
           </a:p>
           <a:p>
-            <a:r>
-              <a:rPr lang="en-US" altLang="ja-JP" dirty="0">
-                <a:solidFill>
-                  <a:schemeClr val="bg1"/>
-                </a:solidFill>
-              </a:rPr>
-              <a:t>	</a:t>
-            </a:r>
-            <a:r>
-              <a:rPr lang="ja-JP" altLang="en-US" dirty="0">
-                <a:solidFill>
-                  <a:schemeClr val="bg1"/>
-                </a:solidFill>
-              </a:rPr>
-              <a:t>中：</a:t>
-            </a:r>
-            <a:r>
-              <a:rPr lang="en-US" altLang="ja-JP" dirty="0">
-                <a:solidFill>
-                  <a:schemeClr val="bg1"/>
-                </a:solidFill>
-              </a:rPr>
-              <a:t>I</a:t>
-            </a:r>
-            <a:r>
-              <a:rPr lang="ja-JP" altLang="en-US" dirty="0">
-                <a:solidFill>
-                  <a:schemeClr val="bg1"/>
-                </a:solidFill>
-              </a:rPr>
-              <a:t>キー</a:t>
-            </a:r>
             <a:endParaRPr lang="en-US" altLang="ja-JP" dirty="0">
               <a:solidFill>
                 <a:schemeClr val="bg1"/>
@@ -5008,22 +6333,6 @@
               </a:rPr>
               <a:t>強：</a:t>
             </a:r>
-            <a:r>
-              <a:rPr lang="en-US" altLang="ja-JP" dirty="0">
-                <a:solidFill>
-                  <a:schemeClr val="bg1"/>
-                </a:solidFill>
-              </a:rPr>
-              <a:t>O</a:t>
-            </a:r>
-            <a:r>
-              <a:rPr lang="ja-JP" altLang="en-US" dirty="0">
-                <a:solidFill>
-                  <a:schemeClr val="bg1"/>
-                </a:solidFill>
-              </a:rPr>
-              <a:t>キー</a:t>
-            </a:r>
             <a:endParaRPr lang="en-US" altLang="ja-JP" dirty="0">
               <a:solidFill>
                 <a:schemeClr val="bg1"/>
@@ -5031,30 +6340,6 @@
             </a:endParaRPr>
           </a:p>
           <a:p>
-            <a:r>
-              <a:rPr lang="ja-JP" altLang="en-US" dirty="0">
-                <a:solidFill>
-                  <a:schemeClr val="bg1"/>
-                </a:solidFill>
-              </a:rPr>
-              <a:t>・キック弱：</a:t>
-            </a:r>
-            <a:r>
-              <a:rPr lang="en-US" altLang="ja-JP" dirty="0">
-                <a:solidFill>
-                  <a:schemeClr val="bg1"/>
-                </a:solidFill>
-              </a:rPr>
-              <a:t>J</a:t>
-            </a:r>
-            <a:r>
-              <a:rPr lang="ja-JP" altLang="en-US" dirty="0">
-                <a:solidFill>
-                  <a:schemeClr val="bg1"/>
-                </a:solidFill>
-              </a:rPr>
-              <a:t>キー</a:t>
-            </a:r>
             <a:endParaRPr lang="en-US" altLang="ja-JP" dirty="0">
               <a:solidFill>
                 <a:schemeClr val="bg1"/>
@@ -5063,36 +6348,12 @@
           </a:p>
           <a:p>
             <a:r>
-              <a:rPr lang="en-US" altLang="ja-JP" dirty="0">
-                <a:solidFill>
-                  <a:schemeClr val="bg1"/>
-                </a:solidFill>
-              </a:rPr>
-              <a:t>	</a:t>
-            </a:r>
-            <a:r>
               <a:rPr lang="ja-JP" altLang="en-US" dirty="0">
                 <a:solidFill>
                   <a:schemeClr val="bg1"/>
                 </a:solidFill>
               </a:rPr>
-              <a:t>中：</a:t>
-            </a:r>
-            <a:r>
-              <a:rPr lang="en-US" altLang="ja-JP" dirty="0">
-                <a:solidFill>
-                  <a:schemeClr val="bg1"/>
-                </a:solidFill>
-              </a:rPr>
-              <a:t>K</a:t>
-            </a:r>
-            <a:r>
-              <a:rPr lang="ja-JP" altLang="en-US" dirty="0">
-                <a:solidFill>
-                  <a:schemeClr val="bg1"/>
-                </a:solidFill>
-              </a:rPr>
-              <a:t>キー</a:t>
+              <a:t>・ガード　：</a:t>
             </a:r>
             <a:endParaRPr lang="en-US" altLang="ja-JP" dirty="0">
               <a:solidFill>
@@ -5100,923 +6361,368 @@
               </a:solidFill>
             </a:endParaRPr>
           </a:p>
-          <a:p>
-            <a:r>
-              <a:rPr lang="en-US" altLang="ja-JP" dirty="0">
-                <a:solidFill>
-                  <a:schemeClr val="bg1"/>
-                </a:solidFill>
-              </a:rPr>
-              <a:t>	</a:t>
-            </a:r>
-            <a:r>
-              <a:rPr lang="ja-JP" altLang="en-US" dirty="0">
-                <a:solidFill>
-                  <a:schemeClr val="bg1"/>
-                </a:solidFill>
-              </a:rPr>
-              <a:t>強：</a:t>
-            </a:r>
-            <a:r>
-              <a:rPr lang="en-US" altLang="ja-JP" dirty="0">
-                <a:solidFill>
-                  <a:schemeClr val="bg1"/>
-                </a:solidFill>
-              </a:rPr>
-              <a:t>L</a:t>
-            </a:r>
-            <a:r>
-              <a:rPr lang="ja-JP" altLang="en-US" dirty="0">
-                <a:solidFill>
-                  <a:schemeClr val="bg1"/>
-                </a:solidFill>
-              </a:rPr>
-              <a:t>キー</a:t>
-            </a:r>
-            <a:endParaRPr lang="en-US" altLang="ja-JP" dirty="0">
-              <a:solidFill>
-                <a:schemeClr val="bg1"/>
-              </a:solidFill>
-            </a:endParaRPr>
-          </a:p>
-          <a:p>
-            <a:r>
-              <a:rPr lang="ja-JP" altLang="en-US" dirty="0">
-                <a:solidFill>
-                  <a:schemeClr val="bg1"/>
-                </a:solidFill>
-              </a:rPr>
-              <a:t>・ガード　：</a:t>
-            </a:r>
-            <a:r>
-              <a:rPr lang="en-US" altLang="ja-JP" dirty="0">
-                <a:solidFill>
-                  <a:schemeClr val="bg1"/>
-                </a:solidFill>
-              </a:rPr>
-              <a:t>H</a:t>
-            </a:r>
-            <a:r>
-              <a:rPr lang="ja-JP" altLang="en-US" dirty="0">
-                <a:solidFill>
-                  <a:schemeClr val="bg1"/>
-                </a:solidFill>
-              </a:rPr>
-              <a:t>キー</a:t>
-            </a:r>
-            <a:endParaRPr lang="en-US" altLang="ja-JP" dirty="0">
-              <a:solidFill>
-                <a:schemeClr val="bg1"/>
-              </a:solidFill>
-            </a:endParaRPr>
-          </a:p>
-        </p:txBody>
-      </p:sp>
-      <p:sp>
-        <p:nvSpPr>
-          <p:cNvPr id="8" name="テキスト ボックス 7">
-            <a:extLst>
-              <a:ext uri="{FF2B5EF4-FFF2-40B4-BE49-F238E27FC236}">
-                <a16:creationId xmlns:a16="http://schemas.microsoft.com/office/drawing/2014/main" id="{9FA20AF2-CDB0-4DC3-AA69-573B362A4EA4}"/>
-              </a:ext>
-            </a:extLst>
-          </p:cNvPr>
-          <p:cNvSpPr txBox="1"/>
+        </p:txBody>
+      </p:sp>
+      <p:pic>
+        <p:nvPicPr>
+          <p:cNvPr id="28" name="図 27">
+            <a:extLst>
+              <a:ext uri="{FF2B5EF4-FFF2-40B4-BE49-F238E27FC236}">
+                <a16:creationId xmlns:a16="http://schemas.microsoft.com/office/drawing/2014/main" id="{6ED642A9-ADF2-4C33-9D4D-B87BC566D54A}"/>
+              </a:ext>
+            </a:extLst>
+          </p:cNvPr>
+          <p:cNvPicPr>
+            <a:picLocks noChangeAspect="1"/>
+          </p:cNvPicPr>
           <p:nvPr/>
-        </p:nvSpPr>
-        <p:spPr>
-          <a:xfrm>
-            <a:off x="4035972" y="1711801"/>
-            <a:ext cx="3205655" cy="3139321"/>
+        </p:nvPicPr>
+        <p:blipFill>
+          <a:blip r:embed="rId11">
+            <a:extLst>
+              <a:ext uri="{28A0092B-C50C-407E-A947-70E740481C1C}">
+                <a14:useLocalDpi xmlns:a14="http://schemas.microsoft.com/office/drawing/2010/main" val="0"/>
+              </a:ext>
+            </a:extLst>
+          </a:blip>
+          <a:stretch>
+            <a:fillRect/>
+          </a:stretch>
+        </p:blipFill>
+        <p:spPr>
+          <a:xfrm>
+            <a:off x="5230994" y="3826876"/>
+            <a:ext cx="517057" cy="517057"/>
           </a:xfrm>
           <a:prstGeom prst="rect">
             <a:avLst/>
           </a:prstGeom>
-          <a:noFill/>
-        </p:spPr>
-        <p:txBody>
-          <a:bodyPr wrap="square" rtlCol="0">
-            <a:spAutoFit/>
-          </a:bodyPr>
-          <a:lstStyle/>
-          <a:p>
-            <a:r>
-              <a:rPr lang="en-US" altLang="ja-JP" dirty="0">
-                <a:solidFill>
-                  <a:schemeClr val="bg1"/>
-                </a:solidFill>
-              </a:rPr>
-              <a:t>【</a:t>
-            </a:r>
-            <a:r>
-              <a:rPr lang="ja-JP" altLang="en-US" dirty="0">
-                <a:solidFill>
-                  <a:schemeClr val="bg1"/>
-                </a:solidFill>
-              </a:rPr>
-              <a:t>ゲームパッドコマンド</a:t>
-            </a:r>
-            <a:r>
-              <a:rPr lang="en-US" altLang="ja-JP" dirty="0">
-                <a:solidFill>
-                  <a:schemeClr val="bg1"/>
-                </a:solidFill>
-              </a:rPr>
-              <a:t>】</a:t>
-            </a:r>
-          </a:p>
-          <a:p>
-            <a:endParaRPr lang="en-US" altLang="ja-JP" dirty="0">
-              <a:solidFill>
-                <a:schemeClr val="bg1"/>
-              </a:solidFill>
-            </a:endParaRPr>
-          </a:p>
-          <a:p>
-            <a:r>
-              <a:rPr lang="en-US" altLang="ja-JP" dirty="0">
-                <a:solidFill>
-                  <a:schemeClr val="bg1"/>
-                </a:solidFill>
-              </a:rPr>
-              <a:t>Xbox</a:t>
-            </a:r>
-            <a:r>
-              <a:rPr lang="ja-JP" altLang="en-US" dirty="0">
-                <a:solidFill>
-                  <a:schemeClr val="bg1"/>
-                </a:solidFill>
-              </a:rPr>
-              <a:t>専用</a:t>
-            </a:r>
-            <a:endParaRPr lang="en-US" altLang="ja-JP" dirty="0">
-              <a:solidFill>
-                <a:schemeClr val="bg1"/>
-              </a:solidFill>
-            </a:endParaRPr>
-          </a:p>
-          <a:p>
-            <a:r>
-              <a:rPr lang="ja-JP" altLang="en-US" dirty="0">
-                <a:solidFill>
-                  <a:schemeClr val="bg1"/>
-                </a:solidFill>
-              </a:rPr>
-              <a:t>・移動　　：左スティック</a:t>
-            </a:r>
-            <a:endParaRPr lang="en-US" altLang="ja-JP" dirty="0">
-              <a:solidFill>
-                <a:schemeClr val="bg1"/>
-              </a:solidFill>
-            </a:endParaRPr>
-          </a:p>
-          <a:p>
-            <a:r>
-              <a:rPr lang="ja-JP" altLang="en-US" dirty="0">
-                <a:solidFill>
-                  <a:schemeClr val="bg1"/>
-                </a:solidFill>
-              </a:rPr>
-              <a:t>・パンチ弱：</a:t>
-            </a:r>
-            <a:r>
-              <a:rPr lang="en-US" altLang="ja-JP" dirty="0">
-                <a:solidFill>
-                  <a:schemeClr val="bg1"/>
-                </a:solidFill>
-              </a:rPr>
-              <a:t>B</a:t>
-            </a:r>
-            <a:r>
-              <a:rPr lang="ja-JP" altLang="en-US" dirty="0">
-                <a:solidFill>
-                  <a:schemeClr val="bg1"/>
-                </a:solidFill>
-              </a:rPr>
-              <a:t>ボタン</a:t>
-            </a:r>
-            <a:endParaRPr lang="en-US" altLang="ja-JP" dirty="0">
-              <a:solidFill>
-                <a:schemeClr val="bg1"/>
-              </a:solidFill>
-            </a:endParaRPr>
-          </a:p>
-          <a:p>
-            <a:r>
-              <a:rPr lang="en-US" altLang="ja-JP" dirty="0">
-                <a:solidFill>
-                  <a:schemeClr val="bg1"/>
-                </a:solidFill>
-              </a:rPr>
-              <a:t>	</a:t>
-            </a:r>
-            <a:r>
-              <a:rPr lang="ja-JP" altLang="en-US" dirty="0">
-                <a:solidFill>
-                  <a:schemeClr val="bg1"/>
-                </a:solidFill>
-              </a:rPr>
-              <a:t>中：</a:t>
-            </a:r>
-            <a:r>
-              <a:rPr lang="en-US" altLang="ja-JP" dirty="0">
-                <a:solidFill>
-                  <a:schemeClr val="bg1"/>
-                </a:solidFill>
-              </a:rPr>
-              <a:t>L</a:t>
-            </a:r>
-            <a:r>
-              <a:rPr lang="ja-JP" altLang="en-US" dirty="0">
-                <a:solidFill>
-                  <a:schemeClr val="bg1"/>
-                </a:solidFill>
-              </a:rPr>
-              <a:t>ボタン</a:t>
-            </a:r>
-            <a:endParaRPr lang="en-US" altLang="ja-JP" dirty="0">
-              <a:solidFill>
-                <a:schemeClr val="bg1"/>
-              </a:solidFill>
-            </a:endParaRPr>
-          </a:p>
-          <a:p>
-            <a:r>
-              <a:rPr lang="en-US" altLang="ja-JP" dirty="0">
-                <a:solidFill>
-                  <a:schemeClr val="bg1"/>
-                </a:solidFill>
-              </a:rPr>
-              <a:t>	</a:t>
-            </a:r>
-            <a:r>
-              <a:rPr lang="ja-JP" altLang="en-US" dirty="0">
-                <a:solidFill>
-                  <a:schemeClr val="bg1"/>
-                </a:solidFill>
-              </a:rPr>
-              <a:t>強：</a:t>
-            </a:r>
-            <a:r>
-              <a:rPr lang="en-US" altLang="ja-JP" dirty="0">
-                <a:solidFill>
-                  <a:schemeClr val="bg1"/>
-                </a:solidFill>
-              </a:rPr>
-              <a:t>LT</a:t>
-            </a:r>
-            <a:r>
-              <a:rPr lang="ja-JP" altLang="en-US" dirty="0">
-                <a:solidFill>
-                  <a:schemeClr val="bg1"/>
-                </a:solidFill>
-              </a:rPr>
-              <a:t>トリガー</a:t>
-            </a:r>
-            <a:endParaRPr lang="en-US" altLang="ja-JP" dirty="0">
-              <a:solidFill>
-                <a:schemeClr val="bg1"/>
-              </a:solidFill>
-            </a:endParaRPr>
-          </a:p>
-          <a:p>
-            <a:r>
-              <a:rPr lang="ja-JP" altLang="en-US" dirty="0">
-                <a:solidFill>
-                  <a:schemeClr val="bg1"/>
-                </a:solidFill>
-              </a:rPr>
-              <a:t>・キック弱：</a:t>
-            </a:r>
-            <a:r>
-              <a:rPr lang="en-US" altLang="ja-JP" dirty="0">
-                <a:solidFill>
-                  <a:schemeClr val="bg1"/>
-                </a:solidFill>
-              </a:rPr>
-              <a:t>A</a:t>
-            </a:r>
-            <a:r>
-              <a:rPr lang="ja-JP" altLang="en-US" dirty="0">
-                <a:solidFill>
-                  <a:schemeClr val="bg1"/>
-                </a:solidFill>
-              </a:rPr>
-              <a:t>ボタン</a:t>
-            </a:r>
-            <a:endParaRPr lang="en-US" altLang="ja-JP" dirty="0">
-              <a:solidFill>
-                <a:schemeClr val="bg1"/>
-              </a:solidFill>
-            </a:endParaRPr>
-          </a:p>
-          <a:p>
-            <a:r>
-              <a:rPr lang="en-US" altLang="ja-JP" dirty="0">
-                <a:solidFill>
-                  <a:schemeClr val="bg1"/>
-                </a:solidFill>
-              </a:rPr>
-              <a:t>	</a:t>
-            </a:r>
-            <a:r>
-              <a:rPr lang="ja-JP" altLang="en-US" dirty="0">
-                <a:solidFill>
-                  <a:schemeClr val="bg1"/>
-                </a:solidFill>
-              </a:rPr>
-              <a:t>中：</a:t>
-            </a:r>
-            <a:r>
-              <a:rPr lang="en-US" altLang="ja-JP" dirty="0">
-                <a:solidFill>
-                  <a:schemeClr val="bg1"/>
-                </a:solidFill>
-              </a:rPr>
-              <a:t>R</a:t>
-            </a:r>
-            <a:r>
-              <a:rPr lang="ja-JP" altLang="en-US" dirty="0">
-                <a:solidFill>
-                  <a:schemeClr val="bg1"/>
-                </a:solidFill>
-              </a:rPr>
-              <a:t>ボタン</a:t>
-            </a:r>
-            <a:endParaRPr lang="en-US" altLang="ja-JP" dirty="0">
-              <a:solidFill>
-                <a:schemeClr val="bg1"/>
-              </a:solidFill>
-            </a:endParaRPr>
-          </a:p>
-          <a:p>
-            <a:r>
-              <a:rPr lang="en-US" altLang="ja-JP" dirty="0">
-                <a:solidFill>
-                  <a:schemeClr val="bg1"/>
-                </a:solidFill>
-              </a:rPr>
-              <a:t>	</a:t>
-            </a:r>
-            <a:r>
-              <a:rPr lang="ja-JP" altLang="en-US" dirty="0">
-                <a:solidFill>
-                  <a:schemeClr val="bg1"/>
-                </a:solidFill>
-              </a:rPr>
-              <a:t>強：</a:t>
-            </a:r>
-            <a:r>
-              <a:rPr lang="en-US" altLang="ja-JP" dirty="0">
-                <a:solidFill>
-                  <a:schemeClr val="bg1"/>
-                </a:solidFill>
-              </a:rPr>
-              <a:t>RT</a:t>
-            </a:r>
-            <a:r>
-              <a:rPr lang="ja-JP" altLang="en-US" dirty="0">
-                <a:solidFill>
-                  <a:schemeClr val="bg1"/>
-                </a:solidFill>
-              </a:rPr>
-              <a:t>トリガー</a:t>
-            </a:r>
-            <a:endParaRPr lang="en-US" altLang="ja-JP" dirty="0">
-              <a:solidFill>
-                <a:schemeClr val="bg1"/>
-              </a:solidFill>
-            </a:endParaRPr>
-          </a:p>
-          <a:p>
-            <a:r>
-              <a:rPr lang="ja-JP" altLang="en-US" dirty="0">
-                <a:solidFill>
-                  <a:schemeClr val="bg1"/>
-                </a:solidFill>
-              </a:rPr>
-              <a:t>・ガード　：</a:t>
-            </a:r>
-            <a:r>
-              <a:rPr lang="en-US" altLang="ja-JP" dirty="0">
-                <a:solidFill>
-                  <a:schemeClr val="bg1"/>
-                </a:solidFill>
-              </a:rPr>
-              <a:t>X</a:t>
-            </a:r>
-            <a:r>
-              <a:rPr lang="ja-JP" altLang="en-US" dirty="0">
-                <a:solidFill>
-                  <a:schemeClr val="bg1"/>
-                </a:solidFill>
-              </a:rPr>
-              <a:t>ボタン</a:t>
-            </a:r>
-            <a:endParaRPr lang="en-US" altLang="ja-JP" dirty="0">
-              <a:solidFill>
-                <a:schemeClr val="bg1"/>
-              </a:solidFill>
-            </a:endParaRPr>
-          </a:p>
-        </p:txBody>
-      </p:sp>
-      <p:sp>
-        <p:nvSpPr>
-          <p:cNvPr id="11" name="テキスト ボックス 10">
-            <a:extLst>
-              <a:ext uri="{FF2B5EF4-FFF2-40B4-BE49-F238E27FC236}">
-                <a16:creationId xmlns:a16="http://schemas.microsoft.com/office/drawing/2014/main" id="{539E2AC6-25FF-4C71-A9FD-32E00FA4E5AF}"/>
-              </a:ext>
-            </a:extLst>
-          </p:cNvPr>
-          <p:cNvSpPr txBox="1"/>
+        </p:spPr>
+      </p:pic>
+      <p:pic>
+        <p:nvPicPr>
+          <p:cNvPr id="31" name="図 30">
+            <a:extLst>
+              <a:ext uri="{FF2B5EF4-FFF2-40B4-BE49-F238E27FC236}">
+                <a16:creationId xmlns:a16="http://schemas.microsoft.com/office/drawing/2014/main" id="{4C5E9DBC-BF03-46A4-A506-8ECA7AFEFF03}"/>
+              </a:ext>
+            </a:extLst>
+          </p:cNvPr>
+          <p:cNvPicPr>
+            <a:picLocks noChangeAspect="1"/>
+          </p:cNvPicPr>
           <p:nvPr/>
-        </p:nvSpPr>
-        <p:spPr>
-          <a:xfrm>
-            <a:off x="7241627" y="1769608"/>
-            <a:ext cx="4566745" cy="1200329"/>
+        </p:nvPicPr>
+        <p:blipFill>
+          <a:blip r:embed="rId12">
+            <a:extLst>
+              <a:ext uri="{28A0092B-C50C-407E-A947-70E740481C1C}">
+                <a14:useLocalDpi xmlns:a14="http://schemas.microsoft.com/office/drawing/2010/main" val="0"/>
+              </a:ext>
+            </a:extLst>
+          </a:blip>
+          <a:stretch>
+            <a:fillRect/>
+          </a:stretch>
+        </p:blipFill>
+        <p:spPr>
+          <a:xfrm>
+            <a:off x="7893879" y="4986347"/>
+            <a:ext cx="735701" cy="735701"/>
           </a:xfrm>
           <a:prstGeom prst="rect">
             <a:avLst/>
           </a:prstGeom>
-          <a:noFill/>
-        </p:spPr>
-        <p:txBody>
-          <a:bodyPr wrap="square" rtlCol="0">
-            <a:spAutoFit/>
-          </a:bodyPr>
-          <a:lstStyle/>
-          <a:p>
-            <a:r>
-              <a:rPr lang="en-US" altLang="ja-JP" dirty="0">
-                <a:solidFill>
-                  <a:schemeClr val="bg1"/>
-                </a:solidFill>
-              </a:rPr>
-              <a:t>【</a:t>
-            </a:r>
-            <a:r>
-              <a:rPr lang="ja-JP" altLang="en-US" dirty="0">
-                <a:solidFill>
-                  <a:schemeClr val="bg1"/>
-                </a:solidFill>
-              </a:rPr>
-              <a:t>トレーニング専用コマンド</a:t>
-            </a:r>
-            <a:r>
-              <a:rPr lang="en-US" altLang="ja-JP" dirty="0">
-                <a:solidFill>
-                  <a:schemeClr val="bg1"/>
-                </a:solidFill>
-              </a:rPr>
-              <a:t>】</a:t>
-            </a:r>
-          </a:p>
-          <a:p>
-            <a:endParaRPr lang="en-US" altLang="ja-JP" dirty="0">
-              <a:solidFill>
-                <a:schemeClr val="bg1"/>
-              </a:solidFill>
-            </a:endParaRPr>
-          </a:p>
-          <a:p>
-            <a:r>
-              <a:rPr lang="ja-JP" altLang="en-US" dirty="0">
-                <a:solidFill>
-                  <a:schemeClr val="bg1"/>
-                </a:solidFill>
-              </a:rPr>
-              <a:t>・オプション：</a:t>
-            </a:r>
-            <a:r>
-              <a:rPr lang="en-US" altLang="ja-JP" dirty="0">
-                <a:solidFill>
-                  <a:schemeClr val="bg1"/>
-                </a:solidFill>
-              </a:rPr>
-              <a:t>Tab</a:t>
-            </a:r>
-            <a:r>
-              <a:rPr lang="ja-JP" altLang="en-US" dirty="0">
-                <a:solidFill>
-                  <a:schemeClr val="bg1"/>
-                </a:solidFill>
-              </a:rPr>
-              <a:t>キー </a:t>
-            </a:r>
-            <a:r>
-              <a:rPr lang="en-US" altLang="ja-JP" dirty="0">
-                <a:solidFill>
-                  <a:schemeClr val="bg1"/>
-                </a:solidFill>
-              </a:rPr>
-              <a:t>or </a:t>
-            </a:r>
-            <a:r>
-              <a:rPr lang="ja-JP" altLang="en-US" sz="1800" dirty="0">
-                <a:solidFill>
-                  <a:schemeClr val="bg1"/>
-                </a:solidFill>
-                <a:ea typeface="ＭＳ ゴシック" panose="020B0609070205080204" pitchFamily="49" charset="-128"/>
-              </a:rPr>
-              <a:t>≡</a:t>
-            </a:r>
-            <a:r>
-              <a:rPr lang="ja-JP" altLang="en-US" sz="1800" dirty="0">
-                <a:solidFill>
-                  <a:schemeClr val="bg1"/>
-                </a:solidFill>
-                <a:latin typeface="+mn-ea"/>
-              </a:rPr>
-              <a:t>ボタン</a:t>
-            </a:r>
-            <a:endParaRPr lang="en-US" altLang="ja-JP" sz="1800" dirty="0">
-              <a:solidFill>
-                <a:schemeClr val="bg1"/>
-              </a:solidFill>
-              <a:latin typeface="+mn-ea"/>
-            </a:endParaRPr>
-          </a:p>
-          <a:p>
-            <a:r>
-              <a:rPr lang="ja-JP" altLang="en-US" dirty="0">
-                <a:solidFill>
-                  <a:schemeClr val="bg1"/>
-                </a:solidFill>
-                <a:latin typeface="+mn-ea"/>
-              </a:rPr>
-              <a:t>・モード切替：</a:t>
-            </a:r>
-            <a:r>
-              <a:rPr lang="en-US" altLang="ja-JP" dirty="0">
-                <a:solidFill>
-                  <a:schemeClr val="bg1"/>
-                </a:solidFill>
-                <a:latin typeface="+mn-ea"/>
-              </a:rPr>
-              <a:t>Q</a:t>
-            </a:r>
-            <a:r>
-              <a:rPr lang="ja-JP" altLang="en-US" dirty="0">
-                <a:solidFill>
-                  <a:schemeClr val="bg1"/>
-                </a:solidFill>
-                <a:latin typeface="+mn-ea"/>
-              </a:rPr>
-              <a:t>キー </a:t>
-            </a:r>
-            <a:r>
-              <a:rPr lang="en-US" altLang="ja-JP" dirty="0">
-                <a:solidFill>
-                  <a:schemeClr val="bg1"/>
-                </a:solidFill>
-                <a:latin typeface="+mn-ea"/>
-              </a:rPr>
-              <a:t>or Y</a:t>
-            </a:r>
-            <a:r>
-              <a:rPr lang="ja-JP" altLang="en-US" dirty="0">
-                <a:solidFill>
-                  <a:schemeClr val="bg1"/>
-                </a:solidFill>
-                <a:latin typeface="+mn-ea"/>
-              </a:rPr>
-              <a:t>ボタン</a:t>
-            </a:r>
-            <a:endParaRPr lang="en-US" altLang="ja-JP" dirty="0">
-              <a:solidFill>
-                <a:schemeClr val="bg1"/>
-              </a:solidFill>
-              <a:latin typeface="+mn-ea"/>
-            </a:endParaRPr>
-          </a:p>
-        </p:txBody>
-      </p:sp>
-      <p:sp>
-        <p:nvSpPr>
-          <p:cNvPr id="12" name="テキスト ボックス 11">
-            <a:extLst>
-              <a:ext uri="{FF2B5EF4-FFF2-40B4-BE49-F238E27FC236}">
-                <a16:creationId xmlns:a16="http://schemas.microsoft.com/office/drawing/2014/main" id="{BB4B2347-92CB-42D1-80C5-9B9B8D8DF1D2}"/>
-              </a:ext>
-            </a:extLst>
-          </p:cNvPr>
-          <p:cNvSpPr txBox="1"/>
+        </p:spPr>
+      </p:pic>
+      <p:pic>
+        <p:nvPicPr>
+          <p:cNvPr id="33" name="図 32">
+            <a:extLst>
+              <a:ext uri="{FF2B5EF4-FFF2-40B4-BE49-F238E27FC236}">
+                <a16:creationId xmlns:a16="http://schemas.microsoft.com/office/drawing/2014/main" id="{40089D42-A4F8-4DB3-82E6-E7A9A88A69E9}"/>
+              </a:ext>
+            </a:extLst>
+          </p:cNvPr>
+          <p:cNvPicPr>
+            <a:picLocks noChangeAspect="1"/>
+          </p:cNvPicPr>
           <p:nvPr/>
-        </p:nvSpPr>
-        <p:spPr>
-          <a:xfrm>
-            <a:off x="7241626" y="3142962"/>
-            <a:ext cx="4566745" cy="1754326"/>
+        </p:nvPicPr>
+        <p:blipFill>
+          <a:blip r:embed="rId13">
+            <a:extLst>
+              <a:ext uri="{28A0092B-C50C-407E-A947-70E740481C1C}">
+                <a14:useLocalDpi xmlns:a14="http://schemas.microsoft.com/office/drawing/2010/main" val="0"/>
+              </a:ext>
+            </a:extLst>
+          </a:blip>
+          <a:stretch>
+            <a:fillRect/>
+          </a:stretch>
+        </p:blipFill>
+        <p:spPr>
+          <a:xfrm>
+            <a:off x="7920997" y="2484578"/>
+            <a:ext cx="643160" cy="643160"/>
           </a:xfrm>
           <a:prstGeom prst="rect">
             <a:avLst/>
           </a:prstGeom>
-          <a:noFill/>
-        </p:spPr>
-        <p:txBody>
-          <a:bodyPr wrap="square" rtlCol="0">
-            <a:spAutoFit/>
-          </a:bodyPr>
-          <a:lstStyle/>
-          <a:p>
-            <a:r>
-              <a:rPr lang="en-US" altLang="ja-JP" dirty="0">
-                <a:solidFill>
-                  <a:schemeClr val="bg1"/>
-                </a:solidFill>
-              </a:rPr>
-              <a:t>【</a:t>
-            </a:r>
-            <a:r>
-              <a:rPr lang="ja-JP" altLang="en-US" dirty="0">
-                <a:solidFill>
-                  <a:schemeClr val="bg1"/>
-                </a:solidFill>
-              </a:rPr>
-              <a:t>選択コマンド</a:t>
-            </a:r>
-            <a:r>
-              <a:rPr lang="en-US" altLang="ja-JP" dirty="0">
-                <a:solidFill>
-                  <a:schemeClr val="bg1"/>
-                </a:solidFill>
-              </a:rPr>
-              <a:t>】</a:t>
-            </a:r>
-          </a:p>
-          <a:p>
-            <a:endParaRPr lang="en-US" altLang="ja-JP" dirty="0">
-              <a:solidFill>
-                <a:schemeClr val="bg1"/>
-              </a:solidFill>
-            </a:endParaRPr>
-          </a:p>
-          <a:p>
-            <a:r>
-              <a:rPr lang="ja-JP" altLang="en-US" dirty="0">
-                <a:solidFill>
-                  <a:schemeClr val="bg1"/>
-                </a:solidFill>
-              </a:rPr>
-              <a:t>・</a:t>
-            </a:r>
-            <a:r>
-              <a:rPr lang="en-US" altLang="ja-JP" dirty="0">
-                <a:solidFill>
-                  <a:schemeClr val="bg1"/>
-                </a:solidFill>
-              </a:rPr>
-              <a:t>UI</a:t>
-            </a:r>
-            <a:r>
-              <a:rPr lang="ja-JP" altLang="en-US" dirty="0">
-                <a:solidFill>
-                  <a:schemeClr val="bg1"/>
-                </a:solidFill>
-              </a:rPr>
-              <a:t>の移動</a:t>
-            </a:r>
-            <a:r>
-              <a:rPr lang="en-US" altLang="ja-JP" dirty="0">
-                <a:solidFill>
-                  <a:schemeClr val="bg1"/>
-                </a:solidFill>
-              </a:rPr>
-              <a:t>	</a:t>
-            </a:r>
-            <a:r>
-              <a:rPr lang="ja-JP" altLang="en-US" dirty="0">
-                <a:solidFill>
-                  <a:schemeClr val="bg1"/>
-                </a:solidFill>
-              </a:rPr>
-              <a:t>：</a:t>
-            </a:r>
-            <a:r>
-              <a:rPr lang="en-US" altLang="ja-JP" dirty="0">
-                <a:solidFill>
-                  <a:schemeClr val="bg1"/>
-                </a:solidFill>
-              </a:rPr>
-              <a:t>[</a:t>
-            </a:r>
-            <a:r>
-              <a:rPr lang="ja-JP" altLang="en-US" dirty="0">
-                <a:solidFill>
-                  <a:schemeClr val="bg1"/>
-                </a:solidFill>
-              </a:rPr>
-              <a:t>↑</a:t>
-            </a:r>
-            <a:r>
-              <a:rPr lang="en-US" altLang="ja-JP" dirty="0">
-                <a:solidFill>
-                  <a:schemeClr val="bg1"/>
-                </a:solidFill>
-              </a:rPr>
-              <a:t>] [</a:t>
-            </a:r>
-            <a:r>
-              <a:rPr lang="ja-JP" altLang="en-US" dirty="0">
-                <a:solidFill>
-                  <a:schemeClr val="bg1"/>
-                </a:solidFill>
-              </a:rPr>
-              <a:t>↓</a:t>
-            </a:r>
-            <a:r>
-              <a:rPr lang="en-US" altLang="ja-JP" dirty="0">
-                <a:solidFill>
-                  <a:schemeClr val="bg1"/>
-                </a:solidFill>
-              </a:rPr>
-              <a:t>] [</a:t>
-            </a:r>
-            <a:r>
-              <a:rPr lang="ja-JP" altLang="en-US" dirty="0">
-                <a:solidFill>
-                  <a:schemeClr val="bg1"/>
-                </a:solidFill>
-              </a:rPr>
-              <a:t>←</a:t>
-            </a:r>
-            <a:r>
-              <a:rPr lang="en-US" altLang="ja-JP" dirty="0">
-                <a:solidFill>
-                  <a:schemeClr val="bg1"/>
-                </a:solidFill>
-              </a:rPr>
-              <a:t>][</a:t>
-            </a:r>
-            <a:r>
-              <a:rPr lang="ja-JP" altLang="en-US" dirty="0">
-                <a:solidFill>
-                  <a:schemeClr val="bg1"/>
-                </a:solidFill>
-              </a:rPr>
-              <a:t>→</a:t>
-            </a:r>
-            <a:r>
-              <a:rPr lang="en-US" altLang="ja-JP" dirty="0">
-                <a:solidFill>
-                  <a:schemeClr val="bg1"/>
-                </a:solidFill>
-              </a:rPr>
-              <a:t>]</a:t>
-            </a:r>
-            <a:endParaRPr lang="en-US" altLang="ja-JP" sz="1800" dirty="0">
-              <a:solidFill>
-                <a:schemeClr val="bg1"/>
-              </a:solidFill>
-              <a:latin typeface="+mn-ea"/>
-            </a:endParaRPr>
-          </a:p>
-          <a:p>
-            <a:r>
-              <a:rPr lang="ja-JP" altLang="en-US" dirty="0">
-                <a:solidFill>
-                  <a:schemeClr val="bg1"/>
-                </a:solidFill>
-                <a:latin typeface="+mn-ea"/>
-              </a:rPr>
-              <a:t>・決定＆解除</a:t>
-            </a:r>
-            <a:r>
-              <a:rPr lang="en-US" altLang="ja-JP" dirty="0">
-                <a:solidFill>
-                  <a:schemeClr val="bg1"/>
-                </a:solidFill>
-                <a:latin typeface="+mn-ea"/>
-              </a:rPr>
-              <a:t>	</a:t>
-            </a:r>
-            <a:r>
-              <a:rPr lang="ja-JP" altLang="en-US" dirty="0">
-                <a:solidFill>
-                  <a:schemeClr val="bg1"/>
-                </a:solidFill>
-                <a:latin typeface="+mn-ea"/>
-              </a:rPr>
-              <a:t>：</a:t>
-            </a:r>
-            <a:r>
-              <a:rPr lang="en-US" altLang="ja-JP" dirty="0">
-                <a:solidFill>
-                  <a:schemeClr val="bg1"/>
-                </a:solidFill>
-                <a:latin typeface="+mn-ea"/>
-              </a:rPr>
-              <a:t>Enter</a:t>
-            </a:r>
-            <a:r>
-              <a:rPr lang="ja-JP" altLang="en-US" dirty="0">
-                <a:solidFill>
-                  <a:schemeClr val="bg1"/>
-                </a:solidFill>
-                <a:latin typeface="+mn-ea"/>
-              </a:rPr>
-              <a:t>キー</a:t>
-            </a:r>
-            <a:endParaRPr lang="en-US" altLang="ja-JP" dirty="0">
-              <a:solidFill>
-                <a:schemeClr val="bg1"/>
-              </a:solidFill>
-              <a:latin typeface="+mn-ea"/>
-            </a:endParaRPr>
-          </a:p>
-          <a:p>
-            <a:r>
-              <a:rPr lang="ja-JP" altLang="en-US" dirty="0">
-                <a:solidFill>
-                  <a:schemeClr val="bg1"/>
-                </a:solidFill>
-                <a:latin typeface="+mn-ea"/>
-              </a:rPr>
-              <a:t>・タイトルに戻る：</a:t>
-            </a:r>
-            <a:r>
-              <a:rPr lang="en-US" altLang="ja-JP" dirty="0">
-                <a:solidFill>
-                  <a:schemeClr val="bg1"/>
-                </a:solidFill>
-                <a:latin typeface="+mn-ea"/>
-              </a:rPr>
-              <a:t>Tab</a:t>
-            </a:r>
-            <a:r>
-              <a:rPr lang="ja-JP" altLang="en-US" dirty="0">
-                <a:solidFill>
-                  <a:schemeClr val="bg1"/>
-                </a:solidFill>
-                <a:latin typeface="+mn-ea"/>
-              </a:rPr>
-              <a:t>キー</a:t>
-            </a:r>
-            <a:br>
-              <a:rPr lang="en-US" altLang="ja-JP" dirty="0">
-                <a:solidFill>
-                  <a:schemeClr val="bg1"/>
-                </a:solidFill>
-                <a:latin typeface="+mn-ea"/>
-              </a:rPr>
-            </a:br>
-            <a:r>
-              <a:rPr lang="ja-JP" altLang="en-US" dirty="0">
-                <a:solidFill>
-                  <a:schemeClr val="bg1"/>
-                </a:solidFill>
-                <a:latin typeface="+mn-ea"/>
-              </a:rPr>
-              <a:t>・ゲーム終了</a:t>
-            </a:r>
-            <a:r>
-              <a:rPr lang="en-US" altLang="ja-JP" dirty="0">
-                <a:solidFill>
-                  <a:schemeClr val="bg1"/>
-                </a:solidFill>
-                <a:latin typeface="+mn-ea"/>
-              </a:rPr>
-              <a:t>	</a:t>
-            </a:r>
-            <a:r>
-              <a:rPr lang="ja-JP" altLang="en-US" dirty="0">
-                <a:solidFill>
-                  <a:schemeClr val="bg1"/>
-                </a:solidFill>
-                <a:latin typeface="+mn-ea"/>
-              </a:rPr>
-              <a:t>：</a:t>
-            </a:r>
-            <a:r>
-              <a:rPr lang="en-US" altLang="ja-JP" dirty="0">
-                <a:solidFill>
-                  <a:schemeClr val="bg1"/>
-                </a:solidFill>
-                <a:latin typeface="+mn-ea"/>
-              </a:rPr>
-              <a:t>Esc</a:t>
-            </a:r>
-            <a:r>
-              <a:rPr lang="ja-JP" altLang="en-US" dirty="0">
-                <a:solidFill>
-                  <a:schemeClr val="bg1"/>
-                </a:solidFill>
-                <a:latin typeface="+mn-ea"/>
-              </a:rPr>
-              <a:t>キー</a:t>
-            </a:r>
-            <a:endParaRPr lang="en-US" altLang="ja-JP" dirty="0">
-              <a:solidFill>
-                <a:schemeClr val="bg1"/>
-              </a:solidFill>
-              <a:latin typeface="+mn-ea"/>
-            </a:endParaRPr>
-          </a:p>
-        </p:txBody>
-      </p:sp>
+        </p:spPr>
+      </p:pic>
+      <p:pic>
+        <p:nvPicPr>
+          <p:cNvPr id="35" name="図 34">
+            <a:extLst>
+              <a:ext uri="{FF2B5EF4-FFF2-40B4-BE49-F238E27FC236}">
+                <a16:creationId xmlns:a16="http://schemas.microsoft.com/office/drawing/2014/main" id="{986218ED-5CEF-4BE8-8F31-B5725E81D948}"/>
+              </a:ext>
+            </a:extLst>
+          </p:cNvPr>
+          <p:cNvPicPr>
+            <a:picLocks noChangeAspect="1"/>
+          </p:cNvPicPr>
+          <p:nvPr/>
+        </p:nvPicPr>
+        <p:blipFill>
+          <a:blip r:embed="rId14">
+            <a:extLst>
+              <a:ext uri="{28A0092B-C50C-407E-A947-70E740481C1C}">
+                <a14:useLocalDpi xmlns:a14="http://schemas.microsoft.com/office/drawing/2010/main" val="0"/>
+              </a:ext>
+            </a:extLst>
+          </a:blip>
+          <a:stretch>
+            <a:fillRect/>
+          </a:stretch>
+        </p:blipFill>
+        <p:spPr>
+          <a:xfrm>
+            <a:off x="8572870" y="3646855"/>
+            <a:ext cx="663535" cy="663535"/>
+          </a:xfrm>
+          <a:prstGeom prst="rect">
+            <a:avLst/>
+          </a:prstGeom>
+        </p:spPr>
+      </p:pic>
+      <p:pic>
+        <p:nvPicPr>
+          <p:cNvPr id="37" name="図 36">
+            <a:extLst>
+              <a:ext uri="{FF2B5EF4-FFF2-40B4-BE49-F238E27FC236}">
+                <a16:creationId xmlns:a16="http://schemas.microsoft.com/office/drawing/2014/main" id="{BA843374-2646-4428-AD8C-E8E8FCB98FA8}"/>
+              </a:ext>
+            </a:extLst>
+          </p:cNvPr>
+          <p:cNvPicPr>
+            <a:picLocks noChangeAspect="1"/>
+          </p:cNvPicPr>
+          <p:nvPr/>
+        </p:nvPicPr>
+        <p:blipFill>
+          <a:blip r:embed="rId15">
+            <a:extLst>
+              <a:ext uri="{28A0092B-C50C-407E-A947-70E740481C1C}">
+                <a14:useLocalDpi xmlns:a14="http://schemas.microsoft.com/office/drawing/2010/main" val="0"/>
+              </a:ext>
+            </a:extLst>
+          </a:blip>
+          <a:stretch>
+            <a:fillRect/>
+          </a:stretch>
+        </p:blipFill>
+        <p:spPr>
+          <a:xfrm>
+            <a:off x="7929963" y="3646856"/>
+            <a:ext cx="663534" cy="663534"/>
+          </a:xfrm>
+          <a:prstGeom prst="rect">
+            <a:avLst/>
+          </a:prstGeom>
+        </p:spPr>
+      </p:pic>
+      <p:pic>
+        <p:nvPicPr>
+          <p:cNvPr id="39" name="図 38">
+            <a:extLst>
+              <a:ext uri="{FF2B5EF4-FFF2-40B4-BE49-F238E27FC236}">
+                <a16:creationId xmlns:a16="http://schemas.microsoft.com/office/drawing/2014/main" id="{A4A08B59-8EF0-4DE4-A86B-081CFED60A0A}"/>
+              </a:ext>
+            </a:extLst>
+          </p:cNvPr>
+          <p:cNvPicPr>
+            <a:picLocks noChangeAspect="1"/>
+          </p:cNvPicPr>
+          <p:nvPr/>
+        </p:nvPicPr>
+        <p:blipFill>
+          <a:blip r:embed="rId16">
+            <a:extLst>
+              <a:ext uri="{28A0092B-C50C-407E-A947-70E740481C1C}">
+                <a14:useLocalDpi xmlns:a14="http://schemas.microsoft.com/office/drawing/2010/main" val="0"/>
+              </a:ext>
+            </a:extLst>
+          </a:blip>
+          <a:stretch>
+            <a:fillRect/>
+          </a:stretch>
+        </p:blipFill>
+        <p:spPr>
+          <a:xfrm>
+            <a:off x="9275054" y="3646854"/>
+            <a:ext cx="663535" cy="663535"/>
+          </a:xfrm>
+          <a:prstGeom prst="rect">
+            <a:avLst/>
+          </a:prstGeom>
+        </p:spPr>
+      </p:pic>
+      <p:pic>
+        <p:nvPicPr>
+          <p:cNvPr id="41" name="図 40">
+            <a:extLst>
+              <a:ext uri="{FF2B5EF4-FFF2-40B4-BE49-F238E27FC236}">
+                <a16:creationId xmlns:a16="http://schemas.microsoft.com/office/drawing/2014/main" id="{BB47DAD2-BDDD-4BEF-A343-B23ED1D99E17}"/>
+              </a:ext>
+            </a:extLst>
+          </p:cNvPr>
+          <p:cNvPicPr>
+            <a:picLocks noChangeAspect="1"/>
+          </p:cNvPicPr>
+          <p:nvPr/>
+        </p:nvPicPr>
+        <p:blipFill>
+          <a:blip r:embed="rId17">
+            <a:extLst>
+              <a:ext uri="{28A0092B-C50C-407E-A947-70E740481C1C}">
+                <a14:useLocalDpi xmlns:a14="http://schemas.microsoft.com/office/drawing/2010/main" val="0"/>
+              </a:ext>
+            </a:extLst>
+          </a:blip>
+          <a:stretch>
+            <a:fillRect/>
+          </a:stretch>
+        </p:blipFill>
+        <p:spPr>
+          <a:xfrm>
+            <a:off x="9938589" y="3646855"/>
+            <a:ext cx="663534" cy="663534"/>
+          </a:xfrm>
+          <a:prstGeom prst="rect">
+            <a:avLst/>
+          </a:prstGeom>
+        </p:spPr>
+      </p:pic>
+      <p:pic>
+        <p:nvPicPr>
+          <p:cNvPr id="45" name="図 44">
+            <a:extLst>
+              <a:ext uri="{FF2B5EF4-FFF2-40B4-BE49-F238E27FC236}">
+                <a16:creationId xmlns:a16="http://schemas.microsoft.com/office/drawing/2014/main" id="{DF4098DD-5A9C-4D24-B6EF-89226EB2FB23}"/>
+              </a:ext>
+            </a:extLst>
+          </p:cNvPr>
+          <p:cNvPicPr>
+            <a:picLocks noChangeAspect="1"/>
+          </p:cNvPicPr>
+          <p:nvPr/>
+        </p:nvPicPr>
+        <p:blipFill>
+          <a:blip r:embed="rId18">
+            <a:extLst>
+              <a:ext uri="{28A0092B-C50C-407E-A947-70E740481C1C}">
+                <a14:useLocalDpi xmlns:a14="http://schemas.microsoft.com/office/drawing/2010/main" val="0"/>
+              </a:ext>
+            </a:extLst>
+          </a:blip>
+          <a:stretch>
+            <a:fillRect/>
+          </a:stretch>
+        </p:blipFill>
+        <p:spPr>
+          <a:xfrm>
+            <a:off x="7920997" y="4417726"/>
+            <a:ext cx="625278" cy="625278"/>
+          </a:xfrm>
+          <a:prstGeom prst="rect">
+            <a:avLst/>
+          </a:prstGeom>
+        </p:spPr>
+      </p:pic>
+      <p:pic>
+        <p:nvPicPr>
+          <p:cNvPr id="47" name="図 46">
+            <a:extLst>
+              <a:ext uri="{FF2B5EF4-FFF2-40B4-BE49-F238E27FC236}">
+                <a16:creationId xmlns:a16="http://schemas.microsoft.com/office/drawing/2014/main" id="{8F7C966E-3804-4F78-876A-0218CC492D27}"/>
+              </a:ext>
+            </a:extLst>
+          </p:cNvPr>
+          <p:cNvPicPr>
+            <a:picLocks noChangeAspect="1"/>
+          </p:cNvPicPr>
+          <p:nvPr/>
+        </p:nvPicPr>
+        <p:blipFill>
+          <a:blip r:embed="rId19">
+            <a:extLst>
+              <a:ext uri="{28A0092B-C50C-407E-A947-70E740481C1C}">
+                <a14:useLocalDpi xmlns:a14="http://schemas.microsoft.com/office/drawing/2010/main" val="0"/>
+              </a:ext>
+            </a:extLst>
+          </a:blip>
+          <a:stretch>
+            <a:fillRect/>
+          </a:stretch>
+        </p:blipFill>
+        <p:spPr>
+          <a:xfrm>
+            <a:off x="7968517" y="5684346"/>
+            <a:ext cx="586426" cy="586426"/>
+          </a:xfrm>
+          <a:prstGeom prst="rect">
+            <a:avLst/>
+          </a:prstGeom>
+        </p:spPr>
+      </p:pic>
+      <p:pic>
+        <p:nvPicPr>
+          <p:cNvPr id="48" name="図 47">
+            <a:extLst>
+              <a:ext uri="{FF2B5EF4-FFF2-40B4-BE49-F238E27FC236}">
+                <a16:creationId xmlns:a16="http://schemas.microsoft.com/office/drawing/2014/main" id="{5D4B9ADB-A276-49C2-86BA-FB7C251124BD}"/>
+              </a:ext>
+            </a:extLst>
+          </p:cNvPr>
+          <p:cNvPicPr>
+            <a:picLocks noChangeAspect="1"/>
+          </p:cNvPicPr>
+          <p:nvPr/>
+        </p:nvPicPr>
+        <p:blipFill>
+          <a:blip r:embed="rId12">
+            <a:extLst>
+              <a:ext uri="{28A0092B-C50C-407E-A947-70E740481C1C}">
+                <a14:useLocalDpi xmlns:a14="http://schemas.microsoft.com/office/drawing/2010/main" val="0"/>
+              </a:ext>
+            </a:extLst>
+          </a:blip>
+          <a:stretch>
+            <a:fillRect/>
+          </a:stretch>
+        </p:blipFill>
+        <p:spPr>
+          <a:xfrm>
+            <a:off x="7806767" y="1722873"/>
+            <a:ext cx="911995" cy="911995"/>
+          </a:xfrm>
+          <a:prstGeom prst="rect">
+            <a:avLst/>
+          </a:prstGeom>
+        </p:spPr>
+      </p:pic>
     </p:spTree>
     <p:extLst>
       <p:ext uri="{BB962C8B-B14F-4D97-AF65-F5344CB8AC3E}">
@@ -6047,6 +6753,2071 @@
           <a:chExt cx="0" cy="0"/>
         </a:xfrm>
       </p:grpSpPr>
+      <p:pic>
+        <p:nvPicPr>
+          <p:cNvPr id="5" name="図 4">
+            <a:extLst>
+              <a:ext uri="{FF2B5EF4-FFF2-40B4-BE49-F238E27FC236}">
+                <a16:creationId xmlns:a16="http://schemas.microsoft.com/office/drawing/2014/main" id="{8171048D-035D-411F-99B6-8938408D0A57}"/>
+              </a:ext>
+            </a:extLst>
+          </p:cNvPr>
+          <p:cNvPicPr>
+            <a:picLocks noChangeAspect="1"/>
+          </p:cNvPicPr>
+          <p:nvPr/>
+        </p:nvPicPr>
+        <p:blipFill>
+          <a:blip r:embed="rId2">
+            <a:extLst>
+              <a:ext uri="{28A0092B-C50C-407E-A947-70E740481C1C}">
+                <a14:useLocalDpi xmlns:a14="http://schemas.microsoft.com/office/drawing/2010/main" val="0"/>
+              </a:ext>
+            </a:extLst>
+          </a:blip>
+          <a:stretch>
+            <a:fillRect/>
+          </a:stretch>
+        </p:blipFill>
+        <p:spPr>
+          <a:xfrm>
+            <a:off x="-18394" y="-15228"/>
+            <a:ext cx="12246141" cy="6888455"/>
+          </a:xfrm>
+          <a:prstGeom prst="rect">
+            <a:avLst/>
+          </a:prstGeom>
+        </p:spPr>
+      </p:pic>
+      <p:sp>
+        <p:nvSpPr>
+          <p:cNvPr id="2" name="タイトル 1">
+            <a:extLst>
+              <a:ext uri="{FF2B5EF4-FFF2-40B4-BE49-F238E27FC236}">
+                <a16:creationId xmlns:a16="http://schemas.microsoft.com/office/drawing/2014/main" id="{646F406E-6800-42C8-A3AF-63C86E852BA7}"/>
+              </a:ext>
+            </a:extLst>
+          </p:cNvPr>
+          <p:cNvSpPr>
+            <a:spLocks noGrp="1"/>
+          </p:cNvSpPr>
+          <p:nvPr>
+            <p:ph type="title"/>
+          </p:nvPr>
+        </p:nvSpPr>
+        <p:spPr>
+          <a:xfrm>
+            <a:off x="585952" y="386238"/>
+            <a:ext cx="10515600" cy="1325563"/>
+          </a:xfrm>
+        </p:spPr>
+        <p:txBody>
+          <a:bodyPr/>
+          <a:lstStyle/>
+          <a:p>
+            <a:r>
+              <a:rPr kumimoji="1" lang="en-US" altLang="ja-JP" dirty="0">
+                <a:solidFill>
+                  <a:schemeClr val="bg1"/>
+                </a:solidFill>
+              </a:rPr>
+              <a:t>【</a:t>
+            </a:r>
+            <a:r>
+              <a:rPr lang="ja-JP" altLang="en-US" dirty="0">
+                <a:solidFill>
+                  <a:schemeClr val="bg1"/>
+                </a:solidFill>
+              </a:rPr>
+              <a:t>ゲームパッド</a:t>
+            </a:r>
+            <a:r>
+              <a:rPr kumimoji="1" lang="ja-JP" altLang="en-US" dirty="0">
+                <a:solidFill>
+                  <a:schemeClr val="bg1"/>
+                </a:solidFill>
+              </a:rPr>
+              <a:t>操作方法</a:t>
+            </a:r>
+            <a:r>
+              <a:rPr kumimoji="1" lang="en-US" altLang="ja-JP" dirty="0">
+                <a:solidFill>
+                  <a:schemeClr val="bg1"/>
+                </a:solidFill>
+              </a:rPr>
+              <a:t>】</a:t>
+            </a:r>
+            <a:endParaRPr kumimoji="1" lang="ja-JP" altLang="en-US" dirty="0">
+              <a:solidFill>
+                <a:schemeClr val="bg1"/>
+              </a:solidFill>
+            </a:endParaRPr>
+          </a:p>
+        </p:txBody>
+      </p:sp>
+      <p:sp>
+        <p:nvSpPr>
+          <p:cNvPr id="8" name="テキスト ボックス 7">
+            <a:extLst>
+              <a:ext uri="{FF2B5EF4-FFF2-40B4-BE49-F238E27FC236}">
+                <a16:creationId xmlns:a16="http://schemas.microsoft.com/office/drawing/2014/main" id="{9FA20AF2-CDB0-4DC3-AA69-573B362A4EA4}"/>
+              </a:ext>
+            </a:extLst>
+          </p:cNvPr>
+          <p:cNvSpPr txBox="1"/>
+          <p:nvPr/>
+        </p:nvSpPr>
+        <p:spPr>
+          <a:xfrm>
+            <a:off x="585952" y="1711800"/>
+            <a:ext cx="3205655" cy="4801314"/>
+          </a:xfrm>
+          <a:prstGeom prst="rect">
+            <a:avLst/>
+          </a:prstGeom>
+          <a:noFill/>
+        </p:spPr>
+        <p:txBody>
+          <a:bodyPr wrap="square" rtlCol="0">
+            <a:spAutoFit/>
+          </a:bodyPr>
+          <a:lstStyle/>
+          <a:p>
+            <a:r>
+              <a:rPr lang="en-US" altLang="ja-JP" dirty="0">
+                <a:solidFill>
+                  <a:schemeClr val="bg1"/>
+                </a:solidFill>
+              </a:rPr>
+              <a:t>【</a:t>
+            </a:r>
+            <a:r>
+              <a:rPr lang="ja-JP" altLang="en-US" dirty="0">
+                <a:solidFill>
+                  <a:schemeClr val="bg1"/>
+                </a:solidFill>
+              </a:rPr>
+              <a:t>ゲームパッドコマンド</a:t>
+            </a:r>
+            <a:r>
+              <a:rPr lang="en-US" altLang="ja-JP" dirty="0">
+                <a:solidFill>
+                  <a:schemeClr val="bg1"/>
+                </a:solidFill>
+              </a:rPr>
+              <a:t>】</a:t>
+            </a:r>
+          </a:p>
+          <a:p>
+            <a:endParaRPr lang="en-US" altLang="ja-JP" dirty="0">
+              <a:solidFill>
+                <a:schemeClr val="bg1"/>
+              </a:solidFill>
+            </a:endParaRPr>
+          </a:p>
+          <a:p>
+            <a:r>
+              <a:rPr lang="ja-JP" altLang="en-US" dirty="0">
+                <a:solidFill>
+                  <a:schemeClr val="bg1"/>
+                </a:solidFill>
+              </a:rPr>
+              <a:t>・移動　　：</a:t>
+            </a:r>
+            <a:endParaRPr lang="en-US" altLang="ja-JP" dirty="0">
+              <a:solidFill>
+                <a:schemeClr val="bg1"/>
+              </a:solidFill>
+            </a:endParaRPr>
+          </a:p>
+          <a:p>
+            <a:endParaRPr lang="en-US" altLang="ja-JP" dirty="0">
+              <a:solidFill>
+                <a:schemeClr val="bg1"/>
+              </a:solidFill>
+            </a:endParaRPr>
+          </a:p>
+          <a:p>
+            <a:r>
+              <a:rPr lang="ja-JP" altLang="en-US" dirty="0">
+                <a:solidFill>
+                  <a:schemeClr val="bg1"/>
+                </a:solidFill>
+              </a:rPr>
+              <a:t>・パンチ弱：</a:t>
+            </a:r>
+            <a:endParaRPr lang="en-US" altLang="ja-JP" dirty="0">
+              <a:solidFill>
+                <a:schemeClr val="bg1"/>
+              </a:solidFill>
+            </a:endParaRPr>
+          </a:p>
+          <a:p>
+            <a:endParaRPr lang="en-US" altLang="ja-JP" dirty="0">
+              <a:solidFill>
+                <a:schemeClr val="bg1"/>
+              </a:solidFill>
+            </a:endParaRPr>
+          </a:p>
+          <a:p>
+            <a:r>
+              <a:rPr lang="en-US" altLang="ja-JP" dirty="0">
+                <a:solidFill>
+                  <a:schemeClr val="bg1"/>
+                </a:solidFill>
+              </a:rPr>
+              <a:t>	</a:t>
+            </a:r>
+            <a:r>
+              <a:rPr lang="ja-JP" altLang="en-US" dirty="0">
+                <a:solidFill>
+                  <a:schemeClr val="bg1"/>
+                </a:solidFill>
+              </a:rPr>
+              <a:t>中：</a:t>
+            </a:r>
+            <a:endParaRPr lang="en-US" altLang="ja-JP" dirty="0">
+              <a:solidFill>
+                <a:schemeClr val="bg1"/>
+              </a:solidFill>
+            </a:endParaRPr>
+          </a:p>
+          <a:p>
+            <a:endParaRPr lang="en-US" altLang="ja-JP" dirty="0">
+              <a:solidFill>
+                <a:schemeClr val="bg1"/>
+              </a:solidFill>
+            </a:endParaRPr>
+          </a:p>
+          <a:p>
+            <a:r>
+              <a:rPr lang="en-US" altLang="ja-JP" dirty="0">
+                <a:solidFill>
+                  <a:schemeClr val="bg1"/>
+                </a:solidFill>
+              </a:rPr>
+              <a:t>	</a:t>
+            </a:r>
+            <a:r>
+              <a:rPr lang="ja-JP" altLang="en-US" dirty="0">
+                <a:solidFill>
+                  <a:schemeClr val="bg1"/>
+                </a:solidFill>
+              </a:rPr>
+              <a:t>強：</a:t>
+            </a:r>
+            <a:endParaRPr lang="en-US" altLang="ja-JP" dirty="0">
+              <a:solidFill>
+                <a:schemeClr val="bg1"/>
+              </a:solidFill>
+            </a:endParaRPr>
+          </a:p>
+          <a:p>
+            <a:endParaRPr lang="en-US" altLang="ja-JP" dirty="0">
+              <a:solidFill>
+                <a:schemeClr val="bg1"/>
+              </a:solidFill>
+            </a:endParaRPr>
+          </a:p>
+          <a:p>
+            <a:r>
+              <a:rPr lang="ja-JP" altLang="en-US" dirty="0">
+                <a:solidFill>
+                  <a:schemeClr val="bg1"/>
+                </a:solidFill>
+              </a:rPr>
+              <a:t>・キック弱：</a:t>
+            </a:r>
+            <a:endParaRPr lang="en-US" altLang="ja-JP" dirty="0">
+              <a:solidFill>
+                <a:schemeClr val="bg1"/>
+              </a:solidFill>
+            </a:endParaRPr>
+          </a:p>
+          <a:p>
+            <a:endParaRPr lang="en-US" altLang="ja-JP" dirty="0">
+              <a:solidFill>
+                <a:schemeClr val="bg1"/>
+              </a:solidFill>
+            </a:endParaRPr>
+          </a:p>
+          <a:p>
+            <a:r>
+              <a:rPr lang="en-US" altLang="ja-JP" dirty="0">
+                <a:solidFill>
+                  <a:schemeClr val="bg1"/>
+                </a:solidFill>
+              </a:rPr>
+              <a:t>	</a:t>
+            </a:r>
+            <a:r>
+              <a:rPr lang="ja-JP" altLang="en-US" dirty="0">
+                <a:solidFill>
+                  <a:schemeClr val="bg1"/>
+                </a:solidFill>
+              </a:rPr>
+              <a:t>中：</a:t>
+            </a:r>
+            <a:endParaRPr lang="en-US" altLang="ja-JP" dirty="0">
+              <a:solidFill>
+                <a:schemeClr val="bg1"/>
+              </a:solidFill>
+            </a:endParaRPr>
+          </a:p>
+          <a:p>
+            <a:endParaRPr lang="en-US" altLang="ja-JP" dirty="0">
+              <a:solidFill>
+                <a:schemeClr val="bg1"/>
+              </a:solidFill>
+            </a:endParaRPr>
+          </a:p>
+          <a:p>
+            <a:r>
+              <a:rPr lang="en-US" altLang="ja-JP" dirty="0">
+                <a:solidFill>
+                  <a:schemeClr val="bg1"/>
+                </a:solidFill>
+              </a:rPr>
+              <a:t>	</a:t>
+            </a:r>
+            <a:r>
+              <a:rPr lang="ja-JP" altLang="en-US" dirty="0">
+                <a:solidFill>
+                  <a:schemeClr val="bg1"/>
+                </a:solidFill>
+              </a:rPr>
+              <a:t>強：</a:t>
+            </a:r>
+            <a:endParaRPr lang="en-US" altLang="ja-JP" dirty="0">
+              <a:solidFill>
+                <a:schemeClr val="bg1"/>
+              </a:solidFill>
+            </a:endParaRPr>
+          </a:p>
+          <a:p>
+            <a:endParaRPr lang="en-US" altLang="ja-JP" dirty="0">
+              <a:solidFill>
+                <a:schemeClr val="bg1"/>
+              </a:solidFill>
+            </a:endParaRPr>
+          </a:p>
+          <a:p>
+            <a:r>
+              <a:rPr lang="ja-JP" altLang="en-US" dirty="0">
+                <a:solidFill>
+                  <a:schemeClr val="bg1"/>
+                </a:solidFill>
+              </a:rPr>
+              <a:t>・ガード　：</a:t>
+            </a:r>
+            <a:endParaRPr lang="en-US" altLang="ja-JP" dirty="0">
+              <a:solidFill>
+                <a:schemeClr val="bg1"/>
+              </a:solidFill>
+            </a:endParaRPr>
+          </a:p>
+        </p:txBody>
+      </p:sp>
+      <p:sp>
+        <p:nvSpPr>
+          <p:cNvPr id="11" name="テキスト ボックス 10">
+            <a:extLst>
+              <a:ext uri="{FF2B5EF4-FFF2-40B4-BE49-F238E27FC236}">
+                <a16:creationId xmlns:a16="http://schemas.microsoft.com/office/drawing/2014/main" id="{539E2AC6-25FF-4C71-A9FD-32E00FA4E5AF}"/>
+              </a:ext>
+            </a:extLst>
+          </p:cNvPr>
+          <p:cNvSpPr txBox="1"/>
+          <p:nvPr/>
+        </p:nvSpPr>
+        <p:spPr>
+          <a:xfrm>
+            <a:off x="4091153" y="1711800"/>
+            <a:ext cx="4566745" cy="1477328"/>
+          </a:xfrm>
+          <a:prstGeom prst="rect">
+            <a:avLst/>
+          </a:prstGeom>
+          <a:noFill/>
+        </p:spPr>
+        <p:txBody>
+          <a:bodyPr wrap="square" rtlCol="0">
+            <a:spAutoFit/>
+          </a:bodyPr>
+          <a:lstStyle/>
+          <a:p>
+            <a:r>
+              <a:rPr lang="en-US" altLang="ja-JP" dirty="0">
+                <a:solidFill>
+                  <a:schemeClr val="bg1"/>
+                </a:solidFill>
+              </a:rPr>
+              <a:t>【</a:t>
+            </a:r>
+            <a:r>
+              <a:rPr lang="ja-JP" altLang="en-US" dirty="0">
+                <a:solidFill>
+                  <a:schemeClr val="bg1"/>
+                </a:solidFill>
+              </a:rPr>
+              <a:t>トレーニング専用コマンド</a:t>
+            </a:r>
+            <a:r>
+              <a:rPr lang="en-US" altLang="ja-JP" dirty="0">
+                <a:solidFill>
+                  <a:schemeClr val="bg1"/>
+                </a:solidFill>
+              </a:rPr>
+              <a:t>】</a:t>
+            </a:r>
+          </a:p>
+          <a:p>
+            <a:endParaRPr lang="en-US" altLang="ja-JP" dirty="0">
+              <a:solidFill>
+                <a:schemeClr val="bg1"/>
+              </a:solidFill>
+            </a:endParaRPr>
+          </a:p>
+          <a:p>
+            <a:r>
+              <a:rPr lang="ja-JP" altLang="en-US" dirty="0">
+                <a:solidFill>
+                  <a:schemeClr val="bg1"/>
+                </a:solidFill>
+              </a:rPr>
+              <a:t>・オプション：</a:t>
+            </a:r>
+            <a:endParaRPr lang="en-US" altLang="ja-JP" sz="1800" dirty="0">
+              <a:solidFill>
+                <a:schemeClr val="bg1"/>
+              </a:solidFill>
+              <a:latin typeface="+mn-ea"/>
+            </a:endParaRPr>
+          </a:p>
+          <a:p>
+            <a:endParaRPr lang="en-US" altLang="ja-JP" dirty="0">
+              <a:solidFill>
+                <a:schemeClr val="bg1"/>
+              </a:solidFill>
+              <a:latin typeface="+mn-ea"/>
+            </a:endParaRPr>
+          </a:p>
+          <a:p>
+            <a:r>
+              <a:rPr lang="ja-JP" altLang="en-US" dirty="0">
+                <a:solidFill>
+                  <a:schemeClr val="bg1"/>
+                </a:solidFill>
+                <a:latin typeface="+mn-ea"/>
+              </a:rPr>
+              <a:t>・モード切替：</a:t>
+            </a:r>
+            <a:endParaRPr lang="en-US" altLang="ja-JP" dirty="0">
+              <a:solidFill>
+                <a:schemeClr val="bg1"/>
+              </a:solidFill>
+              <a:latin typeface="+mn-ea"/>
+            </a:endParaRPr>
+          </a:p>
+        </p:txBody>
+      </p:sp>
+      <p:sp>
+        <p:nvSpPr>
+          <p:cNvPr id="9" name="テキスト ボックス 8">
+            <a:extLst>
+              <a:ext uri="{FF2B5EF4-FFF2-40B4-BE49-F238E27FC236}">
+                <a16:creationId xmlns:a16="http://schemas.microsoft.com/office/drawing/2014/main" id="{B96DCC9C-7B0B-45A2-97C7-6AE6A0824091}"/>
+              </a:ext>
+            </a:extLst>
+          </p:cNvPr>
+          <p:cNvSpPr txBox="1"/>
+          <p:nvPr/>
+        </p:nvSpPr>
+        <p:spPr>
+          <a:xfrm>
+            <a:off x="4091153" y="3391874"/>
+            <a:ext cx="4566745" cy="2585323"/>
+          </a:xfrm>
+          <a:prstGeom prst="rect">
+            <a:avLst/>
+          </a:prstGeom>
+          <a:noFill/>
+        </p:spPr>
+        <p:txBody>
+          <a:bodyPr wrap="square" rtlCol="0">
+            <a:spAutoFit/>
+          </a:bodyPr>
+          <a:lstStyle/>
+          <a:p>
+            <a:r>
+              <a:rPr lang="en-US" altLang="ja-JP" dirty="0">
+                <a:solidFill>
+                  <a:schemeClr val="bg1"/>
+                </a:solidFill>
+              </a:rPr>
+              <a:t>【</a:t>
+            </a:r>
+            <a:r>
+              <a:rPr lang="ja-JP" altLang="en-US" dirty="0">
+                <a:solidFill>
+                  <a:schemeClr val="bg1"/>
+                </a:solidFill>
+              </a:rPr>
+              <a:t>選択コマンド</a:t>
+            </a:r>
+            <a:r>
+              <a:rPr lang="en-US" altLang="ja-JP" dirty="0">
+                <a:solidFill>
+                  <a:schemeClr val="bg1"/>
+                </a:solidFill>
+              </a:rPr>
+              <a:t>】</a:t>
+            </a:r>
+          </a:p>
+          <a:p>
+            <a:endParaRPr lang="en-US" altLang="ja-JP" dirty="0">
+              <a:solidFill>
+                <a:schemeClr val="bg1"/>
+              </a:solidFill>
+            </a:endParaRPr>
+          </a:p>
+          <a:p>
+            <a:r>
+              <a:rPr lang="ja-JP" altLang="en-US" dirty="0">
+                <a:solidFill>
+                  <a:schemeClr val="bg1"/>
+                </a:solidFill>
+              </a:rPr>
+              <a:t>・</a:t>
+            </a:r>
+            <a:r>
+              <a:rPr lang="en-US" altLang="ja-JP" dirty="0">
+                <a:solidFill>
+                  <a:schemeClr val="bg1"/>
+                </a:solidFill>
+              </a:rPr>
+              <a:t>UI</a:t>
+            </a:r>
+            <a:r>
+              <a:rPr lang="ja-JP" altLang="en-US" dirty="0">
+                <a:solidFill>
+                  <a:schemeClr val="bg1"/>
+                </a:solidFill>
+              </a:rPr>
+              <a:t>の移動</a:t>
+            </a:r>
+            <a:r>
+              <a:rPr lang="en-US" altLang="ja-JP" dirty="0">
+                <a:solidFill>
+                  <a:schemeClr val="bg1"/>
+                </a:solidFill>
+              </a:rPr>
+              <a:t>	</a:t>
+            </a:r>
+            <a:r>
+              <a:rPr lang="ja-JP" altLang="en-US" dirty="0">
+                <a:solidFill>
+                  <a:schemeClr val="bg1"/>
+                </a:solidFill>
+              </a:rPr>
+              <a:t>：</a:t>
+            </a:r>
+            <a:endParaRPr lang="en-US" altLang="ja-JP" dirty="0">
+              <a:solidFill>
+                <a:schemeClr val="bg1"/>
+              </a:solidFill>
+            </a:endParaRPr>
+          </a:p>
+          <a:p>
+            <a:endParaRPr lang="en-US" altLang="ja-JP" dirty="0">
+              <a:solidFill>
+                <a:schemeClr val="bg1"/>
+              </a:solidFill>
+              <a:latin typeface="+mn-ea"/>
+            </a:endParaRPr>
+          </a:p>
+          <a:p>
+            <a:r>
+              <a:rPr lang="ja-JP" altLang="en-US" dirty="0">
+                <a:solidFill>
+                  <a:schemeClr val="bg1"/>
+                </a:solidFill>
+                <a:latin typeface="+mn-ea"/>
+              </a:rPr>
+              <a:t>・コマンド一覧　：</a:t>
+            </a:r>
+            <a:endParaRPr lang="en-US" altLang="ja-JP" sz="1800" dirty="0">
+              <a:solidFill>
+                <a:schemeClr val="bg1"/>
+              </a:solidFill>
+              <a:latin typeface="+mn-ea"/>
+            </a:endParaRPr>
+          </a:p>
+          <a:p>
+            <a:endParaRPr lang="en-US" altLang="ja-JP" dirty="0">
+              <a:solidFill>
+                <a:schemeClr val="bg1"/>
+              </a:solidFill>
+              <a:latin typeface="+mn-ea"/>
+            </a:endParaRPr>
+          </a:p>
+          <a:p>
+            <a:r>
+              <a:rPr lang="ja-JP" altLang="en-US" dirty="0">
+                <a:solidFill>
+                  <a:schemeClr val="bg1"/>
+                </a:solidFill>
+                <a:latin typeface="+mn-ea"/>
+              </a:rPr>
+              <a:t>・決定＆解除</a:t>
+            </a:r>
+            <a:r>
+              <a:rPr lang="en-US" altLang="ja-JP" dirty="0">
+                <a:solidFill>
+                  <a:schemeClr val="bg1"/>
+                </a:solidFill>
+                <a:latin typeface="+mn-ea"/>
+              </a:rPr>
+              <a:t>	</a:t>
+            </a:r>
+            <a:r>
+              <a:rPr lang="ja-JP" altLang="en-US" dirty="0">
+                <a:solidFill>
+                  <a:schemeClr val="bg1"/>
+                </a:solidFill>
+                <a:latin typeface="+mn-ea"/>
+              </a:rPr>
+              <a:t>：</a:t>
+            </a:r>
+            <a:endParaRPr lang="en-US" altLang="ja-JP" dirty="0">
+              <a:solidFill>
+                <a:schemeClr val="bg1"/>
+              </a:solidFill>
+              <a:latin typeface="+mn-ea"/>
+            </a:endParaRPr>
+          </a:p>
+          <a:p>
+            <a:endParaRPr lang="en-US" altLang="ja-JP" dirty="0">
+              <a:solidFill>
+                <a:schemeClr val="bg1"/>
+              </a:solidFill>
+              <a:latin typeface="+mn-ea"/>
+            </a:endParaRPr>
+          </a:p>
+          <a:p>
+            <a:r>
+              <a:rPr lang="ja-JP" altLang="en-US" dirty="0">
+                <a:solidFill>
+                  <a:schemeClr val="bg1"/>
+                </a:solidFill>
+                <a:latin typeface="+mn-ea"/>
+              </a:rPr>
+              <a:t>・タイトルへ＆ゲーム終了：</a:t>
+            </a:r>
+            <a:endParaRPr lang="en-US" altLang="ja-JP" dirty="0">
+              <a:solidFill>
+                <a:schemeClr val="bg1"/>
+              </a:solidFill>
+              <a:latin typeface="+mn-ea"/>
+            </a:endParaRPr>
+          </a:p>
+        </p:txBody>
+      </p:sp>
+      <p:pic>
+        <p:nvPicPr>
+          <p:cNvPr id="6" name="図 5">
+            <a:extLst>
+              <a:ext uri="{FF2B5EF4-FFF2-40B4-BE49-F238E27FC236}">
+                <a16:creationId xmlns:a16="http://schemas.microsoft.com/office/drawing/2014/main" id="{F117836F-459E-4722-8AF2-DF87775D628A}"/>
+              </a:ext>
+            </a:extLst>
+          </p:cNvPr>
+          <p:cNvPicPr>
+            <a:picLocks noChangeAspect="1"/>
+          </p:cNvPicPr>
+          <p:nvPr/>
+        </p:nvPicPr>
+        <p:blipFill>
+          <a:blip r:embed="rId3">
+            <a:extLst>
+              <a:ext uri="{28A0092B-C50C-407E-A947-70E740481C1C}">
+                <a14:useLocalDpi xmlns:a14="http://schemas.microsoft.com/office/drawing/2010/main" val="0"/>
+              </a:ext>
+            </a:extLst>
+          </a:blip>
+          <a:stretch>
+            <a:fillRect/>
+          </a:stretch>
+        </p:blipFill>
+        <p:spPr>
+          <a:xfrm>
+            <a:off x="2147766" y="4350536"/>
+            <a:ext cx="609600" cy="609600"/>
+          </a:xfrm>
+          <a:prstGeom prst="rect">
+            <a:avLst/>
+          </a:prstGeom>
+        </p:spPr>
+      </p:pic>
+      <p:pic>
+        <p:nvPicPr>
+          <p:cNvPr id="13" name="図 12">
+            <a:extLst>
+              <a:ext uri="{FF2B5EF4-FFF2-40B4-BE49-F238E27FC236}">
+                <a16:creationId xmlns:a16="http://schemas.microsoft.com/office/drawing/2014/main" id="{241FF53A-8457-4EFF-B4B0-D6F331905BF9}"/>
+              </a:ext>
+            </a:extLst>
+          </p:cNvPr>
+          <p:cNvPicPr>
+            <a:picLocks noChangeAspect="1"/>
+          </p:cNvPicPr>
+          <p:nvPr/>
+        </p:nvPicPr>
+        <p:blipFill>
+          <a:blip r:embed="rId4">
+            <a:extLst>
+              <a:ext uri="{28A0092B-C50C-407E-A947-70E740481C1C}">
+                <a14:useLocalDpi xmlns:a14="http://schemas.microsoft.com/office/drawing/2010/main" val="0"/>
+              </a:ext>
+            </a:extLst>
+          </a:blip>
+          <a:stretch>
+            <a:fillRect/>
+          </a:stretch>
+        </p:blipFill>
+        <p:spPr>
+          <a:xfrm>
+            <a:off x="2136682" y="2671861"/>
+            <a:ext cx="609600" cy="609600"/>
+          </a:xfrm>
+          <a:prstGeom prst="rect">
+            <a:avLst/>
+          </a:prstGeom>
+        </p:spPr>
+      </p:pic>
+      <p:pic>
+        <p:nvPicPr>
+          <p:cNvPr id="17" name="図 16">
+            <a:extLst>
+              <a:ext uri="{FF2B5EF4-FFF2-40B4-BE49-F238E27FC236}">
+                <a16:creationId xmlns:a16="http://schemas.microsoft.com/office/drawing/2014/main" id="{076A51AF-D1B4-4351-BDAC-FBB902CC8BC4}"/>
+              </a:ext>
+            </a:extLst>
+          </p:cNvPr>
+          <p:cNvPicPr>
+            <a:picLocks noChangeAspect="1"/>
+          </p:cNvPicPr>
+          <p:nvPr/>
+        </p:nvPicPr>
+        <p:blipFill>
+          <a:blip r:embed="rId5">
+            <a:extLst>
+              <a:ext uri="{28A0092B-C50C-407E-A947-70E740481C1C}">
+                <a14:useLocalDpi xmlns:a14="http://schemas.microsoft.com/office/drawing/2010/main" val="0"/>
+              </a:ext>
+            </a:extLst>
+          </a:blip>
+          <a:stretch>
+            <a:fillRect/>
+          </a:stretch>
+        </p:blipFill>
+        <p:spPr>
+          <a:xfrm>
+            <a:off x="6046486" y="2116768"/>
+            <a:ext cx="609600" cy="609600"/>
+          </a:xfrm>
+          <a:prstGeom prst="rect">
+            <a:avLst/>
+          </a:prstGeom>
+        </p:spPr>
+      </p:pic>
+      <p:pic>
+        <p:nvPicPr>
+          <p:cNvPr id="23" name="図 22">
+            <a:extLst>
+              <a:ext uri="{FF2B5EF4-FFF2-40B4-BE49-F238E27FC236}">
+                <a16:creationId xmlns:a16="http://schemas.microsoft.com/office/drawing/2014/main" id="{3B6504E1-94BA-4F0E-88D5-92BCC9D24439}"/>
+              </a:ext>
+            </a:extLst>
+          </p:cNvPr>
+          <p:cNvPicPr>
+            <a:picLocks noChangeAspect="1"/>
+          </p:cNvPicPr>
+          <p:nvPr/>
+        </p:nvPicPr>
+        <p:blipFill>
+          <a:blip r:embed="rId6">
+            <a:extLst>
+              <a:ext uri="{28A0092B-C50C-407E-A947-70E740481C1C}">
+                <a14:useLocalDpi xmlns:a14="http://schemas.microsoft.com/office/drawing/2010/main" val="0"/>
+              </a:ext>
+            </a:extLst>
+          </a:blip>
+          <a:stretch>
+            <a:fillRect/>
+          </a:stretch>
+        </p:blipFill>
+        <p:spPr>
+          <a:xfrm>
+            <a:off x="7283671" y="5419355"/>
+            <a:ext cx="609600" cy="609600"/>
+          </a:xfrm>
+          <a:prstGeom prst="rect">
+            <a:avLst/>
+          </a:prstGeom>
+        </p:spPr>
+      </p:pic>
+      <p:pic>
+        <p:nvPicPr>
+          <p:cNvPr id="25" name="図 24">
+            <a:extLst>
+              <a:ext uri="{FF2B5EF4-FFF2-40B4-BE49-F238E27FC236}">
+                <a16:creationId xmlns:a16="http://schemas.microsoft.com/office/drawing/2014/main" id="{21F04B4C-F19D-40EB-B06D-8E2FC515A0EF}"/>
+              </a:ext>
+            </a:extLst>
+          </p:cNvPr>
+          <p:cNvPicPr>
+            <a:picLocks noChangeAspect="1"/>
+          </p:cNvPicPr>
+          <p:nvPr/>
+        </p:nvPicPr>
+        <p:blipFill>
+          <a:blip r:embed="rId7">
+            <a:extLst>
+              <a:ext uri="{28A0092B-C50C-407E-A947-70E740481C1C}">
+                <a14:useLocalDpi xmlns:a14="http://schemas.microsoft.com/office/drawing/2010/main" val="0"/>
+              </a:ext>
+            </a:extLst>
+          </a:blip>
+          <a:stretch>
+            <a:fillRect/>
+          </a:stretch>
+        </p:blipFill>
+        <p:spPr>
+          <a:xfrm>
+            <a:off x="2188778" y="5966235"/>
+            <a:ext cx="609600" cy="609600"/>
+          </a:xfrm>
+          <a:prstGeom prst="rect">
+            <a:avLst/>
+          </a:prstGeom>
+        </p:spPr>
+      </p:pic>
+      <p:pic>
+        <p:nvPicPr>
+          <p:cNvPr id="27" name="図 26">
+            <a:extLst>
+              <a:ext uri="{FF2B5EF4-FFF2-40B4-BE49-F238E27FC236}">
+                <a16:creationId xmlns:a16="http://schemas.microsoft.com/office/drawing/2014/main" id="{95625F16-5C32-4B73-805C-C0E54F896ECD}"/>
+              </a:ext>
+            </a:extLst>
+          </p:cNvPr>
+          <p:cNvPicPr>
+            <a:picLocks noChangeAspect="1"/>
+          </p:cNvPicPr>
+          <p:nvPr/>
+        </p:nvPicPr>
+        <p:blipFill>
+          <a:blip r:embed="rId8">
+            <a:extLst>
+              <a:ext uri="{28A0092B-C50C-407E-A947-70E740481C1C}">
+                <a14:useLocalDpi xmlns:a14="http://schemas.microsoft.com/office/drawing/2010/main" val="0"/>
+              </a:ext>
+            </a:extLst>
+          </a:blip>
+          <a:stretch>
+            <a:fillRect/>
+          </a:stretch>
+        </p:blipFill>
+        <p:spPr>
+          <a:xfrm>
+            <a:off x="6046486" y="2702599"/>
+            <a:ext cx="609600" cy="609600"/>
+          </a:xfrm>
+          <a:prstGeom prst="rect">
+            <a:avLst/>
+          </a:prstGeom>
+        </p:spPr>
+      </p:pic>
+      <p:pic>
+        <p:nvPicPr>
+          <p:cNvPr id="31" name="図 30">
+            <a:extLst>
+              <a:ext uri="{FF2B5EF4-FFF2-40B4-BE49-F238E27FC236}">
+                <a16:creationId xmlns:a16="http://schemas.microsoft.com/office/drawing/2014/main" id="{D1EA2457-EFB7-448D-A62D-FFA3EF83C11A}"/>
+              </a:ext>
+            </a:extLst>
+          </p:cNvPr>
+          <p:cNvPicPr>
+            <a:picLocks noChangeAspect="1"/>
+          </p:cNvPicPr>
+          <p:nvPr/>
+        </p:nvPicPr>
+        <p:blipFill>
+          <a:blip r:embed="rId9">
+            <a:extLst>
+              <a:ext uri="{28A0092B-C50C-407E-A947-70E740481C1C}">
+                <a14:useLocalDpi xmlns:a14="http://schemas.microsoft.com/office/drawing/2010/main" val="0"/>
+              </a:ext>
+            </a:extLst>
+          </a:blip>
+          <a:stretch>
+            <a:fillRect/>
+          </a:stretch>
+        </p:blipFill>
+        <p:spPr>
+          <a:xfrm>
+            <a:off x="2147766" y="3235576"/>
+            <a:ext cx="609600" cy="609600"/>
+          </a:xfrm>
+          <a:prstGeom prst="rect">
+            <a:avLst/>
+          </a:prstGeom>
+        </p:spPr>
+      </p:pic>
+      <p:pic>
+        <p:nvPicPr>
+          <p:cNvPr id="33" name="図 32">
+            <a:extLst>
+              <a:ext uri="{FF2B5EF4-FFF2-40B4-BE49-F238E27FC236}">
+                <a16:creationId xmlns:a16="http://schemas.microsoft.com/office/drawing/2014/main" id="{4A9665FB-B4A0-4C19-A716-A88719AA1E58}"/>
+              </a:ext>
+            </a:extLst>
+          </p:cNvPr>
+          <p:cNvPicPr>
+            <a:picLocks noChangeAspect="1"/>
+          </p:cNvPicPr>
+          <p:nvPr/>
+        </p:nvPicPr>
+        <p:blipFill>
+          <a:blip r:embed="rId10">
+            <a:extLst>
+              <a:ext uri="{28A0092B-C50C-407E-A947-70E740481C1C}">
+                <a14:useLocalDpi xmlns:a14="http://schemas.microsoft.com/office/drawing/2010/main" val="0"/>
+              </a:ext>
+            </a:extLst>
+          </a:blip>
+          <a:stretch>
+            <a:fillRect/>
+          </a:stretch>
+        </p:blipFill>
+        <p:spPr>
+          <a:xfrm>
+            <a:off x="2147766" y="3799291"/>
+            <a:ext cx="609600" cy="609600"/>
+          </a:xfrm>
+          <a:prstGeom prst="rect">
+            <a:avLst/>
+          </a:prstGeom>
+        </p:spPr>
+      </p:pic>
+      <p:pic>
+        <p:nvPicPr>
+          <p:cNvPr id="35" name="図 34">
+            <a:extLst>
+              <a:ext uri="{FF2B5EF4-FFF2-40B4-BE49-F238E27FC236}">
+                <a16:creationId xmlns:a16="http://schemas.microsoft.com/office/drawing/2014/main" id="{7858441D-0BC6-48E7-B121-7E0BA62C8878}"/>
+              </a:ext>
+            </a:extLst>
+          </p:cNvPr>
+          <p:cNvPicPr>
+            <a:picLocks noChangeAspect="1"/>
+          </p:cNvPicPr>
+          <p:nvPr/>
+        </p:nvPicPr>
+        <p:blipFill>
+          <a:blip r:embed="rId11">
+            <a:extLst>
+              <a:ext uri="{28A0092B-C50C-407E-A947-70E740481C1C}">
+                <a14:useLocalDpi xmlns:a14="http://schemas.microsoft.com/office/drawing/2010/main" val="0"/>
+              </a:ext>
+            </a:extLst>
+          </a:blip>
+          <a:stretch>
+            <a:fillRect/>
+          </a:stretch>
+        </p:blipFill>
+        <p:spPr>
+          <a:xfrm>
+            <a:off x="2188779" y="4868110"/>
+            <a:ext cx="609600" cy="609600"/>
+          </a:xfrm>
+          <a:prstGeom prst="rect">
+            <a:avLst/>
+          </a:prstGeom>
+        </p:spPr>
+      </p:pic>
+      <p:pic>
+        <p:nvPicPr>
+          <p:cNvPr id="39" name="図 38">
+            <a:extLst>
+              <a:ext uri="{FF2B5EF4-FFF2-40B4-BE49-F238E27FC236}">
+                <a16:creationId xmlns:a16="http://schemas.microsoft.com/office/drawing/2014/main" id="{9E667BAC-1EAB-4CE3-96E0-2B9579712666}"/>
+              </a:ext>
+            </a:extLst>
+          </p:cNvPr>
+          <p:cNvPicPr>
+            <a:picLocks noChangeAspect="1"/>
+          </p:cNvPicPr>
+          <p:nvPr/>
+        </p:nvPicPr>
+        <p:blipFill>
+          <a:blip r:embed="rId12">
+            <a:extLst>
+              <a:ext uri="{28A0092B-C50C-407E-A947-70E740481C1C}">
+                <a14:useLocalDpi xmlns:a14="http://schemas.microsoft.com/office/drawing/2010/main" val="0"/>
+              </a:ext>
+            </a:extLst>
+          </a:blip>
+          <a:stretch>
+            <a:fillRect/>
+          </a:stretch>
+        </p:blipFill>
+        <p:spPr>
+          <a:xfrm>
+            <a:off x="2188778" y="5419355"/>
+            <a:ext cx="609600" cy="609600"/>
+          </a:xfrm>
+          <a:prstGeom prst="rect">
+            <a:avLst/>
+          </a:prstGeom>
+        </p:spPr>
+      </p:pic>
+      <p:pic>
+        <p:nvPicPr>
+          <p:cNvPr id="41" name="図 40">
+            <a:extLst>
+              <a:ext uri="{FF2B5EF4-FFF2-40B4-BE49-F238E27FC236}">
+                <a16:creationId xmlns:a16="http://schemas.microsoft.com/office/drawing/2014/main" id="{085A033A-4A7A-4EA4-B79C-C0E9D3671F92}"/>
+              </a:ext>
+            </a:extLst>
+          </p:cNvPr>
+          <p:cNvPicPr>
+            <a:picLocks noChangeAspect="1"/>
+          </p:cNvPicPr>
+          <p:nvPr/>
+        </p:nvPicPr>
+        <p:blipFill>
+          <a:blip r:embed="rId13">
+            <a:extLst>
+              <a:ext uri="{28A0092B-C50C-407E-A947-70E740481C1C}">
+                <a14:useLocalDpi xmlns:a14="http://schemas.microsoft.com/office/drawing/2010/main" val="0"/>
+              </a:ext>
+            </a:extLst>
+          </a:blip>
+          <a:stretch>
+            <a:fillRect/>
+          </a:stretch>
+        </p:blipFill>
+        <p:spPr>
+          <a:xfrm>
+            <a:off x="2136682" y="2100426"/>
+            <a:ext cx="609600" cy="609600"/>
+          </a:xfrm>
+          <a:prstGeom prst="rect">
+            <a:avLst/>
+          </a:prstGeom>
+        </p:spPr>
+      </p:pic>
+      <p:pic>
+        <p:nvPicPr>
+          <p:cNvPr id="43" name="図 42">
+            <a:extLst>
+              <a:ext uri="{FF2B5EF4-FFF2-40B4-BE49-F238E27FC236}">
+                <a16:creationId xmlns:a16="http://schemas.microsoft.com/office/drawing/2014/main" id="{52F07E4D-2667-4AFF-984F-CE4B0186DD0F}"/>
+              </a:ext>
+            </a:extLst>
+          </p:cNvPr>
+          <p:cNvPicPr>
+            <a:picLocks noChangeAspect="1"/>
+          </p:cNvPicPr>
+          <p:nvPr/>
+        </p:nvPicPr>
+        <p:blipFill>
+          <a:blip r:embed="rId14">
+            <a:extLst>
+              <a:ext uri="{28A0092B-C50C-407E-A947-70E740481C1C}">
+                <a14:useLocalDpi xmlns:a14="http://schemas.microsoft.com/office/drawing/2010/main" val="0"/>
+              </a:ext>
+            </a:extLst>
+          </a:blip>
+          <a:stretch>
+            <a:fillRect/>
+          </a:stretch>
+        </p:blipFill>
+        <p:spPr>
+          <a:xfrm>
+            <a:off x="6374525" y="4372226"/>
+            <a:ext cx="609600" cy="609600"/>
+          </a:xfrm>
+          <a:prstGeom prst="rect">
+            <a:avLst/>
+          </a:prstGeom>
+        </p:spPr>
+      </p:pic>
+      <p:pic>
+        <p:nvPicPr>
+          <p:cNvPr id="44" name="図 43">
+            <a:extLst>
+              <a:ext uri="{FF2B5EF4-FFF2-40B4-BE49-F238E27FC236}">
+                <a16:creationId xmlns:a16="http://schemas.microsoft.com/office/drawing/2014/main" id="{C2F20EC3-04E6-4E42-A6B3-F21F6B3B224F}"/>
+              </a:ext>
+            </a:extLst>
+          </p:cNvPr>
+          <p:cNvPicPr>
+            <a:picLocks noChangeAspect="1"/>
+          </p:cNvPicPr>
+          <p:nvPr/>
+        </p:nvPicPr>
+        <p:blipFill>
+          <a:blip r:embed="rId13">
+            <a:extLst>
+              <a:ext uri="{28A0092B-C50C-407E-A947-70E740481C1C}">
+                <a14:useLocalDpi xmlns:a14="http://schemas.microsoft.com/office/drawing/2010/main" val="0"/>
+              </a:ext>
+            </a:extLst>
+          </a:blip>
+          <a:stretch>
+            <a:fillRect/>
+          </a:stretch>
+        </p:blipFill>
+        <p:spPr>
+          <a:xfrm>
+            <a:off x="6374525" y="3786078"/>
+            <a:ext cx="609600" cy="609600"/>
+          </a:xfrm>
+          <a:prstGeom prst="rect">
+            <a:avLst/>
+          </a:prstGeom>
+        </p:spPr>
+      </p:pic>
+      <p:pic>
+        <p:nvPicPr>
+          <p:cNvPr id="45" name="図 44">
+            <a:extLst>
+              <a:ext uri="{FF2B5EF4-FFF2-40B4-BE49-F238E27FC236}">
+                <a16:creationId xmlns:a16="http://schemas.microsoft.com/office/drawing/2014/main" id="{D33E779A-DDD1-4B5F-9C87-DAF5C41D555A}"/>
+              </a:ext>
+            </a:extLst>
+          </p:cNvPr>
+          <p:cNvPicPr>
+            <a:picLocks noChangeAspect="1"/>
+          </p:cNvPicPr>
+          <p:nvPr/>
+        </p:nvPicPr>
+        <p:blipFill>
+          <a:blip r:embed="rId4">
+            <a:extLst>
+              <a:ext uri="{28A0092B-C50C-407E-A947-70E740481C1C}">
+                <a14:useLocalDpi xmlns:a14="http://schemas.microsoft.com/office/drawing/2010/main" val="0"/>
+              </a:ext>
+            </a:extLst>
+          </a:blip>
+          <a:stretch>
+            <a:fillRect/>
+          </a:stretch>
+        </p:blipFill>
+        <p:spPr>
+          <a:xfrm>
+            <a:off x="6374525" y="4919069"/>
+            <a:ext cx="609600" cy="609600"/>
+          </a:xfrm>
+          <a:prstGeom prst="rect">
+            <a:avLst/>
+          </a:prstGeom>
+        </p:spPr>
+      </p:pic>
+      <p:pic>
+        <p:nvPicPr>
+          <p:cNvPr id="47" name="図 46">
+            <a:extLst>
+              <a:ext uri="{FF2B5EF4-FFF2-40B4-BE49-F238E27FC236}">
+                <a16:creationId xmlns:a16="http://schemas.microsoft.com/office/drawing/2014/main" id="{1E511BA3-6F3C-4E24-BD04-E7948FBCCBFB}"/>
+              </a:ext>
+            </a:extLst>
+          </p:cNvPr>
+          <p:cNvPicPr>
+            <a:picLocks noChangeAspect="1"/>
+          </p:cNvPicPr>
+          <p:nvPr/>
+        </p:nvPicPr>
+        <p:blipFill>
+          <a:blip r:embed="rId15">
+            <a:extLst>
+              <a:ext uri="{28A0092B-C50C-407E-A947-70E740481C1C}">
+                <a14:useLocalDpi xmlns:a14="http://schemas.microsoft.com/office/drawing/2010/main" val="0"/>
+              </a:ext>
+            </a:extLst>
+          </a:blip>
+          <a:stretch>
+            <a:fillRect/>
+          </a:stretch>
+        </p:blipFill>
+        <p:spPr>
+          <a:xfrm>
+            <a:off x="7588471" y="838469"/>
+            <a:ext cx="4038262" cy="2523914"/>
+          </a:xfrm>
+          <a:prstGeom prst="rect">
+            <a:avLst/>
+          </a:prstGeom>
+        </p:spPr>
+      </p:pic>
+      <p:pic>
+        <p:nvPicPr>
+          <p:cNvPr id="49" name="図 48">
+            <a:extLst>
+              <a:ext uri="{FF2B5EF4-FFF2-40B4-BE49-F238E27FC236}">
+                <a16:creationId xmlns:a16="http://schemas.microsoft.com/office/drawing/2014/main" id="{FDE4E8B9-25DC-423A-85A1-536854DF4C16}"/>
+              </a:ext>
+            </a:extLst>
+          </p:cNvPr>
+          <p:cNvPicPr>
+            <a:picLocks noChangeAspect="1"/>
+          </p:cNvPicPr>
+          <p:nvPr/>
+        </p:nvPicPr>
+        <p:blipFill>
+          <a:blip r:embed="rId16">
+            <a:extLst>
+              <a:ext uri="{28A0092B-C50C-407E-A947-70E740481C1C}">
+                <a14:useLocalDpi xmlns:a14="http://schemas.microsoft.com/office/drawing/2010/main" val="0"/>
+              </a:ext>
+            </a:extLst>
+          </a:blip>
+          <a:stretch>
+            <a:fillRect/>
+          </a:stretch>
+        </p:blipFill>
+        <p:spPr>
+          <a:xfrm>
+            <a:off x="8224866" y="3486928"/>
+            <a:ext cx="3401867" cy="2126167"/>
+          </a:xfrm>
+          <a:prstGeom prst="rect">
+            <a:avLst/>
+          </a:prstGeom>
+        </p:spPr>
+      </p:pic>
+    </p:spTree>
+    <p:extLst>
+      <p:ext uri="{BB962C8B-B14F-4D97-AF65-F5344CB8AC3E}">
+        <p14:creationId xmlns:p14="http://schemas.microsoft.com/office/powerpoint/2010/main" val="178761255"/>
+      </p:ext>
+    </p:extLst>
+  </p:cSld>
+  <p:clrMapOvr>
+    <a:masterClrMapping/>
+  </p:clrMapOvr>
+</p:sld>
+</file>
+
+<file path=ppt/slides/slide5.xml><?xml version="1.0" encoding="utf-8"?>
+<p:sld xmlns:a="http://schemas.openxmlformats.org/drawingml/2006/main" xmlns:r="http://schemas.openxmlformats.org/officeDocument/2006/relationships" xmlns:p="http://schemas.openxmlformats.org/presentationml/2006/main">
+  <p:cSld>
+    <p:spTree>
+      <p:nvGrpSpPr>
+        <p:cNvPr id="1" name=""/>
+        <p:cNvGrpSpPr/>
+        <p:nvPr/>
+      </p:nvGrpSpPr>
+      <p:grpSpPr>
+        <a:xfrm>
+          <a:off x="0" y="0"/>
+          <a:ext cx="0" cy="0"/>
+          <a:chOff x="0" y="0"/>
+          <a:chExt cx="0" cy="0"/>
+        </a:xfrm>
+      </p:grpSpPr>
+      <p:pic>
+        <p:nvPicPr>
+          <p:cNvPr id="5" name="図 4">
+            <a:extLst>
+              <a:ext uri="{FF2B5EF4-FFF2-40B4-BE49-F238E27FC236}">
+                <a16:creationId xmlns:a16="http://schemas.microsoft.com/office/drawing/2014/main" id="{62510B9F-D4D3-4AD9-881F-C7BB59BD59B8}"/>
+              </a:ext>
+            </a:extLst>
+          </p:cNvPr>
+          <p:cNvPicPr>
+            <a:picLocks noChangeAspect="1"/>
+          </p:cNvPicPr>
+          <p:nvPr/>
+        </p:nvPicPr>
+        <p:blipFill>
+          <a:blip r:embed="rId2">
+            <a:extLst>
+              <a:ext uri="{28A0092B-C50C-407E-A947-70E740481C1C}">
+                <a14:useLocalDpi xmlns:a14="http://schemas.microsoft.com/office/drawing/2010/main" val="0"/>
+              </a:ext>
+            </a:extLst>
+          </a:blip>
+          <a:stretch>
+            <a:fillRect/>
+          </a:stretch>
+        </p:blipFill>
+        <p:spPr>
+          <a:xfrm>
+            <a:off x="1" y="38793"/>
+            <a:ext cx="12191999" cy="6858000"/>
+          </a:xfrm>
+          <a:prstGeom prst="rect">
+            <a:avLst/>
+          </a:prstGeom>
+        </p:spPr>
+      </p:pic>
+      <p:sp>
+        <p:nvSpPr>
+          <p:cNvPr id="2" name="タイトル 1">
+            <a:extLst>
+              <a:ext uri="{FF2B5EF4-FFF2-40B4-BE49-F238E27FC236}">
+                <a16:creationId xmlns:a16="http://schemas.microsoft.com/office/drawing/2014/main" id="{D77BF31B-8925-4C81-B875-5E6B7E9FD0BF}"/>
+              </a:ext>
+            </a:extLst>
+          </p:cNvPr>
+          <p:cNvSpPr>
+            <a:spLocks noGrp="1"/>
+          </p:cNvSpPr>
+          <p:nvPr>
+            <p:ph type="title"/>
+          </p:nvPr>
+        </p:nvSpPr>
+        <p:spPr>
+          <a:xfrm>
+            <a:off x="576926" y="895827"/>
+            <a:ext cx="10515600" cy="1072255"/>
+          </a:xfrm>
+        </p:spPr>
+        <p:txBody>
+          <a:bodyPr/>
+          <a:lstStyle/>
+          <a:p>
+            <a:r>
+              <a:rPr lang="en-US" altLang="ja-JP" dirty="0">
+                <a:solidFill>
+                  <a:schemeClr val="bg1"/>
+                </a:solidFill>
+              </a:rPr>
+              <a:t>【</a:t>
+            </a:r>
+            <a:r>
+              <a:rPr lang="ja-JP" altLang="en-US" dirty="0">
+                <a:solidFill>
+                  <a:schemeClr val="bg1"/>
+                </a:solidFill>
+              </a:rPr>
+              <a:t>コード一覧</a:t>
+            </a:r>
+            <a:r>
+              <a:rPr lang="en-US" altLang="ja-JP" dirty="0">
+                <a:solidFill>
+                  <a:schemeClr val="bg1"/>
+                </a:solidFill>
+              </a:rPr>
+              <a:t>】</a:t>
+            </a:r>
+            <a:endParaRPr kumimoji="1" lang="ja-JP" altLang="en-US" dirty="0">
+              <a:solidFill>
+                <a:schemeClr val="bg1"/>
+              </a:solidFill>
+            </a:endParaRPr>
+          </a:p>
+        </p:txBody>
+      </p:sp>
+      <p:sp>
+        <p:nvSpPr>
+          <p:cNvPr id="3" name="テキスト プレースホルダー 2">
+            <a:extLst>
+              <a:ext uri="{FF2B5EF4-FFF2-40B4-BE49-F238E27FC236}">
+                <a16:creationId xmlns:a16="http://schemas.microsoft.com/office/drawing/2014/main" id="{99C96CBA-F558-4255-82BE-7497933BE10E}"/>
+              </a:ext>
+            </a:extLst>
+          </p:cNvPr>
+          <p:cNvSpPr>
+            <a:spLocks noGrp="1"/>
+          </p:cNvSpPr>
+          <p:nvPr>
+            <p:ph type="body" idx="1"/>
+          </p:nvPr>
+        </p:nvSpPr>
+        <p:spPr>
+          <a:xfrm>
+            <a:off x="576926" y="2086167"/>
+            <a:ext cx="10515600" cy="531193"/>
+          </a:xfrm>
+        </p:spPr>
+        <p:txBody>
+          <a:bodyPr/>
+          <a:lstStyle/>
+          <a:p>
+            <a:r>
+              <a:rPr lang="en-US" altLang="ja-JP" dirty="0">
+                <a:solidFill>
+                  <a:schemeClr val="bg1"/>
+                </a:solidFill>
+              </a:rPr>
+              <a:t>	</a:t>
+            </a:r>
+            <a:r>
+              <a:rPr kumimoji="1" lang="ja-JP" altLang="en-US" sz="3200" dirty="0">
+                <a:solidFill>
+                  <a:schemeClr val="bg1"/>
+                </a:solidFill>
+              </a:rPr>
+              <a:t>➣ コードの場所：作成コード一覧￥ファイル名</a:t>
+            </a:r>
+          </a:p>
+        </p:txBody>
+      </p:sp>
+      <p:sp>
+        <p:nvSpPr>
+          <p:cNvPr id="6" name="タイトル 1">
+            <a:extLst>
+              <a:ext uri="{FF2B5EF4-FFF2-40B4-BE49-F238E27FC236}">
+                <a16:creationId xmlns:a16="http://schemas.microsoft.com/office/drawing/2014/main" id="{3D73087C-A0D6-4E3C-9DB3-3A252828B473}"/>
+              </a:ext>
+            </a:extLst>
+          </p:cNvPr>
+          <p:cNvSpPr txBox="1">
+            <a:spLocks/>
+          </p:cNvSpPr>
+          <p:nvPr/>
+        </p:nvSpPr>
+        <p:spPr>
+          <a:xfrm>
+            <a:off x="576926" y="3247591"/>
+            <a:ext cx="10515600" cy="1072255"/>
+          </a:xfrm>
+          <a:prstGeom prst="rect">
+            <a:avLst/>
+          </a:prstGeom>
+        </p:spPr>
+        <p:txBody>
+          <a:bodyPr vert="horz" lIns="91440" tIns="45720" rIns="91440" bIns="45720" rtlCol="0" anchor="b">
+            <a:normAutofit/>
+          </a:bodyPr>
+          <a:lstStyle>
+            <a:lvl1pPr algn="l" defTabSz="914400" rtl="0" eaLnBrk="1" latinLnBrk="0" hangingPunct="1">
+              <a:lnSpc>
+                <a:spcPct val="90000"/>
+              </a:lnSpc>
+              <a:spcBef>
+                <a:spcPct val="0"/>
+              </a:spcBef>
+              <a:buNone/>
+              <a:defRPr kumimoji="1" sz="6000" kern="1200">
+                <a:solidFill>
+                  <a:schemeClr val="tx1"/>
+                </a:solidFill>
+                <a:latin typeface="+mj-lt"/>
+                <a:ea typeface="+mj-ea"/>
+                <a:cs typeface="+mj-cs"/>
+              </a:defRPr>
+            </a:lvl1pPr>
+          </a:lstStyle>
+          <a:p>
+            <a:r>
+              <a:rPr lang="en-US" altLang="ja-JP" dirty="0">
+                <a:solidFill>
+                  <a:schemeClr val="bg1"/>
+                </a:solidFill>
+              </a:rPr>
+              <a:t>【</a:t>
+            </a:r>
+            <a:r>
+              <a:rPr lang="ja-JP" altLang="en-US" dirty="0">
+                <a:solidFill>
+                  <a:schemeClr val="bg1"/>
+                </a:solidFill>
+              </a:rPr>
+              <a:t>注目コード</a:t>
+            </a:r>
+            <a:r>
+              <a:rPr lang="en-US" altLang="ja-JP" dirty="0">
+                <a:solidFill>
+                  <a:schemeClr val="bg1"/>
+                </a:solidFill>
+              </a:rPr>
+              <a:t>】</a:t>
+            </a:r>
+            <a:endParaRPr lang="ja-JP" altLang="en-US" dirty="0">
+              <a:solidFill>
+                <a:schemeClr val="bg1"/>
+              </a:solidFill>
+            </a:endParaRPr>
+          </a:p>
+        </p:txBody>
+      </p:sp>
+      <p:sp>
+        <p:nvSpPr>
+          <p:cNvPr id="7" name="テキスト プレースホルダー 2">
+            <a:extLst>
+              <a:ext uri="{FF2B5EF4-FFF2-40B4-BE49-F238E27FC236}">
+                <a16:creationId xmlns:a16="http://schemas.microsoft.com/office/drawing/2014/main" id="{BD59184C-B6CE-46AA-B3FD-9552C102995A}"/>
+              </a:ext>
+            </a:extLst>
+          </p:cNvPr>
+          <p:cNvSpPr txBox="1">
+            <a:spLocks/>
+          </p:cNvSpPr>
+          <p:nvPr/>
+        </p:nvSpPr>
+        <p:spPr>
+          <a:xfrm>
+            <a:off x="576926" y="4461986"/>
+            <a:ext cx="10515600" cy="1500187"/>
+          </a:xfrm>
+          <a:prstGeom prst="rect">
+            <a:avLst/>
+          </a:prstGeom>
+        </p:spPr>
+        <p:txBody>
+          <a:bodyPr vert="horz" lIns="91440" tIns="45720" rIns="91440" bIns="45720" rtlCol="0">
+            <a:normAutofit/>
+          </a:bodyPr>
+          <a:lstStyle>
+            <a:lvl1pPr marL="0" indent="0" algn="l" defTabSz="914400" rtl="0" eaLnBrk="1" latinLnBrk="0" hangingPunct="1">
+              <a:lnSpc>
+                <a:spcPct val="90000"/>
+              </a:lnSpc>
+              <a:spcBef>
+                <a:spcPts val="1000"/>
+              </a:spcBef>
+              <a:buFont typeface="Arial" panose="020B0604020202020204" pitchFamily="34" charset="0"/>
+              <a:buNone/>
+              <a:defRPr kumimoji="1" sz="2400" kern="1200">
+                <a:solidFill>
+                  <a:schemeClr val="tx1">
+                    <a:tint val="75000"/>
+                  </a:schemeClr>
+                </a:solidFill>
+                <a:latin typeface="+mn-lt"/>
+                <a:ea typeface="+mn-ea"/>
+                <a:cs typeface="+mn-cs"/>
+              </a:defRPr>
+            </a:lvl1pPr>
+            <a:lvl2pPr marL="457200" indent="0" algn="l" defTabSz="914400" rtl="0" eaLnBrk="1" latinLnBrk="0" hangingPunct="1">
+              <a:lnSpc>
+                <a:spcPct val="90000"/>
+              </a:lnSpc>
+              <a:spcBef>
+                <a:spcPts val="500"/>
+              </a:spcBef>
+              <a:buFont typeface="Arial" panose="020B0604020202020204" pitchFamily="34" charset="0"/>
+              <a:buNone/>
+              <a:defRPr kumimoji="1" sz="2000" kern="1200">
+                <a:solidFill>
+                  <a:schemeClr val="tx1">
+                    <a:tint val="75000"/>
+                  </a:schemeClr>
+                </a:solidFill>
+                <a:latin typeface="+mn-lt"/>
+                <a:ea typeface="+mn-ea"/>
+                <a:cs typeface="+mn-cs"/>
+              </a:defRPr>
+            </a:lvl2pPr>
+            <a:lvl3pPr marL="914400" indent="0" algn="l" defTabSz="914400" rtl="0" eaLnBrk="1" latinLnBrk="0" hangingPunct="1">
+              <a:lnSpc>
+                <a:spcPct val="90000"/>
+              </a:lnSpc>
+              <a:spcBef>
+                <a:spcPts val="500"/>
+              </a:spcBef>
+              <a:buFont typeface="Arial" panose="020B0604020202020204" pitchFamily="34" charset="0"/>
+              <a:buNone/>
+              <a:defRPr kumimoji="1" sz="1800" kern="1200">
+                <a:solidFill>
+                  <a:schemeClr val="tx1">
+                    <a:tint val="75000"/>
+                  </a:schemeClr>
+                </a:solidFill>
+                <a:latin typeface="+mn-lt"/>
+                <a:ea typeface="+mn-ea"/>
+                <a:cs typeface="+mn-cs"/>
+              </a:defRPr>
+            </a:lvl3pPr>
+            <a:lvl4pPr marL="1371600" indent="0" algn="l" defTabSz="914400" rtl="0" eaLnBrk="1" latinLnBrk="0" hangingPunct="1">
+              <a:lnSpc>
+                <a:spcPct val="90000"/>
+              </a:lnSpc>
+              <a:spcBef>
+                <a:spcPts val="500"/>
+              </a:spcBef>
+              <a:buFont typeface="Arial" panose="020B0604020202020204" pitchFamily="34" charset="0"/>
+              <a:buNone/>
+              <a:defRPr kumimoji="1" sz="1600" kern="1200">
+                <a:solidFill>
+                  <a:schemeClr val="tx1">
+                    <a:tint val="75000"/>
+                  </a:schemeClr>
+                </a:solidFill>
+                <a:latin typeface="+mn-lt"/>
+                <a:ea typeface="+mn-ea"/>
+                <a:cs typeface="+mn-cs"/>
+              </a:defRPr>
+            </a:lvl4pPr>
+            <a:lvl5pPr marL="1828800" indent="0" algn="l" defTabSz="914400" rtl="0" eaLnBrk="1" latinLnBrk="0" hangingPunct="1">
+              <a:lnSpc>
+                <a:spcPct val="90000"/>
+              </a:lnSpc>
+              <a:spcBef>
+                <a:spcPts val="500"/>
+              </a:spcBef>
+              <a:buFont typeface="Arial" panose="020B0604020202020204" pitchFamily="34" charset="0"/>
+              <a:buNone/>
+              <a:defRPr kumimoji="1" sz="1600" kern="1200">
+                <a:solidFill>
+                  <a:schemeClr val="tx1">
+                    <a:tint val="75000"/>
+                  </a:schemeClr>
+                </a:solidFill>
+                <a:latin typeface="+mn-lt"/>
+                <a:ea typeface="+mn-ea"/>
+                <a:cs typeface="+mn-cs"/>
+              </a:defRPr>
+            </a:lvl5pPr>
+            <a:lvl6pPr marL="2286000" indent="0" algn="l" defTabSz="914400" rtl="0" eaLnBrk="1" latinLnBrk="0" hangingPunct="1">
+              <a:lnSpc>
+                <a:spcPct val="90000"/>
+              </a:lnSpc>
+              <a:spcBef>
+                <a:spcPts val="500"/>
+              </a:spcBef>
+              <a:buFont typeface="Arial" panose="020B0604020202020204" pitchFamily="34" charset="0"/>
+              <a:buNone/>
+              <a:defRPr kumimoji="1" sz="1600" kern="1200">
+                <a:solidFill>
+                  <a:schemeClr val="tx1">
+                    <a:tint val="75000"/>
+                  </a:schemeClr>
+                </a:solidFill>
+                <a:latin typeface="+mn-lt"/>
+                <a:ea typeface="+mn-ea"/>
+                <a:cs typeface="+mn-cs"/>
+              </a:defRPr>
+            </a:lvl6pPr>
+            <a:lvl7pPr marL="2743200" indent="0" algn="l" defTabSz="914400" rtl="0" eaLnBrk="1" latinLnBrk="0" hangingPunct="1">
+              <a:lnSpc>
+                <a:spcPct val="90000"/>
+              </a:lnSpc>
+              <a:spcBef>
+                <a:spcPts val="500"/>
+              </a:spcBef>
+              <a:buFont typeface="Arial" panose="020B0604020202020204" pitchFamily="34" charset="0"/>
+              <a:buNone/>
+              <a:defRPr kumimoji="1" sz="1600" kern="1200">
+                <a:solidFill>
+                  <a:schemeClr val="tx1">
+                    <a:tint val="75000"/>
+                  </a:schemeClr>
+                </a:solidFill>
+                <a:latin typeface="+mn-lt"/>
+                <a:ea typeface="+mn-ea"/>
+                <a:cs typeface="+mn-cs"/>
+              </a:defRPr>
+            </a:lvl7pPr>
+            <a:lvl8pPr marL="3200400" indent="0" algn="l" defTabSz="914400" rtl="0" eaLnBrk="1" latinLnBrk="0" hangingPunct="1">
+              <a:lnSpc>
+                <a:spcPct val="90000"/>
+              </a:lnSpc>
+              <a:spcBef>
+                <a:spcPts val="500"/>
+              </a:spcBef>
+              <a:buFont typeface="Arial" panose="020B0604020202020204" pitchFamily="34" charset="0"/>
+              <a:buNone/>
+              <a:defRPr kumimoji="1" sz="1600" kern="1200">
+                <a:solidFill>
+                  <a:schemeClr val="tx1">
+                    <a:tint val="75000"/>
+                  </a:schemeClr>
+                </a:solidFill>
+                <a:latin typeface="+mn-lt"/>
+                <a:ea typeface="+mn-ea"/>
+                <a:cs typeface="+mn-cs"/>
+              </a:defRPr>
+            </a:lvl8pPr>
+            <a:lvl9pPr marL="3657600" indent="0" algn="l" defTabSz="914400" rtl="0" eaLnBrk="1" latinLnBrk="0" hangingPunct="1">
+              <a:lnSpc>
+                <a:spcPct val="90000"/>
+              </a:lnSpc>
+              <a:spcBef>
+                <a:spcPts val="500"/>
+              </a:spcBef>
+              <a:buFont typeface="Arial" panose="020B0604020202020204" pitchFamily="34" charset="0"/>
+              <a:buNone/>
+              <a:defRPr kumimoji="1" sz="1600" kern="1200">
+                <a:solidFill>
+                  <a:schemeClr val="tx1">
+                    <a:tint val="75000"/>
+                  </a:schemeClr>
+                </a:solidFill>
+                <a:latin typeface="+mn-lt"/>
+                <a:ea typeface="+mn-ea"/>
+                <a:cs typeface="+mn-cs"/>
+              </a:defRPr>
+            </a:lvl9pPr>
+          </a:lstStyle>
+          <a:p>
+            <a:r>
+              <a:rPr lang="en-US" altLang="ja-JP" dirty="0">
+                <a:solidFill>
+                  <a:schemeClr val="bg1"/>
+                </a:solidFill>
+              </a:rPr>
+              <a:t>	</a:t>
+            </a:r>
+            <a:r>
+              <a:rPr lang="ja-JP" altLang="en-US" dirty="0">
+                <a:solidFill>
+                  <a:schemeClr val="bg1"/>
+                </a:solidFill>
+              </a:rPr>
+              <a:t>➣ </a:t>
+            </a:r>
+            <a:r>
+              <a:rPr lang="en-US" altLang="ja-JP" b="1" dirty="0">
+                <a:solidFill>
+                  <a:srgbClr val="FF0000"/>
+                </a:solidFill>
+              </a:rPr>
+              <a:t>Character.cpp</a:t>
+            </a:r>
+            <a:r>
+              <a:rPr lang="ja-JP" altLang="en-US" dirty="0">
+                <a:solidFill>
+                  <a:schemeClr val="bg1"/>
+                </a:solidFill>
+              </a:rPr>
+              <a:t>：キャラクターの全てをまとめている基底クラス</a:t>
+            </a:r>
+            <a:endParaRPr lang="en-US" altLang="ja-JP" dirty="0">
+              <a:solidFill>
+                <a:schemeClr val="bg1"/>
+              </a:solidFill>
+            </a:endParaRPr>
+          </a:p>
+          <a:p>
+            <a:r>
+              <a:rPr lang="en-US" altLang="ja-JP" dirty="0">
+                <a:solidFill>
+                  <a:schemeClr val="bg1"/>
+                </a:solidFill>
+              </a:rPr>
+              <a:t>	</a:t>
+            </a:r>
+            <a:r>
+              <a:rPr lang="ja-JP" altLang="en-US" dirty="0">
+                <a:solidFill>
+                  <a:schemeClr val="bg1"/>
+                </a:solidFill>
+              </a:rPr>
+              <a:t>➣ </a:t>
+            </a:r>
+            <a:r>
+              <a:rPr lang="en-US" altLang="ja-JP" b="1" dirty="0">
+                <a:solidFill>
+                  <a:srgbClr val="FF0000"/>
+                </a:solidFill>
+              </a:rPr>
+              <a:t>Cpu.cpp</a:t>
+            </a:r>
+            <a:r>
+              <a:rPr lang="ja-JP" altLang="en-US" dirty="0">
+                <a:solidFill>
+                  <a:schemeClr val="bg1"/>
+                </a:solidFill>
+              </a:rPr>
+              <a:t>：</a:t>
+            </a:r>
+            <a:r>
+              <a:rPr lang="en-US" altLang="ja-JP" dirty="0">
+                <a:solidFill>
+                  <a:schemeClr val="bg1"/>
+                </a:solidFill>
+              </a:rPr>
+              <a:t>CPU</a:t>
+            </a:r>
+            <a:r>
+              <a:rPr lang="ja-JP" altLang="en-US" dirty="0">
+                <a:solidFill>
+                  <a:schemeClr val="bg1"/>
+                </a:solidFill>
+              </a:rPr>
+              <a:t>の動作プログラム</a:t>
+            </a:r>
+            <a:endParaRPr lang="en-US" altLang="ja-JP" dirty="0">
+              <a:solidFill>
+                <a:schemeClr val="bg1"/>
+              </a:solidFill>
+            </a:endParaRPr>
+          </a:p>
+          <a:p>
+            <a:r>
+              <a:rPr lang="en-US" altLang="ja-JP" dirty="0">
+                <a:solidFill>
+                  <a:schemeClr val="bg1"/>
+                </a:solidFill>
+              </a:rPr>
+              <a:t>	</a:t>
+            </a:r>
+            <a:r>
+              <a:rPr lang="ja-JP" altLang="en-US" dirty="0">
+                <a:solidFill>
+                  <a:schemeClr val="bg1"/>
+                </a:solidFill>
+              </a:rPr>
+              <a:t>➣ </a:t>
+            </a:r>
+            <a:r>
+              <a:rPr lang="en-US" altLang="ja-JP" b="1" dirty="0">
+                <a:solidFill>
+                  <a:srgbClr val="FF0000"/>
+                </a:solidFill>
+              </a:rPr>
+              <a:t>PlayScene.cpp</a:t>
+            </a:r>
+            <a:r>
+              <a:rPr lang="ja-JP" altLang="en-US" dirty="0">
+                <a:solidFill>
+                  <a:schemeClr val="bg1"/>
+                </a:solidFill>
+              </a:rPr>
+              <a:t>：ゲームシーンの管理プログラム</a:t>
+            </a:r>
+          </a:p>
+        </p:txBody>
+      </p:sp>
+    </p:spTree>
+    <p:extLst>
+      <p:ext uri="{BB962C8B-B14F-4D97-AF65-F5344CB8AC3E}">
+        <p14:creationId xmlns:p14="http://schemas.microsoft.com/office/powerpoint/2010/main" val="3083093276"/>
+      </p:ext>
+    </p:extLst>
+  </p:cSld>
+  <p:clrMapOvr>
+    <a:masterClrMapping/>
+  </p:clrMapOvr>
+</p:sld>
+</file>
+
+<file path=ppt/slides/slide6.xml><?xml version="1.0" encoding="utf-8"?>
+<p:sld xmlns:a="http://schemas.openxmlformats.org/drawingml/2006/main" xmlns:r="http://schemas.openxmlformats.org/officeDocument/2006/relationships" xmlns:p="http://schemas.openxmlformats.org/presentationml/2006/main">
+  <p:cSld>
+    <p:spTree>
+      <p:nvGrpSpPr>
+        <p:cNvPr id="1" name=""/>
+        <p:cNvGrpSpPr/>
+        <p:nvPr/>
+      </p:nvGrpSpPr>
+      <p:grpSpPr>
+        <a:xfrm>
+          <a:off x="0" y="0"/>
+          <a:ext cx="0" cy="0"/>
+          <a:chOff x="0" y="0"/>
+          <a:chExt cx="0" cy="0"/>
+        </a:xfrm>
+      </p:grpSpPr>
+      <p:pic>
+        <p:nvPicPr>
+          <p:cNvPr id="7" name="図 6">
+            <a:extLst>
+              <a:ext uri="{FF2B5EF4-FFF2-40B4-BE49-F238E27FC236}">
+                <a16:creationId xmlns:a16="http://schemas.microsoft.com/office/drawing/2014/main" id="{5FF7C805-5F67-47AE-9325-7DEBBFC02216}"/>
+              </a:ext>
+            </a:extLst>
+          </p:cNvPr>
+          <p:cNvPicPr>
+            <a:picLocks noChangeAspect="1"/>
+          </p:cNvPicPr>
+          <p:nvPr/>
+        </p:nvPicPr>
+        <p:blipFill>
+          <a:blip r:embed="rId2">
+            <a:extLst>
+              <a:ext uri="{28A0092B-C50C-407E-A947-70E740481C1C}">
+                <a14:useLocalDpi xmlns:a14="http://schemas.microsoft.com/office/drawing/2010/main" val="0"/>
+              </a:ext>
+            </a:extLst>
+          </a:blip>
+          <a:stretch>
+            <a:fillRect/>
+          </a:stretch>
+        </p:blipFill>
+        <p:spPr>
+          <a:xfrm>
+            <a:off x="0" y="0"/>
+            <a:ext cx="12191999" cy="6858000"/>
+          </a:xfrm>
+          <a:prstGeom prst="rect">
+            <a:avLst/>
+          </a:prstGeom>
+        </p:spPr>
+      </p:pic>
+      <p:sp>
+        <p:nvSpPr>
+          <p:cNvPr id="2" name="タイトル 1">
+            <a:extLst>
+              <a:ext uri="{FF2B5EF4-FFF2-40B4-BE49-F238E27FC236}">
+                <a16:creationId xmlns:a16="http://schemas.microsoft.com/office/drawing/2014/main" id="{387EF1EF-F7EE-4CF8-8A2F-0D577855FA6C}"/>
+              </a:ext>
+            </a:extLst>
+          </p:cNvPr>
+          <p:cNvSpPr>
+            <a:spLocks noGrp="1"/>
+          </p:cNvSpPr>
+          <p:nvPr>
+            <p:ph type="ctrTitle"/>
+          </p:nvPr>
+        </p:nvSpPr>
+        <p:spPr>
+          <a:xfrm>
+            <a:off x="-1" y="110836"/>
+            <a:ext cx="12191999" cy="1154690"/>
+          </a:xfrm>
+        </p:spPr>
+        <p:txBody>
+          <a:bodyPr>
+            <a:normAutofit/>
+          </a:bodyPr>
+          <a:lstStyle/>
+          <a:p>
+            <a:pPr algn="l"/>
+            <a:r>
+              <a:rPr kumimoji="1" lang="en-US" altLang="ja-JP" sz="4000" dirty="0">
+                <a:solidFill>
+                  <a:schemeClr val="bg1"/>
+                </a:solidFill>
+              </a:rPr>
+              <a:t>【</a:t>
+            </a:r>
+            <a:r>
+              <a:rPr kumimoji="1" lang="ja-JP" altLang="en-US" sz="4000" dirty="0">
+                <a:solidFill>
+                  <a:schemeClr val="bg1"/>
+                </a:solidFill>
+              </a:rPr>
+              <a:t>アピール：当たり判定</a:t>
+            </a:r>
+            <a:r>
+              <a:rPr kumimoji="1" lang="en-US" altLang="ja-JP" sz="4000" dirty="0">
+                <a:solidFill>
+                  <a:schemeClr val="bg1"/>
+                </a:solidFill>
+              </a:rPr>
+              <a:t>】</a:t>
+            </a:r>
+            <a:endParaRPr kumimoji="1" lang="ja-JP" altLang="en-US" sz="4000" dirty="0">
+              <a:solidFill>
+                <a:schemeClr val="bg1"/>
+              </a:solidFill>
+            </a:endParaRPr>
+          </a:p>
+        </p:txBody>
+      </p:sp>
+      <p:sp>
+        <p:nvSpPr>
+          <p:cNvPr id="3" name="字幕 2">
+            <a:extLst>
+              <a:ext uri="{FF2B5EF4-FFF2-40B4-BE49-F238E27FC236}">
+                <a16:creationId xmlns:a16="http://schemas.microsoft.com/office/drawing/2014/main" id="{AE0D6557-FCC8-4E86-8AB0-187C66124CA3}"/>
+              </a:ext>
+            </a:extLst>
+          </p:cNvPr>
+          <p:cNvSpPr>
+            <a:spLocks noGrp="1"/>
+          </p:cNvSpPr>
+          <p:nvPr>
+            <p:ph type="subTitle" idx="1"/>
+          </p:nvPr>
+        </p:nvSpPr>
+        <p:spPr>
+          <a:xfrm>
+            <a:off x="315883" y="1265526"/>
+            <a:ext cx="7680961" cy="3992274"/>
+          </a:xfrm>
+        </p:spPr>
+        <p:txBody>
+          <a:bodyPr/>
+          <a:lstStyle/>
+          <a:p>
+            <a:pPr algn="l"/>
+            <a:r>
+              <a:rPr kumimoji="1" lang="ja-JP" altLang="en-US" dirty="0">
+                <a:solidFill>
+                  <a:schemeClr val="bg1"/>
+                </a:solidFill>
+              </a:rPr>
+              <a:t>「</a:t>
+            </a:r>
+            <a:r>
+              <a:rPr lang="en-US" altLang="ja-JP" dirty="0"/>
+              <a:t> </a:t>
+            </a:r>
+            <a:r>
+              <a:rPr lang="en-US" altLang="ja-JP" b="1" dirty="0">
+                <a:solidFill>
+                  <a:schemeClr val="bg1"/>
+                </a:solidFill>
+              </a:rPr>
+              <a:t>Character.cpp </a:t>
+            </a:r>
+            <a:r>
+              <a:rPr kumimoji="1" lang="ja-JP" altLang="en-US" dirty="0">
+                <a:solidFill>
+                  <a:schemeClr val="bg1"/>
+                </a:solidFill>
+              </a:rPr>
+              <a:t>」</a:t>
+            </a:r>
+            <a:r>
+              <a:rPr lang="ja-JP" altLang="en-US" dirty="0">
+                <a:solidFill>
+                  <a:schemeClr val="bg1"/>
+                </a:solidFill>
+              </a:rPr>
+              <a:t>は、キャラクターの挙動・攻撃・当たり判定をすべてまとめた基底クラスです</a:t>
+            </a:r>
+            <a:r>
+              <a:rPr lang="ja-JP" altLang="en-US" dirty="0"/>
+              <a:t>。</a:t>
+            </a:r>
+            <a:endParaRPr kumimoji="1" lang="ja-JP" altLang="en-US" dirty="0">
+              <a:solidFill>
+                <a:schemeClr val="bg1"/>
+              </a:solidFill>
+            </a:endParaRPr>
+          </a:p>
+        </p:txBody>
+      </p:sp>
+    </p:spTree>
+    <p:extLst>
+      <p:ext uri="{BB962C8B-B14F-4D97-AF65-F5344CB8AC3E}">
+        <p14:creationId xmlns:p14="http://schemas.microsoft.com/office/powerpoint/2010/main" val="739418282"/>
+      </p:ext>
+    </p:extLst>
+  </p:cSld>
+  <p:clrMapOvr>
+    <a:masterClrMapping/>
+  </p:clrMapOvr>
+</p:sld>
+</file>
+
+<file path=ppt/slides/slide7.xml><?xml version="1.0" encoding="utf-8"?>
+<p:sld xmlns:a="http://schemas.openxmlformats.org/drawingml/2006/main" xmlns:r="http://schemas.openxmlformats.org/officeDocument/2006/relationships" xmlns:p="http://schemas.openxmlformats.org/presentationml/2006/main">
+  <p:cSld>
+    <p:spTree>
+      <p:nvGrpSpPr>
+        <p:cNvPr id="1" name=""/>
+        <p:cNvGrpSpPr/>
+        <p:nvPr/>
+      </p:nvGrpSpPr>
+      <p:grpSpPr>
+        <a:xfrm>
+          <a:off x="0" y="0"/>
+          <a:ext cx="0" cy="0"/>
+          <a:chOff x="0" y="0"/>
+          <a:chExt cx="0" cy="0"/>
+        </a:xfrm>
+      </p:grpSpPr>
       <p:sp>
         <p:nvSpPr>
           <p:cNvPr id="2" name="タイトル 1">
@@ -6755,879 +9526,6 @@
 </p:sld>
 </file>
 
-<file path=ppt/slides/slide5.xml><?xml version="1.0" encoding="utf-8"?>
-<p:sld xmlns:a="http://schemas.openxmlformats.org/drawingml/2006/main" xmlns:r="http://schemas.openxmlformats.org/officeDocument/2006/relationships" xmlns:p="http://schemas.openxmlformats.org/presentationml/2006/main">
-  <p:cSld>
-    <p:spTree>
-      <p:nvGrpSpPr>
-        <p:cNvPr id="1" name=""/>
-        <p:cNvGrpSpPr/>
-        <p:nvPr/>
-      </p:nvGrpSpPr>
-      <p:grpSpPr>
-        <a:xfrm>
-          <a:off x="0" y="0"/>
-          <a:ext cx="0" cy="0"/>
-          <a:chOff x="0" y="0"/>
-          <a:chExt cx="0" cy="0"/>
-        </a:xfrm>
-      </p:grpSpPr>
-      <p:sp>
-        <p:nvSpPr>
-          <p:cNvPr id="2" name="タイトル 1">
-            <a:extLst>
-              <a:ext uri="{FF2B5EF4-FFF2-40B4-BE49-F238E27FC236}">
-                <a16:creationId xmlns:a16="http://schemas.microsoft.com/office/drawing/2014/main" id="{A2EEA01F-1AF2-4E06-9A62-2ADD4CE7C413}"/>
-              </a:ext>
-            </a:extLst>
-          </p:cNvPr>
-          <p:cNvSpPr>
-            <a:spLocks noGrp="1"/>
-          </p:cNvSpPr>
-          <p:nvPr>
-            <p:ph type="ctrTitle"/>
-          </p:nvPr>
-        </p:nvSpPr>
-        <p:spPr>
-          <a:xfrm>
-            <a:off x="1619250" y="644526"/>
-            <a:ext cx="9144000" cy="2133599"/>
-          </a:xfrm>
-        </p:spPr>
-        <p:txBody>
-          <a:bodyPr>
-            <a:normAutofit/>
-          </a:bodyPr>
-          <a:lstStyle/>
-          <a:p>
-            <a:r>
-              <a:rPr kumimoji="1" lang="ja-JP" altLang="en-US" sz="10000" dirty="0"/>
-              <a:t>タイトル</a:t>
-            </a:r>
-          </a:p>
-        </p:txBody>
-      </p:sp>
-      <p:sp>
-        <p:nvSpPr>
-          <p:cNvPr id="3" name="字幕 2">
-            <a:extLst>
-              <a:ext uri="{FF2B5EF4-FFF2-40B4-BE49-F238E27FC236}">
-                <a16:creationId xmlns:a16="http://schemas.microsoft.com/office/drawing/2014/main" id="{75C68191-8585-438A-ACCB-E11454B3AA4E}"/>
-              </a:ext>
-            </a:extLst>
-          </p:cNvPr>
-          <p:cNvSpPr>
-            <a:spLocks noGrp="1"/>
-          </p:cNvSpPr>
-          <p:nvPr>
-            <p:ph type="subTitle" idx="1"/>
-          </p:nvPr>
-        </p:nvSpPr>
-        <p:spPr>
-          <a:xfrm>
-            <a:off x="1524000" y="4079876"/>
-            <a:ext cx="9144000" cy="1655762"/>
-          </a:xfrm>
-        </p:spPr>
-        <p:txBody>
-          <a:bodyPr/>
-          <a:lstStyle/>
-          <a:p>
-            <a:r>
-              <a:rPr kumimoji="1" lang="ja-JP" altLang="en-US" dirty="0"/>
-              <a:t>「</a:t>
-            </a:r>
-            <a:r>
-              <a:rPr kumimoji="1" lang="en-US" altLang="ja-JP" dirty="0"/>
-              <a:t>Enter</a:t>
-            </a:r>
-            <a:r>
-              <a:rPr kumimoji="1" lang="ja-JP" altLang="en-US" dirty="0"/>
-              <a:t>」か</a:t>
-            </a:r>
-            <a:r>
-              <a:rPr kumimoji="1" lang="en-US" altLang="ja-JP" dirty="0"/>
-              <a:t>B</a:t>
-            </a:r>
-            <a:r>
-              <a:rPr kumimoji="1" lang="ja-JP" altLang="en-US" dirty="0"/>
-              <a:t>ボタンでスタート</a:t>
-            </a:r>
-          </a:p>
-        </p:txBody>
-      </p:sp>
-    </p:spTree>
-    <p:extLst>
-      <p:ext uri="{BB962C8B-B14F-4D97-AF65-F5344CB8AC3E}">
-        <p14:creationId xmlns:p14="http://schemas.microsoft.com/office/powerpoint/2010/main" val="2100573860"/>
-      </p:ext>
-    </p:extLst>
-  </p:cSld>
-  <p:clrMapOvr>
-    <a:masterClrMapping/>
-  </p:clrMapOvr>
-</p:sld>
-</file>
-
-<file path=ppt/slides/slide6.xml><?xml version="1.0" encoding="utf-8"?>
-<p:sld xmlns:a="http://schemas.openxmlformats.org/drawingml/2006/main" xmlns:r="http://schemas.openxmlformats.org/officeDocument/2006/relationships" xmlns:p="http://schemas.openxmlformats.org/presentationml/2006/main">
-  <p:cSld>
-    <p:spTree>
-      <p:nvGrpSpPr>
-        <p:cNvPr id="1" name=""/>
-        <p:cNvGrpSpPr/>
-        <p:nvPr/>
-      </p:nvGrpSpPr>
-      <p:grpSpPr>
-        <a:xfrm>
-          <a:off x="0" y="0"/>
-          <a:ext cx="0" cy="0"/>
-          <a:chOff x="0" y="0"/>
-          <a:chExt cx="0" cy="0"/>
-        </a:xfrm>
-      </p:grpSpPr>
-      <p:sp>
-        <p:nvSpPr>
-          <p:cNvPr id="2" name="タイトル 1">
-            <a:extLst>
-              <a:ext uri="{FF2B5EF4-FFF2-40B4-BE49-F238E27FC236}">
-                <a16:creationId xmlns:a16="http://schemas.microsoft.com/office/drawing/2014/main" id="{CEA556C0-5DD8-49F1-BCFD-CB90F7462D98}"/>
-              </a:ext>
-            </a:extLst>
-          </p:cNvPr>
-          <p:cNvSpPr>
-            <a:spLocks noGrp="1"/>
-          </p:cNvSpPr>
-          <p:nvPr>
-            <p:ph type="title"/>
-          </p:nvPr>
-        </p:nvSpPr>
-        <p:spPr/>
-        <p:txBody>
-          <a:bodyPr/>
-          <a:lstStyle/>
-          <a:p>
-            <a:r>
-              <a:rPr kumimoji="1" lang="ja-JP" altLang="en-US" dirty="0"/>
-              <a:t>セレクト</a:t>
-            </a:r>
-          </a:p>
-        </p:txBody>
-      </p:sp>
-      <p:sp>
-        <p:nvSpPr>
-          <p:cNvPr id="3" name="正方形/長方形 2">
-            <a:extLst>
-              <a:ext uri="{FF2B5EF4-FFF2-40B4-BE49-F238E27FC236}">
-                <a16:creationId xmlns:a16="http://schemas.microsoft.com/office/drawing/2014/main" id="{1FE672AB-C24E-4F83-9336-382D1738ECDA}"/>
-              </a:ext>
-            </a:extLst>
-          </p:cNvPr>
-          <p:cNvSpPr/>
-          <p:nvPr/>
-        </p:nvSpPr>
-        <p:spPr>
-          <a:xfrm>
-            <a:off x="2647950" y="2695575"/>
-            <a:ext cx="1352550" cy="1628775"/>
-          </a:xfrm>
-          <a:prstGeom prst="rect">
-            <a:avLst/>
-          </a:prstGeom>
-        </p:spPr>
-        <p:style>
-          <a:lnRef idx="2">
-            <a:schemeClr val="dk1">
-              <a:shade val="50000"/>
-            </a:schemeClr>
-          </a:lnRef>
-          <a:fillRef idx="1">
-            <a:schemeClr val="dk1"/>
-          </a:fillRef>
-          <a:effectRef idx="0">
-            <a:schemeClr val="dk1"/>
-          </a:effectRef>
-          <a:fontRef idx="minor">
-            <a:schemeClr val="lt1"/>
-          </a:fontRef>
-        </p:style>
-        <p:txBody>
-          <a:bodyPr rtlCol="0" anchor="ctr"/>
-          <a:lstStyle/>
-          <a:p>
-            <a:pPr algn="ctr"/>
-            <a:r>
-              <a:rPr kumimoji="1" lang="ja-JP" altLang="en-US" dirty="0"/>
-              <a:t>キャラ</a:t>
-            </a:r>
-          </a:p>
-        </p:txBody>
-      </p:sp>
-      <p:sp>
-        <p:nvSpPr>
-          <p:cNvPr id="9" name="正方形/長方形 8">
-            <a:extLst>
-              <a:ext uri="{FF2B5EF4-FFF2-40B4-BE49-F238E27FC236}">
-                <a16:creationId xmlns:a16="http://schemas.microsoft.com/office/drawing/2014/main" id="{B1E21641-AF92-4BC6-B2C3-D2AAF19B9DF9}"/>
-              </a:ext>
-            </a:extLst>
-          </p:cNvPr>
-          <p:cNvSpPr/>
-          <p:nvPr/>
-        </p:nvSpPr>
-        <p:spPr>
-          <a:xfrm>
-            <a:off x="5305425" y="2695575"/>
-            <a:ext cx="1352550" cy="1628775"/>
-          </a:xfrm>
-          <a:prstGeom prst="rect">
-            <a:avLst/>
-          </a:prstGeom>
-        </p:spPr>
-        <p:style>
-          <a:lnRef idx="2">
-            <a:schemeClr val="dk1">
-              <a:shade val="50000"/>
-            </a:schemeClr>
-          </a:lnRef>
-          <a:fillRef idx="1">
-            <a:schemeClr val="dk1"/>
-          </a:fillRef>
-          <a:effectRef idx="0">
-            <a:schemeClr val="dk1"/>
-          </a:effectRef>
-          <a:fontRef idx="minor">
-            <a:schemeClr val="lt1"/>
-          </a:fontRef>
-        </p:style>
-        <p:txBody>
-          <a:bodyPr rtlCol="0" anchor="ctr"/>
-          <a:lstStyle/>
-          <a:p>
-            <a:pPr algn="ctr"/>
-            <a:r>
-              <a:rPr kumimoji="1" lang="ja-JP" altLang="en-US" dirty="0"/>
-              <a:t>キャラ</a:t>
-            </a:r>
-          </a:p>
-        </p:txBody>
-      </p:sp>
-      <p:sp>
-        <p:nvSpPr>
-          <p:cNvPr id="10" name="正方形/長方形 9">
-            <a:extLst>
-              <a:ext uri="{FF2B5EF4-FFF2-40B4-BE49-F238E27FC236}">
-                <a16:creationId xmlns:a16="http://schemas.microsoft.com/office/drawing/2014/main" id="{B8101C9B-25A8-4833-AEB1-45076640F767}"/>
-              </a:ext>
-            </a:extLst>
-          </p:cNvPr>
-          <p:cNvSpPr/>
-          <p:nvPr/>
-        </p:nvSpPr>
-        <p:spPr>
-          <a:xfrm>
-            <a:off x="7962900" y="2695575"/>
-            <a:ext cx="1352550" cy="1628775"/>
-          </a:xfrm>
-          <a:prstGeom prst="rect">
-            <a:avLst/>
-          </a:prstGeom>
-        </p:spPr>
-        <p:style>
-          <a:lnRef idx="2">
-            <a:schemeClr val="dk1">
-              <a:shade val="50000"/>
-            </a:schemeClr>
-          </a:lnRef>
-          <a:fillRef idx="1">
-            <a:schemeClr val="dk1"/>
-          </a:fillRef>
-          <a:effectRef idx="0">
-            <a:schemeClr val="dk1"/>
-          </a:effectRef>
-          <a:fontRef idx="minor">
-            <a:schemeClr val="lt1"/>
-          </a:fontRef>
-        </p:style>
-        <p:txBody>
-          <a:bodyPr rtlCol="0" anchor="ctr"/>
-          <a:lstStyle/>
-          <a:p>
-            <a:pPr algn="ctr"/>
-            <a:r>
-              <a:rPr kumimoji="1" lang="ja-JP" altLang="en-US" dirty="0"/>
-              <a:t>キャラ</a:t>
-            </a:r>
-          </a:p>
-        </p:txBody>
-      </p:sp>
-      <p:sp>
-        <p:nvSpPr>
-          <p:cNvPr id="11" name="正方形/長方形 10">
-            <a:extLst>
-              <a:ext uri="{FF2B5EF4-FFF2-40B4-BE49-F238E27FC236}">
-                <a16:creationId xmlns:a16="http://schemas.microsoft.com/office/drawing/2014/main" id="{18681022-87E9-491C-AA8D-F9A88833EA3D}"/>
-              </a:ext>
-            </a:extLst>
-          </p:cNvPr>
-          <p:cNvSpPr/>
-          <p:nvPr/>
-        </p:nvSpPr>
-        <p:spPr>
-          <a:xfrm>
-            <a:off x="3952875" y="4648200"/>
-            <a:ext cx="1352550" cy="1628775"/>
-          </a:xfrm>
-          <a:prstGeom prst="rect">
-            <a:avLst/>
-          </a:prstGeom>
-        </p:spPr>
-        <p:style>
-          <a:lnRef idx="2">
-            <a:schemeClr val="dk1">
-              <a:shade val="50000"/>
-            </a:schemeClr>
-          </a:lnRef>
-          <a:fillRef idx="1">
-            <a:schemeClr val="dk1"/>
-          </a:fillRef>
-          <a:effectRef idx="0">
-            <a:schemeClr val="dk1"/>
-          </a:effectRef>
-          <a:fontRef idx="minor">
-            <a:schemeClr val="lt1"/>
-          </a:fontRef>
-        </p:style>
-        <p:txBody>
-          <a:bodyPr rtlCol="0" anchor="ctr"/>
-          <a:lstStyle/>
-          <a:p>
-            <a:pPr algn="ctr"/>
-            <a:r>
-              <a:rPr kumimoji="1" lang="ja-JP" altLang="en-US" dirty="0"/>
-              <a:t>キャラ</a:t>
-            </a:r>
-          </a:p>
-        </p:txBody>
-      </p:sp>
-      <p:sp>
-        <p:nvSpPr>
-          <p:cNvPr id="12" name="正方形/長方形 11">
-            <a:extLst>
-              <a:ext uri="{FF2B5EF4-FFF2-40B4-BE49-F238E27FC236}">
-                <a16:creationId xmlns:a16="http://schemas.microsoft.com/office/drawing/2014/main" id="{61C2B7ED-3ED5-4F2C-9B40-10ACF7FA21BF}"/>
-              </a:ext>
-            </a:extLst>
-          </p:cNvPr>
-          <p:cNvSpPr/>
-          <p:nvPr/>
-        </p:nvSpPr>
-        <p:spPr>
-          <a:xfrm>
-            <a:off x="6610350" y="4648200"/>
-            <a:ext cx="1352550" cy="1628775"/>
-          </a:xfrm>
-          <a:prstGeom prst="rect">
-            <a:avLst/>
-          </a:prstGeom>
-        </p:spPr>
-        <p:style>
-          <a:lnRef idx="2">
-            <a:schemeClr val="dk1">
-              <a:shade val="50000"/>
-            </a:schemeClr>
-          </a:lnRef>
-          <a:fillRef idx="1">
-            <a:schemeClr val="dk1"/>
-          </a:fillRef>
-          <a:effectRef idx="0">
-            <a:schemeClr val="dk1"/>
-          </a:effectRef>
-          <a:fontRef idx="minor">
-            <a:schemeClr val="lt1"/>
-          </a:fontRef>
-        </p:style>
-        <p:txBody>
-          <a:bodyPr rtlCol="0" anchor="ctr"/>
-          <a:lstStyle/>
-          <a:p>
-            <a:pPr algn="ctr"/>
-            <a:r>
-              <a:rPr kumimoji="1" lang="ja-JP" altLang="en-US" dirty="0"/>
-              <a:t>キャラ</a:t>
-            </a:r>
-          </a:p>
-        </p:txBody>
-      </p:sp>
-    </p:spTree>
-    <p:extLst>
-      <p:ext uri="{BB962C8B-B14F-4D97-AF65-F5344CB8AC3E}">
-        <p14:creationId xmlns:p14="http://schemas.microsoft.com/office/powerpoint/2010/main" val="3464825203"/>
-      </p:ext>
-    </p:extLst>
-  </p:cSld>
-  <p:clrMapOvr>
-    <a:masterClrMapping/>
-  </p:clrMapOvr>
-</p:sld>
-</file>
-
-<file path=ppt/slides/slide7.xml><?xml version="1.0" encoding="utf-8"?>
-<p:sld xmlns:a="http://schemas.openxmlformats.org/drawingml/2006/main" xmlns:r="http://schemas.openxmlformats.org/officeDocument/2006/relationships" xmlns:p="http://schemas.openxmlformats.org/presentationml/2006/main">
-  <p:cSld>
-    <p:spTree>
-      <p:nvGrpSpPr>
-        <p:cNvPr id="1" name=""/>
-        <p:cNvGrpSpPr/>
-        <p:nvPr/>
-      </p:nvGrpSpPr>
-      <p:grpSpPr>
-        <a:xfrm>
-          <a:off x="0" y="0"/>
-          <a:ext cx="0" cy="0"/>
-          <a:chOff x="0" y="0"/>
-          <a:chExt cx="0" cy="0"/>
-        </a:xfrm>
-      </p:grpSpPr>
-      <p:sp>
-        <p:nvSpPr>
-          <p:cNvPr id="2" name="タイトル 1">
-            <a:extLst>
-              <a:ext uri="{FF2B5EF4-FFF2-40B4-BE49-F238E27FC236}">
-                <a16:creationId xmlns:a16="http://schemas.microsoft.com/office/drawing/2014/main" id="{EA37FBEC-4F81-4EF0-A5ED-18F8031A9E87}"/>
-              </a:ext>
-            </a:extLst>
-          </p:cNvPr>
-          <p:cNvSpPr>
-            <a:spLocks noGrp="1"/>
-          </p:cNvSpPr>
-          <p:nvPr>
-            <p:ph type="title"/>
-          </p:nvPr>
-        </p:nvSpPr>
-        <p:spPr>
-          <a:xfrm>
-            <a:off x="133350" y="99218"/>
-            <a:ext cx="10515600" cy="1325563"/>
-          </a:xfrm>
-        </p:spPr>
-        <p:txBody>
-          <a:bodyPr/>
-          <a:lstStyle/>
-          <a:p>
-            <a:r>
-              <a:rPr kumimoji="1" lang="ja-JP" altLang="en-US" dirty="0"/>
-              <a:t>ゲーム</a:t>
-            </a:r>
-          </a:p>
-        </p:txBody>
-      </p:sp>
-      <p:sp>
-        <p:nvSpPr>
-          <p:cNvPr id="3" name="正方形/長方形 2">
-            <a:extLst>
-              <a:ext uri="{FF2B5EF4-FFF2-40B4-BE49-F238E27FC236}">
-                <a16:creationId xmlns:a16="http://schemas.microsoft.com/office/drawing/2014/main" id="{853D63FD-E35C-4B5D-AB3D-EF0692161EC6}"/>
-              </a:ext>
-            </a:extLst>
-          </p:cNvPr>
-          <p:cNvSpPr/>
-          <p:nvPr/>
-        </p:nvSpPr>
-        <p:spPr>
-          <a:xfrm>
-            <a:off x="3057525" y="2466975"/>
-            <a:ext cx="2190750" cy="3629025"/>
-          </a:xfrm>
-          <a:prstGeom prst="rect">
-            <a:avLst/>
-          </a:prstGeom>
-        </p:spPr>
-        <p:style>
-          <a:lnRef idx="2">
-            <a:schemeClr val="dk1">
-              <a:shade val="50000"/>
-            </a:schemeClr>
-          </a:lnRef>
-          <a:fillRef idx="1">
-            <a:schemeClr val="dk1"/>
-          </a:fillRef>
-          <a:effectRef idx="0">
-            <a:schemeClr val="dk1"/>
-          </a:effectRef>
-          <a:fontRef idx="minor">
-            <a:schemeClr val="lt1"/>
-          </a:fontRef>
-        </p:style>
-        <p:txBody>
-          <a:bodyPr rtlCol="0" anchor="ctr"/>
-          <a:lstStyle/>
-          <a:p>
-            <a:pPr algn="ctr"/>
-            <a:r>
-              <a:rPr kumimoji="1" lang="ja-JP" altLang="en-US" dirty="0"/>
-              <a:t>キャラ</a:t>
-            </a:r>
-          </a:p>
-        </p:txBody>
-      </p:sp>
-      <p:sp>
-        <p:nvSpPr>
-          <p:cNvPr id="4" name="正方形/長方形 3">
-            <a:extLst>
-              <a:ext uri="{FF2B5EF4-FFF2-40B4-BE49-F238E27FC236}">
-                <a16:creationId xmlns:a16="http://schemas.microsoft.com/office/drawing/2014/main" id="{D28347EA-C43E-4578-84C7-23BF7E5D5099}"/>
-              </a:ext>
-            </a:extLst>
-          </p:cNvPr>
-          <p:cNvSpPr/>
-          <p:nvPr/>
-        </p:nvSpPr>
-        <p:spPr>
-          <a:xfrm>
-            <a:off x="7496175" y="2466975"/>
-            <a:ext cx="2190750" cy="3629025"/>
-          </a:xfrm>
-          <a:prstGeom prst="rect">
-            <a:avLst/>
-          </a:prstGeom>
-        </p:spPr>
-        <p:style>
-          <a:lnRef idx="2">
-            <a:schemeClr val="dk1">
-              <a:shade val="50000"/>
-            </a:schemeClr>
-          </a:lnRef>
-          <a:fillRef idx="1">
-            <a:schemeClr val="dk1"/>
-          </a:fillRef>
-          <a:effectRef idx="0">
-            <a:schemeClr val="dk1"/>
-          </a:effectRef>
-          <a:fontRef idx="minor">
-            <a:schemeClr val="lt1"/>
-          </a:fontRef>
-        </p:style>
-        <p:txBody>
-          <a:bodyPr rtlCol="0" anchor="ctr"/>
-          <a:lstStyle/>
-          <a:p>
-            <a:pPr algn="ctr"/>
-            <a:r>
-              <a:rPr kumimoji="1" lang="ja-JP" altLang="en-US" dirty="0"/>
-              <a:t>キャラ</a:t>
-            </a:r>
-          </a:p>
-        </p:txBody>
-      </p:sp>
-      <p:sp>
-        <p:nvSpPr>
-          <p:cNvPr id="5" name="正方形/長方形 4">
-            <a:extLst>
-              <a:ext uri="{FF2B5EF4-FFF2-40B4-BE49-F238E27FC236}">
-                <a16:creationId xmlns:a16="http://schemas.microsoft.com/office/drawing/2014/main" id="{1ABF6A07-DE58-4CC5-AC3B-7F354BDCC33C}"/>
-              </a:ext>
-            </a:extLst>
-          </p:cNvPr>
-          <p:cNvSpPr/>
-          <p:nvPr/>
-        </p:nvSpPr>
-        <p:spPr>
-          <a:xfrm>
-            <a:off x="1304925" y="1200150"/>
-            <a:ext cx="3943350" cy="533400"/>
-          </a:xfrm>
-          <a:prstGeom prst="rect">
-            <a:avLst/>
-          </a:prstGeom>
-          <a:solidFill>
-            <a:srgbClr val="FF0000"/>
-          </a:solidFill>
-        </p:spPr>
-        <p:style>
-          <a:lnRef idx="2">
-            <a:schemeClr val="accent1">
-              <a:shade val="50000"/>
-            </a:schemeClr>
-          </a:lnRef>
-          <a:fillRef idx="1">
-            <a:schemeClr val="accent1"/>
-          </a:fillRef>
-          <a:effectRef idx="0">
-            <a:schemeClr val="accent1"/>
-          </a:effectRef>
-          <a:fontRef idx="minor">
-            <a:schemeClr val="lt1"/>
-          </a:fontRef>
-        </p:style>
-        <p:txBody>
-          <a:bodyPr rtlCol="0" anchor="ctr"/>
-          <a:lstStyle/>
-          <a:p>
-            <a:pPr algn="ctr"/>
-            <a:r>
-              <a:rPr kumimoji="1" lang="en-US" altLang="ja-JP" dirty="0"/>
-              <a:t>HP</a:t>
-            </a:r>
-            <a:endParaRPr kumimoji="1" lang="ja-JP" altLang="en-US" dirty="0"/>
-          </a:p>
-        </p:txBody>
-      </p:sp>
-      <p:sp>
-        <p:nvSpPr>
-          <p:cNvPr id="6" name="正方形/長方形 5">
-            <a:extLst>
-              <a:ext uri="{FF2B5EF4-FFF2-40B4-BE49-F238E27FC236}">
-                <a16:creationId xmlns:a16="http://schemas.microsoft.com/office/drawing/2014/main" id="{AA01EA96-CBEF-4F4C-8F5E-A136E6E4F4F4}"/>
-              </a:ext>
-            </a:extLst>
-          </p:cNvPr>
-          <p:cNvSpPr/>
-          <p:nvPr/>
-        </p:nvSpPr>
-        <p:spPr>
-          <a:xfrm>
-            <a:off x="7496175" y="1200150"/>
-            <a:ext cx="3943350" cy="533400"/>
-          </a:xfrm>
-          <a:prstGeom prst="rect">
-            <a:avLst/>
-          </a:prstGeom>
-          <a:solidFill>
-            <a:srgbClr val="0070C0"/>
-          </a:solidFill>
-        </p:spPr>
-        <p:style>
-          <a:lnRef idx="2">
-            <a:schemeClr val="accent1">
-              <a:shade val="50000"/>
-            </a:schemeClr>
-          </a:lnRef>
-          <a:fillRef idx="1">
-            <a:schemeClr val="accent1"/>
-          </a:fillRef>
-          <a:effectRef idx="0">
-            <a:schemeClr val="accent1"/>
-          </a:effectRef>
-          <a:fontRef idx="minor">
-            <a:schemeClr val="lt1"/>
-          </a:fontRef>
-        </p:style>
-        <p:txBody>
-          <a:bodyPr rtlCol="0" anchor="ctr"/>
-          <a:lstStyle/>
-          <a:p>
-            <a:pPr algn="ctr"/>
-            <a:r>
-              <a:rPr kumimoji="1" lang="en-US" altLang="ja-JP" dirty="0"/>
-              <a:t>HP</a:t>
-            </a:r>
-            <a:endParaRPr kumimoji="1" lang="ja-JP" altLang="en-US" dirty="0"/>
-          </a:p>
-        </p:txBody>
-      </p:sp>
-      <p:sp>
-        <p:nvSpPr>
-          <p:cNvPr id="7" name="正方形/長方形 6">
-            <a:extLst>
-              <a:ext uri="{FF2B5EF4-FFF2-40B4-BE49-F238E27FC236}">
-                <a16:creationId xmlns:a16="http://schemas.microsoft.com/office/drawing/2014/main" id="{E2406FAC-CD78-4DF3-94A2-1814B260B7AF}"/>
-              </a:ext>
-            </a:extLst>
-          </p:cNvPr>
-          <p:cNvSpPr/>
-          <p:nvPr/>
-        </p:nvSpPr>
-        <p:spPr>
-          <a:xfrm>
-            <a:off x="350192" y="2552700"/>
-            <a:ext cx="952500" cy="3086100"/>
-          </a:xfrm>
-          <a:prstGeom prst="rect">
-            <a:avLst/>
-          </a:prstGeom>
-          <a:solidFill>
-            <a:schemeClr val="bg1"/>
-          </a:solidFill>
-          <a:ln>
-            <a:solidFill>
-              <a:schemeClr val="tx1"/>
-            </a:solidFill>
-          </a:ln>
-        </p:spPr>
-        <p:style>
-          <a:lnRef idx="2">
-            <a:schemeClr val="accent1">
-              <a:shade val="50000"/>
-            </a:schemeClr>
-          </a:lnRef>
-          <a:fillRef idx="1">
-            <a:schemeClr val="accent1"/>
-          </a:fillRef>
-          <a:effectRef idx="0">
-            <a:schemeClr val="accent1"/>
-          </a:effectRef>
-          <a:fontRef idx="minor">
-            <a:schemeClr val="lt1"/>
-          </a:fontRef>
-        </p:style>
-        <p:txBody>
-          <a:bodyPr rtlCol="0" anchor="ctr"/>
-          <a:lstStyle/>
-          <a:p>
-            <a:pPr algn="ctr"/>
-            <a:endParaRPr kumimoji="1" lang="ja-JP" altLang="en-US"/>
-          </a:p>
-        </p:txBody>
-      </p:sp>
-      <p:sp>
-        <p:nvSpPr>
-          <p:cNvPr id="8" name="テキスト ボックス 7">
-            <a:extLst>
-              <a:ext uri="{FF2B5EF4-FFF2-40B4-BE49-F238E27FC236}">
-                <a16:creationId xmlns:a16="http://schemas.microsoft.com/office/drawing/2014/main" id="{A2821839-6557-456C-8CF1-D4D4053DF904}"/>
-              </a:ext>
-            </a:extLst>
-          </p:cNvPr>
-          <p:cNvSpPr txBox="1"/>
-          <p:nvPr/>
-        </p:nvSpPr>
-        <p:spPr>
-          <a:xfrm>
-            <a:off x="595609" y="3333750"/>
-            <a:ext cx="461665" cy="1333500"/>
-          </a:xfrm>
-          <a:prstGeom prst="rect">
-            <a:avLst/>
-          </a:prstGeom>
-          <a:noFill/>
-        </p:spPr>
-        <p:txBody>
-          <a:bodyPr vert="eaVert" wrap="square" rtlCol="0">
-            <a:spAutoFit/>
-          </a:bodyPr>
-          <a:lstStyle/>
-          <a:p>
-            <a:r>
-              <a:rPr kumimoji="1" lang="ja-JP" altLang="en-US" dirty="0"/>
-              <a:t>コマンド</a:t>
-            </a:r>
-          </a:p>
-        </p:txBody>
-      </p:sp>
-      <p:sp>
-        <p:nvSpPr>
-          <p:cNvPr id="10" name="正方形/長方形 9">
-            <a:extLst>
-              <a:ext uri="{FF2B5EF4-FFF2-40B4-BE49-F238E27FC236}">
-                <a16:creationId xmlns:a16="http://schemas.microsoft.com/office/drawing/2014/main" id="{A1F64DE1-E8C7-4647-BE6C-2AC178C7824B}"/>
-              </a:ext>
-            </a:extLst>
-          </p:cNvPr>
-          <p:cNvSpPr/>
-          <p:nvPr/>
-        </p:nvSpPr>
-        <p:spPr>
-          <a:xfrm>
-            <a:off x="10808642" y="2552700"/>
-            <a:ext cx="952500" cy="3086100"/>
-          </a:xfrm>
-          <a:prstGeom prst="rect">
-            <a:avLst/>
-          </a:prstGeom>
-          <a:solidFill>
-            <a:schemeClr val="bg1"/>
-          </a:solidFill>
-          <a:ln>
-            <a:solidFill>
-              <a:schemeClr val="tx1"/>
-            </a:solidFill>
-          </a:ln>
-        </p:spPr>
-        <p:style>
-          <a:lnRef idx="2">
-            <a:schemeClr val="accent1">
-              <a:shade val="50000"/>
-            </a:schemeClr>
-          </a:lnRef>
-          <a:fillRef idx="1">
-            <a:schemeClr val="accent1"/>
-          </a:fillRef>
-          <a:effectRef idx="0">
-            <a:schemeClr val="accent1"/>
-          </a:effectRef>
-          <a:fontRef idx="minor">
-            <a:schemeClr val="lt1"/>
-          </a:fontRef>
-        </p:style>
-        <p:txBody>
-          <a:bodyPr rtlCol="0" anchor="ctr"/>
-          <a:lstStyle/>
-          <a:p>
-            <a:pPr algn="ctr"/>
-            <a:r>
-              <a:rPr kumimoji="1" lang="ja-JP" altLang="en-US" dirty="0"/>
-              <a:t>コマンド</a:t>
-            </a:r>
-          </a:p>
-          <a:p>
-            <a:pPr algn="ctr"/>
-            <a:endParaRPr kumimoji="1" lang="ja-JP" altLang="en-US" dirty="0">
-              <a:solidFill>
-                <a:schemeClr val="tx1"/>
-              </a:solidFill>
-            </a:endParaRPr>
-          </a:p>
-        </p:txBody>
-      </p:sp>
-      <p:sp>
-        <p:nvSpPr>
-          <p:cNvPr id="11" name="テキスト ボックス 10">
-            <a:extLst>
-              <a:ext uri="{FF2B5EF4-FFF2-40B4-BE49-F238E27FC236}">
-                <a16:creationId xmlns:a16="http://schemas.microsoft.com/office/drawing/2014/main" id="{567D1BD1-6E30-4B1E-A95B-FE13F697B2FE}"/>
-              </a:ext>
-            </a:extLst>
-          </p:cNvPr>
-          <p:cNvSpPr txBox="1"/>
-          <p:nvPr/>
-        </p:nvSpPr>
-        <p:spPr>
-          <a:xfrm>
-            <a:off x="11054059" y="3333750"/>
-            <a:ext cx="461665" cy="1247775"/>
-          </a:xfrm>
-          <a:prstGeom prst="rect">
-            <a:avLst/>
-          </a:prstGeom>
-          <a:noFill/>
-        </p:spPr>
-        <p:txBody>
-          <a:bodyPr vert="eaVert" wrap="square" rtlCol="0">
-            <a:spAutoFit/>
-          </a:bodyPr>
-          <a:lstStyle/>
-          <a:p>
-            <a:r>
-              <a:rPr kumimoji="1" lang="ja-JP" altLang="en-US" dirty="0"/>
-              <a:t>コマンド</a:t>
-            </a:r>
-          </a:p>
-        </p:txBody>
-      </p:sp>
-    </p:spTree>
-    <p:extLst>
-      <p:ext uri="{BB962C8B-B14F-4D97-AF65-F5344CB8AC3E}">
-        <p14:creationId xmlns:p14="http://schemas.microsoft.com/office/powerpoint/2010/main" val="3460234443"/>
-      </p:ext>
-    </p:extLst>
-  </p:cSld>
-  <p:clrMapOvr>
-    <a:masterClrMapping/>
-  </p:clrMapOvr>
-</p:sld>
-</file>
-
 <file path=ppt/slides/slide8.xml><?xml version="1.0" encoding="utf-8"?>
 <p:sld xmlns:a="http://schemas.openxmlformats.org/drawingml/2006/main" xmlns:r="http://schemas.openxmlformats.org/officeDocument/2006/relationships" xmlns:p="http://schemas.openxmlformats.org/presentationml/2006/main">
   <p:cSld>
@@ -7650,7 +9548,121 @@
           <p:cNvPr id="2" name="タイトル 1">
             <a:extLst>
               <a:ext uri="{FF2B5EF4-FFF2-40B4-BE49-F238E27FC236}">
-                <a16:creationId xmlns:a16="http://schemas.microsoft.com/office/drawing/2014/main" id="{56642868-DB41-4B4D-BD90-A198EA1FB09A}"/>
+                <a16:creationId xmlns:a16="http://schemas.microsoft.com/office/drawing/2014/main" id="{A2EEA01F-1AF2-4E06-9A62-2ADD4CE7C413}"/>
+              </a:ext>
+            </a:extLst>
+          </p:cNvPr>
+          <p:cNvSpPr>
+            <a:spLocks noGrp="1"/>
+          </p:cNvSpPr>
+          <p:nvPr>
+            <p:ph type="ctrTitle"/>
+          </p:nvPr>
+        </p:nvSpPr>
+        <p:spPr>
+          <a:xfrm>
+            <a:off x="1619250" y="644526"/>
+            <a:ext cx="9144000" cy="2133599"/>
+          </a:xfrm>
+        </p:spPr>
+        <p:txBody>
+          <a:bodyPr>
+            <a:normAutofit/>
+          </a:bodyPr>
+          <a:lstStyle/>
+          <a:p>
+            <a:r>
+              <a:rPr kumimoji="1" lang="ja-JP" altLang="en-US" sz="10000" dirty="0"/>
+              <a:t>タイトル</a:t>
+            </a:r>
+          </a:p>
+        </p:txBody>
+      </p:sp>
+      <p:sp>
+        <p:nvSpPr>
+          <p:cNvPr id="3" name="字幕 2">
+            <a:extLst>
+              <a:ext uri="{FF2B5EF4-FFF2-40B4-BE49-F238E27FC236}">
+                <a16:creationId xmlns:a16="http://schemas.microsoft.com/office/drawing/2014/main" id="{75C68191-8585-438A-ACCB-E11454B3AA4E}"/>
+              </a:ext>
+            </a:extLst>
+          </p:cNvPr>
+          <p:cNvSpPr>
+            <a:spLocks noGrp="1"/>
+          </p:cNvSpPr>
+          <p:nvPr>
+            <p:ph type="subTitle" idx="1"/>
+          </p:nvPr>
+        </p:nvSpPr>
+        <p:spPr>
+          <a:xfrm>
+            <a:off x="1524000" y="4079876"/>
+            <a:ext cx="9144000" cy="1655762"/>
+          </a:xfrm>
+        </p:spPr>
+        <p:txBody>
+          <a:bodyPr/>
+          <a:lstStyle/>
+          <a:p>
+            <a:r>
+              <a:rPr kumimoji="1" lang="ja-JP" altLang="en-US" dirty="0"/>
+              <a:t>「</a:t>
+            </a:r>
+            <a:r>
+              <a:rPr kumimoji="1" lang="en-US" altLang="ja-JP" dirty="0"/>
+              <a:t>Enter</a:t>
+            </a:r>
+            <a:r>
+              <a:rPr kumimoji="1" lang="ja-JP" altLang="en-US" dirty="0"/>
+              <a:t>」か</a:t>
+            </a:r>
+            <a:r>
+              <a:rPr kumimoji="1" lang="en-US" altLang="ja-JP" dirty="0"/>
+              <a:t>B</a:t>
+            </a:r>
+            <a:r>
+              <a:rPr kumimoji="1" lang="ja-JP" altLang="en-US" dirty="0"/>
+              <a:t>ボタンでスタート</a:t>
+            </a:r>
+          </a:p>
+        </p:txBody>
+      </p:sp>
+    </p:spTree>
+    <p:extLst>
+      <p:ext uri="{BB962C8B-B14F-4D97-AF65-F5344CB8AC3E}">
+        <p14:creationId xmlns:p14="http://schemas.microsoft.com/office/powerpoint/2010/main" val="2100573860"/>
+      </p:ext>
+    </p:extLst>
+  </p:cSld>
+  <p:clrMapOvr>
+    <a:masterClrMapping/>
+  </p:clrMapOvr>
+</p:sld>
+</file>
+
+<file path=ppt/slides/slide9.xml><?xml version="1.0" encoding="utf-8"?>
+<p:sld xmlns:a="http://schemas.openxmlformats.org/drawingml/2006/main" xmlns:r="http://schemas.openxmlformats.org/officeDocument/2006/relationships" xmlns:p="http://schemas.openxmlformats.org/presentationml/2006/main">
+  <p:cSld>
+    <p:spTree>
+      <p:nvGrpSpPr>
+        <p:cNvPr id="1" name=""/>
+        <p:cNvGrpSpPr/>
+        <p:nvPr/>
+      </p:nvGrpSpPr>
+      <p:grpSpPr>
+        <a:xfrm>
+          <a:off x="0" y="0"/>
+          <a:ext cx="0" cy="0"/>
+          <a:chOff x="0" y="0"/>
+          <a:chExt cx="0" cy="0"/>
+        </a:xfrm>
+      </p:grpSpPr>
+      <p:sp>
+        <p:nvSpPr>
+          <p:cNvPr id="2" name="タイトル 1">
+            <a:extLst>
+              <a:ext uri="{FF2B5EF4-FFF2-40B4-BE49-F238E27FC236}">
+                <a16:creationId xmlns:a16="http://schemas.microsoft.com/office/drawing/2014/main" id="{CEA556C0-5DD8-49F1-BCFD-CB90F7462D98}"/>
               </a:ext>
             </a:extLst>
           </p:cNvPr>
@@ -7668,7 +9680,7 @@
           <a:p>
             <a:r>
               <a:rPr kumimoji="1" lang="ja-JP" altLang="en-US" dirty="0"/>
-              <a:t>リトライ</a:t>
+              <a:t>セレクト</a:t>
             </a:r>
           </a:p>
         </p:txBody>
@@ -7678,7 +9690,7 @@
           <p:cNvPr id="3" name="正方形/長方形 2">
             <a:extLst>
               <a:ext uri="{FF2B5EF4-FFF2-40B4-BE49-F238E27FC236}">
-                <a16:creationId xmlns:a16="http://schemas.microsoft.com/office/drawing/2014/main" id="{F5F2AF6D-07C9-4467-8E0F-2AFA31BC2151}"/>
+                <a16:creationId xmlns:a16="http://schemas.microsoft.com/office/drawing/2014/main" id="{1FE672AB-C24E-4F83-9336-382D1738ECDA}"/>
               </a:ext>
             </a:extLst>
           </p:cNvPr>
@@ -7687,8 +9699,8 @@
         </p:nvSpPr>
         <p:spPr>
           <a:xfrm>
-            <a:off x="4567234" y="5214937"/>
-            <a:ext cx="3057525" cy="762000"/>
+            <a:off x="2647950" y="2695575"/>
+            <a:ext cx="1352550" cy="1628775"/>
           </a:xfrm>
           <a:prstGeom prst="rect">
             <a:avLst/>
@@ -7717,17 +9729,17 @@
             <a:pPr algn="ctr"/>
             <a:r>
               <a:rPr kumimoji="1" lang="ja-JP" altLang="en-US" dirty="0"/>
-              <a:t>タイトルへ</a:t>
-            </a:r>
-          </a:p>
-        </p:txBody>
-      </p:sp>
-      <p:sp>
-        <p:nvSpPr>
-          <p:cNvPr id="4" name="正方形/長方形 3">
-            <a:extLst>
-              <a:ext uri="{FF2B5EF4-FFF2-40B4-BE49-F238E27FC236}">
-                <a16:creationId xmlns:a16="http://schemas.microsoft.com/office/drawing/2014/main" id="{41FEF113-E625-4C2C-9741-3F8F1803F934}"/>
+              <a:t>キャラ</a:t>
+            </a:r>
+          </a:p>
+        </p:txBody>
+      </p:sp>
+      <p:sp>
+        <p:nvSpPr>
+          <p:cNvPr id="9" name="正方形/長方形 8">
+            <a:extLst>
+              <a:ext uri="{FF2B5EF4-FFF2-40B4-BE49-F238E27FC236}">
+                <a16:creationId xmlns:a16="http://schemas.microsoft.com/office/drawing/2014/main" id="{B1E21641-AF92-4BC6-B2C3-D2AAF19B9DF9}"/>
               </a:ext>
             </a:extLst>
           </p:cNvPr>
@@ -7736,8 +9748,8 @@
         </p:nvSpPr>
         <p:spPr>
           <a:xfrm>
-            <a:off x="4567234" y="3745706"/>
-            <a:ext cx="3057525" cy="762000"/>
+            <a:off x="5305425" y="2695575"/>
+            <a:ext cx="1352550" cy="1628775"/>
           </a:xfrm>
           <a:prstGeom prst="rect">
             <a:avLst/>
@@ -7765,22 +9777,18 @@
           <a:p>
             <a:pPr algn="ctr"/>
             <a:r>
-              <a:rPr lang="ja-JP" altLang="en-US" dirty="0"/>
-              <a:t>セレクト</a:t>
-            </a:r>
-            <a:r>
               <a:rPr kumimoji="1" lang="ja-JP" altLang="en-US" dirty="0"/>
-              <a:t>へ</a:t>
-            </a:r>
-          </a:p>
-        </p:txBody>
-      </p:sp>
-      <p:sp>
-        <p:nvSpPr>
-          <p:cNvPr id="5" name="正方形/長方形 4">
-            <a:extLst>
-              <a:ext uri="{FF2B5EF4-FFF2-40B4-BE49-F238E27FC236}">
-                <a16:creationId xmlns:a16="http://schemas.microsoft.com/office/drawing/2014/main" id="{917875AE-1639-4E08-8B8D-36D118830F09}"/>
+              <a:t>キャラ</a:t>
+            </a:r>
+          </a:p>
+        </p:txBody>
+      </p:sp>
+      <p:sp>
+        <p:nvSpPr>
+          <p:cNvPr id="10" name="正方形/長方形 9">
+            <a:extLst>
+              <a:ext uri="{FF2B5EF4-FFF2-40B4-BE49-F238E27FC236}">
+                <a16:creationId xmlns:a16="http://schemas.microsoft.com/office/drawing/2014/main" id="{B8101C9B-25A8-4833-AEB1-45076640F767}"/>
               </a:ext>
             </a:extLst>
           </p:cNvPr>
@@ -7789,8 +9797,8 @@
         </p:nvSpPr>
         <p:spPr>
           <a:xfrm>
-            <a:off x="4567234" y="2276475"/>
-            <a:ext cx="3057525" cy="762000"/>
+            <a:off x="7962900" y="2695575"/>
+            <a:ext cx="1352550" cy="1628775"/>
           </a:xfrm>
           <a:prstGeom prst="rect">
             <a:avLst/>
@@ -7819,7 +9827,105 @@
             <a:pPr algn="ctr"/>
             <a:r>
               <a:rPr kumimoji="1" lang="ja-JP" altLang="en-US" dirty="0"/>
-              <a:t>再挑戦</a:t>
+              <a:t>キャラ</a:t>
+            </a:r>
+          </a:p>
+        </p:txBody>
+      </p:sp>
+      <p:sp>
+        <p:nvSpPr>
+          <p:cNvPr id="11" name="正方形/長方形 10">
+            <a:extLst>
+              <a:ext uri="{FF2B5EF4-FFF2-40B4-BE49-F238E27FC236}">
+                <a16:creationId xmlns:a16="http://schemas.microsoft.com/office/drawing/2014/main" id="{18681022-87E9-491C-AA8D-F9A88833EA3D}"/>
+              </a:ext>
+            </a:extLst>
+          </p:cNvPr>
+          <p:cNvSpPr/>
+          <p:nvPr/>
+        </p:nvSpPr>
+        <p:spPr>
+          <a:xfrm>
+            <a:off x="3952875" y="4648200"/>
+            <a:ext cx="1352550" cy="1628775"/>
+          </a:xfrm>
+          <a:prstGeom prst="rect">
+            <a:avLst/>
+          </a:prstGeom>
+        </p:spPr>
+        <p:style>
+          <a:lnRef idx="2">
+            <a:schemeClr val="dk1">
+              <a:shade val="50000"/>
+            </a:schemeClr>
+          </a:lnRef>
+          <a:fillRef idx="1">
+            <a:schemeClr val="dk1"/>
+          </a:fillRef>
+          <a:effectRef idx="0">
+            <a:schemeClr val="dk1"/>
+          </a:effectRef>
+          <a:fontRef idx="minor">
+            <a:schemeClr val="lt1"/>
+          </a:fontRef>
+        </p:style>
+        <p:txBody>
+          <a:bodyPr rtlCol="0" anchor="ctr"/>
+          <a:lstStyle/>
+          <a:p>
+            <a:pPr algn="ctr"/>
+            <a:r>
+              <a:rPr kumimoji="1" lang="ja-JP" altLang="en-US" dirty="0"/>
+              <a:t>キャラ</a:t>
+            </a:r>
+          </a:p>
+        </p:txBody>
+      </p:sp>
+      <p:sp>
+        <p:nvSpPr>
+          <p:cNvPr id="12" name="正方形/長方形 11">
+            <a:extLst>
+              <a:ext uri="{FF2B5EF4-FFF2-40B4-BE49-F238E27FC236}">
+                <a16:creationId xmlns:a16="http://schemas.microsoft.com/office/drawing/2014/main" id="{61C2B7ED-3ED5-4F2C-9B40-10ACF7FA21BF}"/>
+              </a:ext>
+            </a:extLst>
+          </p:cNvPr>
+          <p:cNvSpPr/>
+          <p:nvPr/>
+        </p:nvSpPr>
+        <p:spPr>
+          <a:xfrm>
+            <a:off x="6610350" y="4648200"/>
+            <a:ext cx="1352550" cy="1628775"/>
+          </a:xfrm>
+          <a:prstGeom prst="rect">
+            <a:avLst/>
+          </a:prstGeom>
+        </p:spPr>
+        <p:style>
+          <a:lnRef idx="2">
+            <a:schemeClr val="dk1">
+              <a:shade val="50000"/>
+            </a:schemeClr>
+          </a:lnRef>
+          <a:fillRef idx="1">
+            <a:schemeClr val="dk1"/>
+          </a:fillRef>
+          <a:effectRef idx="0">
+            <a:schemeClr val="dk1"/>
+          </a:effectRef>
+          <a:fontRef idx="minor">
+            <a:schemeClr val="lt1"/>
+          </a:fontRef>
+        </p:style>
+        <p:txBody>
+          <a:bodyPr rtlCol="0" anchor="ctr"/>
+          <a:lstStyle/>
+          <a:p>
+            <a:pPr algn="ctr"/>
+            <a:r>
+              <a:rPr kumimoji="1" lang="ja-JP" altLang="en-US" dirty="0"/>
+              <a:t>キャラ</a:t>
             </a:r>
           </a:p>
         </p:txBody>
@@ -7827,7 +9933,7 @@
     </p:spTree>
     <p:extLst>
       <p:ext uri="{BB962C8B-B14F-4D97-AF65-F5344CB8AC3E}">
-        <p14:creationId xmlns:p14="http://schemas.microsoft.com/office/powerpoint/2010/main" val="2166365457"/>
+        <p14:creationId xmlns:p14="http://schemas.microsoft.com/office/powerpoint/2010/main" val="3464825203"/>
       </p:ext>
     </p:extLst>
   </p:cSld>

--- a/仕様書.pptx
+++ b/仕様書.pptx
@@ -11,11 +11,12 @@
     <p:sldId id="267" r:id="rId5"/>
     <p:sldId id="268" r:id="rId6"/>
     <p:sldId id="269" r:id="rId7"/>
-    <p:sldId id="258" r:id="rId8"/>
-    <p:sldId id="260" r:id="rId9"/>
-    <p:sldId id="261" r:id="rId10"/>
-    <p:sldId id="262" r:id="rId11"/>
-    <p:sldId id="263" r:id="rId12"/>
+    <p:sldId id="270" r:id="rId8"/>
+    <p:sldId id="258" r:id="rId9"/>
+    <p:sldId id="260" r:id="rId10"/>
+    <p:sldId id="261" r:id="rId11"/>
+    <p:sldId id="262" r:id="rId12"/>
+    <p:sldId id="263" r:id="rId13"/>
   </p:sldIdLst>
   <p:sldSz cx="12192000" cy="6858000"/>
   <p:notesSz cx="6858000" cy="9144000"/>
@@ -4162,7 +4163,7 @@
           <p:cNvPr id="2" name="タイトル 1">
             <a:extLst>
               <a:ext uri="{FF2B5EF4-FFF2-40B4-BE49-F238E27FC236}">
-                <a16:creationId xmlns:a16="http://schemas.microsoft.com/office/drawing/2014/main" id="{EA37FBEC-4F81-4EF0-A5ED-18F8031A9E87}"/>
+                <a16:creationId xmlns:a16="http://schemas.microsoft.com/office/drawing/2014/main" id="{CEA556C0-5DD8-49F1-BCFD-CB90F7462D98}"/>
               </a:ext>
             </a:extLst>
           </p:cNvPr>
@@ -4173,19 +4174,14 @@
             <p:ph type="title"/>
           </p:nvPr>
         </p:nvSpPr>
-        <p:spPr>
-          <a:xfrm>
-            <a:off x="133350" y="99218"/>
-            <a:ext cx="10515600" cy="1325563"/>
-          </a:xfrm>
-        </p:spPr>
+        <p:spPr/>
         <p:txBody>
           <a:bodyPr/>
           <a:lstStyle/>
           <a:p>
             <a:r>
               <a:rPr kumimoji="1" lang="ja-JP" altLang="en-US" dirty="0"/>
-              <a:t>ゲーム</a:t>
+              <a:t>セレクト</a:t>
             </a:r>
           </a:p>
         </p:txBody>
@@ -4195,7 +4191,7 @@
           <p:cNvPr id="3" name="正方形/長方形 2">
             <a:extLst>
               <a:ext uri="{FF2B5EF4-FFF2-40B4-BE49-F238E27FC236}">
-                <a16:creationId xmlns:a16="http://schemas.microsoft.com/office/drawing/2014/main" id="{853D63FD-E35C-4B5D-AB3D-EF0692161EC6}"/>
+                <a16:creationId xmlns:a16="http://schemas.microsoft.com/office/drawing/2014/main" id="{1FE672AB-C24E-4F83-9336-382D1738ECDA}"/>
               </a:ext>
             </a:extLst>
           </p:cNvPr>
@@ -4204,8 +4200,8 @@
         </p:nvSpPr>
         <p:spPr>
           <a:xfrm>
-            <a:off x="3057525" y="2466975"/>
-            <a:ext cx="2190750" cy="3629025"/>
+            <a:off x="2647950" y="2695575"/>
+            <a:ext cx="1352550" cy="1628775"/>
           </a:xfrm>
           <a:prstGeom prst="rect">
             <a:avLst/>
@@ -4241,10 +4237,10 @@
       </p:sp>
       <p:sp>
         <p:nvSpPr>
-          <p:cNvPr id="4" name="正方形/長方形 3">
-            <a:extLst>
-              <a:ext uri="{FF2B5EF4-FFF2-40B4-BE49-F238E27FC236}">
-                <a16:creationId xmlns:a16="http://schemas.microsoft.com/office/drawing/2014/main" id="{D28347EA-C43E-4578-84C7-23BF7E5D5099}"/>
+          <p:cNvPr id="9" name="正方形/長方形 8">
+            <a:extLst>
+              <a:ext uri="{FF2B5EF4-FFF2-40B4-BE49-F238E27FC236}">
+                <a16:creationId xmlns:a16="http://schemas.microsoft.com/office/drawing/2014/main" id="{B1E21641-AF92-4BC6-B2C3-D2AAF19B9DF9}"/>
               </a:ext>
             </a:extLst>
           </p:cNvPr>
@@ -4253,8 +4249,8 @@
         </p:nvSpPr>
         <p:spPr>
           <a:xfrm>
-            <a:off x="7496175" y="2466975"/>
-            <a:ext cx="2190750" cy="3629025"/>
+            <a:off x="5305425" y="2695575"/>
+            <a:ext cx="1352550" cy="1628775"/>
           </a:xfrm>
           <a:prstGeom prst="rect">
             <a:avLst/>
@@ -4290,6 +4286,314 @@
       </p:sp>
       <p:sp>
         <p:nvSpPr>
+          <p:cNvPr id="10" name="正方形/長方形 9">
+            <a:extLst>
+              <a:ext uri="{FF2B5EF4-FFF2-40B4-BE49-F238E27FC236}">
+                <a16:creationId xmlns:a16="http://schemas.microsoft.com/office/drawing/2014/main" id="{B8101C9B-25A8-4833-AEB1-45076640F767}"/>
+              </a:ext>
+            </a:extLst>
+          </p:cNvPr>
+          <p:cNvSpPr/>
+          <p:nvPr/>
+        </p:nvSpPr>
+        <p:spPr>
+          <a:xfrm>
+            <a:off x="7962900" y="2695575"/>
+            <a:ext cx="1352550" cy="1628775"/>
+          </a:xfrm>
+          <a:prstGeom prst="rect">
+            <a:avLst/>
+          </a:prstGeom>
+        </p:spPr>
+        <p:style>
+          <a:lnRef idx="2">
+            <a:schemeClr val="dk1">
+              <a:shade val="50000"/>
+            </a:schemeClr>
+          </a:lnRef>
+          <a:fillRef idx="1">
+            <a:schemeClr val="dk1"/>
+          </a:fillRef>
+          <a:effectRef idx="0">
+            <a:schemeClr val="dk1"/>
+          </a:effectRef>
+          <a:fontRef idx="minor">
+            <a:schemeClr val="lt1"/>
+          </a:fontRef>
+        </p:style>
+        <p:txBody>
+          <a:bodyPr rtlCol="0" anchor="ctr"/>
+          <a:lstStyle/>
+          <a:p>
+            <a:pPr algn="ctr"/>
+            <a:r>
+              <a:rPr kumimoji="1" lang="ja-JP" altLang="en-US" dirty="0"/>
+              <a:t>キャラ</a:t>
+            </a:r>
+          </a:p>
+        </p:txBody>
+      </p:sp>
+      <p:sp>
+        <p:nvSpPr>
+          <p:cNvPr id="11" name="正方形/長方形 10">
+            <a:extLst>
+              <a:ext uri="{FF2B5EF4-FFF2-40B4-BE49-F238E27FC236}">
+                <a16:creationId xmlns:a16="http://schemas.microsoft.com/office/drawing/2014/main" id="{18681022-87E9-491C-AA8D-F9A88833EA3D}"/>
+              </a:ext>
+            </a:extLst>
+          </p:cNvPr>
+          <p:cNvSpPr/>
+          <p:nvPr/>
+        </p:nvSpPr>
+        <p:spPr>
+          <a:xfrm>
+            <a:off x="3952875" y="4648200"/>
+            <a:ext cx="1352550" cy="1628775"/>
+          </a:xfrm>
+          <a:prstGeom prst="rect">
+            <a:avLst/>
+          </a:prstGeom>
+        </p:spPr>
+        <p:style>
+          <a:lnRef idx="2">
+            <a:schemeClr val="dk1">
+              <a:shade val="50000"/>
+            </a:schemeClr>
+          </a:lnRef>
+          <a:fillRef idx="1">
+            <a:schemeClr val="dk1"/>
+          </a:fillRef>
+          <a:effectRef idx="0">
+            <a:schemeClr val="dk1"/>
+          </a:effectRef>
+          <a:fontRef idx="minor">
+            <a:schemeClr val="lt1"/>
+          </a:fontRef>
+        </p:style>
+        <p:txBody>
+          <a:bodyPr rtlCol="0" anchor="ctr"/>
+          <a:lstStyle/>
+          <a:p>
+            <a:pPr algn="ctr"/>
+            <a:r>
+              <a:rPr kumimoji="1" lang="ja-JP" altLang="en-US" dirty="0"/>
+              <a:t>キャラ</a:t>
+            </a:r>
+          </a:p>
+        </p:txBody>
+      </p:sp>
+      <p:sp>
+        <p:nvSpPr>
+          <p:cNvPr id="12" name="正方形/長方形 11">
+            <a:extLst>
+              <a:ext uri="{FF2B5EF4-FFF2-40B4-BE49-F238E27FC236}">
+                <a16:creationId xmlns:a16="http://schemas.microsoft.com/office/drawing/2014/main" id="{61C2B7ED-3ED5-4F2C-9B40-10ACF7FA21BF}"/>
+              </a:ext>
+            </a:extLst>
+          </p:cNvPr>
+          <p:cNvSpPr/>
+          <p:nvPr/>
+        </p:nvSpPr>
+        <p:spPr>
+          <a:xfrm>
+            <a:off x="6610350" y="4648200"/>
+            <a:ext cx="1352550" cy="1628775"/>
+          </a:xfrm>
+          <a:prstGeom prst="rect">
+            <a:avLst/>
+          </a:prstGeom>
+        </p:spPr>
+        <p:style>
+          <a:lnRef idx="2">
+            <a:schemeClr val="dk1">
+              <a:shade val="50000"/>
+            </a:schemeClr>
+          </a:lnRef>
+          <a:fillRef idx="1">
+            <a:schemeClr val="dk1"/>
+          </a:fillRef>
+          <a:effectRef idx="0">
+            <a:schemeClr val="dk1"/>
+          </a:effectRef>
+          <a:fontRef idx="minor">
+            <a:schemeClr val="lt1"/>
+          </a:fontRef>
+        </p:style>
+        <p:txBody>
+          <a:bodyPr rtlCol="0" anchor="ctr"/>
+          <a:lstStyle/>
+          <a:p>
+            <a:pPr algn="ctr"/>
+            <a:r>
+              <a:rPr kumimoji="1" lang="ja-JP" altLang="en-US" dirty="0"/>
+              <a:t>キャラ</a:t>
+            </a:r>
+          </a:p>
+        </p:txBody>
+      </p:sp>
+    </p:spTree>
+    <p:extLst>
+      <p:ext uri="{BB962C8B-B14F-4D97-AF65-F5344CB8AC3E}">
+        <p14:creationId xmlns:p14="http://schemas.microsoft.com/office/powerpoint/2010/main" val="3464825203"/>
+      </p:ext>
+    </p:extLst>
+  </p:cSld>
+  <p:clrMapOvr>
+    <a:masterClrMapping/>
+  </p:clrMapOvr>
+</p:sld>
+</file>
+
+<file path=ppt/slides/slide11.xml><?xml version="1.0" encoding="utf-8"?>
+<p:sld xmlns:a="http://schemas.openxmlformats.org/drawingml/2006/main" xmlns:r="http://schemas.openxmlformats.org/officeDocument/2006/relationships" xmlns:p="http://schemas.openxmlformats.org/presentationml/2006/main">
+  <p:cSld>
+    <p:spTree>
+      <p:nvGrpSpPr>
+        <p:cNvPr id="1" name=""/>
+        <p:cNvGrpSpPr/>
+        <p:nvPr/>
+      </p:nvGrpSpPr>
+      <p:grpSpPr>
+        <a:xfrm>
+          <a:off x="0" y="0"/>
+          <a:ext cx="0" cy="0"/>
+          <a:chOff x="0" y="0"/>
+          <a:chExt cx="0" cy="0"/>
+        </a:xfrm>
+      </p:grpSpPr>
+      <p:sp>
+        <p:nvSpPr>
+          <p:cNvPr id="2" name="タイトル 1">
+            <a:extLst>
+              <a:ext uri="{FF2B5EF4-FFF2-40B4-BE49-F238E27FC236}">
+                <a16:creationId xmlns:a16="http://schemas.microsoft.com/office/drawing/2014/main" id="{EA37FBEC-4F81-4EF0-A5ED-18F8031A9E87}"/>
+              </a:ext>
+            </a:extLst>
+          </p:cNvPr>
+          <p:cNvSpPr>
+            <a:spLocks noGrp="1"/>
+          </p:cNvSpPr>
+          <p:nvPr>
+            <p:ph type="title"/>
+          </p:nvPr>
+        </p:nvSpPr>
+        <p:spPr>
+          <a:xfrm>
+            <a:off x="133350" y="99218"/>
+            <a:ext cx="10515600" cy="1325563"/>
+          </a:xfrm>
+        </p:spPr>
+        <p:txBody>
+          <a:bodyPr/>
+          <a:lstStyle/>
+          <a:p>
+            <a:r>
+              <a:rPr kumimoji="1" lang="ja-JP" altLang="en-US" dirty="0"/>
+              <a:t>ゲーム</a:t>
+            </a:r>
+          </a:p>
+        </p:txBody>
+      </p:sp>
+      <p:sp>
+        <p:nvSpPr>
+          <p:cNvPr id="3" name="正方形/長方形 2">
+            <a:extLst>
+              <a:ext uri="{FF2B5EF4-FFF2-40B4-BE49-F238E27FC236}">
+                <a16:creationId xmlns:a16="http://schemas.microsoft.com/office/drawing/2014/main" id="{853D63FD-E35C-4B5D-AB3D-EF0692161EC6}"/>
+              </a:ext>
+            </a:extLst>
+          </p:cNvPr>
+          <p:cNvSpPr/>
+          <p:nvPr/>
+        </p:nvSpPr>
+        <p:spPr>
+          <a:xfrm>
+            <a:off x="3057525" y="2466975"/>
+            <a:ext cx="2190750" cy="3629025"/>
+          </a:xfrm>
+          <a:prstGeom prst="rect">
+            <a:avLst/>
+          </a:prstGeom>
+        </p:spPr>
+        <p:style>
+          <a:lnRef idx="2">
+            <a:schemeClr val="dk1">
+              <a:shade val="50000"/>
+            </a:schemeClr>
+          </a:lnRef>
+          <a:fillRef idx="1">
+            <a:schemeClr val="dk1"/>
+          </a:fillRef>
+          <a:effectRef idx="0">
+            <a:schemeClr val="dk1"/>
+          </a:effectRef>
+          <a:fontRef idx="minor">
+            <a:schemeClr val="lt1"/>
+          </a:fontRef>
+        </p:style>
+        <p:txBody>
+          <a:bodyPr rtlCol="0" anchor="ctr"/>
+          <a:lstStyle/>
+          <a:p>
+            <a:pPr algn="ctr"/>
+            <a:r>
+              <a:rPr kumimoji="1" lang="ja-JP" altLang="en-US" dirty="0"/>
+              <a:t>キャラ</a:t>
+            </a:r>
+          </a:p>
+        </p:txBody>
+      </p:sp>
+      <p:sp>
+        <p:nvSpPr>
+          <p:cNvPr id="4" name="正方形/長方形 3">
+            <a:extLst>
+              <a:ext uri="{FF2B5EF4-FFF2-40B4-BE49-F238E27FC236}">
+                <a16:creationId xmlns:a16="http://schemas.microsoft.com/office/drawing/2014/main" id="{D28347EA-C43E-4578-84C7-23BF7E5D5099}"/>
+              </a:ext>
+            </a:extLst>
+          </p:cNvPr>
+          <p:cNvSpPr/>
+          <p:nvPr/>
+        </p:nvSpPr>
+        <p:spPr>
+          <a:xfrm>
+            <a:off x="7496175" y="2466975"/>
+            <a:ext cx="2190750" cy="3629025"/>
+          </a:xfrm>
+          <a:prstGeom prst="rect">
+            <a:avLst/>
+          </a:prstGeom>
+        </p:spPr>
+        <p:style>
+          <a:lnRef idx="2">
+            <a:schemeClr val="dk1">
+              <a:shade val="50000"/>
+            </a:schemeClr>
+          </a:lnRef>
+          <a:fillRef idx="1">
+            <a:schemeClr val="dk1"/>
+          </a:fillRef>
+          <a:effectRef idx="0">
+            <a:schemeClr val="dk1"/>
+          </a:effectRef>
+          <a:fontRef idx="minor">
+            <a:schemeClr val="lt1"/>
+          </a:fontRef>
+        </p:style>
+        <p:txBody>
+          <a:bodyPr rtlCol="0" anchor="ctr"/>
+          <a:lstStyle/>
+          <a:p>
+            <a:pPr algn="ctr"/>
+            <a:r>
+              <a:rPr kumimoji="1" lang="ja-JP" altLang="en-US" dirty="0"/>
+              <a:t>キャラ</a:t>
+            </a:r>
+          </a:p>
+        </p:txBody>
+      </p:sp>
+      <p:sp>
+        <p:nvSpPr>
           <p:cNvPr id="5" name="正方形/長方形 4">
             <a:extLst>
               <a:ext uri="{FF2B5EF4-FFF2-40B4-BE49-F238E27FC236}">
@@ -4596,7 +4900,7 @@
 </p:sld>
 </file>
 
-<file path=ppt/slides/slide11.xml><?xml version="1.0" encoding="utf-8"?>
+<file path=ppt/slides/slide12.xml><?xml version="1.0" encoding="utf-8"?>
 <p:sld xmlns:a="http://schemas.openxmlformats.org/drawingml/2006/main" xmlns:r="http://schemas.openxmlformats.org/officeDocument/2006/relationships" xmlns:p="http://schemas.openxmlformats.org/presentationml/2006/main">
   <p:cSld>
     <p:spTree>
@@ -8644,7 +8948,7 @@
         </p:blipFill>
         <p:spPr>
           <a:xfrm>
-            <a:off x="0" y="0"/>
+            <a:off x="1" y="0"/>
             <a:ext cx="12191999" cy="6858000"/>
           </a:xfrm>
           <a:prstGeom prst="rect">
@@ -8731,42 +9035,668 @@
         </p:nvSpPr>
         <p:spPr>
           <a:xfrm>
-            <a:off x="315883" y="1265526"/>
-            <a:ext cx="7680961" cy="3992274"/>
-          </a:xfrm>
-        </p:spPr>
-        <p:txBody>
-          <a:bodyPr/>
+            <a:off x="315883" y="1265525"/>
+            <a:ext cx="7680961" cy="5279361"/>
+          </a:xfrm>
+        </p:spPr>
+        <p:txBody>
+          <a:bodyPr>
+            <a:normAutofit/>
+          </a:bodyPr>
           <a:lstStyle/>
           <a:p>
             <a:pPr algn="l"/>
             <a:r>
-              <a:rPr kumimoji="1" lang="ja-JP" altLang="en-US" dirty="0">
-                <a:solidFill>
-                  <a:schemeClr val="bg1"/>
-                </a:solidFill>
+              <a:rPr lang="ja-JP" altLang="en-US" dirty="0">
+                <a:solidFill>
+                  <a:schemeClr val="bg1"/>
+                </a:solidFill>
+              </a:rPr>
+              <a:t>本作では、格闘ゲームの根幹である</a:t>
+            </a:r>
+            <a:r>
+              <a:rPr lang="ja-JP" altLang="en-US" b="1" dirty="0">
+                <a:solidFill>
+                  <a:srgbClr val="FF0000"/>
+                </a:solidFill>
+              </a:rPr>
+              <a:t>当たり判定</a:t>
+            </a:r>
+            <a:r>
+              <a:rPr lang="ja-JP" altLang="en-US" dirty="0">
+                <a:solidFill>
+                  <a:schemeClr val="bg1"/>
+                </a:solidFill>
+              </a:rPr>
+              <a:t>を</a:t>
+            </a:r>
+            <a:r>
+              <a:rPr lang="en-US" altLang="ja-JP" dirty="0">
+                <a:solidFill>
+                  <a:schemeClr val="bg1"/>
+                </a:solidFill>
+              </a:rPr>
+              <a:t>1</a:t>
+            </a:r>
+            <a:r>
+              <a:rPr lang="ja-JP" altLang="en-US" dirty="0">
+                <a:solidFill>
+                  <a:schemeClr val="bg1"/>
+                </a:solidFill>
+              </a:rPr>
+              <a:t>から自作しました。</a:t>
+            </a:r>
+            <a:endParaRPr lang="en-US" altLang="ja-JP" dirty="0">
+              <a:solidFill>
+                <a:schemeClr val="bg1"/>
+              </a:solidFill>
+            </a:endParaRPr>
+          </a:p>
+          <a:p>
+            <a:pPr algn="l"/>
+            <a:r>
+              <a:rPr lang="ja-JP" altLang="en-US" dirty="0">
+                <a:solidFill>
+                  <a:schemeClr val="bg1"/>
+                </a:solidFill>
+              </a:rPr>
+              <a:t>当たり判定の流れは、</a:t>
+            </a:r>
+            <a:endParaRPr lang="en-US" altLang="ja-JP" dirty="0">
+              <a:solidFill>
+                <a:schemeClr val="bg1"/>
+              </a:solidFill>
+            </a:endParaRPr>
+          </a:p>
+          <a:p>
+            <a:pPr marL="457200" indent="-457200" algn="l">
+              <a:buAutoNum type="arabicParenR"/>
+            </a:pPr>
+            <a:r>
+              <a:rPr lang="en-US" altLang="ja-JP" sz="2000" dirty="0">
+                <a:solidFill>
+                  <a:schemeClr val="bg1"/>
+                </a:solidFill>
+              </a:rPr>
+              <a:t>BoneCollision()</a:t>
+            </a:r>
+          </a:p>
+          <a:p>
+            <a:pPr algn="l"/>
+            <a:r>
+              <a:rPr lang="en-US" altLang="ja-JP" sz="1400" dirty="0">
+                <a:solidFill>
+                  <a:schemeClr val="bg1"/>
+                </a:solidFill>
+              </a:rPr>
+              <a:t>	</a:t>
+            </a:r>
+            <a:r>
+              <a:rPr lang="ja-JP" altLang="en-US" sz="1400" dirty="0">
+                <a:solidFill>
+                  <a:schemeClr val="bg1"/>
+                </a:solidFill>
+              </a:rPr>
+              <a:t>➣ モデルの各ボーンのワールド座標を取得し、動的に更新。</a:t>
+            </a:r>
+            <a:endParaRPr lang="en-US" altLang="ja-JP" sz="1400" dirty="0">
+              <a:solidFill>
+                <a:schemeClr val="bg1"/>
+              </a:solidFill>
+            </a:endParaRPr>
+          </a:p>
+          <a:p>
+            <a:pPr algn="l"/>
+            <a:r>
+              <a:rPr lang="en-US" altLang="ja-JP" sz="1400" dirty="0">
+                <a:solidFill>
+                  <a:schemeClr val="bg1"/>
+                </a:solidFill>
+              </a:rPr>
+              <a:t>	</a:t>
+            </a:r>
+            <a:r>
+              <a:rPr lang="ja-JP" altLang="en-US" sz="1400" dirty="0">
+                <a:solidFill>
+                  <a:schemeClr val="bg1"/>
+                </a:solidFill>
+              </a:rPr>
+              <a:t>➣ 当たり判定がリアルタイムで移動することで、見た目と判定が一致するように</a:t>
+            </a:r>
+            <a:r>
+              <a:rPr lang="en-US" altLang="ja-JP" sz="1400" dirty="0">
+                <a:solidFill>
+                  <a:schemeClr val="bg1"/>
+                </a:solidFill>
+              </a:rPr>
+              <a:t>	</a:t>
+            </a:r>
+            <a:r>
+              <a:rPr lang="ja-JP" altLang="en-US" sz="1400" dirty="0">
+                <a:solidFill>
+                  <a:schemeClr val="bg1"/>
+                </a:solidFill>
+              </a:rPr>
+              <a:t>　 しています。</a:t>
+            </a:r>
+            <a:endParaRPr lang="en-US" altLang="ja-JP" sz="1400" dirty="0">
+              <a:solidFill>
+                <a:schemeClr val="bg1"/>
+              </a:solidFill>
+            </a:endParaRPr>
+          </a:p>
+          <a:p>
+            <a:pPr algn="l"/>
+            <a:r>
+              <a:rPr lang="en-US" altLang="ja-JP" sz="2000" dirty="0">
+                <a:solidFill>
+                  <a:schemeClr val="bg1"/>
+                </a:solidFill>
+              </a:rPr>
+              <a:t>2) CollisionDetection()</a:t>
+            </a:r>
+          </a:p>
+          <a:p>
+            <a:pPr algn="l"/>
+            <a:r>
+              <a:rPr lang="en-US" altLang="ja-JP" sz="1400" dirty="0">
+                <a:solidFill>
+                  <a:schemeClr val="bg1"/>
+                </a:solidFill>
+              </a:rPr>
+              <a:t>	</a:t>
+            </a:r>
+            <a:r>
+              <a:rPr lang="ja-JP" altLang="en-US" sz="1400" dirty="0">
+                <a:solidFill>
+                  <a:schemeClr val="bg1"/>
+                </a:solidFill>
+              </a:rPr>
+              <a:t>➣ ヒットした部位に応じて</a:t>
+            </a:r>
+            <a:r>
+              <a:rPr lang="ja-JP" altLang="en-US" sz="1400" b="1" dirty="0">
+                <a:solidFill>
+                  <a:schemeClr val="bg1"/>
+                </a:solidFill>
+              </a:rPr>
+              <a:t>ダメージ計算と効果音再生</a:t>
+            </a:r>
+            <a:r>
+              <a:rPr lang="ja-JP" altLang="en-US" sz="1400" dirty="0">
+                <a:solidFill>
+                  <a:schemeClr val="bg1"/>
+                </a:solidFill>
+              </a:rPr>
+              <a:t>を行い、フレーム単位での</a:t>
+            </a:r>
+            <a:r>
+              <a:rPr lang="en-US" altLang="ja-JP" sz="1400" dirty="0">
+                <a:solidFill>
+                  <a:schemeClr val="bg1"/>
+                </a:solidFill>
+              </a:rPr>
+              <a:t>	</a:t>
+            </a:r>
+            <a:r>
+              <a:rPr lang="ja-JP" altLang="en-US" sz="1400" dirty="0">
+                <a:solidFill>
+                  <a:schemeClr val="bg1"/>
+                </a:solidFill>
+              </a:rPr>
+              <a:t>　 制御にしています。</a:t>
+            </a:r>
+            <a:endParaRPr lang="en-US" altLang="ja-JP" sz="1400" dirty="0">
+              <a:solidFill>
+                <a:schemeClr val="bg1"/>
+              </a:solidFill>
+            </a:endParaRPr>
+          </a:p>
+          <a:p>
+            <a:pPr algn="l"/>
+            <a:r>
+              <a:rPr lang="en-US" altLang="ja-JP" sz="2000" dirty="0">
+                <a:solidFill>
+                  <a:schemeClr val="bg1"/>
+                </a:solidFill>
+              </a:rPr>
+              <a:t>3) UpdateDamage()</a:t>
+            </a:r>
+          </a:p>
+          <a:p>
+            <a:pPr algn="l"/>
+            <a:r>
+              <a:rPr lang="en-US" altLang="ja-JP" sz="1400" dirty="0">
+                <a:solidFill>
+                  <a:schemeClr val="bg1"/>
+                </a:solidFill>
+              </a:rPr>
+              <a:t>	</a:t>
+            </a:r>
+            <a:r>
+              <a:rPr lang="ja-JP" altLang="en-US" sz="1400" dirty="0">
+                <a:solidFill>
+                  <a:schemeClr val="bg1"/>
+                </a:solidFill>
+              </a:rPr>
+              <a:t>➣ダメージの反映</a:t>
+            </a:r>
+            <a:endParaRPr lang="en-US" altLang="ja-JP" dirty="0">
+              <a:solidFill>
+                <a:schemeClr val="bg1"/>
+              </a:solidFill>
+            </a:endParaRPr>
+          </a:p>
+          <a:p>
+            <a:pPr algn="l"/>
+            <a:endParaRPr kumimoji="1" lang="en-US" altLang="ja-JP" sz="1400" dirty="0">
+              <a:solidFill>
+                <a:schemeClr val="bg1"/>
+              </a:solidFill>
+            </a:endParaRPr>
+          </a:p>
+          <a:p>
+            <a:pPr algn="l"/>
+            <a:r>
+              <a:rPr kumimoji="1" lang="ja-JP" altLang="en-US" sz="1400" dirty="0">
+                <a:solidFill>
+                  <a:schemeClr val="bg1"/>
+                </a:solidFill>
+              </a:rPr>
+              <a:t>また、キャラ同士の</a:t>
+            </a:r>
+            <a:r>
+              <a:rPr kumimoji="0" lang="ja-JP" altLang="ja-JP" sz="1400" b="1" i="0" u="none" strike="noStrike" cap="none" normalizeH="0" baseline="0" dirty="0">
+                <a:ln>
+                  <a:noFill/>
+                </a:ln>
+                <a:solidFill>
+                  <a:srgbClr val="FF0000"/>
+                </a:solidFill>
+                <a:effectLst/>
+                <a:latin typeface="Arial" panose="020B0604020202020204" pitchFamily="34" charset="0"/>
+              </a:rPr>
+              <a:t>物理的な衝突処理</a:t>
+            </a:r>
+            <a:r>
+              <a:rPr kumimoji="0" lang="ja-JP" altLang="ja-JP" sz="1400" b="0" i="0" u="none" strike="noStrike" cap="none" normalizeH="0" baseline="0" dirty="0">
+                <a:ln>
+                  <a:noFill/>
+                </a:ln>
+                <a:solidFill>
+                  <a:schemeClr val="bg1"/>
+                </a:solidFill>
+                <a:effectLst/>
+                <a:latin typeface="Arial" panose="020B0604020202020204" pitchFamily="34" charset="0"/>
+              </a:rPr>
+              <a:t>は</a:t>
+            </a:r>
+            <a:r>
+              <a:rPr kumimoji="0" lang="ja-JP" altLang="en-US" sz="1400" b="0" i="0" u="none" strike="noStrike" cap="none" normalizeH="0" baseline="0" dirty="0">
+                <a:ln>
+                  <a:noFill/>
+                </a:ln>
+                <a:solidFill>
+                  <a:schemeClr val="bg1"/>
+                </a:solidFill>
+                <a:effectLst/>
+                <a:latin typeface="Arial" panose="020B0604020202020204" pitchFamily="34" charset="0"/>
               </a:rPr>
               <a:t>「</a:t>
             </a:r>
             <a:r>
-              <a:rPr lang="en-US" altLang="ja-JP" dirty="0"/>
+              <a:rPr kumimoji="0" lang="ja-JP" altLang="ja-JP" sz="1400" b="0" i="0" u="none" strike="noStrike" cap="none" normalizeH="0" baseline="0" dirty="0">
+                <a:ln>
+                  <a:noFill/>
+                </a:ln>
+                <a:solidFill>
+                  <a:schemeClr val="bg1"/>
+                </a:solidFill>
+                <a:effectLst/>
+                <a:latin typeface="Arial Unicode MS"/>
+              </a:rPr>
+              <a:t>ResolvePlayerCollision()</a:t>
+            </a:r>
+            <a:r>
+              <a:rPr kumimoji="0" lang="ja-JP" altLang="en-US" sz="1400" b="0" i="0" u="none" strike="noStrike" cap="none" normalizeH="0" baseline="0" dirty="0">
+                <a:ln>
+                  <a:noFill/>
+                </a:ln>
+                <a:solidFill>
+                  <a:schemeClr val="bg1"/>
+                </a:solidFill>
+                <a:effectLst/>
+                <a:latin typeface="Arial Unicode MS"/>
+              </a:rPr>
+              <a:t>」</a:t>
+            </a:r>
+            <a:r>
+              <a:rPr kumimoji="0" lang="ja-JP" altLang="ja-JP" sz="1400" b="0" i="0" u="none" strike="noStrike" cap="none" normalizeH="0" baseline="0" dirty="0">
+                <a:ln>
+                  <a:noFill/>
+                </a:ln>
+                <a:solidFill>
+                  <a:schemeClr val="bg1"/>
+                </a:solidFill>
+                <a:effectLst/>
+              </a:rPr>
+              <a:t>で独立して管理。 </a:t>
+            </a:r>
+            <a:endParaRPr kumimoji="0" lang="ja-JP" altLang="ja-JP" sz="1400" b="0" i="0" u="none" strike="noStrike" cap="none" normalizeH="0" baseline="0" dirty="0">
+              <a:ln>
+                <a:noFill/>
+              </a:ln>
+              <a:solidFill>
+                <a:schemeClr val="bg1"/>
+              </a:solidFill>
+              <a:effectLst/>
+              <a:latin typeface="Arial" panose="020B0604020202020204" pitchFamily="34" charset="0"/>
+            </a:endParaRPr>
+          </a:p>
+          <a:p>
+            <a:pPr algn="l"/>
+            <a:r>
+              <a:rPr lang="ja-JP" altLang="en-US" sz="1400" dirty="0">
+                <a:solidFill>
+                  <a:schemeClr val="bg1"/>
+                </a:solidFill>
+              </a:rPr>
+              <a:t>攻撃判定とは別の段階で位置補正を行うことで、見た目とゲームロジックを明確に分離し、挙動の安定性と拡張性を高めました。</a:t>
+            </a:r>
+            <a:endParaRPr kumimoji="1" lang="ja-JP" altLang="en-US" sz="1400" dirty="0">
+              <a:solidFill>
+                <a:schemeClr val="bg1"/>
+              </a:solidFill>
+            </a:endParaRPr>
+          </a:p>
+        </p:txBody>
+      </p:sp>
+      <p:sp>
+        <p:nvSpPr>
+          <p:cNvPr id="5" name="フローチャート: 処理 4">
+            <a:extLst>
+              <a:ext uri="{FF2B5EF4-FFF2-40B4-BE49-F238E27FC236}">
+                <a16:creationId xmlns:a16="http://schemas.microsoft.com/office/drawing/2014/main" id="{10B0508E-7555-4FC7-9BFE-CE451B3852A8}"/>
+              </a:ext>
+            </a:extLst>
+          </p:cNvPr>
+          <p:cNvSpPr/>
+          <p:nvPr/>
+        </p:nvSpPr>
+        <p:spPr>
+          <a:xfrm>
+            <a:off x="315884" y="2471650"/>
+            <a:ext cx="7614458" cy="2909455"/>
+          </a:xfrm>
+          <a:prstGeom prst="flowChartProcess">
+            <a:avLst/>
+          </a:prstGeom>
+          <a:noFill/>
+          <a:ln w="9525" cap="flat" cmpd="sng" algn="ctr">
+            <a:solidFill>
+              <a:srgbClr val="FF0000"/>
+            </a:solidFill>
+            <a:prstDash val="solid"/>
+            <a:round/>
+            <a:headEnd type="none" w="med" len="med"/>
+            <a:tailEnd type="none" w="med" len="med"/>
+          </a:ln>
+        </p:spPr>
+        <p:style>
+          <a:lnRef idx="0">
+            <a:scrgbClr r="0" g="0" b="0"/>
+          </a:lnRef>
+          <a:fillRef idx="0">
+            <a:scrgbClr r="0" g="0" b="0"/>
+          </a:fillRef>
+          <a:effectRef idx="0">
+            <a:scrgbClr r="0" g="0" b="0"/>
+          </a:effectRef>
+          <a:fontRef idx="minor">
+            <a:schemeClr val="accent6"/>
+          </a:fontRef>
+        </p:style>
+        <p:txBody>
+          <a:bodyPr rtlCol="0" anchor="ctr"/>
+          <a:lstStyle/>
+          <a:p>
+            <a:pPr algn="ctr"/>
+            <a:endParaRPr kumimoji="1" lang="ja-JP" altLang="en-US"/>
+          </a:p>
+        </p:txBody>
+      </p:sp>
+      <p:sp>
+        <p:nvSpPr>
+          <p:cNvPr id="11" name="Rectangle 5">
+            <a:extLst>
+              <a:ext uri="{FF2B5EF4-FFF2-40B4-BE49-F238E27FC236}">
+                <a16:creationId xmlns:a16="http://schemas.microsoft.com/office/drawing/2014/main" id="{52E5EAD3-877A-4CE5-ABEC-30F5E89735BB}"/>
+              </a:ext>
+            </a:extLst>
+          </p:cNvPr>
+          <p:cNvSpPr>
+            <a:spLocks noChangeArrowheads="1"/>
+          </p:cNvSpPr>
+          <p:nvPr/>
+        </p:nvSpPr>
+        <p:spPr bwMode="auto">
+          <a:xfrm>
+            <a:off x="0" y="43934"/>
+            <a:ext cx="184731" cy="369332"/>
+          </a:xfrm>
+          <a:prstGeom prst="rect">
+            <a:avLst/>
+          </a:prstGeom>
+          <a:noFill/>
+          <a:ln>
+            <a:noFill/>
+          </a:ln>
+          <a:effectLst/>
+          <a:extLst>
+            <a:ext uri="{909E8E84-426E-40DD-AFC4-6F175D3DCCD1}">
+              <a14:hiddenFill xmlns:a14="http://schemas.microsoft.com/office/drawing/2010/main">
+                <a:solidFill>
+                  <a:schemeClr val="accent1"/>
+                </a:solidFill>
+              </a14:hiddenFill>
+            </a:ext>
+            <a:ext uri="{91240B29-F687-4F45-9708-019B960494DF}">
+              <a14:hiddenLine xmlns:a14="http://schemas.microsoft.com/office/drawing/2010/main" w="9525">
+                <a:solidFill>
+                  <a:schemeClr val="tx1"/>
+                </a:solidFill>
+                <a:miter lim="800000"/>
+                <a:headEnd/>
+                <a:tailEnd/>
+              </a14:hiddenLine>
+            </a:ext>
+            <a:ext uri="{AF507438-7753-43E0-B8FC-AC1667EBCBE1}">
+              <a14:hiddenEffects xmlns:a14="http://schemas.microsoft.com/office/drawing/2010/main">
+                <a:effectLst>
+                  <a:outerShdw dist="35921" dir="2700000" algn="ctr" rotWithShape="0">
+                    <a:schemeClr val="bg2"/>
+                  </a:outerShdw>
+                </a:effectLst>
+              </a14:hiddenEffects>
+            </a:ext>
+          </a:extLst>
+        </p:spPr>
+        <p:txBody>
+          <a:bodyPr vert="horz" wrap="none" lIns="91440" tIns="45720" rIns="91440" bIns="45720" numCol="1" anchor="ctr" anchorCtr="0" compatLnSpc="1">
+            <a:prstTxWarp prst="textNoShape">
+              <a:avLst/>
+            </a:prstTxWarp>
+            <a:spAutoFit/>
+          </a:bodyPr>
+          <a:lstStyle/>
+          <a:p>
+            <a:pPr marL="0" marR="0" lvl="0" indent="0" algn="l" defTabSz="914400" rtl="0" eaLnBrk="0" fontAlgn="base" latinLnBrk="0" hangingPunct="0">
+              <a:lnSpc>
+                <a:spcPct val="100000"/>
+              </a:lnSpc>
+              <a:spcBef>
+                <a:spcPct val="0"/>
+              </a:spcBef>
+              <a:spcAft>
+                <a:spcPct val="0"/>
+              </a:spcAft>
+              <a:buClrTx/>
+              <a:buSzTx/>
+              <a:buFontTx/>
+              <a:buNone/>
+              <a:tabLst/>
+            </a:pPr>
+            <a:endParaRPr kumimoji="0" lang="ja-JP" altLang="ja-JP" sz="1800" b="0" i="0" u="none" strike="noStrike" cap="none" normalizeH="0" baseline="0" dirty="0">
+              <a:ln>
+                <a:noFill/>
+              </a:ln>
+              <a:solidFill>
+                <a:schemeClr val="tx1"/>
+              </a:solidFill>
+              <a:effectLst/>
+              <a:latin typeface="Arial" panose="020B0604020202020204" pitchFamily="34" charset="0"/>
+            </a:endParaRPr>
+          </a:p>
+        </p:txBody>
+      </p:sp>
+      <p:pic>
+        <p:nvPicPr>
+          <p:cNvPr id="13" name="図 12">
+            <a:extLst>
+              <a:ext uri="{FF2B5EF4-FFF2-40B4-BE49-F238E27FC236}">
+                <a16:creationId xmlns:a16="http://schemas.microsoft.com/office/drawing/2014/main" id="{27C40889-01CC-4C48-8C93-74002AC1875F}"/>
+              </a:ext>
+            </a:extLst>
+          </p:cNvPr>
+          <p:cNvPicPr>
+            <a:picLocks noChangeAspect="1"/>
+          </p:cNvPicPr>
+          <p:nvPr/>
+        </p:nvPicPr>
+        <p:blipFill>
+          <a:blip r:embed="rId3">
+            <a:extLst>
+              <a:ext uri="{28A0092B-C50C-407E-A947-70E740481C1C}">
+                <a14:useLocalDpi xmlns:a14="http://schemas.microsoft.com/office/drawing/2010/main" val="0"/>
+              </a:ext>
+            </a:extLst>
+          </a:blip>
+          <a:stretch>
+            <a:fillRect/>
+          </a:stretch>
+        </p:blipFill>
+        <p:spPr>
+          <a:xfrm>
+            <a:off x="7996844" y="426341"/>
+            <a:ext cx="1774444" cy="3408156"/>
+          </a:xfrm>
+          <a:prstGeom prst="rect">
+            <a:avLst/>
+          </a:prstGeom>
+        </p:spPr>
+      </p:pic>
+      <p:pic>
+        <p:nvPicPr>
+          <p:cNvPr id="17" name="図 16">
+            <a:extLst>
+              <a:ext uri="{FF2B5EF4-FFF2-40B4-BE49-F238E27FC236}">
+                <a16:creationId xmlns:a16="http://schemas.microsoft.com/office/drawing/2014/main" id="{D65BEBF2-D478-4AA7-A08B-8F82F338A07B}"/>
+              </a:ext>
+            </a:extLst>
+          </p:cNvPr>
+          <p:cNvPicPr>
+            <a:picLocks noChangeAspect="1"/>
+          </p:cNvPicPr>
+          <p:nvPr/>
+        </p:nvPicPr>
+        <p:blipFill>
+          <a:blip r:embed="rId4">
+            <a:extLst>
+              <a:ext uri="{28A0092B-C50C-407E-A947-70E740481C1C}">
+                <a14:useLocalDpi xmlns:a14="http://schemas.microsoft.com/office/drawing/2010/main" val="0"/>
+              </a:ext>
+            </a:extLst>
+          </a:blip>
+          <a:stretch>
+            <a:fillRect/>
+          </a:stretch>
+        </p:blipFill>
+        <p:spPr>
+          <a:xfrm>
+            <a:off x="8424484" y="4821383"/>
+            <a:ext cx="3159806" cy="1558061"/>
+          </a:xfrm>
+          <a:prstGeom prst="rect">
+            <a:avLst/>
+          </a:prstGeom>
+        </p:spPr>
+      </p:pic>
+      <p:sp>
+        <p:nvSpPr>
+          <p:cNvPr id="18" name="テキスト ボックス 17">
+            <a:extLst>
+              <a:ext uri="{FF2B5EF4-FFF2-40B4-BE49-F238E27FC236}">
+                <a16:creationId xmlns:a16="http://schemas.microsoft.com/office/drawing/2014/main" id="{49E0F2A6-B978-4116-BBB4-538B13A16C21}"/>
+              </a:ext>
+            </a:extLst>
+          </p:cNvPr>
+          <p:cNvSpPr txBox="1"/>
+          <p:nvPr/>
+        </p:nvSpPr>
+        <p:spPr>
+          <a:xfrm>
+            <a:off x="9886604" y="726168"/>
+            <a:ext cx="1983971" cy="646331"/>
+          </a:xfrm>
+          <a:prstGeom prst="rect">
+            <a:avLst/>
+          </a:prstGeom>
+          <a:noFill/>
+        </p:spPr>
+        <p:txBody>
+          <a:bodyPr wrap="square" rtlCol="0">
+            <a:spAutoFit/>
+          </a:bodyPr>
+          <a:lstStyle/>
+          <a:p>
+            <a:r>
+              <a:rPr lang="ja-JP" altLang="en-US" dirty="0">
+                <a:solidFill>
+                  <a:schemeClr val="bg1"/>
+                </a:solidFill>
+              </a:rPr>
+              <a:t>← </a:t>
+            </a:r>
+            <a:r>
+              <a:rPr lang="en-US" altLang="ja-JP" dirty="0">
+                <a:solidFill>
+                  <a:schemeClr val="bg1"/>
+                </a:solidFill>
+              </a:rPr>
+              <a:t>Character.cpp</a:t>
+            </a:r>
+            <a:r>
+              <a:rPr lang="ja-JP" altLang="en-US" dirty="0">
+                <a:solidFill>
+                  <a:schemeClr val="bg1"/>
+                </a:solidFill>
+              </a:rPr>
               <a:t> </a:t>
             </a:r>
-            <a:r>
-              <a:rPr lang="en-US" altLang="ja-JP" b="1" dirty="0">
-                <a:solidFill>
-                  <a:schemeClr val="bg1"/>
-                </a:solidFill>
-              </a:rPr>
-              <a:t>Character.cpp </a:t>
-            </a:r>
-            <a:r>
-              <a:rPr kumimoji="1" lang="ja-JP" altLang="en-US" dirty="0">
-                <a:solidFill>
-                  <a:schemeClr val="bg1"/>
-                </a:solidFill>
-              </a:rPr>
-              <a:t>」</a:t>
+            <a:endParaRPr lang="en-US" altLang="ja-JP" dirty="0">
+              <a:solidFill>
+                <a:schemeClr val="bg1"/>
+              </a:solidFill>
+            </a:endParaRPr>
+          </a:p>
+          <a:p>
+            <a:r>
+              <a:rPr lang="en-US" altLang="ja-JP" dirty="0">
+                <a:solidFill>
+                  <a:schemeClr val="bg1"/>
+                </a:solidFill>
+              </a:rPr>
+              <a:t>626</a:t>
             </a:r>
             <a:r>
               <a:rPr lang="ja-JP" altLang="en-US" dirty="0">
@@ -8774,11 +9704,106 @@
                   <a:schemeClr val="bg1"/>
                 </a:solidFill>
               </a:rPr>
-              <a:t>は、キャラクターの挙動・攻撃・当たり判定をすべてまとめた基底クラスです</a:t>
-            </a:r>
-            <a:r>
-              <a:rPr lang="ja-JP" altLang="en-US" dirty="0"/>
-              <a:t>。</a:t>
+              <a:t>行目以降</a:t>
+            </a:r>
+            <a:r>
+              <a:rPr lang="en-US" altLang="ja-JP" dirty="0">
+                <a:solidFill>
+                  <a:schemeClr val="bg1"/>
+                </a:solidFill>
+              </a:rPr>
+              <a:t> </a:t>
+            </a:r>
+            <a:endParaRPr kumimoji="1" lang="ja-JP" altLang="en-US" dirty="0">
+              <a:solidFill>
+                <a:schemeClr val="bg1"/>
+              </a:solidFill>
+            </a:endParaRPr>
+          </a:p>
+        </p:txBody>
+      </p:sp>
+      <p:sp>
+        <p:nvSpPr>
+          <p:cNvPr id="19" name="テキスト ボックス 18">
+            <a:extLst>
+              <a:ext uri="{FF2B5EF4-FFF2-40B4-BE49-F238E27FC236}">
+                <a16:creationId xmlns:a16="http://schemas.microsoft.com/office/drawing/2014/main" id="{D94E9099-7F36-49A0-ACC5-2C6A4EA9C282}"/>
+              </a:ext>
+            </a:extLst>
+          </p:cNvPr>
+          <p:cNvSpPr txBox="1"/>
+          <p:nvPr/>
+        </p:nvSpPr>
+        <p:spPr>
+          <a:xfrm>
+            <a:off x="9146771" y="4024360"/>
+            <a:ext cx="1983971" cy="646331"/>
+          </a:xfrm>
+          <a:prstGeom prst="rect">
+            <a:avLst/>
+          </a:prstGeom>
+          <a:noFill/>
+        </p:spPr>
+        <p:txBody>
+          <a:bodyPr wrap="square" rtlCol="0">
+            <a:spAutoFit/>
+          </a:bodyPr>
+          <a:lstStyle/>
+          <a:p>
+            <a:r>
+              <a:rPr lang="ja-JP" altLang="en-US" dirty="0">
+                <a:solidFill>
+                  <a:schemeClr val="bg1"/>
+                </a:solidFill>
+              </a:rPr>
+              <a:t>↓ </a:t>
+            </a:r>
+            <a:r>
+              <a:rPr lang="en-US" altLang="ja-JP" dirty="0">
+                <a:solidFill>
+                  <a:schemeClr val="bg1"/>
+                </a:solidFill>
+              </a:rPr>
+              <a:t>Character.cpp</a:t>
+            </a:r>
+            <a:r>
+              <a:rPr lang="ja-JP" altLang="en-US" dirty="0">
+                <a:solidFill>
+                  <a:schemeClr val="bg1"/>
+                </a:solidFill>
+              </a:rPr>
+              <a:t> </a:t>
+            </a:r>
+            <a:endParaRPr lang="en-US" altLang="ja-JP" dirty="0">
+              <a:solidFill>
+                <a:schemeClr val="bg1"/>
+              </a:solidFill>
+            </a:endParaRPr>
+          </a:p>
+          <a:p>
+            <a:r>
+              <a:rPr lang="en-US" altLang="ja-JP" dirty="0">
+                <a:solidFill>
+                  <a:schemeClr val="bg1"/>
+                </a:solidFill>
+              </a:rPr>
+              <a:t>533</a:t>
+            </a:r>
+            <a:r>
+              <a:rPr lang="ja-JP" altLang="en-US" dirty="0">
+                <a:solidFill>
+                  <a:schemeClr val="bg1"/>
+                </a:solidFill>
+              </a:rPr>
+              <a:t>行目以降</a:t>
+            </a:r>
+            <a:r>
+              <a:rPr lang="en-US" altLang="ja-JP" dirty="0">
+                <a:solidFill>
+                  <a:schemeClr val="bg1"/>
+                </a:solidFill>
+              </a:rPr>
+              <a:t> </a:t>
             </a:r>
             <a:endParaRPr kumimoji="1" lang="ja-JP" altLang="en-US" dirty="0">
               <a:solidFill>
@@ -8818,6 +9843,239 @@
           <a:chExt cx="0" cy="0"/>
         </a:xfrm>
       </p:grpSpPr>
+      <p:pic>
+        <p:nvPicPr>
+          <p:cNvPr id="9" name="図 8">
+            <a:extLst>
+              <a:ext uri="{FF2B5EF4-FFF2-40B4-BE49-F238E27FC236}">
+                <a16:creationId xmlns:a16="http://schemas.microsoft.com/office/drawing/2014/main" id="{A93330EE-6B8B-4FFC-8E4B-B735DA4812A0}"/>
+              </a:ext>
+            </a:extLst>
+          </p:cNvPr>
+          <p:cNvPicPr>
+            <a:picLocks noChangeAspect="1"/>
+          </p:cNvPicPr>
+          <p:nvPr/>
+        </p:nvPicPr>
+        <p:blipFill>
+          <a:blip r:embed="rId2">
+            <a:extLst>
+              <a:ext uri="{28A0092B-C50C-407E-A947-70E740481C1C}">
+                <a14:useLocalDpi xmlns:a14="http://schemas.microsoft.com/office/drawing/2010/main" val="0"/>
+              </a:ext>
+            </a:extLst>
+          </a:blip>
+          <a:stretch>
+            <a:fillRect/>
+          </a:stretch>
+        </p:blipFill>
+        <p:spPr>
+          <a:xfrm>
+            <a:off x="0" y="0"/>
+            <a:ext cx="12191999" cy="6858000"/>
+          </a:xfrm>
+          <a:prstGeom prst="rect">
+            <a:avLst/>
+          </a:prstGeom>
+        </p:spPr>
+      </p:pic>
+      <p:sp>
+        <p:nvSpPr>
+          <p:cNvPr id="2" name="タイトル 1">
+            <a:extLst>
+              <a:ext uri="{FF2B5EF4-FFF2-40B4-BE49-F238E27FC236}">
+                <a16:creationId xmlns:a16="http://schemas.microsoft.com/office/drawing/2014/main" id="{0C9ACDA0-1289-4EE9-9EA7-B48C2498ED18}"/>
+              </a:ext>
+            </a:extLst>
+          </p:cNvPr>
+          <p:cNvSpPr>
+            <a:spLocks noGrp="1"/>
+          </p:cNvSpPr>
+          <p:nvPr>
+            <p:ph type="ctrTitle"/>
+          </p:nvPr>
+        </p:nvSpPr>
+        <p:spPr>
+          <a:xfrm>
+            <a:off x="326966" y="634683"/>
+            <a:ext cx="11538066" cy="822815"/>
+          </a:xfrm>
+        </p:spPr>
+        <p:txBody>
+          <a:bodyPr>
+            <a:normAutofit/>
+          </a:bodyPr>
+          <a:lstStyle/>
+          <a:p>
+            <a:pPr algn="l"/>
+            <a:r>
+              <a:rPr kumimoji="1" lang="en-US" altLang="ja-JP" sz="4000" dirty="0">
+                <a:solidFill>
+                  <a:schemeClr val="bg1"/>
+                </a:solidFill>
+              </a:rPr>
+              <a:t>【</a:t>
+            </a:r>
+            <a:r>
+              <a:rPr kumimoji="1" lang="ja-JP" altLang="en-US" sz="4000" dirty="0">
+                <a:solidFill>
+                  <a:schemeClr val="bg1"/>
+                </a:solidFill>
+              </a:rPr>
+              <a:t>コード進化：</a:t>
+            </a:r>
+            <a:r>
+              <a:rPr kumimoji="1" lang="en-US" altLang="ja-JP" sz="4000" dirty="0">
+                <a:solidFill>
+                  <a:schemeClr val="bg1"/>
+                </a:solidFill>
+              </a:rPr>
+              <a:t>Player.cpp → Character.cpp】</a:t>
+            </a:r>
+            <a:endParaRPr kumimoji="1" lang="ja-JP" altLang="en-US" sz="4000" dirty="0">
+              <a:solidFill>
+                <a:schemeClr val="bg1"/>
+              </a:solidFill>
+            </a:endParaRPr>
+          </a:p>
+        </p:txBody>
+      </p:sp>
+      <p:sp>
+        <p:nvSpPr>
+          <p:cNvPr id="3" name="字幕 2">
+            <a:extLst>
+              <a:ext uri="{FF2B5EF4-FFF2-40B4-BE49-F238E27FC236}">
+                <a16:creationId xmlns:a16="http://schemas.microsoft.com/office/drawing/2014/main" id="{81DC0F0A-1527-4642-A1A0-5BD00B17C73E}"/>
+              </a:ext>
+            </a:extLst>
+          </p:cNvPr>
+          <p:cNvSpPr>
+            <a:spLocks noGrp="1"/>
+          </p:cNvSpPr>
+          <p:nvPr>
+            <p:ph type="subTitle" idx="1"/>
+          </p:nvPr>
+        </p:nvSpPr>
+        <p:spPr>
+          <a:xfrm>
+            <a:off x="326965" y="1457497"/>
+            <a:ext cx="11538065" cy="4765819"/>
+          </a:xfrm>
+        </p:spPr>
+        <p:txBody>
+          <a:bodyPr/>
+          <a:lstStyle/>
+          <a:p>
+            <a:pPr algn="l"/>
+            <a:r>
+              <a:rPr kumimoji="1" lang="ja-JP" altLang="en-US" dirty="0">
+                <a:solidFill>
+                  <a:schemeClr val="bg1"/>
+                </a:solidFill>
+              </a:rPr>
+              <a:t>＜</a:t>
+            </a:r>
+            <a:r>
+              <a:rPr kumimoji="1" lang="en-US" altLang="ja-JP" dirty="0">
+                <a:solidFill>
+                  <a:schemeClr val="bg1"/>
+                </a:solidFill>
+              </a:rPr>
+              <a:t>Before</a:t>
+            </a:r>
+            <a:r>
+              <a:rPr kumimoji="1" lang="ja-JP" altLang="en-US" dirty="0">
+                <a:solidFill>
+                  <a:schemeClr val="bg1"/>
+                </a:solidFill>
+              </a:rPr>
+              <a:t>：</a:t>
+            </a:r>
+            <a:r>
+              <a:rPr kumimoji="1" lang="en-US" altLang="ja-JP" dirty="0">
+                <a:solidFill>
+                  <a:schemeClr val="bg1"/>
+                </a:solidFill>
+              </a:rPr>
+              <a:t>Player.cpp</a:t>
+            </a:r>
+            <a:r>
+              <a:rPr kumimoji="1" lang="ja-JP" altLang="en-US" dirty="0">
+                <a:solidFill>
+                  <a:schemeClr val="bg1"/>
+                </a:solidFill>
+              </a:rPr>
+              <a:t>＞</a:t>
+            </a:r>
+          </a:p>
+        </p:txBody>
+      </p:sp>
+      <p:pic>
+        <p:nvPicPr>
+          <p:cNvPr id="11" name="図 10">
+            <a:extLst>
+              <a:ext uri="{FF2B5EF4-FFF2-40B4-BE49-F238E27FC236}">
+                <a16:creationId xmlns:a16="http://schemas.microsoft.com/office/drawing/2014/main" id="{E04B0BCC-12B7-4E53-A05B-B703B1B789F0}"/>
+              </a:ext>
+            </a:extLst>
+          </p:cNvPr>
+          <p:cNvPicPr>
+            <a:picLocks noChangeAspect="1"/>
+          </p:cNvPicPr>
+          <p:nvPr/>
+        </p:nvPicPr>
+        <p:blipFill>
+          <a:blip r:embed="rId3">
+            <a:extLst>
+              <a:ext uri="{28A0092B-C50C-407E-A947-70E740481C1C}">
+                <a14:useLocalDpi xmlns:a14="http://schemas.microsoft.com/office/drawing/2010/main" val="0"/>
+              </a:ext>
+            </a:extLst>
+          </a:blip>
+          <a:stretch>
+            <a:fillRect/>
+          </a:stretch>
+        </p:blipFill>
+        <p:spPr>
+          <a:xfrm>
+            <a:off x="628994" y="1823839"/>
+            <a:ext cx="4452853" cy="1494224"/>
+          </a:xfrm>
+          <a:prstGeom prst="rect">
+            <a:avLst/>
+          </a:prstGeom>
+        </p:spPr>
+      </p:pic>
+    </p:spTree>
+    <p:extLst>
+      <p:ext uri="{BB962C8B-B14F-4D97-AF65-F5344CB8AC3E}">
+        <p14:creationId xmlns:p14="http://schemas.microsoft.com/office/powerpoint/2010/main" val="2352901465"/>
+      </p:ext>
+    </p:extLst>
+  </p:cSld>
+  <p:clrMapOvr>
+    <a:masterClrMapping/>
+  </p:clrMapOvr>
+</p:sld>
+</file>
+
+<file path=ppt/slides/slide8.xml><?xml version="1.0" encoding="utf-8"?>
+<p:sld xmlns:a="http://schemas.openxmlformats.org/drawingml/2006/main" xmlns:r="http://schemas.openxmlformats.org/officeDocument/2006/relationships" xmlns:p="http://schemas.openxmlformats.org/presentationml/2006/main">
+  <p:cSld>
+    <p:spTree>
+      <p:nvGrpSpPr>
+        <p:cNvPr id="1" name=""/>
+        <p:cNvGrpSpPr/>
+        <p:nvPr/>
+      </p:nvGrpSpPr>
+      <p:grpSpPr>
+        <a:xfrm>
+          <a:off x="0" y="0"/>
+          <a:ext cx="0" cy="0"/>
+          <a:chOff x="0" y="0"/>
+          <a:chExt cx="0" cy="0"/>
+        </a:xfrm>
+      </p:grpSpPr>
       <p:sp>
         <p:nvSpPr>
           <p:cNvPr id="2" name="タイトル 1">
@@ -9526,120 +10784,6 @@
 </p:sld>
 </file>
 
-<file path=ppt/slides/slide8.xml><?xml version="1.0" encoding="utf-8"?>
-<p:sld xmlns:a="http://schemas.openxmlformats.org/drawingml/2006/main" xmlns:r="http://schemas.openxmlformats.org/officeDocument/2006/relationships" xmlns:p="http://schemas.openxmlformats.org/presentationml/2006/main">
-  <p:cSld>
-    <p:spTree>
-      <p:nvGrpSpPr>
-        <p:cNvPr id="1" name=""/>
-        <p:cNvGrpSpPr/>
-        <p:nvPr/>
-      </p:nvGrpSpPr>
-      <p:grpSpPr>
-        <a:xfrm>
-          <a:off x="0" y="0"/>
-          <a:ext cx="0" cy="0"/>
-          <a:chOff x="0" y="0"/>
-          <a:chExt cx="0" cy="0"/>
-        </a:xfrm>
-      </p:grpSpPr>
-      <p:sp>
-        <p:nvSpPr>
-          <p:cNvPr id="2" name="タイトル 1">
-            <a:extLst>
-              <a:ext uri="{FF2B5EF4-FFF2-40B4-BE49-F238E27FC236}">
-                <a16:creationId xmlns:a16="http://schemas.microsoft.com/office/drawing/2014/main" id="{A2EEA01F-1AF2-4E06-9A62-2ADD4CE7C413}"/>
-              </a:ext>
-            </a:extLst>
-          </p:cNvPr>
-          <p:cNvSpPr>
-            <a:spLocks noGrp="1"/>
-          </p:cNvSpPr>
-          <p:nvPr>
-            <p:ph type="ctrTitle"/>
-          </p:nvPr>
-        </p:nvSpPr>
-        <p:spPr>
-          <a:xfrm>
-            <a:off x="1619250" y="644526"/>
-            <a:ext cx="9144000" cy="2133599"/>
-          </a:xfrm>
-        </p:spPr>
-        <p:txBody>
-          <a:bodyPr>
-            <a:normAutofit/>
-          </a:bodyPr>
-          <a:lstStyle/>
-          <a:p>
-            <a:r>
-              <a:rPr kumimoji="1" lang="ja-JP" altLang="en-US" sz="10000" dirty="0"/>
-              <a:t>タイトル</a:t>
-            </a:r>
-          </a:p>
-        </p:txBody>
-      </p:sp>
-      <p:sp>
-        <p:nvSpPr>
-          <p:cNvPr id="3" name="字幕 2">
-            <a:extLst>
-              <a:ext uri="{FF2B5EF4-FFF2-40B4-BE49-F238E27FC236}">
-                <a16:creationId xmlns:a16="http://schemas.microsoft.com/office/drawing/2014/main" id="{75C68191-8585-438A-ACCB-E11454B3AA4E}"/>
-              </a:ext>
-            </a:extLst>
-          </p:cNvPr>
-          <p:cNvSpPr>
-            <a:spLocks noGrp="1"/>
-          </p:cNvSpPr>
-          <p:nvPr>
-            <p:ph type="subTitle" idx="1"/>
-          </p:nvPr>
-        </p:nvSpPr>
-        <p:spPr>
-          <a:xfrm>
-            <a:off x="1524000" y="4079876"/>
-            <a:ext cx="9144000" cy="1655762"/>
-          </a:xfrm>
-        </p:spPr>
-        <p:txBody>
-          <a:bodyPr/>
-          <a:lstStyle/>
-          <a:p>
-            <a:r>
-              <a:rPr kumimoji="1" lang="ja-JP" altLang="en-US" dirty="0"/>
-              <a:t>「</a:t>
-            </a:r>
-            <a:r>
-              <a:rPr kumimoji="1" lang="en-US" altLang="ja-JP" dirty="0"/>
-              <a:t>Enter</a:t>
-            </a:r>
-            <a:r>
-              <a:rPr kumimoji="1" lang="ja-JP" altLang="en-US" dirty="0"/>
-              <a:t>」か</a:t>
-            </a:r>
-            <a:r>
-              <a:rPr kumimoji="1" lang="en-US" altLang="ja-JP" dirty="0"/>
-              <a:t>B</a:t>
-            </a:r>
-            <a:r>
-              <a:rPr kumimoji="1" lang="ja-JP" altLang="en-US" dirty="0"/>
-              <a:t>ボタンでスタート</a:t>
-            </a:r>
-          </a:p>
-        </p:txBody>
-      </p:sp>
-    </p:spTree>
-    <p:extLst>
-      <p:ext uri="{BB962C8B-B14F-4D97-AF65-F5344CB8AC3E}">
-        <p14:creationId xmlns:p14="http://schemas.microsoft.com/office/powerpoint/2010/main" val="2100573860"/>
-      </p:ext>
-    </p:extLst>
-  </p:cSld>
-  <p:clrMapOvr>
-    <a:masterClrMapping/>
-  </p:clrMapOvr>
-</p:sld>
-</file>
-
 <file path=ppt/slides/slide9.xml><?xml version="1.0" encoding="utf-8"?>
 <p:sld xmlns:a="http://schemas.openxmlformats.org/drawingml/2006/main" xmlns:r="http://schemas.openxmlformats.org/officeDocument/2006/relationships" xmlns:p="http://schemas.openxmlformats.org/presentationml/2006/main">
   <p:cSld>
@@ -9662,7 +10806,7 @@
           <p:cNvPr id="2" name="タイトル 1">
             <a:extLst>
               <a:ext uri="{FF2B5EF4-FFF2-40B4-BE49-F238E27FC236}">
-                <a16:creationId xmlns:a16="http://schemas.microsoft.com/office/drawing/2014/main" id="{CEA556C0-5DD8-49F1-BCFD-CB90F7462D98}"/>
+                <a16:creationId xmlns:a16="http://schemas.microsoft.com/office/drawing/2014/main" id="{A2EEA01F-1AF2-4E06-9A62-2ADD4CE7C413}"/>
               </a:ext>
             </a:extLst>
           </p:cNvPr>
@@ -9670,262 +10814,73 @@
             <a:spLocks noGrp="1"/>
           </p:cNvSpPr>
           <p:nvPr>
-            <p:ph type="title"/>
+            <p:ph type="ctrTitle"/>
           </p:nvPr>
         </p:nvSpPr>
-        <p:spPr/>
+        <p:spPr>
+          <a:xfrm>
+            <a:off x="1619250" y="644526"/>
+            <a:ext cx="9144000" cy="2133599"/>
+          </a:xfrm>
+        </p:spPr>
+        <p:txBody>
+          <a:bodyPr>
+            <a:normAutofit/>
+          </a:bodyPr>
+          <a:lstStyle/>
+          <a:p>
+            <a:r>
+              <a:rPr kumimoji="1" lang="ja-JP" altLang="en-US" sz="10000" dirty="0"/>
+              <a:t>タイトル</a:t>
+            </a:r>
+          </a:p>
+        </p:txBody>
+      </p:sp>
+      <p:sp>
+        <p:nvSpPr>
+          <p:cNvPr id="3" name="字幕 2">
+            <a:extLst>
+              <a:ext uri="{FF2B5EF4-FFF2-40B4-BE49-F238E27FC236}">
+                <a16:creationId xmlns:a16="http://schemas.microsoft.com/office/drawing/2014/main" id="{75C68191-8585-438A-ACCB-E11454B3AA4E}"/>
+              </a:ext>
+            </a:extLst>
+          </p:cNvPr>
+          <p:cNvSpPr>
+            <a:spLocks noGrp="1"/>
+          </p:cNvSpPr>
+          <p:nvPr>
+            <p:ph type="subTitle" idx="1"/>
+          </p:nvPr>
+        </p:nvSpPr>
+        <p:spPr>
+          <a:xfrm>
+            <a:off x="1524000" y="4079876"/>
+            <a:ext cx="9144000" cy="1655762"/>
+          </a:xfrm>
+        </p:spPr>
         <p:txBody>
           <a:bodyPr/>
           <a:lstStyle/>
           <a:p>
             <a:r>
               <a:rPr kumimoji="1" lang="ja-JP" altLang="en-US" dirty="0"/>
-              <a:t>セレクト</a:t>
-            </a:r>
-          </a:p>
-        </p:txBody>
-      </p:sp>
-      <p:sp>
-        <p:nvSpPr>
-          <p:cNvPr id="3" name="正方形/長方形 2">
-            <a:extLst>
-              <a:ext uri="{FF2B5EF4-FFF2-40B4-BE49-F238E27FC236}">
-                <a16:creationId xmlns:a16="http://schemas.microsoft.com/office/drawing/2014/main" id="{1FE672AB-C24E-4F83-9336-382D1738ECDA}"/>
-              </a:ext>
-            </a:extLst>
-          </p:cNvPr>
-          <p:cNvSpPr/>
-          <p:nvPr/>
-        </p:nvSpPr>
-        <p:spPr>
-          <a:xfrm>
-            <a:off x="2647950" y="2695575"/>
-            <a:ext cx="1352550" cy="1628775"/>
-          </a:xfrm>
-          <a:prstGeom prst="rect">
-            <a:avLst/>
-          </a:prstGeom>
-        </p:spPr>
-        <p:style>
-          <a:lnRef idx="2">
-            <a:schemeClr val="dk1">
-              <a:shade val="50000"/>
-            </a:schemeClr>
-          </a:lnRef>
-          <a:fillRef idx="1">
-            <a:schemeClr val="dk1"/>
-          </a:fillRef>
-          <a:effectRef idx="0">
-            <a:schemeClr val="dk1"/>
-          </a:effectRef>
-          <a:fontRef idx="minor">
-            <a:schemeClr val="lt1"/>
-          </a:fontRef>
-        </p:style>
-        <p:txBody>
-          <a:bodyPr rtlCol="0" anchor="ctr"/>
-          <a:lstStyle/>
-          <a:p>
-            <a:pPr algn="ctr"/>
+              <a:t>「</a:t>
+            </a:r>
+            <a:r>
+              <a:rPr kumimoji="1" lang="en-US" altLang="ja-JP" dirty="0"/>
+              <a:t>Enter</a:t>
+            </a:r>
             <a:r>
               <a:rPr kumimoji="1" lang="ja-JP" altLang="en-US" dirty="0"/>
-              <a:t>キャラ</a:t>
-            </a:r>
-          </a:p>
-        </p:txBody>
-      </p:sp>
-      <p:sp>
-        <p:nvSpPr>
-          <p:cNvPr id="9" name="正方形/長方形 8">
-            <a:extLst>
-              <a:ext uri="{FF2B5EF4-FFF2-40B4-BE49-F238E27FC236}">
-                <a16:creationId xmlns:a16="http://schemas.microsoft.com/office/drawing/2014/main" id="{B1E21641-AF92-4BC6-B2C3-D2AAF19B9DF9}"/>
-              </a:ext>
-            </a:extLst>
-          </p:cNvPr>
-          <p:cNvSpPr/>
-          <p:nvPr/>
-        </p:nvSpPr>
-        <p:spPr>
-          <a:xfrm>
-            <a:off x="5305425" y="2695575"/>
-            <a:ext cx="1352550" cy="1628775"/>
-          </a:xfrm>
-          <a:prstGeom prst="rect">
-            <a:avLst/>
-          </a:prstGeom>
-        </p:spPr>
-        <p:style>
-          <a:lnRef idx="2">
-            <a:schemeClr val="dk1">
-              <a:shade val="50000"/>
-            </a:schemeClr>
-          </a:lnRef>
-          <a:fillRef idx="1">
-            <a:schemeClr val="dk1"/>
-          </a:fillRef>
-          <a:effectRef idx="0">
-            <a:schemeClr val="dk1"/>
-          </a:effectRef>
-          <a:fontRef idx="minor">
-            <a:schemeClr val="lt1"/>
-          </a:fontRef>
-        </p:style>
-        <p:txBody>
-          <a:bodyPr rtlCol="0" anchor="ctr"/>
-          <a:lstStyle/>
-          <a:p>
-            <a:pPr algn="ctr"/>
+              <a:t>」か</a:t>
+            </a:r>
+            <a:r>
+              <a:rPr kumimoji="1" lang="en-US" altLang="ja-JP" dirty="0"/>
+              <a:t>B</a:t>
+            </a:r>
             <a:r>
               <a:rPr kumimoji="1" lang="ja-JP" altLang="en-US" dirty="0"/>
-              <a:t>キャラ</a:t>
-            </a:r>
-          </a:p>
-        </p:txBody>
-      </p:sp>
-      <p:sp>
-        <p:nvSpPr>
-          <p:cNvPr id="10" name="正方形/長方形 9">
-            <a:extLst>
-              <a:ext uri="{FF2B5EF4-FFF2-40B4-BE49-F238E27FC236}">
-                <a16:creationId xmlns:a16="http://schemas.microsoft.com/office/drawing/2014/main" id="{B8101C9B-25A8-4833-AEB1-45076640F767}"/>
-              </a:ext>
-            </a:extLst>
-          </p:cNvPr>
-          <p:cNvSpPr/>
-          <p:nvPr/>
-        </p:nvSpPr>
-        <p:spPr>
-          <a:xfrm>
-            <a:off x="7962900" y="2695575"/>
-            <a:ext cx="1352550" cy="1628775"/>
-          </a:xfrm>
-          <a:prstGeom prst="rect">
-            <a:avLst/>
-          </a:prstGeom>
-        </p:spPr>
-        <p:style>
-          <a:lnRef idx="2">
-            <a:schemeClr val="dk1">
-              <a:shade val="50000"/>
-            </a:schemeClr>
-          </a:lnRef>
-          <a:fillRef idx="1">
-            <a:schemeClr val="dk1"/>
-          </a:fillRef>
-          <a:effectRef idx="0">
-            <a:schemeClr val="dk1"/>
-          </a:effectRef>
-          <a:fontRef idx="minor">
-            <a:schemeClr val="lt1"/>
-          </a:fontRef>
-        </p:style>
-        <p:txBody>
-          <a:bodyPr rtlCol="0" anchor="ctr"/>
-          <a:lstStyle/>
-          <a:p>
-            <a:pPr algn="ctr"/>
-            <a:r>
-              <a:rPr kumimoji="1" lang="ja-JP" altLang="en-US" dirty="0"/>
-              <a:t>キャラ</a:t>
-            </a:r>
-          </a:p>
-        </p:txBody>
-      </p:sp>
-      <p:sp>
-        <p:nvSpPr>
-          <p:cNvPr id="11" name="正方形/長方形 10">
-            <a:extLst>
-              <a:ext uri="{FF2B5EF4-FFF2-40B4-BE49-F238E27FC236}">
-                <a16:creationId xmlns:a16="http://schemas.microsoft.com/office/drawing/2014/main" id="{18681022-87E9-491C-AA8D-F9A88833EA3D}"/>
-              </a:ext>
-            </a:extLst>
-          </p:cNvPr>
-          <p:cNvSpPr/>
-          <p:nvPr/>
-        </p:nvSpPr>
-        <p:spPr>
-          <a:xfrm>
-            <a:off x="3952875" y="4648200"/>
-            <a:ext cx="1352550" cy="1628775"/>
-          </a:xfrm>
-          <a:prstGeom prst="rect">
-            <a:avLst/>
-          </a:prstGeom>
-        </p:spPr>
-        <p:style>
-          <a:lnRef idx="2">
-            <a:schemeClr val="dk1">
-              <a:shade val="50000"/>
-            </a:schemeClr>
-          </a:lnRef>
-          <a:fillRef idx="1">
-            <a:schemeClr val="dk1"/>
-          </a:fillRef>
-          <a:effectRef idx="0">
-            <a:schemeClr val="dk1"/>
-          </a:effectRef>
-          <a:fontRef idx="minor">
-            <a:schemeClr val="lt1"/>
-          </a:fontRef>
-        </p:style>
-        <p:txBody>
-          <a:bodyPr rtlCol="0" anchor="ctr"/>
-          <a:lstStyle/>
-          <a:p>
-            <a:pPr algn="ctr"/>
-            <a:r>
-              <a:rPr kumimoji="1" lang="ja-JP" altLang="en-US" dirty="0"/>
-              <a:t>キャラ</a:t>
-            </a:r>
-          </a:p>
-        </p:txBody>
-      </p:sp>
-      <p:sp>
-        <p:nvSpPr>
-          <p:cNvPr id="12" name="正方形/長方形 11">
-            <a:extLst>
-              <a:ext uri="{FF2B5EF4-FFF2-40B4-BE49-F238E27FC236}">
-                <a16:creationId xmlns:a16="http://schemas.microsoft.com/office/drawing/2014/main" id="{61C2B7ED-3ED5-4F2C-9B40-10ACF7FA21BF}"/>
-              </a:ext>
-            </a:extLst>
-          </p:cNvPr>
-          <p:cNvSpPr/>
-          <p:nvPr/>
-        </p:nvSpPr>
-        <p:spPr>
-          <a:xfrm>
-            <a:off x="6610350" y="4648200"/>
-            <a:ext cx="1352550" cy="1628775"/>
-          </a:xfrm>
-          <a:prstGeom prst="rect">
-            <a:avLst/>
-          </a:prstGeom>
-        </p:spPr>
-        <p:style>
-          <a:lnRef idx="2">
-            <a:schemeClr val="dk1">
-              <a:shade val="50000"/>
-            </a:schemeClr>
-          </a:lnRef>
-          <a:fillRef idx="1">
-            <a:schemeClr val="dk1"/>
-          </a:fillRef>
-          <a:effectRef idx="0">
-            <a:schemeClr val="dk1"/>
-          </a:effectRef>
-          <a:fontRef idx="minor">
-            <a:schemeClr val="lt1"/>
-          </a:fontRef>
-        </p:style>
-        <p:txBody>
-          <a:bodyPr rtlCol="0" anchor="ctr"/>
-          <a:lstStyle/>
-          <a:p>
-            <a:pPr algn="ctr"/>
-            <a:r>
-              <a:rPr kumimoji="1" lang="ja-JP" altLang="en-US" dirty="0"/>
-              <a:t>キャラ</a:t>
+              <a:t>ボタンでスタート</a:t>
             </a:r>
           </a:p>
         </p:txBody>
@@ -9933,7 +10888,7 @@
     </p:spTree>
     <p:extLst>
       <p:ext uri="{BB962C8B-B14F-4D97-AF65-F5344CB8AC3E}">
-        <p14:creationId xmlns:p14="http://schemas.microsoft.com/office/powerpoint/2010/main" val="3464825203"/>
+        <p14:creationId xmlns:p14="http://schemas.microsoft.com/office/powerpoint/2010/main" val="2100573860"/>
       </p:ext>
     </p:extLst>
   </p:cSld>

--- a/仕様書.pptx
+++ b/仕様書.pptx
@@ -11,12 +11,10 @@
     <p:sldId id="267" r:id="rId5"/>
     <p:sldId id="268" r:id="rId6"/>
     <p:sldId id="269" r:id="rId7"/>
-    <p:sldId id="270" r:id="rId8"/>
-    <p:sldId id="258" r:id="rId9"/>
-    <p:sldId id="260" r:id="rId10"/>
-    <p:sldId id="261" r:id="rId11"/>
-    <p:sldId id="262" r:id="rId12"/>
-    <p:sldId id="263" r:id="rId13"/>
+    <p:sldId id="271" r:id="rId8"/>
+    <p:sldId id="270" r:id="rId9"/>
+    <p:sldId id="272" r:id="rId10"/>
+    <p:sldId id="273" r:id="rId11"/>
   </p:sldIdLst>
   <p:sldSz cx="12192000" cy="6858000"/>
   <p:notesSz cx="6858000" cy="9144000"/>
@@ -121,6 +119,355 @@
     </p:ext>
   </p:extLst>
 </p:presentation>
+</file>
+
+<file path=ppt/revisionInfo.xml><?xml version="1.0" encoding="utf-8"?>
+<p1510:revInfo xmlns:a="http://schemas.openxmlformats.org/drawingml/2006/main" xmlns:r="http://schemas.openxmlformats.org/officeDocument/2006/relationships" xmlns:p1510="http://schemas.microsoft.com/office/powerpoint/2015/10/main">
+  <p1510:revLst>
+    <p1510:client id="{544764D6-8BC6-6AEE-8602-F9642AA4CD05}" v="699" dt="2025-12-18T18:26:14.187"/>
+  </p1510:revLst>
+</p1510:revInfo>
+</file>
+
+<file path=ppt/changesInfos/changesInfo1.xml><?xml version="1.0" encoding="utf-8"?>
+<pc:chgInfo xmlns:a="http://schemas.openxmlformats.org/drawingml/2006/main" xmlns:r="http://schemas.openxmlformats.org/officeDocument/2006/relationships" xmlns:ac="http://schemas.microsoft.com/office/drawing/2013/main/command" xmlns:pc="http://schemas.microsoft.com/office/powerpoint/2013/main/command">
+  <pc:docChgLst>
+    <pc:chgData name="西川 楓真" userId="S::sdt2395gp0016@edu.sca.ac.jp::73045bb8-9ade-40ec-92ac-cafc669feaf0" providerId="AD" clId="Web-{544764D6-8BC6-6AEE-8602-F9642AA4CD05}"/>
+    <pc:docChg chg="addSld delSld modSld sldOrd">
+      <pc:chgData name="西川 楓真" userId="S::sdt2395gp0016@edu.sca.ac.jp::73045bb8-9ade-40ec-92ac-cafc669feaf0" providerId="AD" clId="Web-{544764D6-8BC6-6AEE-8602-F9642AA4CD05}" dt="2025-12-18T18:26:14.187" v="580"/>
+      <pc:docMkLst>
+        <pc:docMk/>
+      </pc:docMkLst>
+      <pc:sldChg chg="del">
+        <pc:chgData name="西川 楓真" userId="S::sdt2395gp0016@edu.sca.ac.jp::73045bb8-9ade-40ec-92ac-cafc669feaf0" providerId="AD" clId="Web-{544764D6-8BC6-6AEE-8602-F9642AA4CD05}" dt="2025-12-18T16:39:23.859" v="84"/>
+        <pc:sldMkLst>
+          <pc:docMk/>
+          <pc:sldMk cId="1673219951" sldId="258"/>
+        </pc:sldMkLst>
+      </pc:sldChg>
+      <pc:sldChg chg="del">
+        <pc:chgData name="西川 楓真" userId="S::sdt2395gp0016@edu.sca.ac.jp::73045bb8-9ade-40ec-92ac-cafc669feaf0" providerId="AD" clId="Web-{544764D6-8BC6-6AEE-8602-F9642AA4CD05}" dt="2025-12-18T16:39:22.874" v="83"/>
+        <pc:sldMkLst>
+          <pc:docMk/>
+          <pc:sldMk cId="2100573860" sldId="260"/>
+        </pc:sldMkLst>
+      </pc:sldChg>
+      <pc:sldChg chg="del">
+        <pc:chgData name="西川 楓真" userId="S::sdt2395gp0016@edu.sca.ac.jp::73045bb8-9ade-40ec-92ac-cafc669feaf0" providerId="AD" clId="Web-{544764D6-8BC6-6AEE-8602-F9642AA4CD05}" dt="2025-12-18T16:39:21.765" v="82"/>
+        <pc:sldMkLst>
+          <pc:docMk/>
+          <pc:sldMk cId="3464825203" sldId="261"/>
+        </pc:sldMkLst>
+      </pc:sldChg>
+      <pc:sldChg chg="del">
+        <pc:chgData name="西川 楓真" userId="S::sdt2395gp0016@edu.sca.ac.jp::73045bb8-9ade-40ec-92ac-cafc669feaf0" providerId="AD" clId="Web-{544764D6-8BC6-6AEE-8602-F9642AA4CD05}" dt="2025-12-18T16:39:20.359" v="81"/>
+        <pc:sldMkLst>
+          <pc:docMk/>
+          <pc:sldMk cId="3460234443" sldId="262"/>
+        </pc:sldMkLst>
+      </pc:sldChg>
+      <pc:sldChg chg="del">
+        <pc:chgData name="西川 楓真" userId="S::sdt2395gp0016@edu.sca.ac.jp::73045bb8-9ade-40ec-92ac-cafc669feaf0" providerId="AD" clId="Web-{544764D6-8BC6-6AEE-8602-F9642AA4CD05}" dt="2025-12-18T16:39:19.093" v="80"/>
+        <pc:sldMkLst>
+          <pc:docMk/>
+          <pc:sldMk cId="2166365457" sldId="263"/>
+        </pc:sldMkLst>
+      </pc:sldChg>
+      <pc:sldChg chg="addSp delSp modSp">
+        <pc:chgData name="西川 楓真" userId="S::sdt2395gp0016@edu.sca.ac.jp::73045bb8-9ade-40ec-92ac-cafc669feaf0" providerId="AD" clId="Web-{544764D6-8BC6-6AEE-8602-F9642AA4CD05}" dt="2025-12-18T16:46:22.088" v="178"/>
+        <pc:sldMkLst>
+          <pc:docMk/>
+          <pc:sldMk cId="2352901465" sldId="270"/>
+        </pc:sldMkLst>
+        <pc:spChg chg="mod">
+          <ac:chgData name="西川 楓真" userId="S::sdt2395gp0016@edu.sca.ac.jp::73045bb8-9ade-40ec-92ac-cafc669feaf0" providerId="AD" clId="Web-{544764D6-8BC6-6AEE-8602-F9642AA4CD05}" dt="2025-12-18T16:35:02.181" v="24" actId="20577"/>
+          <ac:spMkLst>
+            <pc:docMk/>
+            <pc:sldMk cId="2352901465" sldId="270"/>
+            <ac:spMk id="3" creationId="{81DC0F0A-1527-4642-A1A0-5BD00B17C73E}"/>
+          </ac:spMkLst>
+        </pc:spChg>
+        <pc:spChg chg="add del mod">
+          <ac:chgData name="西川 楓真" userId="S::sdt2395gp0016@edu.sca.ac.jp::73045bb8-9ade-40ec-92ac-cafc669feaf0" providerId="AD" clId="Web-{544764D6-8BC6-6AEE-8602-F9642AA4CD05}" dt="2025-12-18T16:35:46.261" v="28"/>
+          <ac:spMkLst>
+            <pc:docMk/>
+            <pc:sldMk cId="2352901465" sldId="270"/>
+            <ac:spMk id="4" creationId="{F0D27FC6-2E09-1F78-AAE7-2B1A739AB683}"/>
+          </ac:spMkLst>
+        </pc:spChg>
+        <pc:spChg chg="add del mod">
+          <ac:chgData name="西川 楓真" userId="S::sdt2395gp0016@edu.sca.ac.jp::73045bb8-9ade-40ec-92ac-cafc669feaf0" providerId="AD" clId="Web-{544764D6-8BC6-6AEE-8602-F9642AA4CD05}" dt="2025-12-18T16:42:10.705" v="101"/>
+          <ac:spMkLst>
+            <pc:docMk/>
+            <pc:sldMk cId="2352901465" sldId="270"/>
+            <ac:spMk id="5" creationId="{7BC05198-E5C2-06C4-0636-AEAFA1681AF1}"/>
+          </ac:spMkLst>
+        </pc:spChg>
+        <pc:spChg chg="add mod">
+          <ac:chgData name="西川 楓真" userId="S::sdt2395gp0016@edu.sca.ac.jp::73045bb8-9ade-40ec-92ac-cafc669feaf0" providerId="AD" clId="Web-{544764D6-8BC6-6AEE-8602-F9642AA4CD05}" dt="2025-12-18T16:44:52.723" v="154" actId="14100"/>
+          <ac:spMkLst>
+            <pc:docMk/>
+            <pc:sldMk cId="2352901465" sldId="270"/>
+            <ac:spMk id="6" creationId="{6517C78E-A450-51D1-AAB9-50FBC86B7C18}"/>
+          </ac:spMkLst>
+        </pc:spChg>
+        <pc:spChg chg="add mod">
+          <ac:chgData name="西川 楓真" userId="S::sdt2395gp0016@edu.sca.ac.jp::73045bb8-9ade-40ec-92ac-cafc669feaf0" providerId="AD" clId="Web-{544764D6-8BC6-6AEE-8602-F9642AA4CD05}" dt="2025-12-18T16:44:24.769" v="149" actId="20577"/>
+          <ac:spMkLst>
+            <pc:docMk/>
+            <pc:sldMk cId="2352901465" sldId="270"/>
+            <ac:spMk id="7" creationId="{32F7A7DF-79E3-F73A-7431-51BA4C213209}"/>
+          </ac:spMkLst>
+        </pc:spChg>
+        <pc:spChg chg="add mod">
+          <ac:chgData name="西川 楓真" userId="S::sdt2395gp0016@edu.sca.ac.jp::73045bb8-9ade-40ec-92ac-cafc669feaf0" providerId="AD" clId="Web-{544764D6-8BC6-6AEE-8602-F9642AA4CD05}" dt="2025-12-18T16:44:16.207" v="145" actId="20577"/>
+          <ac:spMkLst>
+            <pc:docMk/>
+            <pc:sldMk cId="2352901465" sldId="270"/>
+            <ac:spMk id="8" creationId="{DF6C8FBB-0BB7-41C0-9D72-2B7DE8493FF6}"/>
+          </ac:spMkLst>
+        </pc:spChg>
+        <pc:spChg chg="add mod">
+          <ac:chgData name="西川 楓真" userId="S::sdt2395gp0016@edu.sca.ac.jp::73045bb8-9ade-40ec-92ac-cafc669feaf0" providerId="AD" clId="Web-{544764D6-8BC6-6AEE-8602-F9642AA4CD05}" dt="2025-12-18T16:45:43.226" v="174" actId="1076"/>
+          <ac:spMkLst>
+            <pc:docMk/>
+            <pc:sldMk cId="2352901465" sldId="270"/>
+            <ac:spMk id="10" creationId="{A73C2873-9D29-8085-389E-9CE0C6770ECE}"/>
+          </ac:spMkLst>
+        </pc:spChg>
+        <pc:picChg chg="mod">
+          <ac:chgData name="西川 楓真" userId="S::sdt2395gp0016@edu.sca.ac.jp::73045bb8-9ade-40ec-92ac-cafc669feaf0" providerId="AD" clId="Web-{544764D6-8BC6-6AEE-8602-F9642AA4CD05}" dt="2025-12-18T16:36:49.215" v="47" actId="1076"/>
+          <ac:picMkLst>
+            <pc:docMk/>
+            <pc:sldMk cId="2352901465" sldId="270"/>
+            <ac:picMk id="9" creationId="{A93330EE-6B8B-4FFC-8E4B-B735DA4812A0}"/>
+          </ac:picMkLst>
+        </pc:picChg>
+        <pc:picChg chg="mod">
+          <ac:chgData name="西川 楓真" userId="S::sdt2395gp0016@edu.sca.ac.jp::73045bb8-9ade-40ec-92ac-cafc669feaf0" providerId="AD" clId="Web-{544764D6-8BC6-6AEE-8602-F9642AA4CD05}" dt="2025-12-18T16:40:57.563" v="89" actId="1076"/>
+          <ac:picMkLst>
+            <pc:docMk/>
+            <pc:sldMk cId="2352901465" sldId="270"/>
+            <ac:picMk id="11" creationId="{E04B0BCC-12B7-4E53-A05B-B703B1B789F0}"/>
+          </ac:picMkLst>
+        </pc:picChg>
+        <pc:picChg chg="add del mod">
+          <ac:chgData name="西川 楓真" userId="S::sdt2395gp0016@edu.sca.ac.jp::73045bb8-9ade-40ec-92ac-cafc669feaf0" providerId="AD" clId="Web-{544764D6-8BC6-6AEE-8602-F9642AA4CD05}" dt="2025-12-18T16:46:22.088" v="178"/>
+          <ac:picMkLst>
+            <pc:docMk/>
+            <pc:sldMk cId="2352901465" sldId="270"/>
+            <ac:picMk id="12" creationId="{88416E08-D9FB-2434-53B4-1621F822F717}"/>
+          </ac:picMkLst>
+        </pc:picChg>
+      </pc:sldChg>
+      <pc:sldChg chg="addSp delSp modSp add ord replId">
+        <pc:chgData name="西川 楓真" userId="S::sdt2395gp0016@edu.sca.ac.jp::73045bb8-9ade-40ec-92ac-cafc669feaf0" providerId="AD" clId="Web-{544764D6-8BC6-6AEE-8602-F9642AA4CD05}" dt="2025-12-18T17:57:35.650" v="388" actId="20577"/>
+        <pc:sldMkLst>
+          <pc:docMk/>
+          <pc:sldMk cId="2682138417" sldId="271"/>
+        </pc:sldMkLst>
+        <pc:spChg chg="mod">
+          <ac:chgData name="西川 楓真" userId="S::sdt2395gp0016@edu.sca.ac.jp::73045bb8-9ade-40ec-92ac-cafc669feaf0" providerId="AD" clId="Web-{544764D6-8BC6-6AEE-8602-F9642AA4CD05}" dt="2025-12-18T17:47:02.365" v="267" actId="1076"/>
+          <ac:spMkLst>
+            <pc:docMk/>
+            <pc:sldMk cId="2682138417" sldId="271"/>
+            <ac:spMk id="2" creationId="{F948EF0F-BA2E-3D9C-EFE5-F404BE762142}"/>
+          </ac:spMkLst>
+        </pc:spChg>
+        <pc:spChg chg="mod">
+          <ac:chgData name="西川 楓真" userId="S::sdt2395gp0016@edu.sca.ac.jp::73045bb8-9ade-40ec-92ac-cafc669feaf0" providerId="AD" clId="Web-{544764D6-8BC6-6AEE-8602-F9642AA4CD05}" dt="2025-12-18T17:33:33.143" v="246" actId="20577"/>
+          <ac:spMkLst>
+            <pc:docMk/>
+            <pc:sldMk cId="2682138417" sldId="271"/>
+            <ac:spMk id="3" creationId="{3A8A0949-2BFA-36B6-88A4-6BD275C3417F}"/>
+          </ac:spMkLst>
+        </pc:spChg>
+        <pc:spChg chg="add mod">
+          <ac:chgData name="西川 楓真" userId="S::sdt2395gp0016@edu.sca.ac.jp::73045bb8-9ade-40ec-92ac-cafc669feaf0" providerId="AD" clId="Web-{544764D6-8BC6-6AEE-8602-F9642AA4CD05}" dt="2025-12-18T17:47:21.319" v="270" actId="20577"/>
+          <ac:spMkLst>
+            <pc:docMk/>
+            <pc:sldMk cId="2682138417" sldId="271"/>
+            <ac:spMk id="5" creationId="{C81615F2-4AF8-7291-742E-66BBC61C795C}"/>
+          </ac:spMkLst>
+        </pc:spChg>
+        <pc:spChg chg="del">
+          <ac:chgData name="西川 楓真" userId="S::sdt2395gp0016@edu.sca.ac.jp::73045bb8-9ade-40ec-92ac-cafc669feaf0" providerId="AD" clId="Web-{544764D6-8BC6-6AEE-8602-F9642AA4CD05}" dt="2025-12-18T16:51:43.213" v="185"/>
+          <ac:spMkLst>
+            <pc:docMk/>
+            <pc:sldMk cId="2682138417" sldId="271"/>
+            <ac:spMk id="6" creationId="{1BF7B0F8-E5EC-7447-B740-7497E89D474A}"/>
+          </ac:spMkLst>
+        </pc:spChg>
+        <pc:spChg chg="del">
+          <ac:chgData name="西川 楓真" userId="S::sdt2395gp0016@edu.sca.ac.jp::73045bb8-9ade-40ec-92ac-cafc669feaf0" providerId="AD" clId="Web-{544764D6-8BC6-6AEE-8602-F9642AA4CD05}" dt="2025-12-18T16:51:37.432" v="183"/>
+          <ac:spMkLst>
+            <pc:docMk/>
+            <pc:sldMk cId="2682138417" sldId="271"/>
+            <ac:spMk id="7" creationId="{6A255011-B233-F525-B19C-D6498FAB0F53}"/>
+          </ac:spMkLst>
+        </pc:spChg>
+        <pc:spChg chg="del">
+          <ac:chgData name="西川 楓真" userId="S::sdt2395gp0016@edu.sca.ac.jp::73045bb8-9ade-40ec-92ac-cafc669feaf0" providerId="AD" clId="Web-{544764D6-8BC6-6AEE-8602-F9642AA4CD05}" dt="2025-12-18T16:51:40.275" v="184"/>
+          <ac:spMkLst>
+            <pc:docMk/>
+            <pc:sldMk cId="2682138417" sldId="271"/>
+            <ac:spMk id="8" creationId="{1565BD8F-69CF-9A70-FAE6-5E836A8441BE}"/>
+          </ac:spMkLst>
+        </pc:spChg>
+        <pc:spChg chg="del">
+          <ac:chgData name="西川 楓真" userId="S::sdt2395gp0016@edu.sca.ac.jp::73045bb8-9ade-40ec-92ac-cafc669feaf0" providerId="AD" clId="Web-{544764D6-8BC6-6AEE-8602-F9642AA4CD05}" dt="2025-12-18T16:51:46.322" v="186"/>
+          <ac:spMkLst>
+            <pc:docMk/>
+            <pc:sldMk cId="2682138417" sldId="271"/>
+            <ac:spMk id="10" creationId="{73581121-8B5B-2335-7EC2-D75AD54433A7}"/>
+          </ac:spMkLst>
+        </pc:spChg>
+        <pc:spChg chg="add mod">
+          <ac:chgData name="西川 楓真" userId="S::sdt2395gp0016@edu.sca.ac.jp::73045bb8-9ade-40ec-92ac-cafc669feaf0" providerId="AD" clId="Web-{544764D6-8BC6-6AEE-8602-F9642AA4CD05}" dt="2025-12-18T17:53:48.429" v="321" actId="14100"/>
+          <ac:spMkLst>
+            <pc:docMk/>
+            <pc:sldMk cId="2682138417" sldId="271"/>
+            <ac:spMk id="13" creationId="{B3CD38FD-099C-08F0-F076-5A4E6FC871C4}"/>
+          </ac:spMkLst>
+        </pc:spChg>
+        <pc:spChg chg="add mod">
+          <ac:chgData name="西川 楓真" userId="S::sdt2395gp0016@edu.sca.ac.jp::73045bb8-9ade-40ec-92ac-cafc669feaf0" providerId="AD" clId="Web-{544764D6-8BC6-6AEE-8602-F9642AA4CD05}" dt="2025-12-18T17:54:59.429" v="334" actId="1076"/>
+          <ac:spMkLst>
+            <pc:docMk/>
+            <pc:sldMk cId="2682138417" sldId="271"/>
+            <ac:spMk id="14" creationId="{06490069-1184-9722-1270-93E42FF63D5C}"/>
+          </ac:spMkLst>
+        </pc:spChg>
+        <pc:spChg chg="add del mod">
+          <ac:chgData name="西川 楓真" userId="S::sdt2395gp0016@edu.sca.ac.jp::73045bb8-9ade-40ec-92ac-cafc669feaf0" providerId="AD" clId="Web-{544764D6-8BC6-6AEE-8602-F9642AA4CD05}" dt="2025-12-18T17:55:41.571" v="347"/>
+          <ac:spMkLst>
+            <pc:docMk/>
+            <pc:sldMk cId="2682138417" sldId="271"/>
+            <ac:spMk id="16" creationId="{78F2124F-1274-AB2E-089D-0A9292680A39}"/>
+          </ac:spMkLst>
+        </pc:spChg>
+        <pc:spChg chg="add mod">
+          <ac:chgData name="西川 楓真" userId="S::sdt2395gp0016@edu.sca.ac.jp::73045bb8-9ade-40ec-92ac-cafc669feaf0" providerId="AD" clId="Web-{544764D6-8BC6-6AEE-8602-F9642AA4CD05}" dt="2025-12-18T17:56:49.712" v="377" actId="1076"/>
+          <ac:spMkLst>
+            <pc:docMk/>
+            <pc:sldMk cId="2682138417" sldId="271"/>
+            <ac:spMk id="18" creationId="{1362EEDB-8E98-5B54-F874-D9D0C6081838}"/>
+          </ac:spMkLst>
+        </pc:spChg>
+        <pc:spChg chg="add mod">
+          <ac:chgData name="西川 楓真" userId="S::sdt2395gp0016@edu.sca.ac.jp::73045bb8-9ade-40ec-92ac-cafc669feaf0" providerId="AD" clId="Web-{544764D6-8BC6-6AEE-8602-F9642AA4CD05}" dt="2025-12-18T17:57:35.650" v="388" actId="20577"/>
+          <ac:spMkLst>
+            <pc:docMk/>
+            <pc:sldMk cId="2682138417" sldId="271"/>
+            <ac:spMk id="20" creationId="{6F9E5B8B-C08B-414E-18D4-745A0FD2CF1F}"/>
+          </ac:spMkLst>
+        </pc:spChg>
+        <pc:picChg chg="mod">
+          <ac:chgData name="西川 楓真" userId="S::sdt2395gp0016@edu.sca.ac.jp::73045bb8-9ade-40ec-92ac-cafc669feaf0" providerId="AD" clId="Web-{544764D6-8BC6-6AEE-8602-F9642AA4CD05}" dt="2025-12-18T17:57:08.025" v="382" actId="1076"/>
+          <ac:picMkLst>
+            <pc:docMk/>
+            <pc:sldMk cId="2682138417" sldId="271"/>
+            <ac:picMk id="9" creationId="{1C117327-97DC-1058-7503-72025617BD17}"/>
+          </ac:picMkLst>
+        </pc:picChg>
+        <pc:picChg chg="del">
+          <ac:chgData name="西川 楓真" userId="S::sdt2395gp0016@edu.sca.ac.jp::73045bb8-9ade-40ec-92ac-cafc669feaf0" providerId="AD" clId="Web-{544764D6-8BC6-6AEE-8602-F9642AA4CD05}" dt="2025-12-18T16:51:33.056" v="182"/>
+          <ac:picMkLst>
+            <pc:docMk/>
+            <pc:sldMk cId="2682138417" sldId="271"/>
+            <ac:picMk id="11" creationId="{5ABF8922-ABAB-1B38-E8BE-6D11C35A4EEB}"/>
+          </ac:picMkLst>
+        </pc:picChg>
+        <pc:picChg chg="add del">
+          <ac:chgData name="西川 楓真" userId="S::sdt2395gp0016@edu.sca.ac.jp::73045bb8-9ade-40ec-92ac-cafc669feaf0" providerId="AD" clId="Web-{544764D6-8BC6-6AEE-8602-F9642AA4CD05}" dt="2025-12-18T17:56:58.290" v="379"/>
+          <ac:picMkLst>
+            <pc:docMk/>
+            <pc:sldMk cId="2682138417" sldId="271"/>
+            <ac:picMk id="19" creationId="{AC503217-6817-A218-42A5-78F37EF0376B}"/>
+          </ac:picMkLst>
+        </pc:picChg>
+      </pc:sldChg>
+      <pc:sldChg chg="addSp delSp modSp new">
+        <pc:chgData name="西川 楓真" userId="S::sdt2395gp0016@edu.sca.ac.jp::73045bb8-9ade-40ec-92ac-cafc669feaf0" providerId="AD" clId="Web-{544764D6-8BC6-6AEE-8602-F9642AA4CD05}" dt="2025-12-18T18:25:44.234" v="577" actId="14100"/>
+        <pc:sldMkLst>
+          <pc:docMk/>
+          <pc:sldMk cId="2264894672" sldId="272"/>
+        </pc:sldMkLst>
+        <pc:spChg chg="mod">
+          <ac:chgData name="西川 楓真" userId="S::sdt2395gp0016@edu.sca.ac.jp::73045bb8-9ade-40ec-92ac-cafc669feaf0" providerId="AD" clId="Web-{544764D6-8BC6-6AEE-8602-F9642AA4CD05}" dt="2025-12-18T18:07:09.634" v="406" actId="20577"/>
+          <ac:spMkLst>
+            <pc:docMk/>
+            <pc:sldMk cId="2264894672" sldId="272"/>
+            <ac:spMk id="2" creationId="{5158EFB3-9A7E-49FD-025F-4C3288F22738}"/>
+          </ac:spMkLst>
+        </pc:spChg>
+        <pc:spChg chg="mod">
+          <ac:chgData name="西川 楓真" userId="S::sdt2395gp0016@edu.sca.ac.jp::73045bb8-9ade-40ec-92ac-cafc669feaf0" providerId="AD" clId="Web-{544764D6-8BC6-6AEE-8602-F9642AA4CD05}" dt="2025-12-18T18:20:13.215" v="536" actId="20577"/>
+          <ac:spMkLst>
+            <pc:docMk/>
+            <pc:sldMk cId="2264894672" sldId="272"/>
+            <ac:spMk id="3" creationId="{784D736B-89AF-ED44-FF58-AC1E2C735A78}"/>
+          </ac:spMkLst>
+        </pc:spChg>
+        <pc:spChg chg="add mod">
+          <ac:chgData name="西川 楓真" userId="S::sdt2395gp0016@edu.sca.ac.jp::73045bb8-9ade-40ec-92ac-cafc669feaf0" providerId="AD" clId="Web-{544764D6-8BC6-6AEE-8602-F9642AA4CD05}" dt="2025-12-18T18:21:45.294" v="546"/>
+          <ac:spMkLst>
+            <pc:docMk/>
+            <pc:sldMk cId="2264894672" sldId="272"/>
+            <ac:spMk id="6" creationId="{7E94E749-9FB2-FDD5-E7B7-E642FE115D89}"/>
+          </ac:spMkLst>
+        </pc:spChg>
+        <pc:spChg chg="add del">
+          <ac:chgData name="西川 楓真" userId="S::sdt2395gp0016@edu.sca.ac.jp::73045bb8-9ade-40ec-92ac-cafc669feaf0" providerId="AD" clId="Web-{544764D6-8BC6-6AEE-8602-F9642AA4CD05}" dt="2025-12-18T18:23:22.248" v="548"/>
+          <ac:spMkLst>
+            <pc:docMk/>
+            <pc:sldMk cId="2264894672" sldId="272"/>
+            <ac:spMk id="7" creationId="{35B9113C-7023-A496-35D9-50FA69FC92A8}"/>
+          </ac:spMkLst>
+        </pc:spChg>
+        <pc:spChg chg="add mod">
+          <ac:chgData name="西川 楓真" userId="S::sdt2395gp0016@edu.sca.ac.jp::73045bb8-9ade-40ec-92ac-cafc669feaf0" providerId="AD" clId="Web-{544764D6-8BC6-6AEE-8602-F9642AA4CD05}" dt="2025-12-18T18:24:52.578" v="559" actId="1076"/>
+          <ac:spMkLst>
+            <pc:docMk/>
+            <pc:sldMk cId="2264894672" sldId="272"/>
+            <ac:spMk id="8" creationId="{CAA2FEEE-7EFE-B900-59CC-FC814EFD8B6D}"/>
+          </ac:spMkLst>
+        </pc:spChg>
+        <pc:spChg chg="add mod">
+          <ac:chgData name="西川 楓真" userId="S::sdt2395gp0016@edu.sca.ac.jp::73045bb8-9ade-40ec-92ac-cafc669feaf0" providerId="AD" clId="Web-{544764D6-8BC6-6AEE-8602-F9642AA4CD05}" dt="2025-12-18T18:25:44.234" v="577" actId="14100"/>
+          <ac:spMkLst>
+            <pc:docMk/>
+            <pc:sldMk cId="2264894672" sldId="272"/>
+            <ac:spMk id="9" creationId="{8FD61AC8-7ED0-87CC-7319-0733A6CB71F6}"/>
+          </ac:spMkLst>
+        </pc:spChg>
+        <pc:picChg chg="add ord">
+          <ac:chgData name="西川 楓真" userId="S::sdt2395gp0016@edu.sca.ac.jp::73045bb8-9ade-40ec-92ac-cafc669feaf0" providerId="AD" clId="Web-{544764D6-8BC6-6AEE-8602-F9642AA4CD05}" dt="2025-12-18T17:58:47.228" v="391"/>
+          <ac:picMkLst>
+            <pc:docMk/>
+            <pc:sldMk cId="2264894672" sldId="272"/>
+            <ac:picMk id="5" creationId="{97BBC640-A06E-E007-9B08-853C8E29298F}"/>
+          </ac:picMkLst>
+        </pc:picChg>
+      </pc:sldChg>
+      <pc:sldChg chg="addSp modSp new">
+        <pc:chgData name="西川 楓真" userId="S::sdt2395gp0016@edu.sca.ac.jp::73045bb8-9ade-40ec-92ac-cafc669feaf0" providerId="AD" clId="Web-{544764D6-8BC6-6AEE-8602-F9642AA4CD05}" dt="2025-12-18T18:26:14.187" v="580"/>
+        <pc:sldMkLst>
+          <pc:docMk/>
+          <pc:sldMk cId="1868734530" sldId="273"/>
+        </pc:sldMkLst>
+        <pc:picChg chg="add ord">
+          <ac:chgData name="西川 楓真" userId="S::sdt2395gp0016@edu.sca.ac.jp::73045bb8-9ade-40ec-92ac-cafc669feaf0" providerId="AD" clId="Web-{544764D6-8BC6-6AEE-8602-F9642AA4CD05}" dt="2025-12-18T18:26:14.187" v="580"/>
+          <ac:picMkLst>
+            <pc:docMk/>
+            <pc:sldMk cId="1868734530" sldId="273"/>
+            <ac:picMk id="5" creationId="{E037A573-C913-A590-F97A-E29A6D66B671}"/>
+          </ac:picMkLst>
+        </pc:picChg>
+      </pc:sldChg>
+    </pc:docChg>
+  </pc:docChgLst>
+</pc:chgInfo>
 </file>
 
 <file path=ppt/slideLayouts/slideLayout1.xml><?xml version="1.0" encoding="utf-8"?>
@@ -4158,12 +4505,48 @@
           <a:chExt cx="0" cy="0"/>
         </a:xfrm>
       </p:grpSpPr>
+      <p:pic>
+        <p:nvPicPr>
+          <p:cNvPr id="5" name="図 8">
+            <a:extLst>
+              <a:ext uri="{FF2B5EF4-FFF2-40B4-BE49-F238E27FC236}">
+                <a16:creationId xmlns:a16="http://schemas.microsoft.com/office/drawing/2014/main" id="{E037A573-C913-A590-F97A-E29A6D66B671}"/>
+              </a:ext>
+            </a:extLst>
+          </p:cNvPr>
+          <p:cNvPicPr>
+            <a:picLocks noChangeAspect="1"/>
+          </p:cNvPicPr>
+          <p:nvPr/>
+        </p:nvPicPr>
+        <p:blipFill>
+          <a:blip r:embed="rId2">
+            <a:extLst>
+              <a:ext uri="{28A0092B-C50C-407E-A947-70E740481C1C}">
+                <a14:useLocalDpi xmlns:a14="http://schemas.microsoft.com/office/drawing/2010/main" val="0"/>
+              </a:ext>
+            </a:extLst>
+          </a:blip>
+          <a:stretch>
+            <a:fillRect/>
+          </a:stretch>
+        </p:blipFill>
+        <p:spPr>
+          <a:xfrm>
+            <a:off x="0" y="0"/>
+            <a:ext cx="12191999" cy="6858000"/>
+          </a:xfrm>
+          <a:prstGeom prst="rect">
+            <a:avLst/>
+          </a:prstGeom>
+        </p:spPr>
+      </p:pic>
       <p:sp>
         <p:nvSpPr>
-          <p:cNvPr id="2" name="タイトル 1">
-            <a:extLst>
-              <a:ext uri="{FF2B5EF4-FFF2-40B4-BE49-F238E27FC236}">
-                <a16:creationId xmlns:a16="http://schemas.microsoft.com/office/drawing/2014/main" id="{CEA556C0-5DD8-49F1-BCFD-CB90F7462D98}"/>
+          <p:cNvPr id="2" name="Title 1">
+            <a:extLst>
+              <a:ext uri="{FF2B5EF4-FFF2-40B4-BE49-F238E27FC236}">
+                <a16:creationId xmlns:a16="http://schemas.microsoft.com/office/drawing/2014/main" id="{1BE0EFE3-B4E8-BDD5-E9E2-E8D796611510}"/>
               </a:ext>
             </a:extLst>
           </p:cNvPr>
@@ -4171,7 +4554,7 @@
             <a:spLocks noGrp="1"/>
           </p:cNvSpPr>
           <p:nvPr>
-            <p:ph type="title"/>
+            <p:ph type="ctrTitle"/>
           </p:nvPr>
         </p:nvSpPr>
         <p:spPr/>
@@ -4179,294 +4562,16 @@
           <a:bodyPr/>
           <a:lstStyle/>
           <a:p>
-            <a:r>
-              <a:rPr kumimoji="1" lang="ja-JP" altLang="en-US" dirty="0"/>
-              <a:t>セレクト</a:t>
-            </a:r>
+            <a:endParaRPr kumimoji="1" lang="en-US"/>
           </a:p>
         </p:txBody>
       </p:sp>
       <p:sp>
         <p:nvSpPr>
-          <p:cNvPr id="3" name="正方形/長方形 2">
-            <a:extLst>
-              <a:ext uri="{FF2B5EF4-FFF2-40B4-BE49-F238E27FC236}">
-                <a16:creationId xmlns:a16="http://schemas.microsoft.com/office/drawing/2014/main" id="{1FE672AB-C24E-4F83-9336-382D1738ECDA}"/>
-              </a:ext>
-            </a:extLst>
-          </p:cNvPr>
-          <p:cNvSpPr/>
-          <p:nvPr/>
-        </p:nvSpPr>
-        <p:spPr>
-          <a:xfrm>
-            <a:off x="2647950" y="2695575"/>
-            <a:ext cx="1352550" cy="1628775"/>
-          </a:xfrm>
-          <a:prstGeom prst="rect">
-            <a:avLst/>
-          </a:prstGeom>
-        </p:spPr>
-        <p:style>
-          <a:lnRef idx="2">
-            <a:schemeClr val="dk1">
-              <a:shade val="50000"/>
-            </a:schemeClr>
-          </a:lnRef>
-          <a:fillRef idx="1">
-            <a:schemeClr val="dk1"/>
-          </a:fillRef>
-          <a:effectRef idx="0">
-            <a:schemeClr val="dk1"/>
-          </a:effectRef>
-          <a:fontRef idx="minor">
-            <a:schemeClr val="lt1"/>
-          </a:fontRef>
-        </p:style>
-        <p:txBody>
-          <a:bodyPr rtlCol="0" anchor="ctr"/>
-          <a:lstStyle/>
-          <a:p>
-            <a:pPr algn="ctr"/>
-            <a:r>
-              <a:rPr kumimoji="1" lang="ja-JP" altLang="en-US" dirty="0"/>
-              <a:t>キャラ</a:t>
-            </a:r>
-          </a:p>
-        </p:txBody>
-      </p:sp>
-      <p:sp>
-        <p:nvSpPr>
-          <p:cNvPr id="9" name="正方形/長方形 8">
-            <a:extLst>
-              <a:ext uri="{FF2B5EF4-FFF2-40B4-BE49-F238E27FC236}">
-                <a16:creationId xmlns:a16="http://schemas.microsoft.com/office/drawing/2014/main" id="{B1E21641-AF92-4BC6-B2C3-D2AAF19B9DF9}"/>
-              </a:ext>
-            </a:extLst>
-          </p:cNvPr>
-          <p:cNvSpPr/>
-          <p:nvPr/>
-        </p:nvSpPr>
-        <p:spPr>
-          <a:xfrm>
-            <a:off x="5305425" y="2695575"/>
-            <a:ext cx="1352550" cy="1628775"/>
-          </a:xfrm>
-          <a:prstGeom prst="rect">
-            <a:avLst/>
-          </a:prstGeom>
-        </p:spPr>
-        <p:style>
-          <a:lnRef idx="2">
-            <a:schemeClr val="dk1">
-              <a:shade val="50000"/>
-            </a:schemeClr>
-          </a:lnRef>
-          <a:fillRef idx="1">
-            <a:schemeClr val="dk1"/>
-          </a:fillRef>
-          <a:effectRef idx="0">
-            <a:schemeClr val="dk1"/>
-          </a:effectRef>
-          <a:fontRef idx="minor">
-            <a:schemeClr val="lt1"/>
-          </a:fontRef>
-        </p:style>
-        <p:txBody>
-          <a:bodyPr rtlCol="0" anchor="ctr"/>
-          <a:lstStyle/>
-          <a:p>
-            <a:pPr algn="ctr"/>
-            <a:r>
-              <a:rPr kumimoji="1" lang="ja-JP" altLang="en-US" dirty="0"/>
-              <a:t>キャラ</a:t>
-            </a:r>
-          </a:p>
-        </p:txBody>
-      </p:sp>
-      <p:sp>
-        <p:nvSpPr>
-          <p:cNvPr id="10" name="正方形/長方形 9">
-            <a:extLst>
-              <a:ext uri="{FF2B5EF4-FFF2-40B4-BE49-F238E27FC236}">
-                <a16:creationId xmlns:a16="http://schemas.microsoft.com/office/drawing/2014/main" id="{B8101C9B-25A8-4833-AEB1-45076640F767}"/>
-              </a:ext>
-            </a:extLst>
-          </p:cNvPr>
-          <p:cNvSpPr/>
-          <p:nvPr/>
-        </p:nvSpPr>
-        <p:spPr>
-          <a:xfrm>
-            <a:off x="7962900" y="2695575"/>
-            <a:ext cx="1352550" cy="1628775"/>
-          </a:xfrm>
-          <a:prstGeom prst="rect">
-            <a:avLst/>
-          </a:prstGeom>
-        </p:spPr>
-        <p:style>
-          <a:lnRef idx="2">
-            <a:schemeClr val="dk1">
-              <a:shade val="50000"/>
-            </a:schemeClr>
-          </a:lnRef>
-          <a:fillRef idx="1">
-            <a:schemeClr val="dk1"/>
-          </a:fillRef>
-          <a:effectRef idx="0">
-            <a:schemeClr val="dk1"/>
-          </a:effectRef>
-          <a:fontRef idx="minor">
-            <a:schemeClr val="lt1"/>
-          </a:fontRef>
-        </p:style>
-        <p:txBody>
-          <a:bodyPr rtlCol="0" anchor="ctr"/>
-          <a:lstStyle/>
-          <a:p>
-            <a:pPr algn="ctr"/>
-            <a:r>
-              <a:rPr kumimoji="1" lang="ja-JP" altLang="en-US" dirty="0"/>
-              <a:t>キャラ</a:t>
-            </a:r>
-          </a:p>
-        </p:txBody>
-      </p:sp>
-      <p:sp>
-        <p:nvSpPr>
-          <p:cNvPr id="11" name="正方形/長方形 10">
-            <a:extLst>
-              <a:ext uri="{FF2B5EF4-FFF2-40B4-BE49-F238E27FC236}">
-                <a16:creationId xmlns:a16="http://schemas.microsoft.com/office/drawing/2014/main" id="{18681022-87E9-491C-AA8D-F9A88833EA3D}"/>
-              </a:ext>
-            </a:extLst>
-          </p:cNvPr>
-          <p:cNvSpPr/>
-          <p:nvPr/>
-        </p:nvSpPr>
-        <p:spPr>
-          <a:xfrm>
-            <a:off x="3952875" y="4648200"/>
-            <a:ext cx="1352550" cy="1628775"/>
-          </a:xfrm>
-          <a:prstGeom prst="rect">
-            <a:avLst/>
-          </a:prstGeom>
-        </p:spPr>
-        <p:style>
-          <a:lnRef idx="2">
-            <a:schemeClr val="dk1">
-              <a:shade val="50000"/>
-            </a:schemeClr>
-          </a:lnRef>
-          <a:fillRef idx="1">
-            <a:schemeClr val="dk1"/>
-          </a:fillRef>
-          <a:effectRef idx="0">
-            <a:schemeClr val="dk1"/>
-          </a:effectRef>
-          <a:fontRef idx="minor">
-            <a:schemeClr val="lt1"/>
-          </a:fontRef>
-        </p:style>
-        <p:txBody>
-          <a:bodyPr rtlCol="0" anchor="ctr"/>
-          <a:lstStyle/>
-          <a:p>
-            <a:pPr algn="ctr"/>
-            <a:r>
-              <a:rPr kumimoji="1" lang="ja-JP" altLang="en-US" dirty="0"/>
-              <a:t>キャラ</a:t>
-            </a:r>
-          </a:p>
-        </p:txBody>
-      </p:sp>
-      <p:sp>
-        <p:nvSpPr>
-          <p:cNvPr id="12" name="正方形/長方形 11">
-            <a:extLst>
-              <a:ext uri="{FF2B5EF4-FFF2-40B4-BE49-F238E27FC236}">
-                <a16:creationId xmlns:a16="http://schemas.microsoft.com/office/drawing/2014/main" id="{61C2B7ED-3ED5-4F2C-9B40-10ACF7FA21BF}"/>
-              </a:ext>
-            </a:extLst>
-          </p:cNvPr>
-          <p:cNvSpPr/>
-          <p:nvPr/>
-        </p:nvSpPr>
-        <p:spPr>
-          <a:xfrm>
-            <a:off x="6610350" y="4648200"/>
-            <a:ext cx="1352550" cy="1628775"/>
-          </a:xfrm>
-          <a:prstGeom prst="rect">
-            <a:avLst/>
-          </a:prstGeom>
-        </p:spPr>
-        <p:style>
-          <a:lnRef idx="2">
-            <a:schemeClr val="dk1">
-              <a:shade val="50000"/>
-            </a:schemeClr>
-          </a:lnRef>
-          <a:fillRef idx="1">
-            <a:schemeClr val="dk1"/>
-          </a:fillRef>
-          <a:effectRef idx="0">
-            <a:schemeClr val="dk1"/>
-          </a:effectRef>
-          <a:fontRef idx="minor">
-            <a:schemeClr val="lt1"/>
-          </a:fontRef>
-        </p:style>
-        <p:txBody>
-          <a:bodyPr rtlCol="0" anchor="ctr"/>
-          <a:lstStyle/>
-          <a:p>
-            <a:pPr algn="ctr"/>
-            <a:r>
-              <a:rPr kumimoji="1" lang="ja-JP" altLang="en-US" dirty="0"/>
-              <a:t>キャラ</a:t>
-            </a:r>
-          </a:p>
-        </p:txBody>
-      </p:sp>
-    </p:spTree>
-    <p:extLst>
-      <p:ext uri="{BB962C8B-B14F-4D97-AF65-F5344CB8AC3E}">
-        <p14:creationId xmlns:p14="http://schemas.microsoft.com/office/powerpoint/2010/main" val="3464825203"/>
-      </p:ext>
-    </p:extLst>
-  </p:cSld>
-  <p:clrMapOvr>
-    <a:masterClrMapping/>
-  </p:clrMapOvr>
-</p:sld>
-</file>
-
-<file path=ppt/slides/slide11.xml><?xml version="1.0" encoding="utf-8"?>
-<p:sld xmlns:a="http://schemas.openxmlformats.org/drawingml/2006/main" xmlns:r="http://schemas.openxmlformats.org/officeDocument/2006/relationships" xmlns:p="http://schemas.openxmlformats.org/presentationml/2006/main">
-  <p:cSld>
-    <p:spTree>
-      <p:nvGrpSpPr>
-        <p:cNvPr id="1" name=""/>
-        <p:cNvGrpSpPr/>
-        <p:nvPr/>
-      </p:nvGrpSpPr>
-      <p:grpSpPr>
-        <a:xfrm>
-          <a:off x="0" y="0"/>
-          <a:ext cx="0" cy="0"/>
-          <a:chOff x="0" y="0"/>
-          <a:chExt cx="0" cy="0"/>
-        </a:xfrm>
-      </p:grpSpPr>
-      <p:sp>
-        <p:nvSpPr>
-          <p:cNvPr id="2" name="タイトル 1">
-            <a:extLst>
-              <a:ext uri="{FF2B5EF4-FFF2-40B4-BE49-F238E27FC236}">
-                <a16:creationId xmlns:a16="http://schemas.microsoft.com/office/drawing/2014/main" id="{EA37FBEC-4F81-4EF0-A5ED-18F8031A9E87}"/>
+          <p:cNvPr id="3" name="Subtitle 2">
+            <a:extLst>
+              <a:ext uri="{FF2B5EF4-FFF2-40B4-BE49-F238E27FC236}">
+                <a16:creationId xmlns:a16="http://schemas.microsoft.com/office/drawing/2014/main" id="{0767F2EC-0245-9C07-A58F-F9A657961630}"/>
               </a:ext>
             </a:extLst>
           </p:cNvPr>
@@ -4474,463 +4579,7 @@
             <a:spLocks noGrp="1"/>
           </p:cNvSpPr>
           <p:nvPr>
-            <p:ph type="title"/>
-          </p:nvPr>
-        </p:nvSpPr>
-        <p:spPr>
-          <a:xfrm>
-            <a:off x="133350" y="99218"/>
-            <a:ext cx="10515600" cy="1325563"/>
-          </a:xfrm>
-        </p:spPr>
-        <p:txBody>
-          <a:bodyPr/>
-          <a:lstStyle/>
-          <a:p>
-            <a:r>
-              <a:rPr kumimoji="1" lang="ja-JP" altLang="en-US" dirty="0"/>
-              <a:t>ゲーム</a:t>
-            </a:r>
-          </a:p>
-        </p:txBody>
-      </p:sp>
-      <p:sp>
-        <p:nvSpPr>
-          <p:cNvPr id="3" name="正方形/長方形 2">
-            <a:extLst>
-              <a:ext uri="{FF2B5EF4-FFF2-40B4-BE49-F238E27FC236}">
-                <a16:creationId xmlns:a16="http://schemas.microsoft.com/office/drawing/2014/main" id="{853D63FD-E35C-4B5D-AB3D-EF0692161EC6}"/>
-              </a:ext>
-            </a:extLst>
-          </p:cNvPr>
-          <p:cNvSpPr/>
-          <p:nvPr/>
-        </p:nvSpPr>
-        <p:spPr>
-          <a:xfrm>
-            <a:off x="3057525" y="2466975"/>
-            <a:ext cx="2190750" cy="3629025"/>
-          </a:xfrm>
-          <a:prstGeom prst="rect">
-            <a:avLst/>
-          </a:prstGeom>
-        </p:spPr>
-        <p:style>
-          <a:lnRef idx="2">
-            <a:schemeClr val="dk1">
-              <a:shade val="50000"/>
-            </a:schemeClr>
-          </a:lnRef>
-          <a:fillRef idx="1">
-            <a:schemeClr val="dk1"/>
-          </a:fillRef>
-          <a:effectRef idx="0">
-            <a:schemeClr val="dk1"/>
-          </a:effectRef>
-          <a:fontRef idx="minor">
-            <a:schemeClr val="lt1"/>
-          </a:fontRef>
-        </p:style>
-        <p:txBody>
-          <a:bodyPr rtlCol="0" anchor="ctr"/>
-          <a:lstStyle/>
-          <a:p>
-            <a:pPr algn="ctr"/>
-            <a:r>
-              <a:rPr kumimoji="1" lang="ja-JP" altLang="en-US" dirty="0"/>
-              <a:t>キャラ</a:t>
-            </a:r>
-          </a:p>
-        </p:txBody>
-      </p:sp>
-      <p:sp>
-        <p:nvSpPr>
-          <p:cNvPr id="4" name="正方形/長方形 3">
-            <a:extLst>
-              <a:ext uri="{FF2B5EF4-FFF2-40B4-BE49-F238E27FC236}">
-                <a16:creationId xmlns:a16="http://schemas.microsoft.com/office/drawing/2014/main" id="{D28347EA-C43E-4578-84C7-23BF7E5D5099}"/>
-              </a:ext>
-            </a:extLst>
-          </p:cNvPr>
-          <p:cNvSpPr/>
-          <p:nvPr/>
-        </p:nvSpPr>
-        <p:spPr>
-          <a:xfrm>
-            <a:off x="7496175" y="2466975"/>
-            <a:ext cx="2190750" cy="3629025"/>
-          </a:xfrm>
-          <a:prstGeom prst="rect">
-            <a:avLst/>
-          </a:prstGeom>
-        </p:spPr>
-        <p:style>
-          <a:lnRef idx="2">
-            <a:schemeClr val="dk1">
-              <a:shade val="50000"/>
-            </a:schemeClr>
-          </a:lnRef>
-          <a:fillRef idx="1">
-            <a:schemeClr val="dk1"/>
-          </a:fillRef>
-          <a:effectRef idx="0">
-            <a:schemeClr val="dk1"/>
-          </a:effectRef>
-          <a:fontRef idx="minor">
-            <a:schemeClr val="lt1"/>
-          </a:fontRef>
-        </p:style>
-        <p:txBody>
-          <a:bodyPr rtlCol="0" anchor="ctr"/>
-          <a:lstStyle/>
-          <a:p>
-            <a:pPr algn="ctr"/>
-            <a:r>
-              <a:rPr kumimoji="1" lang="ja-JP" altLang="en-US" dirty="0"/>
-              <a:t>キャラ</a:t>
-            </a:r>
-          </a:p>
-        </p:txBody>
-      </p:sp>
-      <p:sp>
-        <p:nvSpPr>
-          <p:cNvPr id="5" name="正方形/長方形 4">
-            <a:extLst>
-              <a:ext uri="{FF2B5EF4-FFF2-40B4-BE49-F238E27FC236}">
-                <a16:creationId xmlns:a16="http://schemas.microsoft.com/office/drawing/2014/main" id="{1ABF6A07-DE58-4CC5-AC3B-7F354BDCC33C}"/>
-              </a:ext>
-            </a:extLst>
-          </p:cNvPr>
-          <p:cNvSpPr/>
-          <p:nvPr/>
-        </p:nvSpPr>
-        <p:spPr>
-          <a:xfrm>
-            <a:off x="1304925" y="1200150"/>
-            <a:ext cx="3943350" cy="533400"/>
-          </a:xfrm>
-          <a:prstGeom prst="rect">
-            <a:avLst/>
-          </a:prstGeom>
-          <a:solidFill>
-            <a:srgbClr val="FF0000"/>
-          </a:solidFill>
-        </p:spPr>
-        <p:style>
-          <a:lnRef idx="2">
-            <a:schemeClr val="accent1">
-              <a:shade val="50000"/>
-            </a:schemeClr>
-          </a:lnRef>
-          <a:fillRef idx="1">
-            <a:schemeClr val="accent1"/>
-          </a:fillRef>
-          <a:effectRef idx="0">
-            <a:schemeClr val="accent1"/>
-          </a:effectRef>
-          <a:fontRef idx="minor">
-            <a:schemeClr val="lt1"/>
-          </a:fontRef>
-        </p:style>
-        <p:txBody>
-          <a:bodyPr rtlCol="0" anchor="ctr"/>
-          <a:lstStyle/>
-          <a:p>
-            <a:pPr algn="ctr"/>
-            <a:r>
-              <a:rPr kumimoji="1" lang="en-US" altLang="ja-JP" dirty="0"/>
-              <a:t>HP</a:t>
-            </a:r>
-            <a:endParaRPr kumimoji="1" lang="ja-JP" altLang="en-US" dirty="0"/>
-          </a:p>
-        </p:txBody>
-      </p:sp>
-      <p:sp>
-        <p:nvSpPr>
-          <p:cNvPr id="6" name="正方形/長方形 5">
-            <a:extLst>
-              <a:ext uri="{FF2B5EF4-FFF2-40B4-BE49-F238E27FC236}">
-                <a16:creationId xmlns:a16="http://schemas.microsoft.com/office/drawing/2014/main" id="{AA01EA96-CBEF-4F4C-8F5E-A136E6E4F4F4}"/>
-              </a:ext>
-            </a:extLst>
-          </p:cNvPr>
-          <p:cNvSpPr/>
-          <p:nvPr/>
-        </p:nvSpPr>
-        <p:spPr>
-          <a:xfrm>
-            <a:off x="7496175" y="1200150"/>
-            <a:ext cx="3943350" cy="533400"/>
-          </a:xfrm>
-          <a:prstGeom prst="rect">
-            <a:avLst/>
-          </a:prstGeom>
-          <a:solidFill>
-            <a:srgbClr val="0070C0"/>
-          </a:solidFill>
-        </p:spPr>
-        <p:style>
-          <a:lnRef idx="2">
-            <a:schemeClr val="accent1">
-              <a:shade val="50000"/>
-            </a:schemeClr>
-          </a:lnRef>
-          <a:fillRef idx="1">
-            <a:schemeClr val="accent1"/>
-          </a:fillRef>
-          <a:effectRef idx="0">
-            <a:schemeClr val="accent1"/>
-          </a:effectRef>
-          <a:fontRef idx="minor">
-            <a:schemeClr val="lt1"/>
-          </a:fontRef>
-        </p:style>
-        <p:txBody>
-          <a:bodyPr rtlCol="0" anchor="ctr"/>
-          <a:lstStyle/>
-          <a:p>
-            <a:pPr algn="ctr"/>
-            <a:r>
-              <a:rPr kumimoji="1" lang="en-US" altLang="ja-JP" dirty="0"/>
-              <a:t>HP</a:t>
-            </a:r>
-            <a:endParaRPr kumimoji="1" lang="ja-JP" altLang="en-US" dirty="0"/>
-          </a:p>
-        </p:txBody>
-      </p:sp>
-      <p:sp>
-        <p:nvSpPr>
-          <p:cNvPr id="7" name="正方形/長方形 6">
-            <a:extLst>
-              <a:ext uri="{FF2B5EF4-FFF2-40B4-BE49-F238E27FC236}">
-                <a16:creationId xmlns:a16="http://schemas.microsoft.com/office/drawing/2014/main" id="{E2406FAC-CD78-4DF3-94A2-1814B260B7AF}"/>
-              </a:ext>
-            </a:extLst>
-          </p:cNvPr>
-          <p:cNvSpPr/>
-          <p:nvPr/>
-        </p:nvSpPr>
-        <p:spPr>
-          <a:xfrm>
-            <a:off x="350192" y="2552700"/>
-            <a:ext cx="952500" cy="3086100"/>
-          </a:xfrm>
-          <a:prstGeom prst="rect">
-            <a:avLst/>
-          </a:prstGeom>
-          <a:solidFill>
-            <a:schemeClr val="bg1"/>
-          </a:solidFill>
-          <a:ln>
-            <a:solidFill>
-              <a:schemeClr val="tx1"/>
-            </a:solidFill>
-          </a:ln>
-        </p:spPr>
-        <p:style>
-          <a:lnRef idx="2">
-            <a:schemeClr val="accent1">
-              <a:shade val="50000"/>
-            </a:schemeClr>
-          </a:lnRef>
-          <a:fillRef idx="1">
-            <a:schemeClr val="accent1"/>
-          </a:fillRef>
-          <a:effectRef idx="0">
-            <a:schemeClr val="accent1"/>
-          </a:effectRef>
-          <a:fontRef idx="minor">
-            <a:schemeClr val="lt1"/>
-          </a:fontRef>
-        </p:style>
-        <p:txBody>
-          <a:bodyPr rtlCol="0" anchor="ctr"/>
-          <a:lstStyle/>
-          <a:p>
-            <a:pPr algn="ctr"/>
-            <a:endParaRPr kumimoji="1" lang="ja-JP" altLang="en-US"/>
-          </a:p>
-        </p:txBody>
-      </p:sp>
-      <p:sp>
-        <p:nvSpPr>
-          <p:cNvPr id="8" name="テキスト ボックス 7">
-            <a:extLst>
-              <a:ext uri="{FF2B5EF4-FFF2-40B4-BE49-F238E27FC236}">
-                <a16:creationId xmlns:a16="http://schemas.microsoft.com/office/drawing/2014/main" id="{A2821839-6557-456C-8CF1-D4D4053DF904}"/>
-              </a:ext>
-            </a:extLst>
-          </p:cNvPr>
-          <p:cNvSpPr txBox="1"/>
-          <p:nvPr/>
-        </p:nvSpPr>
-        <p:spPr>
-          <a:xfrm>
-            <a:off x="595609" y="3333750"/>
-            <a:ext cx="461665" cy="1333500"/>
-          </a:xfrm>
-          <a:prstGeom prst="rect">
-            <a:avLst/>
-          </a:prstGeom>
-          <a:noFill/>
-        </p:spPr>
-        <p:txBody>
-          <a:bodyPr vert="eaVert" wrap="square" rtlCol="0">
-            <a:spAutoFit/>
-          </a:bodyPr>
-          <a:lstStyle/>
-          <a:p>
-            <a:r>
-              <a:rPr kumimoji="1" lang="ja-JP" altLang="en-US" dirty="0"/>
-              <a:t>コマンド</a:t>
-            </a:r>
-          </a:p>
-        </p:txBody>
-      </p:sp>
-      <p:sp>
-        <p:nvSpPr>
-          <p:cNvPr id="10" name="正方形/長方形 9">
-            <a:extLst>
-              <a:ext uri="{FF2B5EF4-FFF2-40B4-BE49-F238E27FC236}">
-                <a16:creationId xmlns:a16="http://schemas.microsoft.com/office/drawing/2014/main" id="{A1F64DE1-E8C7-4647-BE6C-2AC178C7824B}"/>
-              </a:ext>
-            </a:extLst>
-          </p:cNvPr>
-          <p:cNvSpPr/>
-          <p:nvPr/>
-        </p:nvSpPr>
-        <p:spPr>
-          <a:xfrm>
-            <a:off x="10808642" y="2552700"/>
-            <a:ext cx="952500" cy="3086100"/>
-          </a:xfrm>
-          <a:prstGeom prst="rect">
-            <a:avLst/>
-          </a:prstGeom>
-          <a:solidFill>
-            <a:schemeClr val="bg1"/>
-          </a:solidFill>
-          <a:ln>
-            <a:solidFill>
-              <a:schemeClr val="tx1"/>
-            </a:solidFill>
-          </a:ln>
-        </p:spPr>
-        <p:style>
-          <a:lnRef idx="2">
-            <a:schemeClr val="accent1">
-              <a:shade val="50000"/>
-            </a:schemeClr>
-          </a:lnRef>
-          <a:fillRef idx="1">
-            <a:schemeClr val="accent1"/>
-          </a:fillRef>
-          <a:effectRef idx="0">
-            <a:schemeClr val="accent1"/>
-          </a:effectRef>
-          <a:fontRef idx="minor">
-            <a:schemeClr val="lt1"/>
-          </a:fontRef>
-        </p:style>
-        <p:txBody>
-          <a:bodyPr rtlCol="0" anchor="ctr"/>
-          <a:lstStyle/>
-          <a:p>
-            <a:pPr algn="ctr"/>
-            <a:r>
-              <a:rPr kumimoji="1" lang="ja-JP" altLang="en-US" dirty="0"/>
-              <a:t>コマンド</a:t>
-            </a:r>
-          </a:p>
-          <a:p>
-            <a:pPr algn="ctr"/>
-            <a:endParaRPr kumimoji="1" lang="ja-JP" altLang="en-US" dirty="0">
-              <a:solidFill>
-                <a:schemeClr val="tx1"/>
-              </a:solidFill>
-            </a:endParaRPr>
-          </a:p>
-        </p:txBody>
-      </p:sp>
-      <p:sp>
-        <p:nvSpPr>
-          <p:cNvPr id="11" name="テキスト ボックス 10">
-            <a:extLst>
-              <a:ext uri="{FF2B5EF4-FFF2-40B4-BE49-F238E27FC236}">
-                <a16:creationId xmlns:a16="http://schemas.microsoft.com/office/drawing/2014/main" id="{567D1BD1-6E30-4B1E-A95B-FE13F697B2FE}"/>
-              </a:ext>
-            </a:extLst>
-          </p:cNvPr>
-          <p:cNvSpPr txBox="1"/>
-          <p:nvPr/>
-        </p:nvSpPr>
-        <p:spPr>
-          <a:xfrm>
-            <a:off x="11054059" y="3333750"/>
-            <a:ext cx="461665" cy="1247775"/>
-          </a:xfrm>
-          <a:prstGeom prst="rect">
-            <a:avLst/>
-          </a:prstGeom>
-          <a:noFill/>
-        </p:spPr>
-        <p:txBody>
-          <a:bodyPr vert="eaVert" wrap="square" rtlCol="0">
-            <a:spAutoFit/>
-          </a:bodyPr>
-          <a:lstStyle/>
-          <a:p>
-            <a:r>
-              <a:rPr kumimoji="1" lang="ja-JP" altLang="en-US" dirty="0"/>
-              <a:t>コマンド</a:t>
-            </a:r>
-          </a:p>
-        </p:txBody>
-      </p:sp>
-    </p:spTree>
-    <p:extLst>
-      <p:ext uri="{BB962C8B-B14F-4D97-AF65-F5344CB8AC3E}">
-        <p14:creationId xmlns:p14="http://schemas.microsoft.com/office/powerpoint/2010/main" val="3460234443"/>
-      </p:ext>
-    </p:extLst>
-  </p:cSld>
-  <p:clrMapOvr>
-    <a:masterClrMapping/>
-  </p:clrMapOvr>
-</p:sld>
-</file>
-
-<file path=ppt/slides/slide12.xml><?xml version="1.0" encoding="utf-8"?>
-<p:sld xmlns:a="http://schemas.openxmlformats.org/drawingml/2006/main" xmlns:r="http://schemas.openxmlformats.org/officeDocument/2006/relationships" xmlns:p="http://schemas.openxmlformats.org/presentationml/2006/main">
-  <p:cSld>
-    <p:spTree>
-      <p:nvGrpSpPr>
-        <p:cNvPr id="1" name=""/>
-        <p:cNvGrpSpPr/>
-        <p:nvPr/>
-      </p:nvGrpSpPr>
-      <p:grpSpPr>
-        <a:xfrm>
-          <a:off x="0" y="0"/>
-          <a:ext cx="0" cy="0"/>
-          <a:chOff x="0" y="0"/>
-          <a:chExt cx="0" cy="0"/>
-        </a:xfrm>
-      </p:grpSpPr>
-      <p:sp>
-        <p:nvSpPr>
-          <p:cNvPr id="2" name="タイトル 1">
-            <a:extLst>
-              <a:ext uri="{FF2B5EF4-FFF2-40B4-BE49-F238E27FC236}">
-                <a16:creationId xmlns:a16="http://schemas.microsoft.com/office/drawing/2014/main" id="{56642868-DB41-4B4D-BD90-A198EA1FB09A}"/>
-              </a:ext>
-            </a:extLst>
-          </p:cNvPr>
-          <p:cNvSpPr>
-            <a:spLocks noGrp="1"/>
-          </p:cNvSpPr>
-          <p:nvPr>
-            <p:ph type="title"/>
+            <p:ph type="subTitle" idx="1"/>
           </p:nvPr>
         </p:nvSpPr>
         <p:spPr/>
@@ -4938,168 +4587,14 @@
           <a:bodyPr/>
           <a:lstStyle/>
           <a:p>
-            <a:r>
-              <a:rPr kumimoji="1" lang="ja-JP" altLang="en-US" dirty="0"/>
-              <a:t>リトライ</a:t>
-            </a:r>
-          </a:p>
-        </p:txBody>
-      </p:sp>
-      <p:sp>
-        <p:nvSpPr>
-          <p:cNvPr id="3" name="正方形/長方形 2">
-            <a:extLst>
-              <a:ext uri="{FF2B5EF4-FFF2-40B4-BE49-F238E27FC236}">
-                <a16:creationId xmlns:a16="http://schemas.microsoft.com/office/drawing/2014/main" id="{F5F2AF6D-07C9-4467-8E0F-2AFA31BC2151}"/>
-              </a:ext>
-            </a:extLst>
-          </p:cNvPr>
-          <p:cNvSpPr/>
-          <p:nvPr/>
-        </p:nvSpPr>
-        <p:spPr>
-          <a:xfrm>
-            <a:off x="4567234" y="5214937"/>
-            <a:ext cx="3057525" cy="762000"/>
-          </a:xfrm>
-          <a:prstGeom prst="rect">
-            <a:avLst/>
-          </a:prstGeom>
-        </p:spPr>
-        <p:style>
-          <a:lnRef idx="2">
-            <a:schemeClr val="dk1">
-              <a:shade val="50000"/>
-            </a:schemeClr>
-          </a:lnRef>
-          <a:fillRef idx="1">
-            <a:schemeClr val="dk1"/>
-          </a:fillRef>
-          <a:effectRef idx="0">
-            <a:schemeClr val="dk1"/>
-          </a:effectRef>
-          <a:fontRef idx="minor">
-            <a:schemeClr val="lt1"/>
-          </a:fontRef>
-        </p:style>
-        <p:txBody>
-          <a:bodyPr rtlCol="0" anchor="ctr"/>
-          <a:lstStyle/>
-          <a:p>
-            <a:pPr algn="ctr"/>
-            <a:r>
-              <a:rPr kumimoji="1" lang="ja-JP" altLang="en-US" dirty="0"/>
-              <a:t>タイトルへ</a:t>
-            </a:r>
-          </a:p>
-        </p:txBody>
-      </p:sp>
-      <p:sp>
-        <p:nvSpPr>
-          <p:cNvPr id="4" name="正方形/長方形 3">
-            <a:extLst>
-              <a:ext uri="{FF2B5EF4-FFF2-40B4-BE49-F238E27FC236}">
-                <a16:creationId xmlns:a16="http://schemas.microsoft.com/office/drawing/2014/main" id="{41FEF113-E625-4C2C-9741-3F8F1803F934}"/>
-              </a:ext>
-            </a:extLst>
-          </p:cNvPr>
-          <p:cNvSpPr/>
-          <p:nvPr/>
-        </p:nvSpPr>
-        <p:spPr>
-          <a:xfrm>
-            <a:off x="4567234" y="3745706"/>
-            <a:ext cx="3057525" cy="762000"/>
-          </a:xfrm>
-          <a:prstGeom prst="rect">
-            <a:avLst/>
-          </a:prstGeom>
-        </p:spPr>
-        <p:style>
-          <a:lnRef idx="2">
-            <a:schemeClr val="dk1">
-              <a:shade val="50000"/>
-            </a:schemeClr>
-          </a:lnRef>
-          <a:fillRef idx="1">
-            <a:schemeClr val="dk1"/>
-          </a:fillRef>
-          <a:effectRef idx="0">
-            <a:schemeClr val="dk1"/>
-          </a:effectRef>
-          <a:fontRef idx="minor">
-            <a:schemeClr val="lt1"/>
-          </a:fontRef>
-        </p:style>
-        <p:txBody>
-          <a:bodyPr rtlCol="0" anchor="ctr"/>
-          <a:lstStyle/>
-          <a:p>
-            <a:pPr algn="ctr"/>
-            <a:r>
-              <a:rPr lang="ja-JP" altLang="en-US" dirty="0"/>
-              <a:t>セレクト</a:t>
-            </a:r>
-            <a:r>
-              <a:rPr kumimoji="1" lang="ja-JP" altLang="en-US" dirty="0"/>
-              <a:t>へ</a:t>
-            </a:r>
-          </a:p>
-        </p:txBody>
-      </p:sp>
-      <p:sp>
-        <p:nvSpPr>
-          <p:cNvPr id="5" name="正方形/長方形 4">
-            <a:extLst>
-              <a:ext uri="{FF2B5EF4-FFF2-40B4-BE49-F238E27FC236}">
-                <a16:creationId xmlns:a16="http://schemas.microsoft.com/office/drawing/2014/main" id="{917875AE-1639-4E08-8B8D-36D118830F09}"/>
-              </a:ext>
-            </a:extLst>
-          </p:cNvPr>
-          <p:cNvSpPr/>
-          <p:nvPr/>
-        </p:nvSpPr>
-        <p:spPr>
-          <a:xfrm>
-            <a:off x="4567234" y="2276475"/>
-            <a:ext cx="3057525" cy="762000"/>
-          </a:xfrm>
-          <a:prstGeom prst="rect">
-            <a:avLst/>
-          </a:prstGeom>
-        </p:spPr>
-        <p:style>
-          <a:lnRef idx="2">
-            <a:schemeClr val="dk1">
-              <a:shade val="50000"/>
-            </a:schemeClr>
-          </a:lnRef>
-          <a:fillRef idx="1">
-            <a:schemeClr val="dk1"/>
-          </a:fillRef>
-          <a:effectRef idx="0">
-            <a:schemeClr val="dk1"/>
-          </a:effectRef>
-          <a:fontRef idx="minor">
-            <a:schemeClr val="lt1"/>
-          </a:fontRef>
-        </p:style>
-        <p:txBody>
-          <a:bodyPr rtlCol="0" anchor="ctr"/>
-          <a:lstStyle/>
-          <a:p>
-            <a:pPr algn="ctr"/>
-            <a:r>
-              <a:rPr kumimoji="1" lang="ja-JP" altLang="en-US" dirty="0"/>
-              <a:t>再挑戦</a:t>
-            </a:r>
+            <a:endParaRPr kumimoji="1" lang="en-US"/>
           </a:p>
         </p:txBody>
       </p:sp>
     </p:spTree>
     <p:extLst>
       <p:ext uri="{BB962C8B-B14F-4D97-AF65-F5344CB8AC3E}">
-        <p14:creationId xmlns:p14="http://schemas.microsoft.com/office/powerpoint/2010/main" val="2166365457"/>
+        <p14:creationId xmlns:p14="http://schemas.microsoft.com/office/powerpoint/2010/main" val="1868734530"/>
       </p:ext>
     </p:extLst>
   </p:cSld>
@@ -9831,7 +9326,13 @@
   <p:cSld>
     <p:spTree>
       <p:nvGrpSpPr>
-        <p:cNvPr id="1" name=""/>
+        <p:cNvPr id="1" name="">
+          <a:extLst>
+            <a:ext uri="{FF2B5EF4-FFF2-40B4-BE49-F238E27FC236}">
+              <a16:creationId xmlns:a16="http://schemas.microsoft.com/office/drawing/2014/main" id="{700A3DBA-DA8E-136B-0008-8556C7D6FDE0}"/>
+            </a:ext>
+          </a:extLst>
+        </p:cNvPr>
         <p:cNvGrpSpPr/>
         <p:nvPr/>
       </p:nvGrpSpPr>
@@ -9848,7 +9349,7 @@
           <p:cNvPr id="9" name="図 8">
             <a:extLst>
               <a:ext uri="{FF2B5EF4-FFF2-40B4-BE49-F238E27FC236}">
-                <a16:creationId xmlns:a16="http://schemas.microsoft.com/office/drawing/2014/main" id="{A93330EE-6B8B-4FFC-8E4B-B735DA4812A0}"/>
+                <a16:creationId xmlns:a16="http://schemas.microsoft.com/office/drawing/2014/main" id="{1C117327-97DC-1058-7503-72025617BD17}"/>
               </a:ext>
             </a:extLst>
           </p:cNvPr>
@@ -9884,7 +9385,7 @@
           <p:cNvPr id="2" name="タイトル 1">
             <a:extLst>
               <a:ext uri="{FF2B5EF4-FFF2-40B4-BE49-F238E27FC236}">
-                <a16:creationId xmlns:a16="http://schemas.microsoft.com/office/drawing/2014/main" id="{0C9ACDA0-1289-4EE9-9EA7-B48C2498ED18}"/>
+                <a16:creationId xmlns:a16="http://schemas.microsoft.com/office/drawing/2014/main" id="{F948EF0F-BA2E-3D9C-EFE5-F404BE762142}"/>
               </a:ext>
             </a:extLst>
           </p:cNvPr>
@@ -9897,8 +9398,8 @@
         </p:nvSpPr>
         <p:spPr>
           <a:xfrm>
-            <a:off x="326966" y="634683"/>
-            <a:ext cx="11538066" cy="822815"/>
+            <a:off x="326966" y="3423890"/>
+            <a:ext cx="5830256" cy="822815"/>
           </a:xfrm>
         </p:spPr>
         <p:txBody>
@@ -9909,33 +9410,37 @@
           <a:p>
             <a:pPr algn="l"/>
             <a:r>
-              <a:rPr kumimoji="1" lang="en-US" altLang="ja-JP" sz="4000" dirty="0">
-                <a:solidFill>
-                  <a:schemeClr val="bg1"/>
-                </a:solidFill>
+              <a:rPr lang="en-US" altLang="ja-JP" sz="3200" dirty="0">
+                <a:solidFill>
+                  <a:schemeClr val="bg1"/>
+                </a:solidFill>
+                <a:ea typeface="游ゴシック Light"/>
               </a:rPr>
               <a:t>【</a:t>
             </a:r>
             <a:r>
-              <a:rPr kumimoji="1" lang="ja-JP" altLang="en-US" sz="4000" dirty="0">
-                <a:solidFill>
-                  <a:schemeClr val="bg1"/>
-                </a:solidFill>
-              </a:rPr>
-              <a:t>コード進化：</a:t>
-            </a:r>
-            <a:r>
-              <a:rPr kumimoji="1" lang="en-US" altLang="ja-JP" sz="4000" dirty="0">
-                <a:solidFill>
-                  <a:schemeClr val="bg1"/>
-                </a:solidFill>
-              </a:rPr>
-              <a:t>Player.cpp → Character.cpp】</a:t>
-            </a:r>
-            <a:endParaRPr kumimoji="1" lang="ja-JP" altLang="en-US" sz="4000" dirty="0">
-              <a:solidFill>
-                <a:schemeClr val="bg1"/>
-              </a:solidFill>
+              <a:rPr lang="en-US" altLang="ja-JP" sz="3200" err="1">
+                <a:solidFill>
+                  <a:schemeClr val="bg1"/>
+                </a:solidFill>
+                <a:ea typeface="游ゴシック Light"/>
+              </a:rPr>
+              <a:t>苦労した点</a:t>
+            </a:r>
+            <a:r>
+              <a:rPr lang="en-US" altLang="ja-JP" sz="3200" dirty="0">
+                <a:solidFill>
+                  <a:schemeClr val="bg1"/>
+                </a:solidFill>
+                <a:ea typeface="游ゴシック Light"/>
+              </a:rPr>
+              <a:t>】</a:t>
+            </a:r>
+            <a:endParaRPr lang="ja-JP" altLang="en-US" sz="3200" dirty="0">
+              <a:solidFill>
+                <a:schemeClr val="bg1"/>
+              </a:solidFill>
+              <a:ea typeface="游ゴシック Light"/>
             </a:endParaRPr>
           </a:p>
         </p:txBody>
@@ -9945,7 +9450,7 @@
           <p:cNvPr id="3" name="字幕 2">
             <a:extLst>
               <a:ext uri="{FF2B5EF4-FFF2-40B4-BE49-F238E27FC236}">
-                <a16:creationId xmlns:a16="http://schemas.microsoft.com/office/drawing/2014/main" id="{81DC0F0A-1527-4642-A1A0-5BD00B17C73E}"/>
+                <a16:creationId xmlns:a16="http://schemas.microsoft.com/office/drawing/2014/main" id="{3A8A0949-2BFA-36B6-88A4-6BD275C3417F}"/>
               </a:ext>
             </a:extLst>
           </p:cNvPr>
@@ -9958,98 +9463,728 @@
         </p:nvSpPr>
         <p:spPr>
           <a:xfrm>
-            <a:off x="326965" y="1457497"/>
-            <a:ext cx="11538065" cy="4765819"/>
+            <a:off x="686399" y="1457497"/>
+            <a:ext cx="10934215" cy="4765819"/>
           </a:xfrm>
         </p:spPr>
         <p:txBody>
-          <a:bodyPr/>
+          <a:bodyPr vert="horz" lIns="91440" tIns="45720" rIns="91440" bIns="45720" rtlCol="0" anchor="t">
+            <a:normAutofit/>
+          </a:bodyPr>
           <a:lstStyle/>
           <a:p>
             <a:pPr algn="l"/>
-            <a:r>
-              <a:rPr kumimoji="1" lang="ja-JP" altLang="en-US" dirty="0">
-                <a:solidFill>
-                  <a:schemeClr val="bg1"/>
-                </a:solidFill>
-              </a:rPr>
-              <a:t>＜</a:t>
-            </a:r>
-            <a:r>
-              <a:rPr kumimoji="1" lang="en-US" altLang="ja-JP" dirty="0">
-                <a:solidFill>
-                  <a:schemeClr val="bg1"/>
-                </a:solidFill>
-              </a:rPr>
-              <a:t>Before</a:t>
-            </a:r>
-            <a:r>
-              <a:rPr kumimoji="1" lang="ja-JP" altLang="en-US" dirty="0">
-                <a:solidFill>
-                  <a:schemeClr val="bg1"/>
-                </a:solidFill>
-              </a:rPr>
-              <a:t>：</a:t>
-            </a:r>
-            <a:r>
-              <a:rPr kumimoji="1" lang="en-US" altLang="ja-JP" dirty="0">
-                <a:solidFill>
-                  <a:schemeClr val="bg1"/>
-                </a:solidFill>
-              </a:rPr>
-              <a:t>Player.cpp</a:t>
-            </a:r>
-            <a:r>
-              <a:rPr kumimoji="1" lang="ja-JP" altLang="en-US" dirty="0">
-                <a:solidFill>
-                  <a:schemeClr val="bg1"/>
-                </a:solidFill>
-              </a:rPr>
-              <a:t>＞</a:t>
-            </a:r>
+            <a:endParaRPr lang="ja-JP" dirty="0">
+              <a:solidFill>
+                <a:schemeClr val="bg1"/>
+              </a:solidFill>
+              <a:ea typeface="+mn-lt"/>
+              <a:cs typeface="+mn-lt"/>
+            </a:endParaRPr>
+          </a:p>
+          <a:p>
+            <a:pPr algn="l"/>
+            <a:endParaRPr lang="ja-JP" dirty="0">
+              <a:solidFill>
+                <a:schemeClr val="bg1"/>
+              </a:solidFill>
+              <a:ea typeface="游ゴシック"/>
+            </a:endParaRPr>
+          </a:p>
+          <a:p>
+            <a:pPr algn="l"/>
+            <a:endParaRPr lang="ja-JP" altLang="en-US" dirty="0">
+              <a:solidFill>
+                <a:schemeClr val="bg1"/>
+              </a:solidFill>
+              <a:ea typeface="游ゴシック"/>
+            </a:endParaRPr>
           </a:p>
         </p:txBody>
       </p:sp>
-      <p:pic>
-        <p:nvPicPr>
-          <p:cNvPr id="11" name="図 10">
-            <a:extLst>
-              <a:ext uri="{FF2B5EF4-FFF2-40B4-BE49-F238E27FC236}">
-                <a16:creationId xmlns:a16="http://schemas.microsoft.com/office/drawing/2014/main" id="{E04B0BCC-12B7-4E53-A05B-B703B1B789F0}"/>
-              </a:ext>
-            </a:extLst>
-          </p:cNvPr>
-          <p:cNvPicPr>
-            <a:picLocks noChangeAspect="1"/>
-          </p:cNvPicPr>
+      <p:sp>
+        <p:nvSpPr>
+          <p:cNvPr id="5" name="タイトル 1">
+            <a:extLst>
+              <a:ext uri="{FF2B5EF4-FFF2-40B4-BE49-F238E27FC236}">
+                <a16:creationId xmlns:a16="http://schemas.microsoft.com/office/drawing/2014/main" id="{C81615F2-4AF8-7291-742E-66BBC61C795C}"/>
+              </a:ext>
+            </a:extLst>
+          </p:cNvPr>
+          <p:cNvSpPr txBox="1">
+            <a:spLocks/>
+          </p:cNvSpPr>
           <p:nvPr/>
-        </p:nvPicPr>
-        <p:blipFill>
-          <a:blip r:embed="rId3">
-            <a:extLst>
-              <a:ext uri="{28A0092B-C50C-407E-A947-70E740481C1C}">
-                <a14:useLocalDpi xmlns:a14="http://schemas.microsoft.com/office/drawing/2010/main" val="0"/>
-              </a:ext>
-            </a:extLst>
-          </a:blip>
-          <a:stretch>
-            <a:fillRect/>
-          </a:stretch>
-        </p:blipFill>
+        </p:nvSpPr>
         <p:spPr>
           <a:xfrm>
-            <a:off x="628994" y="1823839"/>
-            <a:ext cx="4452853" cy="1494224"/>
+            <a:off x="6100913" y="3418139"/>
+            <a:ext cx="5830256" cy="822815"/>
           </a:xfrm>
           <a:prstGeom prst="rect">
             <a:avLst/>
           </a:prstGeom>
         </p:spPr>
-      </p:pic>
+        <p:txBody>
+          <a:bodyPr vert="horz" lIns="91440" tIns="45720" rIns="91440" bIns="45720" rtlCol="0" anchor="b">
+            <a:normAutofit/>
+          </a:bodyPr>
+          <a:lstStyle>
+            <a:lvl1pPr algn="ctr" defTabSz="914400" rtl="0" eaLnBrk="1" latinLnBrk="0" hangingPunct="1">
+              <a:lnSpc>
+                <a:spcPct val="90000"/>
+              </a:lnSpc>
+              <a:spcBef>
+                <a:spcPct val="0"/>
+              </a:spcBef>
+              <a:buNone/>
+              <a:defRPr kumimoji="1" sz="6000" kern="1200">
+                <a:solidFill>
+                  <a:schemeClr val="tx1"/>
+                </a:solidFill>
+                <a:latin typeface="+mj-lt"/>
+                <a:ea typeface="+mj-ea"/>
+                <a:cs typeface="+mj-cs"/>
+              </a:defRPr>
+            </a:lvl1pPr>
+          </a:lstStyle>
+          <a:p>
+            <a:pPr algn="l"/>
+            <a:r>
+              <a:rPr lang="en-US" altLang="ja-JP" sz="3200" dirty="0">
+                <a:solidFill>
+                  <a:schemeClr val="bg1"/>
+                </a:solidFill>
+                <a:ea typeface="游ゴシック Light"/>
+              </a:rPr>
+              <a:t>【</a:t>
+            </a:r>
+            <a:r>
+              <a:rPr lang="en-US" altLang="ja-JP" sz="3200" err="1">
+                <a:solidFill>
+                  <a:schemeClr val="bg1"/>
+                </a:solidFill>
+                <a:ea typeface="游ゴシック Light"/>
+              </a:rPr>
+              <a:t>改善した点</a:t>
+            </a:r>
+            <a:r>
+              <a:rPr lang="en-US" altLang="ja-JP" sz="3200" dirty="0">
+                <a:solidFill>
+                  <a:schemeClr val="bg1"/>
+                </a:solidFill>
+                <a:ea typeface="游ゴシック Light"/>
+              </a:rPr>
+              <a:t>】</a:t>
+            </a:r>
+            <a:endParaRPr lang="ja-JP" altLang="en-US" sz="3200" dirty="0">
+              <a:solidFill>
+                <a:schemeClr val="bg1"/>
+              </a:solidFill>
+              <a:ea typeface="游ゴシック Light"/>
+            </a:endParaRPr>
+          </a:p>
+        </p:txBody>
+      </p:sp>
+      <p:sp>
+        <p:nvSpPr>
+          <p:cNvPr id="13" name="タイトル 1">
+            <a:extLst>
+              <a:ext uri="{FF2B5EF4-FFF2-40B4-BE49-F238E27FC236}">
+                <a16:creationId xmlns:a16="http://schemas.microsoft.com/office/drawing/2014/main" id="{B3CD38FD-099C-08F0-F076-5A4E6FC871C4}"/>
+              </a:ext>
+            </a:extLst>
+          </p:cNvPr>
+          <p:cNvSpPr txBox="1">
+            <a:spLocks/>
+          </p:cNvSpPr>
+          <p:nvPr/>
+        </p:nvSpPr>
+        <p:spPr>
+          <a:xfrm>
+            <a:off x="321215" y="4237648"/>
+            <a:ext cx="4967616" cy="2274928"/>
+          </a:xfrm>
+          <a:prstGeom prst="rect">
+            <a:avLst/>
+          </a:prstGeom>
+        </p:spPr>
+        <p:txBody>
+          <a:bodyPr vert="horz" lIns="91440" tIns="45720" rIns="91440" bIns="45720" rtlCol="0" anchor="t">
+            <a:normAutofit/>
+          </a:bodyPr>
+          <a:lstStyle>
+            <a:lvl1pPr algn="ctr" defTabSz="914400" rtl="0" eaLnBrk="1" latinLnBrk="0" hangingPunct="1">
+              <a:lnSpc>
+                <a:spcPct val="90000"/>
+              </a:lnSpc>
+              <a:spcBef>
+                <a:spcPct val="0"/>
+              </a:spcBef>
+              <a:buNone/>
+              <a:defRPr kumimoji="1" sz="6000" kern="1200">
+                <a:solidFill>
+                  <a:schemeClr val="tx1"/>
+                </a:solidFill>
+                <a:latin typeface="+mj-lt"/>
+                <a:ea typeface="+mj-ea"/>
+                <a:cs typeface="+mj-cs"/>
+              </a:defRPr>
+            </a:lvl1pPr>
+          </a:lstStyle>
+          <a:p>
+            <a:pPr marL="285750" indent="-285750" algn="l">
+              <a:buFont typeface="Arial"/>
+              <a:buChar char="•"/>
+            </a:pPr>
+            <a:endParaRPr lang="en-US" sz="1800" dirty="0">
+              <a:solidFill>
+                <a:schemeClr val="bg1"/>
+              </a:solidFill>
+              <a:ea typeface="+mj-lt"/>
+              <a:cs typeface="+mj-lt"/>
+            </a:endParaRPr>
+          </a:p>
+          <a:p>
+            <a:pPr marL="285750" indent="-285750" algn="l">
+              <a:buFont typeface="Arial"/>
+              <a:buChar char="•"/>
+            </a:pPr>
+            <a:r>
+              <a:rPr lang="en-US" sz="1800" dirty="0" err="1">
+                <a:solidFill>
+                  <a:schemeClr val="bg1"/>
+                </a:solidFill>
+                <a:ea typeface="+mj-lt"/>
+                <a:cs typeface="+mj-lt"/>
+              </a:rPr>
+              <a:t>当たり判定を</a:t>
+            </a:r>
+            <a:r>
+              <a:rPr lang="en-US" sz="1800" b="1" dirty="0" err="1">
+                <a:solidFill>
+                  <a:schemeClr val="bg1"/>
+                </a:solidFill>
+                <a:ea typeface="+mj-lt"/>
+                <a:cs typeface="+mj-lt"/>
+              </a:rPr>
+              <a:t>手動で位置指定</a:t>
+            </a:r>
+            <a:r>
+              <a:rPr lang="en-US" sz="1800" dirty="0" err="1">
+                <a:solidFill>
+                  <a:schemeClr val="bg1"/>
+                </a:solidFill>
+                <a:ea typeface="+mj-lt"/>
+                <a:cs typeface="+mj-lt"/>
+              </a:rPr>
+              <a:t>していたため、フレームごとの処理が多く</a:t>
+            </a:r>
+            <a:r>
+              <a:rPr lang="en-US" sz="1800" b="1" dirty="0" err="1">
+                <a:solidFill>
+                  <a:schemeClr val="bg1"/>
+                </a:solidFill>
+                <a:ea typeface="+mj-lt"/>
+                <a:cs typeface="+mj-lt"/>
+              </a:rPr>
+              <a:t>動作が重くなっていた</a:t>
+            </a:r>
+            <a:r>
+              <a:rPr lang="en-US" sz="1800" dirty="0">
+                <a:solidFill>
+                  <a:schemeClr val="bg1"/>
+                </a:solidFill>
+                <a:ea typeface="+mj-lt"/>
+                <a:cs typeface="+mj-lt"/>
+              </a:rPr>
+              <a:t>。</a:t>
+            </a:r>
+            <a:endParaRPr lang="en-US" altLang="ja-JP" sz="1800" dirty="0">
+              <a:solidFill>
+                <a:schemeClr val="bg1"/>
+              </a:solidFill>
+              <a:ea typeface="+mj-lt"/>
+              <a:cs typeface="+mj-lt"/>
+            </a:endParaRPr>
+          </a:p>
+          <a:p>
+            <a:pPr marL="285750" indent="-285750" algn="l">
+              <a:buFont typeface="Arial"/>
+              <a:buChar char="•"/>
+            </a:pPr>
+            <a:endParaRPr lang="en-US" sz="1800" dirty="0">
+              <a:solidFill>
+                <a:schemeClr val="bg1"/>
+              </a:solidFill>
+              <a:ea typeface="+mj-lt"/>
+              <a:cs typeface="+mj-lt"/>
+            </a:endParaRPr>
+          </a:p>
+          <a:p>
+            <a:pPr marL="285750" indent="-285750" algn="l">
+              <a:buFont typeface="Arial"/>
+              <a:buChar char="•"/>
+            </a:pPr>
+            <a:r>
+              <a:rPr lang="en-US" sz="1800" dirty="0" err="1">
+                <a:solidFill>
+                  <a:schemeClr val="bg1"/>
+                </a:solidFill>
+                <a:ea typeface="+mj-lt"/>
+                <a:cs typeface="+mj-lt"/>
+              </a:rPr>
+              <a:t>攻撃を近距離で当てると、</a:t>
+            </a:r>
+            <a:r>
+              <a:rPr lang="en-US" sz="1800" b="1" dirty="0" err="1">
+                <a:solidFill>
+                  <a:schemeClr val="bg1"/>
+                </a:solidFill>
+                <a:ea typeface="+mj-lt"/>
+                <a:cs typeface="+mj-lt"/>
+              </a:rPr>
+              <a:t>同じ攻撃が多段ヒットしてしまう</a:t>
+            </a:r>
+            <a:r>
+              <a:rPr lang="en-US" sz="1800" dirty="0" err="1">
+                <a:solidFill>
+                  <a:schemeClr val="bg1"/>
+                </a:solidFill>
+                <a:ea typeface="+mj-lt"/>
+                <a:cs typeface="+mj-lt"/>
+              </a:rPr>
+              <a:t>問題が発生</a:t>
+            </a:r>
+            <a:r>
+              <a:rPr lang="en-US" sz="1800" dirty="0">
+                <a:solidFill>
+                  <a:schemeClr val="bg1"/>
+                </a:solidFill>
+                <a:ea typeface="+mj-lt"/>
+                <a:cs typeface="+mj-lt"/>
+              </a:rPr>
+              <a:t>。</a:t>
+            </a:r>
+          </a:p>
+          <a:p>
+            <a:pPr algn="l"/>
+            <a:endParaRPr lang="en-US" altLang="ja-JP" sz="3200" dirty="0">
+              <a:solidFill>
+                <a:schemeClr val="bg1"/>
+              </a:solidFill>
+              <a:ea typeface="游ゴシック Light"/>
+            </a:endParaRPr>
+          </a:p>
+        </p:txBody>
+      </p:sp>
+      <p:sp>
+        <p:nvSpPr>
+          <p:cNvPr id="14" name="タイトル 1">
+            <a:extLst>
+              <a:ext uri="{FF2B5EF4-FFF2-40B4-BE49-F238E27FC236}">
+                <a16:creationId xmlns:a16="http://schemas.microsoft.com/office/drawing/2014/main" id="{06490069-1184-9722-1270-93E42FF63D5C}"/>
+              </a:ext>
+            </a:extLst>
+          </p:cNvPr>
+          <p:cNvSpPr txBox="1">
+            <a:spLocks/>
+          </p:cNvSpPr>
+          <p:nvPr/>
+        </p:nvSpPr>
+        <p:spPr>
+          <a:xfrm>
+            <a:off x="6474725" y="4237647"/>
+            <a:ext cx="4536296" cy="2274928"/>
+          </a:xfrm>
+          <a:prstGeom prst="rect">
+            <a:avLst/>
+          </a:prstGeom>
+        </p:spPr>
+        <p:txBody>
+          <a:bodyPr vert="horz" lIns="91440" tIns="45720" rIns="91440" bIns="45720" rtlCol="0" anchor="t">
+            <a:normAutofit/>
+          </a:bodyPr>
+          <a:lstStyle>
+            <a:lvl1pPr algn="ctr" defTabSz="914400" rtl="0" eaLnBrk="1" latinLnBrk="0" hangingPunct="1">
+              <a:lnSpc>
+                <a:spcPct val="90000"/>
+              </a:lnSpc>
+              <a:spcBef>
+                <a:spcPct val="0"/>
+              </a:spcBef>
+              <a:buNone/>
+              <a:defRPr kumimoji="1" sz="6000" kern="1200">
+                <a:solidFill>
+                  <a:schemeClr val="tx1"/>
+                </a:solidFill>
+                <a:latin typeface="+mj-lt"/>
+                <a:ea typeface="+mj-ea"/>
+                <a:cs typeface="+mj-cs"/>
+              </a:defRPr>
+            </a:lvl1pPr>
+          </a:lstStyle>
+          <a:p>
+            <a:pPr marL="285750" indent="-285750" algn="l">
+              <a:buFont typeface="Arial"/>
+              <a:buChar char="•"/>
+            </a:pPr>
+            <a:endParaRPr lang="en-US" sz="1800" dirty="0">
+              <a:solidFill>
+                <a:schemeClr val="bg1"/>
+              </a:solidFill>
+              <a:ea typeface="+mj-lt"/>
+              <a:cs typeface="+mj-lt"/>
+            </a:endParaRPr>
+          </a:p>
+          <a:p>
+            <a:pPr algn="l">
+              <a:buFont typeface="Arial"/>
+              <a:buChar char="•"/>
+            </a:pPr>
+            <a:r>
+              <a:rPr lang="ja-JP" altLang="en-US" sz="1800">
+                <a:solidFill>
+                  <a:schemeClr val="bg1"/>
+                </a:solidFill>
+                <a:ea typeface="+mj-lt"/>
+                <a:cs typeface="+mj-lt"/>
+              </a:rPr>
+              <a:t>　当たり判定を</a:t>
+            </a:r>
+            <a:r>
+              <a:rPr lang="ja-JP" altLang="en-US" sz="1800" b="1">
+                <a:solidFill>
+                  <a:schemeClr val="bg1"/>
+                </a:solidFill>
+                <a:ea typeface="+mj-lt"/>
+                <a:cs typeface="+mj-lt"/>
+              </a:rPr>
+              <a:t>骨（ボーン）に追従</a:t>
+            </a:r>
+            <a:r>
+              <a:rPr lang="ja-JP" altLang="en-US" sz="1800">
+                <a:solidFill>
+                  <a:schemeClr val="bg1"/>
+                </a:solidFill>
+                <a:ea typeface="+mj-lt"/>
+                <a:cs typeface="+mj-lt"/>
+              </a:rPr>
+              <a:t>させることで</a:t>
+            </a:r>
+            <a:r>
+              <a:rPr lang="en-US" sz="1800" dirty="0">
+                <a:solidFill>
+                  <a:schemeClr val="bg1"/>
+                </a:solidFill>
+                <a:ea typeface="+mj-lt"/>
+                <a:cs typeface="+mj-lt"/>
+              </a:rPr>
+              <a:t>、</a:t>
+            </a:r>
+            <a:r>
+              <a:rPr lang="ja-JP" altLang="en-US" sz="1800">
+                <a:solidFill>
+                  <a:schemeClr val="bg1"/>
+                </a:solidFill>
+                <a:ea typeface="+mj-lt"/>
+                <a:cs typeface="+mj-lt"/>
+              </a:rPr>
+              <a:t>アニメーション中の位置ずれを自動補正</a:t>
+            </a:r>
+            <a:r>
+              <a:rPr lang="en-US" sz="1800" dirty="0">
+                <a:solidFill>
+                  <a:schemeClr val="bg1"/>
+                </a:solidFill>
+                <a:ea typeface="+mj-lt"/>
+                <a:cs typeface="+mj-lt"/>
+              </a:rPr>
+              <a:t>。</a:t>
+            </a:r>
+            <a:endParaRPr lang="en-US" altLang="ja-JP" sz="1800" dirty="0">
+              <a:solidFill>
+                <a:schemeClr val="bg1"/>
+              </a:solidFill>
+              <a:ea typeface="+mj-lt"/>
+              <a:cs typeface="+mj-lt"/>
+            </a:endParaRPr>
+          </a:p>
+          <a:p>
+            <a:pPr algn="l">
+              <a:buFont typeface="Arial"/>
+              <a:buChar char="•"/>
+            </a:pPr>
+            <a:endParaRPr lang="en-US" altLang="ja-JP" sz="1800" dirty="0">
+              <a:solidFill>
+                <a:schemeClr val="bg1"/>
+              </a:solidFill>
+              <a:ea typeface="+mj-lt"/>
+              <a:cs typeface="+mj-lt"/>
+            </a:endParaRPr>
+          </a:p>
+          <a:p>
+            <a:pPr algn="l">
+              <a:buFont typeface="Arial"/>
+              <a:buChar char="•"/>
+            </a:pPr>
+            <a:r>
+              <a:rPr lang="ja-JP" altLang="en-US" sz="1800">
+                <a:solidFill>
+                  <a:schemeClr val="bg1"/>
+                </a:solidFill>
+                <a:ea typeface="+mj-lt"/>
+                <a:cs typeface="+mj-lt"/>
+              </a:rPr>
+              <a:t>　攻撃ごとに</a:t>
+            </a:r>
+            <a:r>
+              <a:rPr lang="ja-JP" altLang="en-US" sz="1800" b="1">
+                <a:solidFill>
+                  <a:schemeClr val="bg1"/>
+                </a:solidFill>
+                <a:ea typeface="+mj-lt"/>
+                <a:cs typeface="+mj-lt"/>
+              </a:rPr>
+              <a:t>有効なフレーム範囲</a:t>
+            </a:r>
+            <a:r>
+              <a:rPr lang="ja-JP" altLang="en-US" sz="1800">
+                <a:solidFill>
+                  <a:schemeClr val="bg1"/>
+                </a:solidFill>
+                <a:ea typeface="+mj-lt"/>
+                <a:cs typeface="+mj-lt"/>
+              </a:rPr>
+              <a:t>を設定し、ヒットタイミングを正確に制御</a:t>
+            </a:r>
+            <a:r>
+              <a:rPr lang="en-US" sz="1800" dirty="0">
+                <a:solidFill>
+                  <a:schemeClr val="bg1"/>
+                </a:solidFill>
+                <a:ea typeface="+mj-lt"/>
+                <a:cs typeface="+mj-lt"/>
+              </a:rPr>
+              <a:t>。</a:t>
+            </a:r>
+            <a:endParaRPr lang="en-US" sz="1800" dirty="0">
+              <a:solidFill>
+                <a:schemeClr val="bg1"/>
+              </a:solidFill>
+              <a:ea typeface="游ゴシック Light"/>
+            </a:endParaRPr>
+          </a:p>
+          <a:p>
+            <a:pPr algn="l">
+              <a:buFont typeface="Arial"/>
+              <a:buChar char="•"/>
+            </a:pPr>
+            <a:endParaRPr lang="en-US" altLang="ja-JP" sz="1400" dirty="0">
+              <a:solidFill>
+                <a:schemeClr val="bg1"/>
+              </a:solidFill>
+              <a:ea typeface="+mj-lt"/>
+              <a:cs typeface="+mj-lt"/>
+            </a:endParaRPr>
+          </a:p>
+          <a:p>
+            <a:pPr marL="285750" indent="-285750" algn="l">
+              <a:buFont typeface="Arial"/>
+              <a:buChar char="•"/>
+            </a:pPr>
+            <a:endParaRPr lang="en-US" sz="1800" dirty="0">
+              <a:solidFill>
+                <a:schemeClr val="bg1"/>
+              </a:solidFill>
+              <a:ea typeface="+mj-lt"/>
+              <a:cs typeface="+mj-lt"/>
+            </a:endParaRPr>
+          </a:p>
+          <a:p>
+            <a:pPr algn="l"/>
+            <a:endParaRPr lang="en-US" altLang="ja-JP" sz="3200" dirty="0">
+              <a:solidFill>
+                <a:schemeClr val="bg1"/>
+              </a:solidFill>
+              <a:ea typeface="+mj-lt"/>
+              <a:cs typeface="+mj-lt"/>
+            </a:endParaRPr>
+          </a:p>
+        </p:txBody>
+      </p:sp>
+      <p:sp>
+        <p:nvSpPr>
+          <p:cNvPr id="18" name="タイトル 1">
+            <a:extLst>
+              <a:ext uri="{FF2B5EF4-FFF2-40B4-BE49-F238E27FC236}">
+                <a16:creationId xmlns:a16="http://schemas.microsoft.com/office/drawing/2014/main" id="{1362EEDB-8E98-5B54-F874-D9D0C6081838}"/>
+              </a:ext>
+            </a:extLst>
+          </p:cNvPr>
+          <p:cNvSpPr txBox="1">
+            <a:spLocks/>
+          </p:cNvSpPr>
+          <p:nvPr/>
+        </p:nvSpPr>
+        <p:spPr>
+          <a:xfrm>
+            <a:off x="910687" y="1462819"/>
+            <a:ext cx="4263124" cy="1239758"/>
+          </a:xfrm>
+          <a:prstGeom prst="rect">
+            <a:avLst/>
+          </a:prstGeom>
+        </p:spPr>
+        <p:txBody>
+          <a:bodyPr vert="horz" lIns="91440" tIns="45720" rIns="91440" bIns="45720" rtlCol="0" anchor="ctr">
+            <a:normAutofit/>
+          </a:bodyPr>
+          <a:lstStyle>
+            <a:lvl1pPr algn="ctr" defTabSz="914400" rtl="0" eaLnBrk="1" latinLnBrk="0" hangingPunct="1">
+              <a:lnSpc>
+                <a:spcPct val="90000"/>
+              </a:lnSpc>
+              <a:spcBef>
+                <a:spcPct val="0"/>
+              </a:spcBef>
+              <a:buNone/>
+              <a:defRPr kumimoji="1" sz="6000" kern="1200">
+                <a:solidFill>
+                  <a:schemeClr val="tx1"/>
+                </a:solidFill>
+                <a:latin typeface="+mj-lt"/>
+                <a:ea typeface="+mj-ea"/>
+                <a:cs typeface="+mj-cs"/>
+              </a:defRPr>
+            </a:lvl1pPr>
+          </a:lstStyle>
+          <a:p>
+            <a:pPr algn="l"/>
+            <a:r>
+              <a:rPr lang="en-US" altLang="ja-JP" sz="3200" dirty="0" err="1">
+                <a:solidFill>
+                  <a:schemeClr val="bg1"/>
+                </a:solidFill>
+                <a:ea typeface="游ゴシック Light"/>
+              </a:rPr>
+              <a:t>BoneCollision</a:t>
+            </a:r>
+            <a:r>
+              <a:rPr lang="en-US" altLang="ja-JP" sz="3200" dirty="0">
+                <a:solidFill>
+                  <a:schemeClr val="bg1"/>
+                </a:solidFill>
+                <a:ea typeface="游ゴシック Light"/>
+              </a:rPr>
+              <a:t>() </a:t>
+            </a:r>
+            <a:r>
+              <a:rPr lang="en-US" altLang="ja-JP" sz="3200" dirty="0" err="1">
+                <a:solidFill>
+                  <a:schemeClr val="bg1"/>
+                </a:solidFill>
+                <a:ea typeface="游ゴシック Light"/>
+              </a:rPr>
+              <a:t>の写真</a:t>
+            </a:r>
+            <a:endParaRPr lang="en-US" altLang="ja-JP" sz="3200">
+              <a:solidFill>
+                <a:schemeClr val="bg1"/>
+              </a:solidFill>
+              <a:ea typeface="游ゴシック Light"/>
+            </a:endParaRPr>
+          </a:p>
+        </p:txBody>
+      </p:sp>
+      <p:sp>
+        <p:nvSpPr>
+          <p:cNvPr id="20" name="タイトル 1">
+            <a:extLst>
+              <a:ext uri="{FF2B5EF4-FFF2-40B4-BE49-F238E27FC236}">
+                <a16:creationId xmlns:a16="http://schemas.microsoft.com/office/drawing/2014/main" id="{6F9E5B8B-C08B-414E-18D4-745A0FD2CF1F}"/>
+              </a:ext>
+            </a:extLst>
+          </p:cNvPr>
+          <p:cNvSpPr txBox="1">
+            <a:spLocks/>
+          </p:cNvSpPr>
+          <p:nvPr/>
+        </p:nvSpPr>
+        <p:spPr>
+          <a:xfrm>
+            <a:off x="6618498" y="1462818"/>
+            <a:ext cx="4263124" cy="1239758"/>
+          </a:xfrm>
+          <a:prstGeom prst="rect">
+            <a:avLst/>
+          </a:prstGeom>
+        </p:spPr>
+        <p:txBody>
+          <a:bodyPr vert="horz" lIns="91440" tIns="45720" rIns="91440" bIns="45720" rtlCol="0" anchor="ctr">
+            <a:normAutofit/>
+          </a:bodyPr>
+          <a:lstStyle>
+            <a:lvl1pPr algn="ctr" defTabSz="914400" rtl="0" eaLnBrk="1" latinLnBrk="0" hangingPunct="1">
+              <a:lnSpc>
+                <a:spcPct val="90000"/>
+              </a:lnSpc>
+              <a:spcBef>
+                <a:spcPct val="0"/>
+              </a:spcBef>
+              <a:buNone/>
+              <a:defRPr kumimoji="1" sz="6000" kern="1200">
+                <a:solidFill>
+                  <a:schemeClr val="tx1"/>
+                </a:solidFill>
+                <a:latin typeface="+mj-lt"/>
+                <a:ea typeface="+mj-ea"/>
+                <a:cs typeface="+mj-cs"/>
+              </a:defRPr>
+            </a:lvl1pPr>
+          </a:lstStyle>
+          <a:p>
+            <a:pPr algn="l"/>
+            <a:r>
+              <a:rPr lang="en-US" altLang="ja-JP" sz="3200" dirty="0" err="1">
+                <a:solidFill>
+                  <a:schemeClr val="bg1"/>
+                </a:solidFill>
+                <a:ea typeface="游ゴシック Light"/>
+              </a:rPr>
+              <a:t>フレーム範囲</a:t>
+            </a:r>
+            <a:r>
+              <a:rPr lang="en-US" altLang="ja-JP" sz="3200" dirty="0">
+                <a:solidFill>
+                  <a:schemeClr val="bg1"/>
+                </a:solidFill>
+                <a:ea typeface="游ゴシック Light"/>
+              </a:rPr>
+              <a:t> </a:t>
+            </a:r>
+            <a:r>
+              <a:rPr lang="en-US" altLang="ja-JP" sz="3200" dirty="0" err="1">
+                <a:solidFill>
+                  <a:schemeClr val="bg1"/>
+                </a:solidFill>
+                <a:ea typeface="游ゴシック Light"/>
+              </a:rPr>
+              <a:t>の写真</a:t>
+            </a:r>
+            <a:endParaRPr lang="en-US" altLang="ja-JP" sz="3200">
+              <a:solidFill>
+                <a:schemeClr val="bg1"/>
+              </a:solidFill>
+              <a:ea typeface="游ゴシック Light"/>
+            </a:endParaRPr>
+          </a:p>
+        </p:txBody>
+      </p:sp>
     </p:spTree>
     <p:extLst>
       <p:ext uri="{BB962C8B-B14F-4D97-AF65-F5344CB8AC3E}">
-        <p14:creationId xmlns:p14="http://schemas.microsoft.com/office/powerpoint/2010/main" val="2352901465"/>
+        <p14:creationId xmlns:p14="http://schemas.microsoft.com/office/powerpoint/2010/main" val="2682138417"/>
       </p:ext>
     </p:extLst>
   </p:cSld>
@@ -10076,12 +10211,48 @@
           <a:chExt cx="0" cy="0"/>
         </a:xfrm>
       </p:grpSpPr>
+      <p:pic>
+        <p:nvPicPr>
+          <p:cNvPr id="9" name="図 8">
+            <a:extLst>
+              <a:ext uri="{FF2B5EF4-FFF2-40B4-BE49-F238E27FC236}">
+                <a16:creationId xmlns:a16="http://schemas.microsoft.com/office/drawing/2014/main" id="{A93330EE-6B8B-4FFC-8E4B-B735DA4812A0}"/>
+              </a:ext>
+            </a:extLst>
+          </p:cNvPr>
+          <p:cNvPicPr>
+            <a:picLocks noChangeAspect="1"/>
+          </p:cNvPicPr>
+          <p:nvPr/>
+        </p:nvPicPr>
+        <p:blipFill>
+          <a:blip r:embed="rId2">
+            <a:extLst>
+              <a:ext uri="{28A0092B-C50C-407E-A947-70E740481C1C}">
+                <a14:useLocalDpi xmlns:a14="http://schemas.microsoft.com/office/drawing/2010/main" val="0"/>
+              </a:ext>
+            </a:extLst>
+          </a:blip>
+          <a:stretch>
+            <a:fillRect/>
+          </a:stretch>
+        </p:blipFill>
+        <p:spPr>
+          <a:xfrm>
+            <a:off x="0" y="0"/>
+            <a:ext cx="12191999" cy="6858000"/>
+          </a:xfrm>
+          <a:prstGeom prst="rect">
+            <a:avLst/>
+          </a:prstGeom>
+        </p:spPr>
+      </p:pic>
       <p:sp>
         <p:nvSpPr>
           <p:cNvPr id="2" name="タイトル 1">
             <a:extLst>
               <a:ext uri="{FF2B5EF4-FFF2-40B4-BE49-F238E27FC236}">
-                <a16:creationId xmlns:a16="http://schemas.microsoft.com/office/drawing/2014/main" id="{F82A4561-DB48-47B2-B032-57840D7B86B3}"/>
+                <a16:creationId xmlns:a16="http://schemas.microsoft.com/office/drawing/2014/main" id="{0C9ACDA0-1289-4EE9-9EA7-B48C2498ED18}"/>
               </a:ext>
             </a:extLst>
           </p:cNvPr>
@@ -10089,27 +10260,289 @@
             <a:spLocks noGrp="1"/>
           </p:cNvSpPr>
           <p:nvPr>
-            <p:ph type="title"/>
+            <p:ph type="ctrTitle"/>
           </p:nvPr>
         </p:nvSpPr>
-        <p:spPr/>
+        <p:spPr>
+          <a:xfrm>
+            <a:off x="326966" y="634683"/>
+            <a:ext cx="11538066" cy="822815"/>
+          </a:xfrm>
+        </p:spPr>
         <p:txBody>
-          <a:bodyPr/>
+          <a:bodyPr>
+            <a:normAutofit/>
+          </a:bodyPr>
           <a:lstStyle/>
           <a:p>
-            <a:r>
-              <a:rPr kumimoji="1" lang="ja-JP" altLang="en-US" dirty="0"/>
-              <a:t>場面数</a:t>
-            </a:r>
+            <a:pPr algn="l"/>
+            <a:r>
+              <a:rPr kumimoji="1" lang="en-US" altLang="ja-JP" sz="4000" dirty="0">
+                <a:solidFill>
+                  <a:schemeClr val="bg1"/>
+                </a:solidFill>
+              </a:rPr>
+              <a:t>【</a:t>
+            </a:r>
+            <a:r>
+              <a:rPr kumimoji="1" lang="ja-JP" altLang="en-US" sz="4000" dirty="0">
+                <a:solidFill>
+                  <a:schemeClr val="bg1"/>
+                </a:solidFill>
+              </a:rPr>
+              <a:t>コード進化：</a:t>
+            </a:r>
+            <a:r>
+              <a:rPr kumimoji="1" lang="en-US" altLang="ja-JP" sz="4000" dirty="0">
+                <a:solidFill>
+                  <a:schemeClr val="bg1"/>
+                </a:solidFill>
+              </a:rPr>
+              <a:t>Player.cpp → Character.cpp】</a:t>
+            </a:r>
+            <a:endParaRPr kumimoji="1" lang="ja-JP" altLang="en-US" sz="4000" dirty="0">
+              <a:solidFill>
+                <a:schemeClr val="bg1"/>
+              </a:solidFill>
+            </a:endParaRPr>
           </a:p>
         </p:txBody>
       </p:sp>
       <p:sp>
         <p:nvSpPr>
-          <p:cNvPr id="3" name="テキスト ボックス 2">
-            <a:extLst>
-              <a:ext uri="{FF2B5EF4-FFF2-40B4-BE49-F238E27FC236}">
-                <a16:creationId xmlns:a16="http://schemas.microsoft.com/office/drawing/2014/main" id="{8A6A0A0F-E525-4468-BCF4-4526F064B195}"/>
+          <p:cNvPr id="3" name="字幕 2">
+            <a:extLst>
+              <a:ext uri="{FF2B5EF4-FFF2-40B4-BE49-F238E27FC236}">
+                <a16:creationId xmlns:a16="http://schemas.microsoft.com/office/drawing/2014/main" id="{81DC0F0A-1527-4642-A1A0-5BD00B17C73E}"/>
+              </a:ext>
+            </a:extLst>
+          </p:cNvPr>
+          <p:cNvSpPr>
+            <a:spLocks noGrp="1"/>
+          </p:cNvSpPr>
+          <p:nvPr>
+            <p:ph type="subTitle" idx="1"/>
+          </p:nvPr>
+        </p:nvSpPr>
+        <p:spPr>
+          <a:xfrm>
+            <a:off x="326965" y="1457497"/>
+            <a:ext cx="5772745" cy="4765819"/>
+          </a:xfrm>
+        </p:spPr>
+        <p:txBody>
+          <a:bodyPr vert="horz" lIns="91440" tIns="45720" rIns="91440" bIns="45720" rtlCol="0" anchor="t">
+            <a:normAutofit/>
+          </a:bodyPr>
+          <a:lstStyle/>
+          <a:p>
+            <a:pPr algn="l"/>
+            <a:r>
+              <a:rPr kumimoji="1" lang="ja-JP" altLang="en-US" dirty="0">
+                <a:solidFill>
+                  <a:schemeClr val="bg1"/>
+                </a:solidFill>
+                <a:ea typeface="游ゴシック"/>
+              </a:rPr>
+              <a:t>＜</a:t>
+            </a:r>
+            <a:r>
+              <a:rPr kumimoji="1" lang="en-US" altLang="ja-JP" dirty="0">
+                <a:solidFill>
+                  <a:srgbClr val="0070C0"/>
+                </a:solidFill>
+                <a:ea typeface="游ゴシック"/>
+              </a:rPr>
+              <a:t>Before</a:t>
+            </a:r>
+            <a:r>
+              <a:rPr kumimoji="1" lang="ja-JP" altLang="en-US" dirty="0">
+                <a:solidFill>
+                  <a:schemeClr val="bg1"/>
+                </a:solidFill>
+                <a:ea typeface="游ゴシック"/>
+              </a:rPr>
+              <a:t>：</a:t>
+            </a:r>
+            <a:r>
+              <a:rPr kumimoji="1" lang="en-US" altLang="ja-JP" dirty="0">
+                <a:solidFill>
+                  <a:schemeClr val="bg1"/>
+                </a:solidFill>
+                <a:ea typeface="游ゴシック"/>
+              </a:rPr>
+              <a:t>Player.cpp</a:t>
+            </a:r>
+            <a:r>
+              <a:rPr kumimoji="1" lang="ja-JP" altLang="en-US" dirty="0">
+                <a:solidFill>
+                  <a:schemeClr val="bg1"/>
+                </a:solidFill>
+                <a:ea typeface="游ゴシック"/>
+              </a:rPr>
+              <a:t>＞</a:t>
+            </a:r>
+          </a:p>
+          <a:p>
+            <a:pPr algn="l"/>
+            <a:r>
+              <a:rPr lang="ja-JP">
+                <a:solidFill>
+                  <a:schemeClr val="bg1"/>
+                </a:solidFill>
+                <a:ea typeface="+mn-lt"/>
+                <a:cs typeface="+mn-lt"/>
+              </a:rPr>
+              <a:t>キャプション：</a:t>
+            </a:r>
+            <a:endParaRPr lang="ja-JP"/>
+          </a:p>
+          <a:p>
+            <a:pPr algn="l"/>
+            <a:r>
+              <a:rPr lang="ja-JP">
+                <a:solidFill>
+                  <a:schemeClr val="bg1"/>
+                </a:solidFill>
+                <a:ea typeface="+mn-lt"/>
+                <a:cs typeface="+mn-lt"/>
+              </a:rPr>
+              <a:t>プレイヤー操作コードが直接記述されていたため、CPUへの流用が困難だった。</a:t>
+            </a:r>
+          </a:p>
+          <a:p>
+            <a:pPr algn="l"/>
+            <a:endParaRPr lang="ja-JP" altLang="en-US" dirty="0">
+              <a:solidFill>
+                <a:schemeClr val="bg1"/>
+              </a:solidFill>
+              <a:ea typeface="游ゴシック"/>
+            </a:endParaRPr>
+          </a:p>
+          <a:p>
+            <a:pPr algn="l"/>
+            <a:r>
+              <a:rPr lang="ja-JP">
+                <a:solidFill>
+                  <a:schemeClr val="bg1"/>
+                </a:solidFill>
+                <a:ea typeface="+mn-lt"/>
+                <a:cs typeface="+mn-lt"/>
+              </a:rPr>
+              <a:t>＜</a:t>
+            </a:r>
+            <a:r>
+              <a:rPr lang="ja-JP">
+                <a:solidFill>
+                  <a:srgbClr val="FF0000"/>
+                </a:solidFill>
+                <a:ea typeface="+mn-lt"/>
+                <a:cs typeface="+mn-lt"/>
+              </a:rPr>
+              <a:t>After</a:t>
+            </a:r>
+            <a:r>
+              <a:rPr lang="ja-JP">
+                <a:solidFill>
+                  <a:schemeClr val="bg1"/>
+                </a:solidFill>
+                <a:ea typeface="+mn-lt"/>
+                <a:cs typeface="+mn-lt"/>
+              </a:rPr>
+              <a:t>：Character.cpp＞</a:t>
+            </a:r>
+          </a:p>
+          <a:p>
+            <a:pPr algn="l"/>
+            <a:r>
+              <a:rPr lang="ja-JP">
+                <a:solidFill>
+                  <a:schemeClr val="bg1"/>
+                </a:solidFill>
+                <a:ea typeface="+mn-lt"/>
+                <a:cs typeface="+mn-lt"/>
+              </a:rPr>
+              <a:t>キャプション：</a:t>
+            </a:r>
+            <a:endParaRPr lang="ja-JP"/>
+          </a:p>
+          <a:p>
+            <a:pPr algn="l"/>
+            <a:r>
+              <a:rPr lang="ja-JP">
+                <a:solidFill>
+                  <a:schemeClr val="bg1"/>
+                </a:solidFill>
+                <a:ea typeface="+mn-lt"/>
+                <a:cs typeface="+mn-lt"/>
+              </a:rPr>
+              <a:t>行動ごとに関数を分離し、共通クラスとして再構築。</a:t>
+            </a:r>
+            <a:endParaRPr lang="ja-JP"/>
+          </a:p>
+          <a:p>
+            <a:pPr algn="l"/>
+            <a:r>
+              <a:rPr lang="ja-JP">
+                <a:solidFill>
+                  <a:schemeClr val="bg1"/>
+                </a:solidFill>
+                <a:ea typeface="+mn-lt"/>
+                <a:cs typeface="+mn-lt"/>
+              </a:rPr>
+              <a:t>CPU制御にも対応可能な柔軟な構造に進化。</a:t>
+            </a:r>
+            <a:endParaRPr lang="en-US" altLang="ja-JP">
+              <a:solidFill>
+                <a:schemeClr val="bg1"/>
+              </a:solidFill>
+              <a:ea typeface="游ゴシック"/>
+            </a:endParaRPr>
+          </a:p>
+        </p:txBody>
+      </p:sp>
+      <p:pic>
+        <p:nvPicPr>
+          <p:cNvPr id="11" name="図 10">
+            <a:extLst>
+              <a:ext uri="{FF2B5EF4-FFF2-40B4-BE49-F238E27FC236}">
+                <a16:creationId xmlns:a16="http://schemas.microsoft.com/office/drawing/2014/main" id="{E04B0BCC-12B7-4E53-A05B-B703B1B789F0}"/>
+              </a:ext>
+            </a:extLst>
+          </p:cNvPr>
+          <p:cNvPicPr>
+            <a:picLocks noChangeAspect="1"/>
+          </p:cNvPicPr>
+          <p:nvPr/>
+        </p:nvPicPr>
+        <p:blipFill>
+          <a:blip r:embed="rId3">
+            <a:extLst>
+              <a:ext uri="{28A0092B-C50C-407E-A947-70E740481C1C}">
+                <a14:useLocalDpi xmlns:a14="http://schemas.microsoft.com/office/drawing/2010/main" val="0"/>
+              </a:ext>
+            </a:extLst>
+          </a:blip>
+          <a:stretch>
+            <a:fillRect/>
+          </a:stretch>
+        </p:blipFill>
+        <p:spPr>
+          <a:xfrm>
+            <a:off x="6279296" y="1823838"/>
+            <a:ext cx="5473645" cy="1839280"/>
+          </a:xfrm>
+          <a:prstGeom prst="rect">
+            <a:avLst/>
+          </a:prstGeom>
+        </p:spPr>
+      </p:pic>
+      <p:sp>
+        <p:nvSpPr>
+          <p:cNvPr id="6" name="TextBox 5">
+            <a:extLst>
+              <a:ext uri="{FF2B5EF4-FFF2-40B4-BE49-F238E27FC236}">
+                <a16:creationId xmlns:a16="http://schemas.microsoft.com/office/drawing/2014/main" id="{6517C78E-A450-51D1-AAB9-50FBC86B7C18}"/>
               </a:ext>
             </a:extLst>
           </p:cNvPr>
@@ -10118,8 +10551,8 @@
         </p:nvSpPr>
         <p:spPr>
           <a:xfrm>
-            <a:off x="838200" y="1464767"/>
-            <a:ext cx="10287000" cy="1200329"/>
+            <a:off x="6278111" y="4692093"/>
+            <a:ext cx="2655581" cy="1200329"/>
           </a:xfrm>
           <a:prstGeom prst="rect">
             <a:avLst/>
@@ -10127,654 +10560,219 @@
           <a:noFill/>
         </p:spPr>
         <p:txBody>
-          <a:bodyPr wrap="square" rtlCol="0">
+          <a:bodyPr rot="0" spcFirstLastPara="0" vertOverflow="overflow" horzOverflow="overflow" vert="horz" wrap="square" lIns="91440" tIns="45720" rIns="91440" bIns="45720" numCol="1" spcCol="0" rtlCol="0" fromWordArt="0" anchor="t" anchorCtr="0" forceAA="0" compatLnSpc="1">
+            <a:prstTxWarp prst="textNoShape">
+              <a:avLst/>
+            </a:prstTxWarp>
             <a:spAutoFit/>
           </a:bodyPr>
           <a:lstStyle/>
           <a:p>
             <a:r>
-              <a:rPr kumimoji="1" lang="ja-JP" altLang="en-US" dirty="0"/>
-              <a:t>・タイトル画面</a:t>
-            </a:r>
-            <a:endParaRPr kumimoji="1" lang="en-US" altLang="ja-JP" dirty="0"/>
-          </a:p>
-          <a:p>
-            <a:r>
-              <a:rPr lang="ja-JP" altLang="en-US" dirty="0"/>
-              <a:t>・セレクト画面</a:t>
-            </a:r>
-            <a:endParaRPr lang="en-US" altLang="ja-JP" dirty="0"/>
-          </a:p>
-          <a:p>
-            <a:r>
-              <a:rPr kumimoji="1" lang="ja-JP" altLang="en-US" dirty="0"/>
-              <a:t>・バトル画面</a:t>
-            </a:r>
-            <a:endParaRPr kumimoji="1" lang="en-US" altLang="ja-JP" dirty="0"/>
-          </a:p>
-          <a:p>
-            <a:r>
-              <a:rPr lang="ja-JP" altLang="en-US" dirty="0"/>
-              <a:t>・リトライ画面</a:t>
-            </a:r>
-            <a:endParaRPr kumimoji="1" lang="en-US" altLang="ja-JP" dirty="0"/>
+              <a:rPr lang="ja-JP" altLang="en-US" sz="2400">
+                <a:solidFill>
+                  <a:schemeClr val="bg1"/>
+                </a:solidFill>
+                <a:ea typeface="游ゴシック"/>
+              </a:rPr>
+              <a:t>Character.cpp のパンチ弱の処理の写真</a:t>
+            </a:r>
+            <a:endParaRPr lang="ja-JP" altLang="en-US" sz="2400" dirty="0">
+              <a:solidFill>
+                <a:schemeClr val="bg1"/>
+              </a:solidFill>
+              <a:ea typeface="游ゴシック"/>
+            </a:endParaRPr>
           </a:p>
         </p:txBody>
       </p:sp>
       <p:sp>
         <p:nvSpPr>
-          <p:cNvPr id="5" name="正方形/長方形 4">
-            <a:extLst>
-              <a:ext uri="{FF2B5EF4-FFF2-40B4-BE49-F238E27FC236}">
-                <a16:creationId xmlns:a16="http://schemas.microsoft.com/office/drawing/2014/main" id="{A87E2790-7571-4C91-90AE-F76380DB691A}"/>
-              </a:ext>
-            </a:extLst>
-          </p:cNvPr>
-          <p:cNvSpPr/>
+          <p:cNvPr id="7" name="TextBox 6">
+            <a:extLst>
+              <a:ext uri="{FF2B5EF4-FFF2-40B4-BE49-F238E27FC236}">
+                <a16:creationId xmlns:a16="http://schemas.microsoft.com/office/drawing/2014/main" id="{32F7A7DF-79E3-F73A-7431-51BA4C213209}"/>
+              </a:ext>
+            </a:extLst>
+          </p:cNvPr>
+          <p:cNvSpPr txBox="1"/>
           <p:nvPr/>
         </p:nvSpPr>
         <p:spPr>
           <a:xfrm>
-            <a:off x="542925" y="3455432"/>
-            <a:ext cx="2047875" cy="1485900"/>
+            <a:off x="6091205" y="1457188"/>
+            <a:ext cx="5660449" cy="369332"/>
           </a:xfrm>
           <a:prstGeom prst="rect">
             <a:avLst/>
           </a:prstGeom>
-          <a:solidFill>
-            <a:schemeClr val="bg1"/>
-          </a:solidFill>
-          <a:ln>
-            <a:solidFill>
-              <a:schemeClr val="tx1"/>
-            </a:solidFill>
-          </a:ln>
+          <a:noFill/>
         </p:spPr>
-        <p:style>
-          <a:lnRef idx="2">
-            <a:schemeClr val="accent1">
-              <a:shade val="50000"/>
-            </a:schemeClr>
-          </a:lnRef>
-          <a:fillRef idx="1">
-            <a:schemeClr val="accent1"/>
-          </a:fillRef>
-          <a:effectRef idx="0">
-            <a:schemeClr val="accent1"/>
-          </a:effectRef>
-          <a:fontRef idx="minor">
-            <a:schemeClr val="lt1"/>
-          </a:fontRef>
-        </p:style>
         <p:txBody>
-          <a:bodyPr rtlCol="0" anchor="ctr"/>
+          <a:bodyPr rot="0" spcFirstLastPara="0" vertOverflow="overflow" horzOverflow="overflow" vert="horz" wrap="square" lIns="91440" tIns="45720" rIns="91440" bIns="45720" numCol="1" spcCol="0" rtlCol="0" fromWordArt="0" anchor="t" anchorCtr="0" forceAA="0" compatLnSpc="1">
+            <a:prstTxWarp prst="textNoShape">
+              <a:avLst/>
+            </a:prstTxWarp>
+            <a:spAutoFit/>
+          </a:bodyPr>
           <a:lstStyle/>
           <a:p>
-            <a:pPr algn="ctr"/>
-            <a:r>
-              <a:rPr kumimoji="1" lang="ja-JP" altLang="en-US" dirty="0">
-                <a:solidFill>
-                  <a:srgbClr val="FF0000"/>
-                </a:solidFill>
-              </a:rPr>
-              <a:t>タイトル</a:t>
-            </a:r>
+            <a:r>
+              <a:rPr lang="ja-JP" altLang="en-US">
+                <a:solidFill>
+                  <a:schemeClr val="bg1"/>
+                </a:solidFill>
+                <a:ea typeface="游ゴシック"/>
+              </a:rPr>
+              <a:t>&lt;</a:t>
+            </a:r>
+            <a:r>
+              <a:rPr lang="ja-JP" altLang="en-US">
+                <a:solidFill>
+                  <a:srgbClr val="0070C0"/>
+                </a:solidFill>
+                <a:ea typeface="游ゴシック"/>
+              </a:rPr>
+              <a:t>Before</a:t>
+            </a:r>
+            <a:r>
+              <a:rPr lang="ja-JP" altLang="en-US">
+                <a:solidFill>
+                  <a:schemeClr val="bg1"/>
+                </a:solidFill>
+                <a:ea typeface="游ゴシック"/>
+              </a:rPr>
+              <a:t>&gt; Player.cpp</a:t>
+            </a:r>
+            <a:endParaRPr lang="ja-JP">
+              <a:solidFill>
+                <a:schemeClr val="bg1"/>
+              </a:solidFill>
+              <a:ea typeface="游ゴシック"/>
+            </a:endParaRPr>
           </a:p>
         </p:txBody>
       </p:sp>
       <p:sp>
         <p:nvSpPr>
-          <p:cNvPr id="7" name="正方形/長方形 6">
-            <a:extLst>
-              <a:ext uri="{FF2B5EF4-FFF2-40B4-BE49-F238E27FC236}">
-                <a16:creationId xmlns:a16="http://schemas.microsoft.com/office/drawing/2014/main" id="{6B721A00-4306-4536-A723-4611471300DA}"/>
-              </a:ext>
-            </a:extLst>
-          </p:cNvPr>
-          <p:cNvSpPr/>
+          <p:cNvPr id="8" name="TextBox 7">
+            <a:extLst>
+              <a:ext uri="{FF2B5EF4-FFF2-40B4-BE49-F238E27FC236}">
+                <a16:creationId xmlns:a16="http://schemas.microsoft.com/office/drawing/2014/main" id="{DF6C8FBB-0BB7-41C0-9D72-2B7DE8493FF6}"/>
+              </a:ext>
+            </a:extLst>
+          </p:cNvPr>
+          <p:cNvSpPr txBox="1"/>
           <p:nvPr/>
         </p:nvSpPr>
         <p:spPr>
           <a:xfrm>
-            <a:off x="3857625" y="3455432"/>
-            <a:ext cx="2047875" cy="1485900"/>
+            <a:off x="6091204" y="3843829"/>
+            <a:ext cx="5660449" cy="369332"/>
           </a:xfrm>
           <a:prstGeom prst="rect">
             <a:avLst/>
           </a:prstGeom>
-          <a:solidFill>
-            <a:schemeClr val="bg1"/>
-          </a:solidFill>
-          <a:ln>
-            <a:solidFill>
-              <a:schemeClr val="tx1"/>
-            </a:solidFill>
-          </a:ln>
+          <a:noFill/>
         </p:spPr>
-        <p:style>
-          <a:lnRef idx="2">
-            <a:schemeClr val="accent1">
-              <a:shade val="50000"/>
-            </a:schemeClr>
-          </a:lnRef>
-          <a:fillRef idx="1">
-            <a:schemeClr val="accent1"/>
-          </a:fillRef>
-          <a:effectRef idx="0">
-            <a:schemeClr val="accent1"/>
-          </a:effectRef>
-          <a:fontRef idx="minor">
-            <a:schemeClr val="lt1"/>
-          </a:fontRef>
-        </p:style>
         <p:txBody>
-          <a:bodyPr rtlCol="0" anchor="ctr"/>
+          <a:bodyPr rot="0" spcFirstLastPara="0" vertOverflow="overflow" horzOverflow="overflow" vert="horz" wrap="square" lIns="91440" tIns="45720" rIns="91440" bIns="45720" numCol="1" spcCol="0" rtlCol="0" fromWordArt="0" anchor="t" anchorCtr="0" forceAA="0" compatLnSpc="1">
+            <a:prstTxWarp prst="textNoShape">
+              <a:avLst/>
+            </a:prstTxWarp>
+            <a:spAutoFit/>
+          </a:bodyPr>
           <a:lstStyle/>
           <a:p>
-            <a:pPr algn="ctr"/>
-            <a:r>
-              <a:rPr lang="ja-JP" altLang="en-US" dirty="0">
+            <a:r>
+              <a:rPr lang="ja-JP" altLang="en-US">
+                <a:solidFill>
+                  <a:schemeClr val="bg1"/>
+                </a:solidFill>
+                <a:ea typeface="游ゴシック"/>
+              </a:rPr>
+              <a:t>&lt;</a:t>
+            </a:r>
+            <a:r>
+              <a:rPr lang="ja-JP" altLang="en-US">
                 <a:solidFill>
                   <a:srgbClr val="FF0000"/>
                 </a:solidFill>
-              </a:rPr>
-              <a:t>セレクト</a:t>
-            </a:r>
-            <a:endParaRPr kumimoji="1" lang="ja-JP" altLang="en-US" dirty="0">
-              <a:solidFill>
-                <a:srgbClr val="FF0000"/>
-              </a:solidFill>
+                <a:ea typeface="游ゴシック"/>
+              </a:rPr>
+              <a:t>After</a:t>
+            </a:r>
+            <a:r>
+              <a:rPr lang="ja-JP" altLang="en-US">
+                <a:solidFill>
+                  <a:schemeClr val="bg1"/>
+                </a:solidFill>
+                <a:ea typeface="游ゴシック"/>
+              </a:rPr>
+              <a:t>&gt; Character.cpp と Player.cpp</a:t>
+            </a:r>
+            <a:endParaRPr lang="ja-JP">
+              <a:solidFill>
+                <a:schemeClr val="bg1"/>
+              </a:solidFill>
+              <a:ea typeface="游ゴシック"/>
             </a:endParaRPr>
           </a:p>
         </p:txBody>
       </p:sp>
       <p:sp>
         <p:nvSpPr>
-          <p:cNvPr id="8" name="正方形/長方形 7">
-            <a:extLst>
-              <a:ext uri="{FF2B5EF4-FFF2-40B4-BE49-F238E27FC236}">
-                <a16:creationId xmlns:a16="http://schemas.microsoft.com/office/drawing/2014/main" id="{AD87DAA3-0A09-470B-AA3F-28D3F41A541D}"/>
-              </a:ext>
-            </a:extLst>
-          </p:cNvPr>
-          <p:cNvSpPr/>
+          <p:cNvPr id="10" name="TextBox 9">
+            <a:extLst>
+              <a:ext uri="{FF2B5EF4-FFF2-40B4-BE49-F238E27FC236}">
+                <a16:creationId xmlns:a16="http://schemas.microsoft.com/office/drawing/2014/main" id="{A73C2873-9D29-8085-389E-9CE0C6770ECE}"/>
+              </a:ext>
+            </a:extLst>
+          </p:cNvPr>
+          <p:cNvSpPr txBox="1"/>
           <p:nvPr/>
         </p:nvSpPr>
         <p:spPr>
           <a:xfrm>
-            <a:off x="7048500" y="3449955"/>
-            <a:ext cx="2047875" cy="1485900"/>
+            <a:off x="9009807" y="4692093"/>
+            <a:ext cx="2152374" cy="1200329"/>
           </a:xfrm>
           <a:prstGeom prst="rect">
             <a:avLst/>
           </a:prstGeom>
-          <a:solidFill>
-            <a:schemeClr val="bg1"/>
-          </a:solidFill>
-          <a:ln>
-            <a:solidFill>
-              <a:schemeClr val="tx1"/>
-            </a:solidFill>
-          </a:ln>
+          <a:noFill/>
         </p:spPr>
-        <p:style>
-          <a:lnRef idx="2">
-            <a:schemeClr val="accent1">
-              <a:shade val="50000"/>
-            </a:schemeClr>
-          </a:lnRef>
-          <a:fillRef idx="1">
-            <a:schemeClr val="accent1"/>
-          </a:fillRef>
-          <a:effectRef idx="0">
-            <a:schemeClr val="accent1"/>
-          </a:effectRef>
-          <a:fontRef idx="minor">
-            <a:schemeClr val="lt1"/>
-          </a:fontRef>
-        </p:style>
         <p:txBody>
-          <a:bodyPr rtlCol="0" anchor="ctr"/>
+          <a:bodyPr rot="0" spcFirstLastPara="0" vertOverflow="overflow" horzOverflow="overflow" vert="horz" wrap="square" lIns="91440" tIns="45720" rIns="91440" bIns="45720" numCol="1" spcCol="0" rtlCol="0" fromWordArt="0" anchor="t" anchorCtr="0" forceAA="0" compatLnSpc="1">
+            <a:prstTxWarp prst="textNoShape">
+              <a:avLst/>
+            </a:prstTxWarp>
+            <a:spAutoFit/>
+          </a:bodyPr>
           <a:lstStyle/>
           <a:p>
-            <a:pPr algn="ctr"/>
-            <a:r>
-              <a:rPr kumimoji="1" lang="ja-JP" altLang="en-US" dirty="0">
-                <a:solidFill>
-                  <a:srgbClr val="FF0000"/>
-                </a:solidFill>
-              </a:rPr>
-              <a:t>ゲーム</a:t>
-            </a:r>
+            <a:r>
+              <a:rPr lang="ja-JP" altLang="en-US" sz="2400">
+                <a:solidFill>
+                  <a:schemeClr val="bg1"/>
+                </a:solidFill>
+                <a:ea typeface="游ゴシック"/>
+              </a:rPr>
+              <a:t>Player.cppの呼び出し部分の写真</a:t>
+            </a:r>
+            <a:endParaRPr lang="ja-JP" altLang="en-US" sz="2400" dirty="0">
+              <a:solidFill>
+                <a:schemeClr val="bg1"/>
+              </a:solidFill>
+              <a:ea typeface="游ゴシック"/>
+            </a:endParaRPr>
           </a:p>
         </p:txBody>
       </p:sp>
-      <p:cxnSp>
-        <p:nvCxnSpPr>
-          <p:cNvPr id="10" name="直線矢印コネクタ 9">
-            <a:extLst>
-              <a:ext uri="{FF2B5EF4-FFF2-40B4-BE49-F238E27FC236}">
-                <a16:creationId xmlns:a16="http://schemas.microsoft.com/office/drawing/2014/main" id="{A6ACA4EC-1980-48B3-8E13-D3C9EF56470F}"/>
-              </a:ext>
-            </a:extLst>
-          </p:cNvPr>
-          <p:cNvCxnSpPr/>
-          <p:nvPr/>
-        </p:nvCxnSpPr>
-        <p:spPr>
-          <a:xfrm>
-            <a:off x="2857500" y="4160282"/>
-            <a:ext cx="819150" cy="0"/>
-          </a:xfrm>
-          <a:prstGeom prst="straightConnector1">
-            <a:avLst/>
-          </a:prstGeom>
-          <a:ln>
-            <a:solidFill>
-              <a:schemeClr val="tx1"/>
-            </a:solidFill>
-            <a:tailEnd type="triangle"/>
-          </a:ln>
-        </p:spPr>
-        <p:style>
-          <a:lnRef idx="1">
-            <a:schemeClr val="accent1"/>
-          </a:lnRef>
-          <a:fillRef idx="0">
-            <a:schemeClr val="accent1"/>
-          </a:fillRef>
-          <a:effectRef idx="0">
-            <a:schemeClr val="accent1"/>
-          </a:effectRef>
-          <a:fontRef idx="minor">
-            <a:schemeClr val="tx1"/>
-          </a:fontRef>
-        </p:style>
-      </p:cxnSp>
-      <p:cxnSp>
-        <p:nvCxnSpPr>
-          <p:cNvPr id="11" name="直線矢印コネクタ 10">
-            <a:extLst>
-              <a:ext uri="{FF2B5EF4-FFF2-40B4-BE49-F238E27FC236}">
-                <a16:creationId xmlns:a16="http://schemas.microsoft.com/office/drawing/2014/main" id="{EC78A32D-6778-4E70-8FAD-CF17D8DBE1E8}"/>
-              </a:ext>
-            </a:extLst>
-          </p:cNvPr>
-          <p:cNvCxnSpPr/>
-          <p:nvPr/>
-        </p:nvCxnSpPr>
-        <p:spPr>
-          <a:xfrm>
-            <a:off x="6096000" y="4158139"/>
-            <a:ext cx="819150" cy="0"/>
-          </a:xfrm>
-          <a:prstGeom prst="straightConnector1">
-            <a:avLst/>
-          </a:prstGeom>
-          <a:ln>
-            <a:solidFill>
-              <a:schemeClr val="tx1"/>
-            </a:solidFill>
-            <a:tailEnd type="triangle"/>
-          </a:ln>
-        </p:spPr>
-        <p:style>
-          <a:lnRef idx="1">
-            <a:schemeClr val="accent1"/>
-          </a:lnRef>
-          <a:fillRef idx="0">
-            <a:schemeClr val="accent1"/>
-          </a:fillRef>
-          <a:effectRef idx="0">
-            <a:schemeClr val="accent1"/>
-          </a:effectRef>
-          <a:fontRef idx="minor">
-            <a:schemeClr val="tx1"/>
-          </a:fontRef>
-        </p:style>
-      </p:cxnSp>
-      <p:sp>
-        <p:nvSpPr>
-          <p:cNvPr id="12" name="正方形/長方形 11">
-            <a:extLst>
-              <a:ext uri="{FF2B5EF4-FFF2-40B4-BE49-F238E27FC236}">
-                <a16:creationId xmlns:a16="http://schemas.microsoft.com/office/drawing/2014/main" id="{ADD9D09C-A963-4B94-A378-49895CC8DACB}"/>
-              </a:ext>
-            </a:extLst>
-          </p:cNvPr>
-          <p:cNvSpPr/>
-          <p:nvPr/>
-        </p:nvSpPr>
-        <p:spPr>
-          <a:xfrm>
-            <a:off x="10101262" y="3449955"/>
-            <a:ext cx="2047875" cy="1485900"/>
-          </a:xfrm>
-          <a:prstGeom prst="rect">
-            <a:avLst/>
-          </a:prstGeom>
-          <a:solidFill>
-            <a:schemeClr val="bg1"/>
-          </a:solidFill>
-          <a:ln>
-            <a:solidFill>
-              <a:schemeClr val="tx1"/>
-            </a:solidFill>
-          </a:ln>
-        </p:spPr>
-        <p:style>
-          <a:lnRef idx="2">
-            <a:schemeClr val="accent1">
-              <a:shade val="50000"/>
-            </a:schemeClr>
-          </a:lnRef>
-          <a:fillRef idx="1">
-            <a:schemeClr val="accent1"/>
-          </a:fillRef>
-          <a:effectRef idx="0">
-            <a:schemeClr val="accent1"/>
-          </a:effectRef>
-          <a:fontRef idx="minor">
-            <a:schemeClr val="lt1"/>
-          </a:fontRef>
-        </p:style>
-        <p:txBody>
-          <a:bodyPr rtlCol="0" anchor="ctr"/>
-          <a:lstStyle/>
-          <a:p>
-            <a:pPr algn="ctr"/>
-            <a:r>
-              <a:rPr lang="ja-JP" altLang="en-US" dirty="0">
-                <a:solidFill>
-                  <a:srgbClr val="FF0000"/>
-                </a:solidFill>
-              </a:rPr>
-              <a:t>リトライ</a:t>
-            </a:r>
-            <a:endParaRPr kumimoji="1" lang="ja-JP" altLang="en-US" dirty="0">
-              <a:solidFill>
-                <a:srgbClr val="FF0000"/>
-              </a:solidFill>
-            </a:endParaRPr>
-          </a:p>
-        </p:txBody>
-      </p:sp>
-      <p:cxnSp>
-        <p:nvCxnSpPr>
-          <p:cNvPr id="13" name="直線矢印コネクタ 12">
-            <a:extLst>
-              <a:ext uri="{FF2B5EF4-FFF2-40B4-BE49-F238E27FC236}">
-                <a16:creationId xmlns:a16="http://schemas.microsoft.com/office/drawing/2014/main" id="{574DBAF3-4E11-470E-875A-DADDF6CD66CD}"/>
-              </a:ext>
-            </a:extLst>
-          </p:cNvPr>
-          <p:cNvCxnSpPr/>
-          <p:nvPr/>
-        </p:nvCxnSpPr>
-        <p:spPr>
-          <a:xfrm>
-            <a:off x="9195381" y="4171474"/>
-            <a:ext cx="819150" cy="0"/>
-          </a:xfrm>
-          <a:prstGeom prst="straightConnector1">
-            <a:avLst/>
-          </a:prstGeom>
-          <a:ln>
-            <a:solidFill>
-              <a:schemeClr val="tx1"/>
-            </a:solidFill>
-            <a:tailEnd type="triangle"/>
-          </a:ln>
-        </p:spPr>
-        <p:style>
-          <a:lnRef idx="1">
-            <a:schemeClr val="accent1"/>
-          </a:lnRef>
-          <a:fillRef idx="0">
-            <a:schemeClr val="accent1"/>
-          </a:fillRef>
-          <a:effectRef idx="0">
-            <a:schemeClr val="accent1"/>
-          </a:effectRef>
-          <a:fontRef idx="minor">
-            <a:schemeClr val="tx1"/>
-          </a:fontRef>
-        </p:style>
-      </p:cxnSp>
-      <p:cxnSp>
-        <p:nvCxnSpPr>
-          <p:cNvPr id="27" name="直線コネクタ 26">
-            <a:extLst>
-              <a:ext uri="{FF2B5EF4-FFF2-40B4-BE49-F238E27FC236}">
-                <a16:creationId xmlns:a16="http://schemas.microsoft.com/office/drawing/2014/main" id="{4393336F-6FF2-4EBA-A077-02480BC54268}"/>
-              </a:ext>
-            </a:extLst>
-          </p:cNvPr>
-          <p:cNvCxnSpPr/>
-          <p:nvPr/>
-        </p:nvCxnSpPr>
-        <p:spPr>
-          <a:xfrm>
-            <a:off x="10915650" y="5372100"/>
-            <a:ext cx="0" cy="647700"/>
-          </a:xfrm>
-          <a:prstGeom prst="line">
-            <a:avLst/>
-          </a:prstGeom>
-        </p:spPr>
-        <p:style>
-          <a:lnRef idx="1">
-            <a:schemeClr val="dk1"/>
-          </a:lnRef>
-          <a:fillRef idx="0">
-            <a:schemeClr val="dk1"/>
-          </a:fillRef>
-          <a:effectRef idx="0">
-            <a:schemeClr val="dk1"/>
-          </a:effectRef>
-          <a:fontRef idx="minor">
-            <a:schemeClr val="tx1"/>
-          </a:fontRef>
-        </p:style>
-      </p:cxnSp>
-      <p:cxnSp>
-        <p:nvCxnSpPr>
-          <p:cNvPr id="30" name="直線コネクタ 29">
-            <a:extLst>
-              <a:ext uri="{FF2B5EF4-FFF2-40B4-BE49-F238E27FC236}">
-                <a16:creationId xmlns:a16="http://schemas.microsoft.com/office/drawing/2014/main" id="{F6039C77-0107-4239-8A90-3982204245BC}"/>
-              </a:ext>
-            </a:extLst>
-          </p:cNvPr>
-          <p:cNvCxnSpPr>
-            <a:cxnSpLocks/>
-          </p:cNvCxnSpPr>
-          <p:nvPr/>
-        </p:nvCxnSpPr>
-        <p:spPr>
-          <a:xfrm flipH="1">
-            <a:off x="1566862" y="6019800"/>
-            <a:ext cx="9348788" cy="0"/>
-          </a:xfrm>
-          <a:prstGeom prst="line">
-            <a:avLst/>
-          </a:prstGeom>
-        </p:spPr>
-        <p:style>
-          <a:lnRef idx="1">
-            <a:schemeClr val="dk1"/>
-          </a:lnRef>
-          <a:fillRef idx="0">
-            <a:schemeClr val="dk1"/>
-          </a:fillRef>
-          <a:effectRef idx="0">
-            <a:schemeClr val="dk1"/>
-          </a:effectRef>
-          <a:fontRef idx="minor">
-            <a:schemeClr val="tx1"/>
-          </a:fontRef>
-        </p:style>
-      </p:cxnSp>
-      <p:cxnSp>
-        <p:nvCxnSpPr>
-          <p:cNvPr id="32" name="直線矢印コネクタ 31">
-            <a:extLst>
-              <a:ext uri="{FF2B5EF4-FFF2-40B4-BE49-F238E27FC236}">
-                <a16:creationId xmlns:a16="http://schemas.microsoft.com/office/drawing/2014/main" id="{B52EE8DC-ABCE-49E4-892F-1C5B93E67581}"/>
-              </a:ext>
-            </a:extLst>
-          </p:cNvPr>
-          <p:cNvCxnSpPr/>
-          <p:nvPr/>
-        </p:nvCxnSpPr>
-        <p:spPr>
-          <a:xfrm flipV="1">
-            <a:off x="4981575" y="5210175"/>
-            <a:ext cx="0" cy="809625"/>
-          </a:xfrm>
-          <a:prstGeom prst="straightConnector1">
-            <a:avLst/>
-          </a:prstGeom>
-          <a:ln>
-            <a:tailEnd type="triangle"/>
-          </a:ln>
-        </p:spPr>
-        <p:style>
-          <a:lnRef idx="1">
-            <a:schemeClr val="dk1"/>
-          </a:lnRef>
-          <a:fillRef idx="0">
-            <a:schemeClr val="dk1"/>
-          </a:fillRef>
-          <a:effectRef idx="0">
-            <a:schemeClr val="dk1"/>
-          </a:effectRef>
-          <a:fontRef idx="minor">
-            <a:schemeClr val="tx1"/>
-          </a:fontRef>
-        </p:style>
-      </p:cxnSp>
-      <p:cxnSp>
-        <p:nvCxnSpPr>
-          <p:cNvPr id="42" name="直線矢印コネクタ 41">
-            <a:extLst>
-              <a:ext uri="{FF2B5EF4-FFF2-40B4-BE49-F238E27FC236}">
-                <a16:creationId xmlns:a16="http://schemas.microsoft.com/office/drawing/2014/main" id="{27D0FD9B-EB81-4737-AED7-AAC6D864A49E}"/>
-              </a:ext>
-            </a:extLst>
-          </p:cNvPr>
-          <p:cNvCxnSpPr/>
-          <p:nvPr/>
-        </p:nvCxnSpPr>
-        <p:spPr>
-          <a:xfrm flipH="1">
-            <a:off x="9324975" y="3838575"/>
-            <a:ext cx="533400" cy="0"/>
-          </a:xfrm>
-          <a:prstGeom prst="straightConnector1">
-            <a:avLst/>
-          </a:prstGeom>
-          <a:ln>
-            <a:tailEnd type="triangle"/>
-          </a:ln>
-        </p:spPr>
-        <p:style>
-          <a:lnRef idx="1">
-            <a:schemeClr val="dk1"/>
-          </a:lnRef>
-          <a:fillRef idx="0">
-            <a:schemeClr val="dk1"/>
-          </a:fillRef>
-          <a:effectRef idx="0">
-            <a:schemeClr val="dk1"/>
-          </a:effectRef>
-          <a:fontRef idx="minor">
-            <a:schemeClr val="tx1"/>
-          </a:fontRef>
-        </p:style>
-      </p:cxnSp>
-      <p:cxnSp>
-        <p:nvCxnSpPr>
-          <p:cNvPr id="46" name="直線矢印コネクタ 45">
-            <a:extLst>
-              <a:ext uri="{FF2B5EF4-FFF2-40B4-BE49-F238E27FC236}">
-                <a16:creationId xmlns:a16="http://schemas.microsoft.com/office/drawing/2014/main" id="{B9B09D31-4A94-49C2-AA97-628391EF94D9}"/>
-              </a:ext>
-            </a:extLst>
-          </p:cNvPr>
-          <p:cNvCxnSpPr/>
-          <p:nvPr/>
-        </p:nvCxnSpPr>
-        <p:spPr>
-          <a:xfrm flipH="1">
-            <a:off x="2857500" y="3781425"/>
-            <a:ext cx="695325" cy="0"/>
-          </a:xfrm>
-          <a:prstGeom prst="straightConnector1">
-            <a:avLst/>
-          </a:prstGeom>
-          <a:ln>
-            <a:tailEnd type="triangle"/>
-          </a:ln>
-        </p:spPr>
-        <p:style>
-          <a:lnRef idx="1">
-            <a:schemeClr val="dk1"/>
-          </a:lnRef>
-          <a:fillRef idx="0">
-            <a:schemeClr val="dk1"/>
-          </a:fillRef>
-          <a:effectRef idx="0">
-            <a:schemeClr val="dk1"/>
-          </a:effectRef>
-          <a:fontRef idx="minor">
-            <a:schemeClr val="tx1"/>
-          </a:fontRef>
-        </p:style>
-      </p:cxnSp>
-      <p:cxnSp>
-        <p:nvCxnSpPr>
-          <p:cNvPr id="49" name="直線矢印コネクタ 48">
-            <a:extLst>
-              <a:ext uri="{FF2B5EF4-FFF2-40B4-BE49-F238E27FC236}">
-                <a16:creationId xmlns:a16="http://schemas.microsoft.com/office/drawing/2014/main" id="{3585EAA1-5079-473A-A5BB-38B726DFCC42}"/>
-              </a:ext>
-            </a:extLst>
-          </p:cNvPr>
-          <p:cNvCxnSpPr/>
-          <p:nvPr/>
-        </p:nvCxnSpPr>
-        <p:spPr>
-          <a:xfrm flipV="1">
-            <a:off x="1566862" y="5210175"/>
-            <a:ext cx="0" cy="809625"/>
-          </a:xfrm>
-          <a:prstGeom prst="straightConnector1">
-            <a:avLst/>
-          </a:prstGeom>
-          <a:ln>
-            <a:tailEnd type="triangle"/>
-          </a:ln>
-        </p:spPr>
-        <p:style>
-          <a:lnRef idx="1">
-            <a:schemeClr val="dk1"/>
-          </a:lnRef>
-          <a:fillRef idx="0">
-            <a:schemeClr val="dk1"/>
-          </a:fillRef>
-          <a:effectRef idx="0">
-            <a:schemeClr val="dk1"/>
-          </a:effectRef>
-          <a:fontRef idx="minor">
-            <a:schemeClr val="tx1"/>
-          </a:fontRef>
-        </p:style>
-      </p:cxnSp>
     </p:spTree>
     <p:extLst>
       <p:ext uri="{BB962C8B-B14F-4D97-AF65-F5344CB8AC3E}">
-        <p14:creationId xmlns:p14="http://schemas.microsoft.com/office/powerpoint/2010/main" val="1673219951"/>
+        <p14:creationId xmlns:p14="http://schemas.microsoft.com/office/powerpoint/2010/main" val="2352901465"/>
       </p:ext>
     </p:extLst>
   </p:cSld>
@@ -10801,12 +10799,48 @@
           <a:chExt cx="0" cy="0"/>
         </a:xfrm>
       </p:grpSpPr>
+      <p:pic>
+        <p:nvPicPr>
+          <p:cNvPr id="5" name="図 8">
+            <a:extLst>
+              <a:ext uri="{FF2B5EF4-FFF2-40B4-BE49-F238E27FC236}">
+                <a16:creationId xmlns:a16="http://schemas.microsoft.com/office/drawing/2014/main" id="{97BBC640-A06E-E007-9B08-853C8E29298F}"/>
+              </a:ext>
+            </a:extLst>
+          </p:cNvPr>
+          <p:cNvPicPr>
+            <a:picLocks noChangeAspect="1"/>
+          </p:cNvPicPr>
+          <p:nvPr/>
+        </p:nvPicPr>
+        <p:blipFill>
+          <a:blip r:embed="rId2">
+            <a:extLst>
+              <a:ext uri="{28A0092B-C50C-407E-A947-70E740481C1C}">
+                <a14:useLocalDpi xmlns:a14="http://schemas.microsoft.com/office/drawing/2010/main" val="0"/>
+              </a:ext>
+            </a:extLst>
+          </a:blip>
+          <a:stretch>
+            <a:fillRect/>
+          </a:stretch>
+        </p:blipFill>
+        <p:spPr>
+          <a:xfrm>
+            <a:off x="0" y="0"/>
+            <a:ext cx="12191999" cy="6858000"/>
+          </a:xfrm>
+          <a:prstGeom prst="rect">
+            <a:avLst/>
+          </a:prstGeom>
+        </p:spPr>
+      </p:pic>
       <p:sp>
         <p:nvSpPr>
-          <p:cNvPr id="2" name="タイトル 1">
-            <a:extLst>
-              <a:ext uri="{FF2B5EF4-FFF2-40B4-BE49-F238E27FC236}">
-                <a16:creationId xmlns:a16="http://schemas.microsoft.com/office/drawing/2014/main" id="{A2EEA01F-1AF2-4E06-9A62-2ADD4CE7C413}"/>
+          <p:cNvPr id="2" name="Title 1">
+            <a:extLst>
+              <a:ext uri="{FF2B5EF4-FFF2-40B4-BE49-F238E27FC236}">
+                <a16:creationId xmlns:a16="http://schemas.microsoft.com/office/drawing/2014/main" id="{5158EFB3-9A7E-49FD-025F-4C3288F22738}"/>
               </a:ext>
             </a:extLst>
           </p:cNvPr>
@@ -10819,29 +10853,94 @@
         </p:nvSpPr>
         <p:spPr>
           <a:xfrm>
-            <a:off x="1619250" y="644526"/>
-            <a:ext cx="9144000" cy="2133599"/>
+            <a:off x="330680" y="863571"/>
+            <a:ext cx="11530640" cy="849224"/>
           </a:xfrm>
         </p:spPr>
         <p:txBody>
-          <a:bodyPr>
-            <a:normAutofit/>
+          <a:bodyPr vert="horz" lIns="91440" tIns="45720" rIns="91440" bIns="45720" rtlCol="0" anchor="b">
+            <a:noAutofit/>
           </a:bodyPr>
           <a:lstStyle/>
           <a:p>
-            <a:r>
-              <a:rPr kumimoji="1" lang="ja-JP" altLang="en-US" sz="10000" dirty="0"/>
-              <a:t>タイトル</a:t>
-            </a:r>
+            <a:pPr algn="l"/>
+            <a:r>
+              <a:rPr lang="en-US" sz="4800" dirty="0">
+                <a:solidFill>
+                  <a:schemeClr val="bg1"/>
+                </a:solidFill>
+                <a:ea typeface="游ゴシック Light"/>
+              </a:rPr>
+              <a:t>【</a:t>
+            </a:r>
+            <a:r>
+              <a:rPr lang="ja-JP" altLang="en-US" sz="4800">
+                <a:solidFill>
+                  <a:schemeClr val="bg1"/>
+                </a:solidFill>
+                <a:ea typeface="游ゴシック Light"/>
+              </a:rPr>
+              <a:t>アピール：</a:t>
+            </a:r>
+            <a:r>
+              <a:rPr lang="en-US" altLang="ja-JP" sz="4800" dirty="0">
+                <a:solidFill>
+                  <a:schemeClr val="bg1"/>
+                </a:solidFill>
+                <a:ea typeface="+mj-lt"/>
+                <a:cs typeface="+mj-lt"/>
+              </a:rPr>
+              <a:t>CPU</a:t>
+            </a:r>
+            <a:r>
+              <a:rPr lang="ja-JP" altLang="en-US" sz="4800">
+                <a:solidFill>
+                  <a:schemeClr val="bg1"/>
+                </a:solidFill>
+                <a:ea typeface="+mj-lt"/>
+                <a:cs typeface="+mj-lt"/>
+              </a:rPr>
+              <a:t>の思考</a:t>
+            </a:r>
+            <a:r>
+              <a:rPr lang="en-US" altLang="ja-JP" sz="4800" dirty="0">
+                <a:solidFill>
+                  <a:schemeClr val="bg1"/>
+                </a:solidFill>
+                <a:ea typeface="+mj-lt"/>
+                <a:cs typeface="+mj-lt"/>
+              </a:rPr>
+              <a:t>AI</a:t>
+            </a:r>
+            <a:r>
+              <a:rPr lang="ja-JP" altLang="en-US" sz="4800">
+                <a:solidFill>
+                  <a:schemeClr val="bg1"/>
+                </a:solidFill>
+                <a:ea typeface="+mj-lt"/>
+                <a:cs typeface="+mj-lt"/>
+              </a:rPr>
+              <a:t>と行動制御</a:t>
+            </a:r>
+            <a:r>
+              <a:rPr lang="en-US" sz="4800" dirty="0">
+                <a:solidFill>
+                  <a:schemeClr val="bg1"/>
+                </a:solidFill>
+                <a:ea typeface="游ゴシック Light"/>
+              </a:rPr>
+              <a:t>】</a:t>
+            </a:r>
+            <a:endParaRPr lang="en-US"/>
           </a:p>
         </p:txBody>
       </p:sp>
       <p:sp>
         <p:nvSpPr>
-          <p:cNvPr id="3" name="字幕 2">
-            <a:extLst>
-              <a:ext uri="{FF2B5EF4-FFF2-40B4-BE49-F238E27FC236}">
-                <a16:creationId xmlns:a16="http://schemas.microsoft.com/office/drawing/2014/main" id="{75C68191-8585-438A-ACCB-E11454B3AA4E}"/>
+          <p:cNvPr id="3" name="Subtitle 2">
+            <a:extLst>
+              <a:ext uri="{FF2B5EF4-FFF2-40B4-BE49-F238E27FC236}">
+                <a16:creationId xmlns:a16="http://schemas.microsoft.com/office/drawing/2014/main" id="{784D736B-89AF-ED44-FF58-AC1E2C735A78}"/>
               </a:ext>
             </a:extLst>
           </p:cNvPr>
@@ -10854,41 +10953,623 @@
         </p:nvSpPr>
         <p:spPr>
           <a:xfrm>
-            <a:off x="1524000" y="4079876"/>
-            <a:ext cx="9144000" cy="1655762"/>
+            <a:off x="330680" y="1718604"/>
+            <a:ext cx="7332453" cy="4790025"/>
           </a:xfrm>
         </p:spPr>
         <p:txBody>
-          <a:bodyPr/>
+          <a:bodyPr vert="horz" lIns="91440" tIns="45720" rIns="91440" bIns="45720" rtlCol="0" anchor="t">
+            <a:normAutofit/>
+          </a:bodyPr>
           <a:lstStyle/>
           <a:p>
-            <a:r>
-              <a:rPr kumimoji="1" lang="ja-JP" altLang="en-US" dirty="0"/>
-              <a:t>「</a:t>
-            </a:r>
-            <a:r>
-              <a:rPr kumimoji="1" lang="en-US" altLang="ja-JP" dirty="0"/>
-              <a:t>Enter</a:t>
-            </a:r>
-            <a:r>
-              <a:rPr kumimoji="1" lang="ja-JP" altLang="en-US" dirty="0"/>
-              <a:t>」か</a:t>
-            </a:r>
-            <a:r>
-              <a:rPr kumimoji="1" lang="en-US" altLang="ja-JP" dirty="0"/>
-              <a:t>B</a:t>
-            </a:r>
-            <a:r>
-              <a:rPr kumimoji="1" lang="ja-JP" altLang="en-US" dirty="0"/>
-              <a:t>ボタンでスタート</a:t>
-            </a:r>
+            <a:pPr algn="l"/>
+            <a:r>
+              <a:rPr lang="en-US" sz="2000" dirty="0">
+                <a:solidFill>
+                  <a:schemeClr val="bg1"/>
+                </a:solidFill>
+                <a:latin typeface="Consolas"/>
+              </a:rPr>
+              <a:t>「CPU.cpp</a:t>
+            </a:r>
+            <a:r>
+              <a:rPr lang="ja-JP" altLang="en-US" sz="2000">
+                <a:solidFill>
+                  <a:schemeClr val="bg1"/>
+                </a:solidFill>
+                <a:latin typeface="Consolas"/>
+                <a:ea typeface="+mn-lt"/>
+                <a:cs typeface="+mn-lt"/>
+              </a:rPr>
+              <a:t>」</a:t>
+            </a:r>
+            <a:r>
+              <a:rPr lang="ja-JP" altLang="en-US" sz="2000">
+                <a:solidFill>
+                  <a:schemeClr val="bg1"/>
+                </a:solidFill>
+                <a:ea typeface="+mn-lt"/>
+                <a:cs typeface="+mn-lt"/>
+              </a:rPr>
+              <a:t>では、プレイヤーキャラクターとは別に動作する</a:t>
+            </a:r>
+            <a:r>
+              <a:rPr lang="en-US" sz="2000" dirty="0">
+                <a:solidFill>
+                  <a:schemeClr val="bg1"/>
+                </a:solidFill>
+                <a:ea typeface="+mn-lt"/>
+                <a:cs typeface="+mn-lt"/>
+              </a:rPr>
+              <a:t>CPU</a:t>
+            </a:r>
+            <a:r>
+              <a:rPr lang="ja-JP" altLang="en-US" sz="2000">
+                <a:solidFill>
+                  <a:schemeClr val="bg1"/>
+                </a:solidFill>
+                <a:ea typeface="+mn-lt"/>
+                <a:cs typeface="+mn-lt"/>
+              </a:rPr>
+              <a:t>（敵キャラ）</a:t>
+            </a:r>
+            <a:r>
+              <a:rPr lang="en-US" sz="2000" dirty="0">
+                <a:solidFill>
+                  <a:schemeClr val="bg1"/>
+                </a:solidFill>
+                <a:ea typeface="+mn-lt"/>
+                <a:cs typeface="+mn-lt"/>
+              </a:rPr>
+              <a:t>AI</a:t>
+            </a:r>
+            <a:r>
+              <a:rPr lang="ja-JP" altLang="en-US" sz="2000">
+                <a:solidFill>
+                  <a:schemeClr val="bg1"/>
+                </a:solidFill>
+                <a:ea typeface="+mn-lt"/>
+                <a:cs typeface="+mn-lt"/>
+              </a:rPr>
+              <a:t>を実装しました</a:t>
+            </a:r>
+            <a:r>
+              <a:rPr lang="en-US" sz="2000" dirty="0">
+                <a:solidFill>
+                  <a:schemeClr val="bg1"/>
+                </a:solidFill>
+                <a:ea typeface="+mn-lt"/>
+                <a:cs typeface="+mn-lt"/>
+              </a:rPr>
+              <a:t>。</a:t>
+            </a:r>
+          </a:p>
+          <a:p>
+            <a:pPr algn="l"/>
+            <a:r>
+              <a:rPr lang="en-US" dirty="0">
+                <a:solidFill>
+                  <a:schemeClr val="bg1"/>
+                </a:solidFill>
+                <a:ea typeface="+mn-lt"/>
+                <a:cs typeface="+mn-lt"/>
+              </a:rPr>
+              <a:t>CPU</a:t>
+            </a:r>
+            <a:r>
+              <a:rPr lang="ja-JP" altLang="en-US">
+                <a:solidFill>
+                  <a:schemeClr val="bg1"/>
+                </a:solidFill>
+                <a:ea typeface="+mn-lt"/>
+                <a:cs typeface="+mn-lt"/>
+              </a:rPr>
+              <a:t>の行動までの流れは、</a:t>
+            </a:r>
+            <a:endParaRPr lang="en-US" dirty="0">
+              <a:solidFill>
+                <a:schemeClr val="bg1"/>
+              </a:solidFill>
+              <a:ea typeface="+mn-lt"/>
+              <a:cs typeface="+mn-lt"/>
+            </a:endParaRPr>
+          </a:p>
+          <a:p>
+            <a:pPr algn="l"/>
+            <a:r>
+              <a:rPr lang="en-US" sz="1800">
+                <a:solidFill>
+                  <a:schemeClr val="bg1"/>
+                </a:solidFill>
+                <a:ea typeface="+mn-lt"/>
+                <a:cs typeface="+mn-lt"/>
+              </a:rPr>
+              <a:t> </a:t>
+            </a:r>
+            <a:r>
+              <a:rPr lang="en-US" sz="2000" dirty="0">
+                <a:solidFill>
+                  <a:schemeClr val="bg1"/>
+                </a:solidFill>
+                <a:ea typeface="+mn-lt"/>
+                <a:cs typeface="+mn-lt"/>
+              </a:rPr>
+              <a:t>1) </a:t>
+            </a:r>
+            <a:r>
+              <a:rPr lang="en-US" sz="2000" err="1">
+                <a:solidFill>
+                  <a:schemeClr val="bg1"/>
+                </a:solidFill>
+                <a:ea typeface="+mn-lt"/>
+                <a:cs typeface="+mn-lt"/>
+              </a:rPr>
+              <a:t>UpdateWAITCombat</a:t>
+            </a:r>
+            <a:r>
+              <a:rPr lang="en-US" sz="2000" dirty="0">
+                <a:solidFill>
+                  <a:schemeClr val="bg1"/>
+                </a:solidFill>
+                <a:ea typeface="+mn-lt"/>
+                <a:cs typeface="+mn-lt"/>
+              </a:rPr>
+              <a:t>()</a:t>
+            </a:r>
+          </a:p>
+          <a:p>
+            <a:pPr algn="l"/>
+            <a:r>
+              <a:rPr lang="en-US" sz="1800" dirty="0">
+                <a:solidFill>
+                  <a:schemeClr val="bg1"/>
+                </a:solidFill>
+                <a:ea typeface="游ゴシック" panose="020F0502020204030204"/>
+              </a:rPr>
+              <a:t>   ➣</a:t>
+            </a:r>
+            <a:r>
+              <a:rPr lang="en-US" sz="1800" dirty="0">
+                <a:solidFill>
+                  <a:schemeClr val="bg1"/>
+                </a:solidFill>
+                <a:ea typeface="+mn-lt"/>
+                <a:cs typeface="+mn-lt"/>
+              </a:rPr>
+              <a:t> AI</a:t>
+            </a:r>
+            <a:r>
+              <a:rPr lang="ja-JP" altLang="en-US" sz="1800">
+                <a:solidFill>
+                  <a:schemeClr val="bg1"/>
+                </a:solidFill>
+                <a:ea typeface="+mn-lt"/>
+                <a:cs typeface="+mn-lt"/>
+              </a:rPr>
+              <a:t>の思考フェーズ</a:t>
+            </a:r>
+            <a:endParaRPr lang="en-US" sz="1800" dirty="0">
+              <a:solidFill>
+                <a:schemeClr val="bg1"/>
+              </a:solidFill>
+              <a:ea typeface="游ゴシック" panose="020F0502020204030204"/>
+            </a:endParaRPr>
+          </a:p>
+          <a:p>
+            <a:pPr algn="l"/>
+            <a:r>
+              <a:rPr lang="en-US" sz="1800">
+                <a:solidFill>
+                  <a:schemeClr val="bg1"/>
+                </a:solidFill>
+                <a:ea typeface="游ゴシック" panose="020F0502020204030204"/>
+              </a:rPr>
+              <a:t> </a:t>
+            </a:r>
+            <a:r>
+              <a:rPr lang="en-US" sz="2000" dirty="0">
+                <a:solidFill>
+                  <a:schemeClr val="bg1"/>
+                </a:solidFill>
+                <a:ea typeface="游ゴシック" panose="020F0502020204030204"/>
+              </a:rPr>
+              <a:t>2) </a:t>
+            </a:r>
+            <a:r>
+              <a:rPr lang="en-US" sz="2000" err="1">
+                <a:solidFill>
+                  <a:schemeClr val="bg1"/>
+                </a:solidFill>
+                <a:ea typeface="+mn-lt"/>
+                <a:cs typeface="+mn-lt"/>
+              </a:rPr>
+              <a:t>UpdateDice</a:t>
+            </a:r>
+            <a:r>
+              <a:rPr lang="en-US" sz="2000" dirty="0">
+                <a:solidFill>
+                  <a:schemeClr val="bg1"/>
+                </a:solidFill>
+                <a:ea typeface="+mn-lt"/>
+                <a:cs typeface="+mn-lt"/>
+              </a:rPr>
+              <a:t>()</a:t>
+            </a:r>
+          </a:p>
+          <a:p>
+            <a:pPr algn="l"/>
+            <a:r>
+              <a:rPr lang="en-US" sz="1800" dirty="0">
+                <a:solidFill>
+                  <a:schemeClr val="bg1"/>
+                </a:solidFill>
+                <a:ea typeface="游ゴシック" panose="020F0502020204030204"/>
+              </a:rPr>
+              <a:t>   ➣</a:t>
+            </a:r>
+            <a:r>
+              <a:rPr lang="en-US" altLang="ja-JP" sz="1800" dirty="0">
+                <a:solidFill>
+                  <a:schemeClr val="bg1"/>
+                </a:solidFill>
+                <a:ea typeface="+mn-lt"/>
+                <a:cs typeface="+mn-lt"/>
+              </a:rPr>
+              <a:t> </a:t>
+            </a:r>
+            <a:r>
+              <a:rPr lang="ja-JP" altLang="en-US" sz="1800">
+                <a:solidFill>
+                  <a:schemeClr val="bg1"/>
+                </a:solidFill>
+                <a:ea typeface="+mn-lt"/>
+                <a:cs typeface="+mn-lt"/>
+              </a:rPr>
+              <a:t>行動確率テーブルを参照するための乱数</a:t>
+            </a:r>
+            <a:endParaRPr lang="en-US" sz="1800" dirty="0">
+              <a:solidFill>
+                <a:schemeClr val="bg1"/>
+              </a:solidFill>
+              <a:ea typeface="游ゴシック" panose="020F0502020204030204"/>
+            </a:endParaRPr>
+          </a:p>
+          <a:p>
+            <a:pPr algn="l"/>
+            <a:r>
+              <a:rPr lang="en-US" sz="1800">
+                <a:solidFill>
+                  <a:schemeClr val="bg1"/>
+                </a:solidFill>
+                <a:ea typeface="游ゴシック" panose="020F0502020204030204"/>
+              </a:rPr>
+              <a:t> </a:t>
+            </a:r>
+            <a:r>
+              <a:rPr lang="en-US" sz="2000" dirty="0">
+                <a:solidFill>
+                  <a:schemeClr val="bg1"/>
+                </a:solidFill>
+                <a:ea typeface="游ゴシック" panose="020F0502020204030204"/>
+              </a:rPr>
+              <a:t>3) </a:t>
+            </a:r>
+            <a:r>
+              <a:rPr lang="ja-JP" altLang="en-US" sz="2000">
+                <a:solidFill>
+                  <a:schemeClr val="bg1"/>
+                </a:solidFill>
+                <a:ea typeface="+mn-lt"/>
+                <a:cs typeface="+mn-lt"/>
+              </a:rPr>
+              <a:t>戦闘距離別の処理</a:t>
+            </a:r>
+          </a:p>
+          <a:p>
+            <a:pPr algn="l"/>
+            <a:r>
+              <a:rPr lang="ja-JP" altLang="en-US" sz="1800">
+                <a:solidFill>
+                  <a:schemeClr val="bg1"/>
+                </a:solidFill>
+                <a:ea typeface="游ゴシック" panose="020F0502020204030204"/>
+              </a:rPr>
+              <a:t>   ➣ </a:t>
+            </a:r>
+            <a:r>
+              <a:rPr lang="ja-JP" sz="1800">
+                <a:solidFill>
+                  <a:schemeClr val="bg1"/>
+                </a:solidFill>
+                <a:ea typeface="+mn-lt"/>
+                <a:cs typeface="+mn-lt"/>
+              </a:rPr>
+              <a:t>行動を分岐。</a:t>
+            </a:r>
+            <a:r>
+              <a:rPr lang="ja-JP" altLang="en-US" sz="1800">
+                <a:solidFill>
+                  <a:schemeClr val="bg1"/>
+                </a:solidFill>
+                <a:ea typeface="+mn-lt"/>
+                <a:cs typeface="+mn-lt"/>
+              </a:rPr>
+              <a:t>さらに細かく分岐</a:t>
+            </a:r>
+          </a:p>
+          <a:p>
+            <a:pPr marL="1200150" lvl="2" indent="-285750" algn="l">
+              <a:buFont typeface="Wingdings" panose="020B0604020202020204" pitchFamily="34" charset="0"/>
+              <a:buChar char="§"/>
+            </a:pPr>
+            <a:r>
+              <a:rPr lang="ja-JP" altLang="en-US" sz="1600" dirty="0">
+                <a:solidFill>
+                  <a:schemeClr val="bg1"/>
+                </a:solidFill>
+                <a:ea typeface="游ゴシック" panose="020F0502020204030204"/>
+              </a:rPr>
+              <a:t> </a:t>
+            </a:r>
+            <a:r>
+              <a:rPr lang="ja-JP" sz="1600">
+                <a:solidFill>
+                  <a:schemeClr val="bg1"/>
+                </a:solidFill>
+                <a:ea typeface="+mn-lt"/>
+                <a:cs typeface="+mn-lt"/>
+              </a:rPr>
+              <a:t>移動なら → </a:t>
+            </a:r>
+            <a:r>
+              <a:rPr lang="ja-JP" sz="1600">
+                <a:solidFill>
+                  <a:schemeClr val="bg1"/>
+                </a:solidFill>
+                <a:latin typeface="Consolas"/>
+                <a:ea typeface="游ゴシック" panose="020F0502020204030204"/>
+              </a:rPr>
+              <a:t>UpdateMove()</a:t>
+            </a:r>
+            <a:endParaRPr lang="ja-JP" altLang="en-US" sz="1600" dirty="0">
+              <a:solidFill>
+                <a:schemeClr val="bg1"/>
+              </a:solidFill>
+              <a:ea typeface="游ゴシック" panose="020F0502020204030204"/>
+            </a:endParaRPr>
+          </a:p>
+          <a:p>
+            <a:pPr marL="1200150" lvl="2" indent="-285750" algn="l">
+              <a:buFont typeface="Wingdings" panose="020B0604020202020204" pitchFamily="34" charset="0"/>
+              <a:buChar char="§"/>
+            </a:pPr>
+            <a:r>
+              <a:rPr lang="ja-JP" sz="1600">
+                <a:solidFill>
+                  <a:schemeClr val="bg1"/>
+                </a:solidFill>
+                <a:ea typeface="+mn-lt"/>
+                <a:cs typeface="+mn-lt"/>
+              </a:rPr>
+              <a:t>攻撃なら → </a:t>
+            </a:r>
+            <a:r>
+              <a:rPr lang="ja-JP" sz="1600">
+                <a:solidFill>
+                  <a:schemeClr val="bg1"/>
+                </a:solidFill>
+                <a:latin typeface="Consolas"/>
+                <a:ea typeface="游ゴシック" panose="020F0502020204030204"/>
+              </a:rPr>
+              <a:t>UpdateAttack()</a:t>
+            </a:r>
+            <a:endParaRPr lang="ja-JP" sz="1600">
+              <a:solidFill>
+                <a:schemeClr val="bg1"/>
+              </a:solidFill>
+              <a:ea typeface="游ゴシック"/>
+            </a:endParaRPr>
+          </a:p>
+          <a:p>
+            <a:pPr marL="1200150" lvl="2" indent="-285750" algn="l">
+              <a:buFont typeface="Wingdings" panose="020B0604020202020204" pitchFamily="34" charset="0"/>
+              <a:buChar char="§"/>
+            </a:pPr>
+            <a:r>
+              <a:rPr lang="ja-JP" sz="1600">
+                <a:solidFill>
+                  <a:schemeClr val="bg1"/>
+                </a:solidFill>
+                <a:ea typeface="+mn-lt"/>
+                <a:cs typeface="+mn-lt"/>
+              </a:rPr>
+              <a:t>ガードなら → </a:t>
+            </a:r>
+            <a:r>
+              <a:rPr lang="ja-JP" sz="1600">
+                <a:solidFill>
+                  <a:schemeClr val="bg1"/>
+                </a:solidFill>
+                <a:latin typeface="Consolas"/>
+                <a:ea typeface="游ゴシック" panose="020F0502020204030204"/>
+              </a:rPr>
+              <a:t>UpdateGuard()</a:t>
+            </a:r>
+            <a:endParaRPr lang="ja-JP" sz="1600">
+              <a:solidFill>
+                <a:schemeClr val="bg1"/>
+              </a:solidFill>
+              <a:ea typeface="游ゴシック"/>
+            </a:endParaRPr>
+          </a:p>
+          <a:p>
+            <a:pPr algn="l"/>
+            <a:endParaRPr lang="ja-JP" altLang="en-US" dirty="0">
+              <a:solidFill>
+                <a:schemeClr val="bg1"/>
+              </a:solidFill>
+              <a:ea typeface="游ゴシック" panose="020F0502020204030204"/>
+            </a:endParaRPr>
+          </a:p>
+        </p:txBody>
+      </p:sp>
+      <p:sp>
+        <p:nvSpPr>
+          <p:cNvPr id="6" name="Rectangle 5">
+            <a:extLst>
+              <a:ext uri="{FF2B5EF4-FFF2-40B4-BE49-F238E27FC236}">
+                <a16:creationId xmlns:a16="http://schemas.microsoft.com/office/drawing/2014/main" id="{7E94E749-9FB2-FDD5-E7B7-E642FE115D89}"/>
+              </a:ext>
+            </a:extLst>
+          </p:cNvPr>
+          <p:cNvSpPr/>
+          <p:nvPr/>
+        </p:nvSpPr>
+        <p:spPr>
+          <a:xfrm>
+            <a:off x="463176" y="2779058"/>
+            <a:ext cx="5528235" cy="3242235"/>
+          </a:xfrm>
+          <a:prstGeom prst="flowChartProcess">
+            <a:avLst/>
+          </a:prstGeom>
+          <a:noFill/>
+          <a:ln>
+            <a:solidFill>
+              <a:srgbClr val="FF0000"/>
+            </a:solidFill>
+          </a:ln>
+        </p:spPr>
+        <p:style>
+          <a:lnRef idx="2">
+            <a:schemeClr val="accent6">
+              <a:shade val="15000"/>
+            </a:schemeClr>
+          </a:lnRef>
+          <a:fillRef idx="1">
+            <a:schemeClr val="accent6"/>
+          </a:fillRef>
+          <a:effectRef idx="0">
+            <a:schemeClr val="accent6"/>
+          </a:effectRef>
+          <a:fontRef idx="minor">
+            <a:schemeClr val="lt1"/>
+          </a:fontRef>
+        </p:style>
+        <p:txBody>
+          <a:bodyPr rtlCol="0" anchor="ctr"/>
+          <a:lstStyle/>
+          <a:p>
+            <a:pPr algn="ctr"/>
+            <a:endParaRPr lang="en-US"/>
+          </a:p>
+        </p:txBody>
+      </p:sp>
+      <p:sp>
+        <p:nvSpPr>
+          <p:cNvPr id="8" name="TextBox 7">
+            <a:extLst>
+              <a:ext uri="{FF2B5EF4-FFF2-40B4-BE49-F238E27FC236}">
+                <a16:creationId xmlns:a16="http://schemas.microsoft.com/office/drawing/2014/main" id="{CAA2FEEE-7EFE-B900-59CC-FC814EFD8B6D}"/>
+              </a:ext>
+            </a:extLst>
+          </p:cNvPr>
+          <p:cNvSpPr txBox="1"/>
+          <p:nvPr/>
+        </p:nvSpPr>
+        <p:spPr>
+          <a:xfrm>
+            <a:off x="8321670" y="2458246"/>
+            <a:ext cx="2535771" cy="646331"/>
+          </a:xfrm>
+          <a:prstGeom prst="rect">
+            <a:avLst/>
+          </a:prstGeom>
+          <a:noFill/>
+        </p:spPr>
+        <p:txBody>
+          <a:bodyPr rot="0" spcFirstLastPara="0" vertOverflow="overflow" horzOverflow="overflow" vert="horz" wrap="square" lIns="91440" tIns="45720" rIns="91440" bIns="45720" numCol="1" spcCol="0" rtlCol="0" fromWordArt="0" anchor="t" anchorCtr="0" forceAA="0" compatLnSpc="1">
+            <a:prstTxWarp prst="textNoShape">
+              <a:avLst/>
+            </a:prstTxWarp>
+            <a:spAutoFit/>
+          </a:bodyPr>
+          <a:lstStyle/>
+          <a:p>
+            <a:pPr algn="l"/>
+            <a:r>
+              <a:rPr lang="ja-JP" altLang="en-US">
+                <a:solidFill>
+                  <a:schemeClr val="bg1"/>
+                </a:solidFill>
+                <a:ea typeface="游ゴシック"/>
+              </a:rPr>
+              <a:t>UpdateWAITCombat()の写真</a:t>
+            </a:r>
+            <a:endParaRPr lang="ja-JP" altLang="en-US" dirty="0">
+              <a:solidFill>
+                <a:schemeClr val="bg1"/>
+              </a:solidFill>
+              <a:ea typeface="游ゴシック"/>
+            </a:endParaRPr>
+          </a:p>
+        </p:txBody>
+      </p:sp>
+      <p:sp>
+        <p:nvSpPr>
+          <p:cNvPr id="9" name="TextBox 8">
+            <a:extLst>
+              <a:ext uri="{FF2B5EF4-FFF2-40B4-BE49-F238E27FC236}">
+                <a16:creationId xmlns:a16="http://schemas.microsoft.com/office/drawing/2014/main" id="{8FD61AC8-7ED0-87CC-7319-0733A6CB71F6}"/>
+              </a:ext>
+            </a:extLst>
+          </p:cNvPr>
+          <p:cNvSpPr txBox="1"/>
+          <p:nvPr/>
+        </p:nvSpPr>
+        <p:spPr>
+          <a:xfrm>
+            <a:off x="8321669" y="4600472"/>
+            <a:ext cx="2737054" cy="369332"/>
+          </a:xfrm>
+          <a:prstGeom prst="rect">
+            <a:avLst/>
+          </a:prstGeom>
+          <a:noFill/>
+        </p:spPr>
+        <p:txBody>
+          <a:bodyPr rot="0" spcFirstLastPara="0" vertOverflow="overflow" horzOverflow="overflow" vert="horz" wrap="square" lIns="91440" tIns="45720" rIns="91440" bIns="45720" numCol="1" spcCol="0" rtlCol="0" fromWordArt="0" anchor="t" anchorCtr="0" forceAA="0" compatLnSpc="1">
+            <a:prstTxWarp prst="textNoShape">
+              <a:avLst/>
+            </a:prstTxWarp>
+            <a:spAutoFit/>
+          </a:bodyPr>
+          <a:lstStyle/>
+          <a:p>
+            <a:pPr algn="l"/>
+            <a:r>
+              <a:rPr lang="ja-JP" altLang="en-US">
+                <a:solidFill>
+                  <a:schemeClr val="bg1"/>
+                </a:solidFill>
+                <a:ea typeface="游ゴシック"/>
+              </a:rPr>
+              <a:t>Switch()のコードの写真</a:t>
+            </a:r>
+            <a:endParaRPr lang="ja-JP" altLang="en-US" dirty="0">
+              <a:solidFill>
+                <a:schemeClr val="bg1"/>
+              </a:solidFill>
+              <a:ea typeface="游ゴシック"/>
+            </a:endParaRPr>
           </a:p>
         </p:txBody>
       </p:sp>
     </p:spTree>
     <p:extLst>
       <p:ext uri="{BB962C8B-B14F-4D97-AF65-F5344CB8AC3E}">
-        <p14:creationId xmlns:p14="http://schemas.microsoft.com/office/powerpoint/2010/main" val="2100573860"/>
+        <p14:creationId xmlns:p14="http://schemas.microsoft.com/office/powerpoint/2010/main" val="2264894672"/>
       </p:ext>
     </p:extLst>
   </p:cSld>
